--- a/src/Infos.pptx
+++ b/src/Infos.pptx
@@ -6,9 +6,11 @@
   </p:sldMasterIdLst>
   <p:sldIdLst>
     <p:sldId id="318" r:id="rId2"/>
-    <p:sldId id="314" r:id="rId3"/>
-    <p:sldId id="315" r:id="rId4"/>
-    <p:sldId id="317" r:id="rId5"/>
+    <p:sldId id="320" r:id="rId3"/>
+    <p:sldId id="321" r:id="rId4"/>
+    <p:sldId id="324" r:id="rId5"/>
+    <p:sldId id="322" r:id="rId6"/>
+    <p:sldId id="323" r:id="rId7"/>
   </p:sldIdLst>
   <p:sldSz cx="12192000" cy="6858000"/>
   <p:notesSz cx="7104063" cy="10234613"/>
@@ -108,21 +110,6 @@
     </a:lvl9pPr>
   </p:defaultTextStyle>
   <p:extLst>
-    <p:ext uri="{521415D9-36F7-43E2-AB2F-B90AF26B5E84}">
-      <p14:sectionLst xmlns:p14="http://schemas.microsoft.com/office/powerpoint/2010/main">
-        <p14:section name="Allgemein" id="{385FA9E0-450F-423E-B235-5384D0AF7780}">
-          <p14:sldIdLst/>
-        </p14:section>
-        <p14:section name="Bedienung" id="{BBAC5551-2E42-4348-B559-83824DAA8B41}">
-          <p14:sldIdLst>
-            <p14:sldId id="318"/>
-            <p14:sldId id="314"/>
-            <p14:sldId id="315"/>
-            <p14:sldId id="317"/>
-          </p14:sldIdLst>
-        </p14:section>
-      </p14:sectionLst>
-    </p:ext>
     <p:ext uri="{EFAFB233-063F-42B5-8137-9DF3F51BA10A}">
       <p15:sldGuideLst xmlns:p15="http://schemas.microsoft.com/office/powerpoint/2012/main"/>
     </p:ext>
@@ -267,7 +254,7 @@
           <a:p>
             <a:fld id="{7F74B683-5B55-47E9-B45C-EB67E1285507}" type="datetimeFigureOut">
               <a:rPr lang="de-DE" smtClean="0"/>
-              <a:t>19.04.2025</a:t>
+              <a:t>26.09.2025</a:t>
             </a:fld>
             <a:endParaRPr lang="de-DE"/>
           </a:p>
@@ -437,7 +424,7 @@
           <a:p>
             <a:fld id="{7F74B683-5B55-47E9-B45C-EB67E1285507}" type="datetimeFigureOut">
               <a:rPr lang="de-DE" smtClean="0"/>
-              <a:t>19.04.2025</a:t>
+              <a:t>26.09.2025</a:t>
             </a:fld>
             <a:endParaRPr lang="de-DE"/>
           </a:p>
@@ -617,7 +604,7 @@
           <a:p>
             <a:fld id="{7F74B683-5B55-47E9-B45C-EB67E1285507}" type="datetimeFigureOut">
               <a:rPr lang="de-DE" smtClean="0"/>
-              <a:t>19.04.2025</a:t>
+              <a:t>26.09.2025</a:t>
             </a:fld>
             <a:endParaRPr lang="de-DE"/>
           </a:p>
@@ -787,7 +774,7 @@
           <a:p>
             <a:fld id="{7F74B683-5B55-47E9-B45C-EB67E1285507}" type="datetimeFigureOut">
               <a:rPr lang="de-DE" smtClean="0"/>
-              <a:t>19.04.2025</a:t>
+              <a:t>26.09.2025</a:t>
             </a:fld>
             <a:endParaRPr lang="de-DE"/>
           </a:p>
@@ -1033,7 +1020,7 @@
           <a:p>
             <a:fld id="{7F74B683-5B55-47E9-B45C-EB67E1285507}" type="datetimeFigureOut">
               <a:rPr lang="de-DE" smtClean="0"/>
-              <a:t>19.04.2025</a:t>
+              <a:t>26.09.2025</a:t>
             </a:fld>
             <a:endParaRPr lang="de-DE"/>
           </a:p>
@@ -1265,7 +1252,7 @@
           <a:p>
             <a:fld id="{7F74B683-5B55-47E9-B45C-EB67E1285507}" type="datetimeFigureOut">
               <a:rPr lang="de-DE" smtClean="0"/>
-              <a:t>19.04.2025</a:t>
+              <a:t>26.09.2025</a:t>
             </a:fld>
             <a:endParaRPr lang="de-DE"/>
           </a:p>
@@ -1632,7 +1619,7 @@
           <a:p>
             <a:fld id="{7F74B683-5B55-47E9-B45C-EB67E1285507}" type="datetimeFigureOut">
               <a:rPr lang="de-DE" smtClean="0"/>
-              <a:t>19.04.2025</a:t>
+              <a:t>26.09.2025</a:t>
             </a:fld>
             <a:endParaRPr lang="de-DE"/>
           </a:p>
@@ -1750,7 +1737,7 @@
           <a:p>
             <a:fld id="{7F74B683-5B55-47E9-B45C-EB67E1285507}" type="datetimeFigureOut">
               <a:rPr lang="de-DE" smtClean="0"/>
-              <a:t>19.04.2025</a:t>
+              <a:t>26.09.2025</a:t>
             </a:fld>
             <a:endParaRPr lang="de-DE"/>
           </a:p>
@@ -1845,7 +1832,7 @@
           <a:p>
             <a:fld id="{7F74B683-5B55-47E9-B45C-EB67E1285507}" type="datetimeFigureOut">
               <a:rPr lang="de-DE" smtClean="0"/>
-              <a:t>19.04.2025</a:t>
+              <a:t>26.09.2025</a:t>
             </a:fld>
             <a:endParaRPr lang="de-DE"/>
           </a:p>
@@ -2122,7 +2109,7 @@
           <a:p>
             <a:fld id="{7F74B683-5B55-47E9-B45C-EB67E1285507}" type="datetimeFigureOut">
               <a:rPr lang="de-DE" smtClean="0"/>
-              <a:t>19.04.2025</a:t>
+              <a:t>26.09.2025</a:t>
             </a:fld>
             <a:endParaRPr lang="de-DE"/>
           </a:p>
@@ -2379,7 +2366,7 @@
           <a:p>
             <a:fld id="{7F74B683-5B55-47E9-B45C-EB67E1285507}" type="datetimeFigureOut">
               <a:rPr lang="de-DE" smtClean="0"/>
-              <a:t>19.04.2025</a:t>
+              <a:t>26.09.2025</a:t>
             </a:fld>
             <a:endParaRPr lang="de-DE"/>
           </a:p>
@@ -2592,7 +2579,7 @@
           <a:p>
             <a:fld id="{7F74B683-5B55-47E9-B45C-EB67E1285507}" type="datetimeFigureOut">
               <a:rPr lang="de-DE" smtClean="0"/>
-              <a:t>19.04.2025</a:t>
+              <a:t>26.09.2025</a:t>
             </a:fld>
             <a:endParaRPr lang="de-DE"/>
           </a:p>
@@ -3043,14 +3030,7 @@
           <a:lstStyle/>
           <a:p>
             <a:r>
-              <a:rPr lang="de-DE" dirty="0">
-                <a:solidFill>
-                  <a:schemeClr val="accent4">
-                    <a:lumMod val="20000"/>
-                    <a:lumOff val="80000"/>
-                  </a:schemeClr>
-                </a:solidFill>
-              </a:rPr>
+              <a:rPr lang="de-DE" dirty="0"/>
               <a:t>Informationen</a:t>
             </a:r>
           </a:p>
@@ -3200,10 +3180,10 @@
       </p:grpSpPr>
       <p:sp>
         <p:nvSpPr>
-          <p:cNvPr id="2" name="Titel 1">
+          <p:cNvPr id="2" name="Title 1">
             <a:extLst>
               <a:ext uri="{FF2B5EF4-FFF2-40B4-BE49-F238E27FC236}">
-                <a16:creationId xmlns:a16="http://schemas.microsoft.com/office/drawing/2014/main" id="{4B71DD04-3BD8-4A71-A4F7-714837989730}"/>
+                <a16:creationId xmlns:a16="http://schemas.microsoft.com/office/drawing/2014/main" id="{40D0B76D-BC5E-4B07-ACC0-A7E2DF6068A9}"/>
               </a:ext>
             </a:extLst>
           </p:cNvPr>
@@ -3220,29 +3200,787 @@
           <a:lstStyle/>
           <a:p>
             <a:r>
-              <a:rPr lang="de-DE"/>
-              <a:t>Eingabe von Symbolen</a:t>
+              <a:rPr kumimoji="0" lang="de-DE" altLang="de-DE" sz="4400" b="0" i="0" u="none" strike="noStrike" cap="none" normalizeH="0" baseline="0" dirty="0">
+                <a:ln>
+                  <a:noFill/>
+                </a:ln>
+                <a:effectLst/>
+                <a:latin typeface="Calibri Light" panose="020F0302020204030204" pitchFamily="34" charset="0"/>
+                <a:ea typeface="Times New Roman" panose="02020603050405020304" pitchFamily="18" charset="0"/>
+                <a:cs typeface="Times New Roman" panose="02020603050405020304" pitchFamily="18" charset="0"/>
+              </a:rPr>
+              <a:t>Kursstart</a:t>
+            </a:r>
+            <a:endParaRPr lang="de-DE" dirty="0"/>
+          </a:p>
+        </p:txBody>
+      </p:sp>
+      <p:sp>
+        <p:nvSpPr>
+          <p:cNvPr id="3" name="Content Placeholder 2">
+            <a:extLst>
+              <a:ext uri="{FF2B5EF4-FFF2-40B4-BE49-F238E27FC236}">
+                <a16:creationId xmlns:a16="http://schemas.microsoft.com/office/drawing/2014/main" id="{DE29B966-6D1E-4B7D-9C37-B4227451FADF}"/>
+              </a:ext>
+            </a:extLst>
+          </p:cNvPr>
+          <p:cNvSpPr>
+            <a:spLocks noGrp="1"/>
+          </p:cNvSpPr>
+          <p:nvPr>
+            <p:ph idx="1"/>
+          </p:nvPr>
+        </p:nvSpPr>
+        <p:spPr/>
+        <p:txBody>
+          <a:bodyPr>
+            <a:normAutofit fontScale="70000" lnSpcReduction="20000"/>
+          </a:bodyPr>
+          <a:lstStyle/>
+          <a:p>
+            <a:pPr marL="0" marR="0" lvl="0" indent="0" algn="l" defTabSz="914400" rtl="0" eaLnBrk="0" fontAlgn="base" latinLnBrk="0" hangingPunct="0">
+              <a:lnSpc>
+                <a:spcPct val="100000"/>
+              </a:lnSpc>
+              <a:spcBef>
+                <a:spcPct val="0"/>
+              </a:spcBef>
+              <a:spcAft>
+                <a:spcPct val="0"/>
+              </a:spcAft>
+              <a:buClrTx/>
+              <a:buSzTx/>
+              <a:buFontTx/>
+              <a:buNone/>
+              <a:tabLst/>
+            </a:pPr>
+            <a:r>
+              <a:rPr kumimoji="0" lang="de-DE" altLang="de-DE" sz="2800" b="0" i="0" u="none" strike="noStrike" cap="none" normalizeH="0" baseline="0" dirty="0">
+                <a:ln>
+                  <a:noFill/>
+                </a:ln>
+                <a:effectLst/>
+                <a:latin typeface="Calibri" panose="020F0502020204030204" pitchFamily="34" charset="0"/>
+                <a:ea typeface="Calibri" panose="020F0502020204030204" pitchFamily="34" charset="0"/>
+                <a:cs typeface="Times New Roman" panose="02020603050405020304" pitchFamily="18" charset="0"/>
+              </a:rPr>
+              <a:t>Hallo!</a:t>
+            </a:r>
+            <a:endParaRPr kumimoji="0" lang="de-DE" altLang="de-DE" sz="800" b="0" i="0" u="none" strike="noStrike" cap="none" normalizeH="0" baseline="0" dirty="0">
+              <a:ln>
+                <a:noFill/>
+              </a:ln>
+              <a:effectLst/>
+            </a:endParaRPr>
+          </a:p>
+          <a:p>
+            <a:pPr eaLnBrk="0" fontAlgn="base" hangingPunct="0">
+              <a:lnSpc>
+                <a:spcPct val="100000"/>
+              </a:lnSpc>
+              <a:spcBef>
+                <a:spcPct val="0"/>
+              </a:spcBef>
+              <a:spcAft>
+                <a:spcPct val="0"/>
+              </a:spcAft>
+            </a:pPr>
+            <a:r>
+              <a:rPr kumimoji="0" lang="de-DE" altLang="de-DE" sz="2800" b="0" i="0" u="none" strike="noStrike" cap="none" normalizeH="0" baseline="0" dirty="0">
+                <a:ln>
+                  <a:noFill/>
+                </a:ln>
+                <a:effectLst/>
+                <a:latin typeface="Calibri" panose="020F0502020204030204" pitchFamily="34" charset="0"/>
+                <a:ea typeface="Calibri" panose="020F0502020204030204" pitchFamily="34" charset="0"/>
+                <a:cs typeface="Times New Roman" panose="02020603050405020304" pitchFamily="18" charset="0"/>
+              </a:rPr>
+              <a:t>Am 22.02. beginnt der Programmierkurs an der Junior Uni.</a:t>
+            </a:r>
+            <a:endParaRPr lang="de-DE" altLang="de-DE" sz="800" dirty="0"/>
+          </a:p>
+          <a:p>
+            <a:pPr eaLnBrk="0" fontAlgn="base" hangingPunct="0">
+              <a:lnSpc>
+                <a:spcPct val="100000"/>
+              </a:lnSpc>
+              <a:spcBef>
+                <a:spcPct val="0"/>
+              </a:spcBef>
+              <a:spcAft>
+                <a:spcPct val="0"/>
+              </a:spcAft>
+            </a:pPr>
+            <a:r>
+              <a:rPr kumimoji="0" lang="de-DE" altLang="de-DE" sz="2800" b="0" i="0" u="none" strike="noStrike" cap="none" normalizeH="0" baseline="0" dirty="0">
+                <a:ln>
+                  <a:noFill/>
+                </a:ln>
+                <a:effectLst/>
+                <a:latin typeface="Calibri" panose="020F0502020204030204" pitchFamily="34" charset="0"/>
+                <a:ea typeface="Calibri" panose="020F0502020204030204" pitchFamily="34" charset="0"/>
+                <a:cs typeface="Times New Roman" panose="02020603050405020304" pitchFamily="18" charset="0"/>
+              </a:rPr>
+              <a:t>Standort: Gesundheitspark Altenessen (ehem. Marienhospital)</a:t>
+            </a:r>
+            <a:br>
+              <a:rPr kumimoji="0" lang="de-DE" altLang="de-DE" sz="2800" b="0" i="0" u="none" strike="noStrike" cap="none" normalizeH="0" baseline="0" dirty="0">
+                <a:ln>
+                  <a:noFill/>
+                </a:ln>
+                <a:effectLst/>
+                <a:latin typeface="Calibri" panose="020F0502020204030204" pitchFamily="34" charset="0"/>
+                <a:ea typeface="Calibri" panose="020F0502020204030204" pitchFamily="34" charset="0"/>
+                <a:cs typeface="Times New Roman" panose="02020603050405020304" pitchFamily="18" charset="0"/>
+              </a:rPr>
+            </a:br>
+            <a:r>
+              <a:rPr kumimoji="0" lang="de-DE" altLang="de-DE" sz="2800" b="0" i="0" u="none" strike="noStrike" cap="none" normalizeH="0" baseline="0" dirty="0">
+                <a:ln>
+                  <a:noFill/>
+                </a:ln>
+                <a:effectLst/>
+                <a:latin typeface="Calibri" panose="020F0502020204030204" pitchFamily="34" charset="0"/>
+                <a:ea typeface="Calibri" panose="020F0502020204030204" pitchFamily="34" charset="0"/>
+                <a:cs typeface="Times New Roman" panose="02020603050405020304" pitchFamily="18" charset="0"/>
+              </a:rPr>
+              <a:t>Hospitalstraße 24</a:t>
+            </a:r>
+            <a:br>
+              <a:rPr kumimoji="0" lang="de-DE" altLang="de-DE" sz="2800" b="0" i="0" u="none" strike="noStrike" cap="none" normalizeH="0" baseline="0" dirty="0">
+                <a:ln>
+                  <a:noFill/>
+                </a:ln>
+                <a:effectLst/>
+                <a:latin typeface="Calibri" panose="020F0502020204030204" pitchFamily="34" charset="0"/>
+                <a:ea typeface="Calibri" panose="020F0502020204030204" pitchFamily="34" charset="0"/>
+                <a:cs typeface="Times New Roman" panose="02020603050405020304" pitchFamily="18" charset="0"/>
+              </a:rPr>
+            </a:br>
+            <a:r>
+              <a:rPr kumimoji="0" lang="de-DE" altLang="de-DE" sz="2800" b="0" i="0" u="none" strike="noStrike" cap="none" normalizeH="0" baseline="0" dirty="0">
+                <a:ln>
+                  <a:noFill/>
+                </a:ln>
+                <a:effectLst/>
+                <a:latin typeface="Calibri" panose="020F0502020204030204" pitchFamily="34" charset="0"/>
+                <a:ea typeface="Calibri" panose="020F0502020204030204" pitchFamily="34" charset="0"/>
+                <a:cs typeface="Times New Roman" panose="02020603050405020304" pitchFamily="18" charset="0"/>
+              </a:rPr>
+              <a:t>45329 Essen</a:t>
+            </a:r>
+            <a:endParaRPr lang="de-DE" altLang="de-DE" sz="800" dirty="0"/>
+          </a:p>
+          <a:p>
+            <a:pPr eaLnBrk="0" fontAlgn="base" hangingPunct="0">
+              <a:lnSpc>
+                <a:spcPct val="100000"/>
+              </a:lnSpc>
+              <a:spcBef>
+                <a:spcPct val="0"/>
+              </a:spcBef>
+              <a:spcAft>
+                <a:spcPct val="0"/>
+              </a:spcAft>
+            </a:pPr>
+            <a:r>
+              <a:rPr kumimoji="0" lang="de-DE" altLang="de-DE" sz="2800" b="0" i="0" u="none" strike="noStrike" cap="none" normalizeH="0" baseline="0" dirty="0">
+                <a:ln>
+                  <a:noFill/>
+                </a:ln>
+                <a:effectLst/>
+                <a:latin typeface="Calibri" panose="020F0502020204030204" pitchFamily="34" charset="0"/>
+                <a:ea typeface="Calibri" panose="020F0502020204030204" pitchFamily="34" charset="0"/>
+                <a:cs typeface="Times New Roman" panose="02020603050405020304" pitchFamily="18" charset="0"/>
+              </a:rPr>
+              <a:t>Es wäre super, wenn du zu allen Terminen kommst, da die Inhalte aufeinander aufbauen.</a:t>
+            </a:r>
+          </a:p>
+          <a:p>
+            <a:pPr eaLnBrk="0" fontAlgn="base" hangingPunct="0">
+              <a:lnSpc>
+                <a:spcPct val="100000"/>
+              </a:lnSpc>
+              <a:spcBef>
+                <a:spcPct val="0"/>
+              </a:spcBef>
+              <a:spcAft>
+                <a:spcPct val="0"/>
+              </a:spcAft>
+            </a:pPr>
+            <a:r>
+              <a:rPr lang="de-DE" altLang="de-DE" dirty="0">
+                <a:latin typeface="Calibri" panose="020F0502020204030204" pitchFamily="34" charset="0"/>
+                <a:ea typeface="Calibri" panose="020F0502020204030204" pitchFamily="34" charset="0"/>
+                <a:cs typeface="Times New Roman" panose="02020603050405020304" pitchFamily="18" charset="0"/>
+              </a:rPr>
+              <a:t>Du bekommst </a:t>
+            </a:r>
+            <a:r>
+              <a:rPr kumimoji="0" lang="de-DE" altLang="de-DE" sz="2800" b="0" i="0" u="none" strike="noStrike" cap="none" normalizeH="0" baseline="0" dirty="0">
+                <a:ln>
+                  <a:noFill/>
+                </a:ln>
+                <a:effectLst/>
+                <a:latin typeface="Calibri" panose="020F0502020204030204" pitchFamily="34" charset="0"/>
+                <a:ea typeface="Calibri" panose="020F0502020204030204" pitchFamily="34" charset="0"/>
+                <a:cs typeface="Times New Roman" panose="02020603050405020304" pitchFamily="18" charset="0"/>
+              </a:rPr>
+              <a:t>für die Dauer des Kurses einen leistungsstarken Laptop zusammen mit einem Netzteil und einer Tasche bereitgestellt, den du für die Entwicklung des Spiels verwendest. Bring dazu bitte den </a:t>
+            </a:r>
+            <a:r>
+              <a:rPr kumimoji="0" lang="de-DE" altLang="de-DE" sz="2800" b="1" i="0" u="none" strike="noStrike" cap="none" normalizeH="0" baseline="0" dirty="0">
+                <a:ln>
+                  <a:noFill/>
+                </a:ln>
+                <a:effectLst/>
+                <a:latin typeface="Calibri" panose="020F0502020204030204" pitchFamily="34" charset="0"/>
+                <a:ea typeface="Calibri" panose="020F0502020204030204" pitchFamily="34" charset="0"/>
+                <a:cs typeface="Times New Roman" panose="02020603050405020304" pitchFamily="18" charset="0"/>
+              </a:rPr>
+              <a:t>Leihvertrag</a:t>
+            </a:r>
+            <a:r>
+              <a:rPr kumimoji="0" lang="de-DE" altLang="de-DE" sz="2800" b="0" i="0" u="none" strike="noStrike" cap="none" normalizeH="0" baseline="0" dirty="0">
+                <a:ln>
+                  <a:noFill/>
+                </a:ln>
+                <a:effectLst/>
+                <a:latin typeface="Calibri" panose="020F0502020204030204" pitchFamily="34" charset="0"/>
+                <a:ea typeface="Calibri" panose="020F0502020204030204" pitchFamily="34" charset="0"/>
+                <a:cs typeface="Times New Roman" panose="02020603050405020304" pitchFamily="18" charset="0"/>
+              </a:rPr>
+              <a:t> zum ersten Kurstermin ausgefüllt und unterschrieben mit.</a:t>
+            </a:r>
+            <a:endParaRPr lang="de-DE" altLang="de-DE" sz="800" dirty="0"/>
+          </a:p>
+          <a:p>
+            <a:pPr eaLnBrk="0" fontAlgn="base" hangingPunct="0">
+              <a:lnSpc>
+                <a:spcPct val="100000"/>
+              </a:lnSpc>
+              <a:spcBef>
+                <a:spcPct val="0"/>
+              </a:spcBef>
+              <a:spcAft>
+                <a:spcPct val="0"/>
+              </a:spcAft>
+            </a:pPr>
+            <a:r>
+              <a:rPr kumimoji="0" lang="de-DE" altLang="de-DE" sz="2800" b="0" i="0" u="none" strike="noStrike" cap="none" normalizeH="0" baseline="0" dirty="0">
+                <a:ln>
+                  <a:noFill/>
+                </a:ln>
+                <a:effectLst/>
+                <a:latin typeface="Calibri" panose="020F0502020204030204" pitchFamily="34" charset="0"/>
+                <a:ea typeface="Calibri" panose="020F0502020204030204" pitchFamily="34" charset="0"/>
+                <a:cs typeface="Times New Roman" panose="02020603050405020304" pitchFamily="18" charset="0"/>
+              </a:rPr>
+              <a:t>Du kannst das Spiel direkt auf einem Android-Handy testen! </a:t>
+            </a:r>
+            <a:br>
+              <a:rPr kumimoji="0" lang="de-DE" altLang="de-DE" sz="2800" b="0" i="0" u="none" strike="noStrike" cap="none" normalizeH="0" baseline="0" dirty="0">
+                <a:ln>
+                  <a:noFill/>
+                </a:ln>
+                <a:effectLst/>
+                <a:latin typeface="Calibri" panose="020F0502020204030204" pitchFamily="34" charset="0"/>
+                <a:ea typeface="Calibri" panose="020F0502020204030204" pitchFamily="34" charset="0"/>
+                <a:cs typeface="Times New Roman" panose="02020603050405020304" pitchFamily="18" charset="0"/>
+              </a:rPr>
+            </a:br>
+            <a:r>
+              <a:rPr kumimoji="0" lang="de-DE" altLang="de-DE" sz="2800" b="0" i="0" u="none" strike="noStrike" cap="none" normalizeH="0" baseline="0" dirty="0">
+                <a:ln>
+                  <a:noFill/>
+                </a:ln>
+                <a:effectLst/>
+                <a:latin typeface="Calibri" panose="020F0502020204030204" pitchFamily="34" charset="0"/>
+                <a:ea typeface="Calibri" panose="020F0502020204030204" pitchFamily="34" charset="0"/>
+                <a:cs typeface="Times New Roman" panose="02020603050405020304" pitchFamily="18" charset="0"/>
+              </a:rPr>
+              <a:t>Nimm dein </a:t>
+            </a:r>
+            <a:r>
+              <a:rPr kumimoji="0" lang="de-DE" altLang="de-DE" sz="2800" b="1" i="0" u="none" strike="noStrike" cap="none" normalizeH="0" baseline="0" dirty="0">
+                <a:ln>
+                  <a:noFill/>
+                </a:ln>
+                <a:effectLst/>
+                <a:latin typeface="Calibri" panose="020F0502020204030204" pitchFamily="34" charset="0"/>
+                <a:ea typeface="Calibri" panose="020F0502020204030204" pitchFamily="34" charset="0"/>
+                <a:cs typeface="Times New Roman" panose="02020603050405020304" pitchFamily="18" charset="0"/>
+              </a:rPr>
+              <a:t>Handy</a:t>
+            </a:r>
+            <a:r>
+              <a:rPr kumimoji="0" lang="de-DE" altLang="de-DE" sz="2800" b="0" i="0" u="none" strike="noStrike" cap="none" normalizeH="0" baseline="0" dirty="0">
+                <a:ln>
+                  <a:noFill/>
+                </a:ln>
+                <a:effectLst/>
+                <a:latin typeface="Calibri" panose="020F0502020204030204" pitchFamily="34" charset="0"/>
+                <a:ea typeface="Calibri" panose="020F0502020204030204" pitchFamily="34" charset="0"/>
+                <a:cs typeface="Times New Roman" panose="02020603050405020304" pitchFamily="18" charset="0"/>
+              </a:rPr>
+              <a:t> zusammen mit einem </a:t>
+            </a:r>
+            <a:r>
+              <a:rPr kumimoji="0" lang="de-DE" altLang="de-DE" sz="2800" b="1" i="0" u="none" strike="noStrike" cap="none" normalizeH="0" baseline="0" dirty="0">
+                <a:ln>
+                  <a:noFill/>
+                </a:ln>
+                <a:effectLst/>
+                <a:latin typeface="Calibri" panose="020F0502020204030204" pitchFamily="34" charset="0"/>
+                <a:ea typeface="Calibri" panose="020F0502020204030204" pitchFamily="34" charset="0"/>
+                <a:cs typeface="Times New Roman" panose="02020603050405020304" pitchFamily="18" charset="0"/>
+              </a:rPr>
+              <a:t>USB-C-Kabel</a:t>
+            </a:r>
+            <a:r>
+              <a:rPr kumimoji="0" lang="de-DE" altLang="de-DE" sz="2800" b="0" i="0" u="none" strike="noStrike" cap="none" normalizeH="0" baseline="0" dirty="0">
+                <a:ln>
+                  <a:noFill/>
+                </a:ln>
+                <a:effectLst/>
+                <a:latin typeface="Calibri" panose="020F0502020204030204" pitchFamily="34" charset="0"/>
+                <a:ea typeface="Calibri" panose="020F0502020204030204" pitchFamily="34" charset="0"/>
+                <a:cs typeface="Times New Roman" panose="02020603050405020304" pitchFamily="18" charset="0"/>
+              </a:rPr>
+              <a:t> mit.</a:t>
+            </a:r>
+            <a:br>
+              <a:rPr kumimoji="0" lang="de-DE" altLang="de-DE" sz="2800" b="0" i="0" u="none" strike="noStrike" cap="none" normalizeH="0" baseline="0" dirty="0">
+                <a:ln>
+                  <a:noFill/>
+                </a:ln>
+                <a:effectLst/>
+                <a:latin typeface="Calibri" panose="020F0502020204030204" pitchFamily="34" charset="0"/>
+                <a:ea typeface="Calibri" panose="020F0502020204030204" pitchFamily="34" charset="0"/>
+                <a:cs typeface="Times New Roman" panose="02020603050405020304" pitchFamily="18" charset="0"/>
+              </a:rPr>
+            </a:br>
+            <a:r>
+              <a:rPr kumimoji="0" lang="de-DE" altLang="de-DE" sz="2800" b="1" i="0" u="none" strike="noStrike" cap="none" normalizeH="0" baseline="0" dirty="0">
+                <a:ln>
+                  <a:noFill/>
+                </a:ln>
+                <a:solidFill>
+                  <a:srgbClr val="F27D82"/>
+                </a:solidFill>
+                <a:effectLst/>
+                <a:latin typeface="Calibri" panose="020F0502020204030204" pitchFamily="34" charset="0"/>
+                <a:ea typeface="Calibri" panose="020F0502020204030204" pitchFamily="34" charset="0"/>
+                <a:cs typeface="Times New Roman" panose="02020603050405020304" pitchFamily="18" charset="0"/>
+              </a:rPr>
+              <a:t>Auf dem Handy darf kein Family Link installiert sein.</a:t>
+            </a:r>
+            <a:br>
+              <a:rPr kumimoji="0" lang="de-DE" altLang="de-DE" sz="2800" b="0" i="0" u="none" strike="noStrike" cap="none" normalizeH="0" baseline="0" dirty="0">
+                <a:ln>
+                  <a:noFill/>
+                </a:ln>
+                <a:effectLst/>
+                <a:latin typeface="Calibri" panose="020F0502020204030204" pitchFamily="34" charset="0"/>
+                <a:ea typeface="Calibri" panose="020F0502020204030204" pitchFamily="34" charset="0"/>
+                <a:cs typeface="Times New Roman" panose="02020603050405020304" pitchFamily="18" charset="0"/>
+              </a:rPr>
+            </a:br>
+            <a:r>
+              <a:rPr kumimoji="0" lang="de-DE" altLang="de-DE" sz="2800" b="0" i="0" u="none" strike="noStrike" cap="none" normalizeH="0" baseline="0" dirty="0">
+                <a:ln>
+                  <a:noFill/>
+                </a:ln>
+                <a:effectLst/>
+                <a:latin typeface="Calibri" panose="020F0502020204030204" pitchFamily="34" charset="0"/>
+                <a:ea typeface="Calibri" panose="020F0502020204030204" pitchFamily="34" charset="0"/>
+                <a:cs typeface="Times New Roman" panose="02020603050405020304" pitchFamily="18" charset="0"/>
+              </a:rPr>
+              <a:t>Wir können das Spiel aufgrund der Restriktionen des Apple-Ökosystems leider nicht auf iOS installieren.</a:t>
+            </a:r>
+            <a:endParaRPr kumimoji="0" lang="de-DE" altLang="de-DE" sz="800" b="0" i="0" u="none" strike="noStrike" cap="none" normalizeH="0" baseline="0" dirty="0">
+              <a:ln>
+                <a:noFill/>
+              </a:ln>
+              <a:effectLst/>
+            </a:endParaRPr>
+          </a:p>
+          <a:p>
+            <a:pPr marL="0" marR="0" lvl="0" indent="0" algn="l" defTabSz="914400" rtl="0" eaLnBrk="0" fontAlgn="base" latinLnBrk="0" hangingPunct="0">
+              <a:lnSpc>
+                <a:spcPct val="100000"/>
+              </a:lnSpc>
+              <a:spcBef>
+                <a:spcPct val="0"/>
+              </a:spcBef>
+              <a:spcAft>
+                <a:spcPct val="0"/>
+              </a:spcAft>
+              <a:buClrTx/>
+              <a:buSzTx/>
+              <a:buFontTx/>
+              <a:buNone/>
+              <a:tabLst/>
+            </a:pPr>
+            <a:r>
+              <a:rPr kumimoji="0" lang="de-DE" altLang="de-DE" sz="2800" b="0" i="0" u="none" strike="noStrike" cap="none" normalizeH="0" baseline="0" dirty="0">
+                <a:ln>
+                  <a:noFill/>
+                </a:ln>
+                <a:effectLst/>
+                <a:latin typeface="Calibri" panose="020F0502020204030204" pitchFamily="34" charset="0"/>
+                <a:ea typeface="Calibri" panose="020F0502020204030204" pitchFamily="34" charset="0"/>
+                <a:cs typeface="Times New Roman" panose="02020603050405020304" pitchFamily="18" charset="0"/>
+              </a:rPr>
+              <a:t>Wir freuen uns auf euch!</a:t>
+            </a:r>
+            <a:endParaRPr kumimoji="0" lang="de-DE" altLang="de-DE" sz="800" b="0" i="0" u="none" strike="noStrike" cap="none" normalizeH="0" baseline="0" dirty="0">
+              <a:ln>
+                <a:noFill/>
+              </a:ln>
+              <a:effectLst/>
+            </a:endParaRPr>
+          </a:p>
+          <a:p>
+            <a:pPr marL="0" marR="0" lvl="0" indent="0" algn="l" defTabSz="914400" rtl="0" eaLnBrk="0" fontAlgn="base" latinLnBrk="0" hangingPunct="0">
+              <a:lnSpc>
+                <a:spcPct val="100000"/>
+              </a:lnSpc>
+              <a:spcBef>
+                <a:spcPct val="0"/>
+              </a:spcBef>
+              <a:spcAft>
+                <a:spcPct val="0"/>
+              </a:spcAft>
+              <a:buClrTx/>
+              <a:buSzTx/>
+              <a:buFontTx/>
+              <a:buNone/>
+              <a:tabLst/>
+            </a:pPr>
+            <a:r>
+              <a:rPr kumimoji="0" lang="de-DE" altLang="de-DE" sz="2800" b="0" i="0" u="none" strike="noStrike" cap="none" normalizeH="0" baseline="0" dirty="0">
+                <a:ln>
+                  <a:noFill/>
+                </a:ln>
+                <a:effectLst/>
+                <a:latin typeface="Calibri" panose="020F0502020204030204" pitchFamily="34" charset="0"/>
+                <a:ea typeface="Calibri" panose="020F0502020204030204" pitchFamily="34" charset="0"/>
+                <a:cs typeface="Times New Roman" panose="02020603050405020304" pitchFamily="18" charset="0"/>
+              </a:rPr>
+              <a:t>Lion und Lasse</a:t>
+            </a:r>
+            <a:endParaRPr kumimoji="0" lang="de-DE" altLang="de-DE" sz="4000" b="0" i="0" u="none" strike="noStrike" cap="none" normalizeH="0" baseline="0" dirty="0">
+              <a:ln>
+                <a:noFill/>
+              </a:ln>
+              <a:effectLst/>
+              <a:latin typeface="Arial" panose="020B0604020202020204" pitchFamily="34" charset="0"/>
+            </a:endParaRPr>
+          </a:p>
+        </p:txBody>
+      </p:sp>
+      <p:pic>
+        <p:nvPicPr>
+          <p:cNvPr id="4" name="Grafik 2">
+            <a:extLst>
+              <a:ext uri="{FF2B5EF4-FFF2-40B4-BE49-F238E27FC236}">
+                <a16:creationId xmlns:a16="http://schemas.microsoft.com/office/drawing/2014/main" id="{4E13E666-F493-4FA2-8C13-DB671F879985}"/>
+              </a:ext>
+            </a:extLst>
+          </p:cNvPr>
+          <p:cNvPicPr>
+            <a:picLocks noChangeAspect="1" noChangeArrowheads="1"/>
+          </p:cNvPicPr>
+          <p:nvPr/>
+        </p:nvPicPr>
+        <p:blipFill>
+          <a:blip r:embed="rId2">
+            <a:extLst>
+              <a:ext uri="{28A0092B-C50C-407E-A947-70E740481C1C}">
+                <a14:useLocalDpi xmlns:a14="http://schemas.microsoft.com/office/drawing/2010/main" val="0"/>
+              </a:ext>
+            </a:extLst>
+          </a:blip>
+          <a:srcRect l="23828" t="26936" b="33696"/>
+          <a:stretch>
+            <a:fillRect/>
+          </a:stretch>
+        </p:blipFill>
+        <p:spPr bwMode="auto">
+          <a:xfrm>
+            <a:off x="10545762" y="3672151"/>
+            <a:ext cx="1646238" cy="850900"/>
+          </a:xfrm>
+          <a:prstGeom prst="rect">
+            <a:avLst/>
+          </a:prstGeom>
+          <a:noFill/>
+          <a:extLst>
+            <a:ext uri="{909E8E84-426E-40DD-AFC4-6F175D3DCCD1}">
+              <a14:hiddenFill xmlns:a14="http://schemas.microsoft.com/office/drawing/2010/main">
+                <a:solidFill>
+                  <a:srgbClr val="FFFFFF"/>
+                </a:solidFill>
+              </a14:hiddenFill>
+            </a:ext>
+          </a:extLst>
+        </p:spPr>
+      </p:pic>
+    </p:spTree>
+    <p:extLst>
+      <p:ext uri="{BB962C8B-B14F-4D97-AF65-F5344CB8AC3E}">
+        <p14:creationId xmlns:p14="http://schemas.microsoft.com/office/powerpoint/2010/main" val="233118332"/>
+      </p:ext>
+    </p:extLst>
+  </p:cSld>
+  <p:clrMapOvr>
+    <a:masterClrMapping/>
+  </p:clrMapOvr>
+</p:sld>
+</file>
+
+<file path=ppt/slides/slide3.xml><?xml version="1.0" encoding="utf-8"?>
+<p:sld xmlns:a="http://schemas.openxmlformats.org/drawingml/2006/main" xmlns:r="http://schemas.openxmlformats.org/officeDocument/2006/relationships" xmlns:p="http://schemas.openxmlformats.org/presentationml/2006/main">
+  <p:cSld>
+    <p:spTree>
+      <p:nvGrpSpPr>
+        <p:cNvPr id="1" name=""/>
+        <p:cNvGrpSpPr/>
+        <p:nvPr/>
+      </p:nvGrpSpPr>
+      <p:grpSpPr>
+        <a:xfrm>
+          <a:off x="0" y="0"/>
+          <a:ext cx="0" cy="0"/>
+          <a:chOff x="0" y="0"/>
+          <a:chExt cx="0" cy="0"/>
+        </a:xfrm>
+      </p:grpSpPr>
+      <p:sp>
+        <p:nvSpPr>
+          <p:cNvPr id="2" name="Title 1">
+            <a:extLst>
+              <a:ext uri="{FF2B5EF4-FFF2-40B4-BE49-F238E27FC236}">
+                <a16:creationId xmlns:a16="http://schemas.microsoft.com/office/drawing/2014/main" id="{2263D464-E8A6-4F16-B231-80688280C1CE}"/>
+              </a:ext>
+            </a:extLst>
+          </p:cNvPr>
+          <p:cNvSpPr>
+            <a:spLocks noGrp="1"/>
+          </p:cNvSpPr>
+          <p:nvPr>
+            <p:ph type="title"/>
+          </p:nvPr>
+        </p:nvSpPr>
+        <p:spPr/>
+        <p:txBody>
+          <a:bodyPr/>
+          <a:lstStyle/>
+          <a:p>
+            <a:r>
+              <a:rPr lang="de-DE" dirty="0"/>
+              <a:t>Family Link Restriktionen umgehen</a:t>
+            </a:r>
+          </a:p>
+        </p:txBody>
+      </p:sp>
+      <p:sp>
+        <p:nvSpPr>
+          <p:cNvPr id="3" name="Content Placeholder 2">
+            <a:extLst>
+              <a:ext uri="{FF2B5EF4-FFF2-40B4-BE49-F238E27FC236}">
+                <a16:creationId xmlns:a16="http://schemas.microsoft.com/office/drawing/2014/main" id="{3686047F-D17B-45AD-9B67-5524A12FF697}"/>
+              </a:ext>
+            </a:extLst>
+          </p:cNvPr>
+          <p:cNvSpPr>
+            <a:spLocks noGrp="1"/>
+          </p:cNvSpPr>
+          <p:nvPr>
+            <p:ph idx="1"/>
+          </p:nvPr>
+        </p:nvSpPr>
+        <p:spPr/>
+        <p:txBody>
+          <a:bodyPr/>
+          <a:lstStyle/>
+          <a:p>
+            <a:pPr marL="0" indent="0">
+              <a:buNone/>
+            </a:pPr>
+            <a:r>
+              <a:rPr lang="de-DE" dirty="0"/>
+              <a:t>…</a:t>
+            </a:r>
+          </a:p>
+        </p:txBody>
+      </p:sp>
+    </p:spTree>
+    <p:extLst>
+      <p:ext uri="{BB962C8B-B14F-4D97-AF65-F5344CB8AC3E}">
+        <p14:creationId xmlns:p14="http://schemas.microsoft.com/office/powerpoint/2010/main" val="789373505"/>
+      </p:ext>
+    </p:extLst>
+  </p:cSld>
+  <p:clrMapOvr>
+    <a:masterClrMapping/>
+  </p:clrMapOvr>
+</p:sld>
+</file>
+
+<file path=ppt/slides/slide4.xml><?xml version="1.0" encoding="utf-8"?>
+<p:sld xmlns:a="http://schemas.openxmlformats.org/drawingml/2006/main" xmlns:r="http://schemas.openxmlformats.org/officeDocument/2006/relationships" xmlns:p="http://schemas.openxmlformats.org/presentationml/2006/main">
+  <p:cSld>
+    <p:spTree>
+      <p:nvGrpSpPr>
+        <p:cNvPr id="1" name=""/>
+        <p:cNvGrpSpPr/>
+        <p:nvPr/>
+      </p:nvGrpSpPr>
+      <p:grpSpPr>
+        <a:xfrm>
+          <a:off x="0" y="0"/>
+          <a:ext cx="0" cy="0"/>
+          <a:chOff x="0" y="0"/>
+          <a:chExt cx="0" cy="0"/>
+        </a:xfrm>
+      </p:grpSpPr>
+      <p:sp>
+        <p:nvSpPr>
+          <p:cNvPr id="2" name="Title 1">
+            <a:extLst>
+              <a:ext uri="{FF2B5EF4-FFF2-40B4-BE49-F238E27FC236}">
+                <a16:creationId xmlns:a16="http://schemas.microsoft.com/office/drawing/2014/main" id="{48FDF813-EE93-425A-B044-6AAE2FADF940}"/>
+              </a:ext>
+            </a:extLst>
+          </p:cNvPr>
+          <p:cNvSpPr>
+            <a:spLocks noGrp="1"/>
+          </p:cNvSpPr>
+          <p:nvPr>
+            <p:ph type="title"/>
+          </p:nvPr>
+        </p:nvSpPr>
+        <p:spPr/>
+        <p:txBody>
+          <a:bodyPr/>
+          <a:lstStyle/>
+          <a:p>
+            <a:r>
+              <a:rPr lang="de-DE" dirty="0"/>
+              <a:t>Informationen recherchieren</a:t>
+            </a:r>
+          </a:p>
+        </p:txBody>
+      </p:sp>
+      <p:sp>
+        <p:nvSpPr>
+          <p:cNvPr id="3" name="Content Placeholder 2">
+            <a:extLst>
+              <a:ext uri="{FF2B5EF4-FFF2-40B4-BE49-F238E27FC236}">
+                <a16:creationId xmlns:a16="http://schemas.microsoft.com/office/drawing/2014/main" id="{02ACB7ED-8D0E-4ED2-A0C2-4FA896016D31}"/>
+              </a:ext>
+            </a:extLst>
+          </p:cNvPr>
+          <p:cNvSpPr>
+            <a:spLocks noGrp="1"/>
+          </p:cNvSpPr>
+          <p:nvPr>
+            <p:ph idx="1"/>
+          </p:nvPr>
+        </p:nvSpPr>
+        <p:spPr/>
+        <p:txBody>
+          <a:bodyPr/>
+          <a:lstStyle/>
+          <a:p>
+            <a:endParaRPr lang="de-DE"/>
+          </a:p>
+        </p:txBody>
+      </p:sp>
+    </p:spTree>
+    <p:extLst>
+      <p:ext uri="{BB962C8B-B14F-4D97-AF65-F5344CB8AC3E}">
+        <p14:creationId xmlns:p14="http://schemas.microsoft.com/office/powerpoint/2010/main" val="1095441688"/>
+      </p:ext>
+    </p:extLst>
+  </p:cSld>
+  <p:clrMapOvr>
+    <a:masterClrMapping/>
+  </p:clrMapOvr>
+</p:sld>
+</file>
+
+<file path=ppt/slides/slide5.xml><?xml version="1.0" encoding="utf-8"?>
+<p:sld xmlns:a="http://schemas.openxmlformats.org/drawingml/2006/main" xmlns:r="http://schemas.openxmlformats.org/officeDocument/2006/relationships" xmlns:p="http://schemas.openxmlformats.org/presentationml/2006/main">
+  <p:cSld>
+    <p:spTree>
+      <p:nvGrpSpPr>
+        <p:cNvPr id="1" name=""/>
+        <p:cNvGrpSpPr/>
+        <p:nvPr/>
+      </p:nvGrpSpPr>
+      <p:grpSpPr>
+        <a:xfrm>
+          <a:off x="0" y="0"/>
+          <a:ext cx="0" cy="0"/>
+          <a:chOff x="0" y="0"/>
+          <a:chExt cx="0" cy="0"/>
+        </a:xfrm>
+      </p:grpSpPr>
+      <p:sp>
+        <p:nvSpPr>
+          <p:cNvPr id="2" name="Title 1">
+            <a:extLst>
+              <a:ext uri="{FF2B5EF4-FFF2-40B4-BE49-F238E27FC236}">
+                <a16:creationId xmlns:a16="http://schemas.microsoft.com/office/drawing/2014/main" id="{742E89BC-A7E5-4160-B7AC-C37B5B5B627A}"/>
+              </a:ext>
+            </a:extLst>
+          </p:cNvPr>
+          <p:cNvSpPr>
+            <a:spLocks noGrp="1"/>
+          </p:cNvSpPr>
+          <p:nvPr>
+            <p:ph type="title"/>
+          </p:nvPr>
+        </p:nvSpPr>
+        <p:spPr/>
+        <p:txBody>
+          <a:bodyPr/>
+          <a:lstStyle/>
+          <a:p>
+            <a:r>
+              <a:rPr lang="de-DE" dirty="0"/>
+              <a:t>Ablauf Sommersemester 2025</a:t>
             </a:r>
           </a:p>
         </p:txBody>
       </p:sp>
       <p:graphicFrame>
         <p:nvGraphicFramePr>
-          <p:cNvPr id="4" name="Tabelle 7">
+          <p:cNvPr id="4" name="Table 4">
             <a:extLst>
               <a:ext uri="{FF2B5EF4-FFF2-40B4-BE49-F238E27FC236}">
-                <a16:creationId xmlns:a16="http://schemas.microsoft.com/office/drawing/2014/main" id="{36A5935D-4966-45D8-A2DD-102E2AD40272}"/>
+                <a16:creationId xmlns:a16="http://schemas.microsoft.com/office/drawing/2014/main" id="{0F764F4F-A0F2-4F8D-B731-509381F16F8A}"/>
               </a:ext>
             </a:extLst>
           </p:cNvPr>
           <p:cNvGraphicFramePr>
             <a:graphicFrameLocks noGrp="1"/>
           </p:cNvGraphicFramePr>
-          <p:nvPr/>
+          <p:nvPr>
+            <p:ph idx="1"/>
+            <p:extLst>
+              <p:ext uri="{D42A27DB-BD31-4B8C-83A1-F6EECF244321}">
+                <p14:modId xmlns:p14="http://schemas.microsoft.com/office/powerpoint/2010/main" val="3442310689"/>
+              </p:ext>
+            </p:extLst>
+          </p:nvPr>
         </p:nvGraphicFramePr>
         <p:xfrm>
-          <a:off x="838200" y="1690687"/>
-          <a:ext cx="10515600" cy="4802193"/>
+          <a:off x="838200" y="1825625"/>
+          <a:ext cx="10515596" cy="4079240"/>
         </p:xfrm>
         <a:graphic>
           <a:graphicData uri="http://schemas.openxmlformats.org/drawingml/2006/table">
@@ -3251,42 +3989,46 @@
                 <a:tableStyleId>{5C22544A-7EE6-4342-B048-85BDC9FD1C3A}</a:tableStyleId>
               </a:tblPr>
               <a:tblGrid>
-                <a:gridCol w="3505200">
+                <a:gridCol w="427892">
                   <a:extLst>
                     <a:ext uri="{9D8B030D-6E8A-4147-A177-3AD203B41FA5}">
-                      <a16:colId xmlns:a16="http://schemas.microsoft.com/office/drawing/2014/main" val="2317810761"/>
+                      <a16:colId xmlns:a16="http://schemas.microsoft.com/office/drawing/2014/main" val="3675322223"/>
                     </a:ext>
                   </a:extLst>
                 </a:gridCol>
-                <a:gridCol w="5466080">
+                <a:gridCol w="1572272">
                   <a:extLst>
                     <a:ext uri="{9D8B030D-6E8A-4147-A177-3AD203B41FA5}">
-                      <a16:colId xmlns:a16="http://schemas.microsoft.com/office/drawing/2014/main" val="3760803087"/>
+                      <a16:colId xmlns:a16="http://schemas.microsoft.com/office/drawing/2014/main" val="829809223"/>
                     </a:ext>
                   </a:extLst>
                 </a:gridCol>
-                <a:gridCol w="1544320">
+                <a:gridCol w="1046802">
                   <a:extLst>
                     <a:ext uri="{9D8B030D-6E8A-4147-A177-3AD203B41FA5}">
-                      <a16:colId xmlns:a16="http://schemas.microsoft.com/office/drawing/2014/main" val="2063619127"/>
+                      <a16:colId xmlns:a16="http://schemas.microsoft.com/office/drawing/2014/main" val="3562242639"/>
+                    </a:ext>
+                  </a:extLst>
+                </a:gridCol>
+                <a:gridCol w="7468630">
+                  <a:extLst>
+                    <a:ext uri="{9D8B030D-6E8A-4147-A177-3AD203B41FA5}">
+                      <a16:colId xmlns:a16="http://schemas.microsoft.com/office/drawing/2014/main" val="162909940"/>
                     </a:ext>
                   </a:extLst>
                 </a:gridCol>
               </a:tblGrid>
-              <a:tr h="436563">
+              <a:tr h="370840">
                 <a:tc>
                   <a:txBody>
                     <a:bodyPr/>
                     <a:lstStyle/>
                     <a:p>
-                      <a:r>
-                        <a:rPr lang="de-DE" u="none">
-                          <a:solidFill>
-                            <a:schemeClr val="tx1"/>
-                          </a:solidFill>
-                        </a:rPr>
-                        <a:t>Name</a:t>
-                      </a:r>
+                      <a:endParaRPr lang="de-DE" dirty="0">
+                        <a:solidFill>
+                          <a:schemeClr val="tx1"/>
+                        </a:solidFill>
+                      </a:endParaRPr>
                     </a:p>
                   </a:txBody>
                   <a:tcPr>
@@ -3319,12 +4061,12 @@
                     <a:lstStyle/>
                     <a:p>
                       <a:r>
-                        <a:rPr lang="de-DE" u="none">
+                        <a:rPr lang="de-DE" dirty="0">
                           <a:solidFill>
                             <a:schemeClr val="tx1"/>
                           </a:solidFill>
                         </a:rPr>
-                        <a:t>Kombination</a:t>
+                        <a:t>Datum</a:t>
                       </a:r>
                     </a:p>
                   </a:txBody>
@@ -3358,12 +4100,12 @@
                     <a:lstStyle/>
                     <a:p>
                       <a:r>
-                        <a:rPr lang="de-DE" u="none">
+                        <a:rPr lang="de-DE" dirty="0">
                           <a:solidFill>
                             <a:schemeClr val="tx1"/>
                           </a:solidFill>
                         </a:rPr>
-                        <a:t>Symbole</a:t>
+                        <a:t>Uhrzeit</a:t>
                       </a:r>
                     </a:p>
                   </a:txBody>
@@ -3378,52 +4120,6 @@
                       <a:noFill/>
                     </a:lnT>
                     <a:lnB w="38100" cmpd="sng">
-                      <a:noFill/>
-                    </a:lnB>
-                    <a:lnTlToBr w="12700" cmpd="sng">
-                      <a:noFill/>
-                      <a:prstDash val="solid"/>
-                    </a:lnTlToBr>
-                    <a:lnBlToTr w="12700" cmpd="sng">
-                      <a:noFill/>
-                      <a:prstDash val="solid"/>
-                    </a:lnBlToTr>
-                    <a:noFill/>
-                  </a:tcPr>
-                </a:tc>
-                <a:extLst>
-                  <a:ext uri="{0D108BD9-81ED-4DB2-BD59-A6C34878D82A}">
-                    <a16:rowId xmlns:a16="http://schemas.microsoft.com/office/drawing/2014/main" val="2371139332"/>
-                  </a:ext>
-                </a:extLst>
-              </a:tr>
-              <a:tr h="436563">
-                <a:tc>
-                  <a:txBody>
-                    <a:bodyPr/>
-                    <a:lstStyle/>
-                    <a:p>
-                      <a:r>
-                        <a:rPr lang="de-DE" u="none">
-                          <a:solidFill>
-                            <a:schemeClr val="tx1"/>
-                          </a:solidFill>
-                        </a:rPr>
-                        <a:t>Semikolon, Doppelpunkt</a:t>
-                      </a:r>
-                    </a:p>
-                  </a:txBody>
-                  <a:tcPr>
-                    <a:lnL w="12700" cmpd="sng">
-                      <a:noFill/>
-                    </a:lnL>
-                    <a:lnR w="12700" cmpd="sng">
-                      <a:noFill/>
-                    </a:lnR>
-                    <a:lnT w="38100" cmpd="sng">
-                      <a:noFill/>
-                    </a:lnT>
-                    <a:lnB w="12700" cmpd="sng">
                       <a:noFill/>
                     </a:lnB>
                     <a:lnTlToBr w="12700" cmpd="sng">
@@ -3443,12 +4139,59 @@
                     <a:lstStyle/>
                     <a:p>
                       <a:r>
-                        <a:rPr lang="de-DE" u="none">
+                        <a:rPr lang="de-DE" dirty="0">
                           <a:solidFill>
                             <a:schemeClr val="tx1"/>
                           </a:solidFill>
                         </a:rPr>
-                        <a:t>Shift + Komma (,) / Punkt (.)</a:t>
+                        <a:t>Inhalt</a:t>
+                      </a:r>
+                    </a:p>
+                  </a:txBody>
+                  <a:tcPr>
+                    <a:lnL w="12700" cmpd="sng">
+                      <a:noFill/>
+                    </a:lnL>
+                    <a:lnR w="12700" cmpd="sng">
+                      <a:noFill/>
+                    </a:lnR>
+                    <a:lnT w="12700" cmpd="sng">
+                      <a:noFill/>
+                    </a:lnT>
+                    <a:lnB w="38100" cmpd="sng">
+                      <a:noFill/>
+                    </a:lnB>
+                    <a:lnTlToBr w="12700" cmpd="sng">
+                      <a:noFill/>
+                      <a:prstDash val="solid"/>
+                    </a:lnTlToBr>
+                    <a:lnBlToTr w="12700" cmpd="sng">
+                      <a:noFill/>
+                      <a:prstDash val="solid"/>
+                    </a:lnBlToTr>
+                    <a:noFill/>
+                  </a:tcPr>
+                </a:tc>
+                <a:extLst>
+                  <a:ext uri="{0D108BD9-81ED-4DB2-BD59-A6C34878D82A}">
+                    <a16:rowId xmlns:a16="http://schemas.microsoft.com/office/drawing/2014/main" val="3313997392"/>
+                  </a:ext>
+                </a:extLst>
+              </a:tr>
+              <a:tr h="370840">
+                <a:tc>
+                  <a:txBody>
+                    <a:bodyPr/>
+                    <a:lstStyle/>
+                    <a:p>
+                      <a:pPr algn="r"/>
+                      <a:r>
+                        <a:rPr lang="de-DE" dirty="0">
+                          <a:solidFill>
+                            <a:schemeClr val="tx1"/>
+                          </a:solidFill>
+                        </a:rPr>
+                        <a:t>1</a:t>
                       </a:r>
                     </a:p>
                   </a:txBody>
@@ -3482,12 +4225,12 @@
                     <a:lstStyle/>
                     <a:p>
                       <a:r>
-                        <a:rPr lang="de-DE" u="none">
+                        <a:rPr lang="de-DE" dirty="0">
                           <a:solidFill>
                             <a:schemeClr val="tx1"/>
                           </a:solidFill>
                         </a:rPr>
-                        <a:t>; :</a:t>
+                        <a:t>Freitag, 20.2.</a:t>
                       </a:r>
                     </a:p>
                   </a:txBody>
@@ -3499,52 +4242,6 @@
                       <a:noFill/>
                     </a:lnR>
                     <a:lnT w="38100" cmpd="sng">
-                      <a:noFill/>
-                    </a:lnT>
-                    <a:lnB w="12700" cmpd="sng">
-                      <a:noFill/>
-                    </a:lnB>
-                    <a:lnTlToBr w="12700" cmpd="sng">
-                      <a:noFill/>
-                      <a:prstDash val="solid"/>
-                    </a:lnTlToBr>
-                    <a:lnBlToTr w="12700" cmpd="sng">
-                      <a:noFill/>
-                      <a:prstDash val="solid"/>
-                    </a:lnBlToTr>
-                    <a:noFill/>
-                  </a:tcPr>
-                </a:tc>
-                <a:extLst>
-                  <a:ext uri="{0D108BD9-81ED-4DB2-BD59-A6C34878D82A}">
-                    <a16:rowId xmlns:a16="http://schemas.microsoft.com/office/drawing/2014/main" val="1137631992"/>
-                  </a:ext>
-                </a:extLst>
-              </a:tr>
-              <a:tr h="436563">
-                <a:tc>
-                  <a:txBody>
-                    <a:bodyPr/>
-                    <a:lstStyle/>
-                    <a:p>
-                      <a:r>
-                        <a:rPr lang="de-DE" u="none">
-                          <a:solidFill>
-                            <a:schemeClr val="tx1"/>
-                          </a:solidFill>
-                        </a:rPr>
-                        <a:t>Anführungsstrich(e)</a:t>
-                      </a:r>
-                    </a:p>
-                  </a:txBody>
-                  <a:tcPr>
-                    <a:lnL w="12700" cmpd="sng">
-                      <a:noFill/>
-                    </a:lnL>
-                    <a:lnR w="12700" cmpd="sng">
-                      <a:noFill/>
-                    </a:lnR>
-                    <a:lnT w="12700" cmpd="sng">
                       <a:noFill/>
                     </a:lnT>
                     <a:lnB w="12700" cmpd="sng">
@@ -3567,12 +4264,12 @@
                     <a:lstStyle/>
                     <a:p>
                       <a:r>
-                        <a:rPr lang="de-DE" u="none">
+                        <a:rPr lang="de-DE" dirty="0">
                           <a:solidFill>
                             <a:schemeClr val="tx1"/>
                           </a:solidFill>
                         </a:rPr>
-                        <a:t>Shift + Hashtag (#) / 2</a:t>
+                        <a:t>17 – 20 ?</a:t>
                       </a:r>
                     </a:p>
                   </a:txBody>
@@ -3583,7 +4280,7 @@
                     <a:lnR w="12700" cmpd="sng">
                       <a:noFill/>
                     </a:lnR>
-                    <a:lnT w="12700" cmpd="sng">
+                    <a:lnT w="38100" cmpd="sng">
                       <a:noFill/>
                     </a:lnT>
                     <a:lnB w="12700" cmpd="sng">
@@ -3606,12 +4303,12 @@
                     <a:lstStyle/>
                     <a:p>
                       <a:r>
-                        <a:rPr lang="de-DE" u="none">
+                        <a:rPr lang="de-DE" dirty="0">
                           <a:solidFill>
                             <a:schemeClr val="tx1"/>
                           </a:solidFill>
                         </a:rPr>
-                        <a:t>' "</a:t>
+                        <a:t>IDE, Befehle, Variablen, Datentypen und Operationen</a:t>
                       </a:r>
                     </a:p>
                   </a:txBody>
@@ -3622,7 +4319,7 @@
                     <a:lnR w="12700" cmpd="sng">
                       <a:noFill/>
                     </a:lnR>
-                    <a:lnT w="12700" cmpd="sng">
+                    <a:lnT w="38100" cmpd="sng">
                       <a:noFill/>
                     </a:lnT>
                     <a:lnB w="12700" cmpd="sng">
@@ -3641,23 +4338,24 @@
                 </a:tc>
                 <a:extLst>
                   <a:ext uri="{0D108BD9-81ED-4DB2-BD59-A6C34878D82A}">
-                    <a16:rowId xmlns:a16="http://schemas.microsoft.com/office/drawing/2014/main" val="735349028"/>
+                    <a16:rowId xmlns:a16="http://schemas.microsoft.com/office/drawing/2014/main" val="2519105199"/>
                   </a:ext>
                 </a:extLst>
               </a:tr>
-              <a:tr h="436563">
+              <a:tr h="370840">
                 <a:tc>
                   <a:txBody>
                     <a:bodyPr/>
                     <a:lstStyle/>
                     <a:p>
+                      <a:pPr algn="r"/>
                       <a:r>
-                        <a:rPr lang="de-DE" u="none">
+                        <a:rPr lang="de-DE" dirty="0">
                           <a:solidFill>
                             <a:schemeClr val="tx1"/>
                           </a:solidFill>
                         </a:rPr>
-                        <a:t>Runde Klammern</a:t>
+                        <a:t>2</a:t>
                       </a:r>
                     </a:p>
                   </a:txBody>
@@ -3691,152 +4389,12 @@
                     <a:lstStyle/>
                     <a:p>
                       <a:r>
-                        <a:rPr lang="de-DE" u="none">
+                        <a:rPr lang="de-DE" dirty="0">
                           <a:solidFill>
                             <a:schemeClr val="tx1"/>
                           </a:solidFill>
                         </a:rPr>
-                        <a:t>Shift + 8/9</a:t>
-                      </a:r>
-                    </a:p>
-                  </a:txBody>
-                  <a:tcPr>
-                    <a:lnL w="12700" cmpd="sng">
-                      <a:noFill/>
-                    </a:lnL>
-                    <a:lnR w="12700" cmpd="sng">
-                      <a:noFill/>
-                    </a:lnR>
-                    <a:lnT w="12700" cmpd="sng">
-                      <a:noFill/>
-                    </a:lnT>
-                    <a:lnB w="12700" cmpd="sng">
-                      <a:noFill/>
-                    </a:lnB>
-                    <a:lnTlToBr w="12700" cmpd="sng">
-                      <a:noFill/>
-                      <a:prstDash val="solid"/>
-                    </a:lnTlToBr>
-                    <a:lnBlToTr w="12700" cmpd="sng">
-                      <a:noFill/>
-                      <a:prstDash val="solid"/>
-                    </a:lnBlToTr>
-                    <a:noFill/>
-                  </a:tcPr>
-                </a:tc>
-                <a:tc>
-                  <a:txBody>
-                    <a:bodyPr/>
-                    <a:lstStyle/>
-                    <a:p>
-                      <a:r>
-                        <a:rPr lang="de-DE" u="none">
-                          <a:solidFill>
-                            <a:schemeClr val="tx1"/>
-                          </a:solidFill>
-                        </a:rPr>
-                        <a:t>()</a:t>
-                      </a:r>
-                    </a:p>
-                  </a:txBody>
-                  <a:tcPr>
-                    <a:lnL w="12700" cmpd="sng">
-                      <a:noFill/>
-                    </a:lnL>
-                    <a:lnR w="12700" cmpd="sng">
-                      <a:noFill/>
-                    </a:lnR>
-                    <a:lnT w="12700" cmpd="sng">
-                      <a:noFill/>
-                    </a:lnT>
-                    <a:lnB w="12700" cmpd="sng">
-                      <a:noFill/>
-                    </a:lnB>
-                    <a:lnTlToBr w="12700" cmpd="sng">
-                      <a:noFill/>
-                      <a:prstDash val="solid"/>
-                    </a:lnTlToBr>
-                    <a:lnBlToTr w="12700" cmpd="sng">
-                      <a:noFill/>
-                      <a:prstDash val="solid"/>
-                    </a:lnBlToTr>
-                    <a:noFill/>
-                  </a:tcPr>
-                </a:tc>
-                <a:extLst>
-                  <a:ext uri="{0D108BD9-81ED-4DB2-BD59-A6C34878D82A}">
-                    <a16:rowId xmlns:a16="http://schemas.microsoft.com/office/drawing/2014/main" val="1753339480"/>
-                  </a:ext>
-                </a:extLst>
-              </a:tr>
-              <a:tr h="436563">
-                <a:tc>
-                  <a:txBody>
-                    <a:bodyPr/>
-                    <a:lstStyle/>
-                    <a:p>
-                      <a:r>
-                        <a:rPr lang="de-DE" u="none">
-                          <a:solidFill>
-                            <a:schemeClr val="tx1"/>
-                          </a:solidFill>
-                        </a:rPr>
-                        <a:t>Eckige Klammern</a:t>
-                      </a:r>
-                    </a:p>
-                  </a:txBody>
-                  <a:tcPr>
-                    <a:lnL w="12700" cmpd="sng">
-                      <a:noFill/>
-                    </a:lnL>
-                    <a:lnR w="12700" cmpd="sng">
-                      <a:noFill/>
-                    </a:lnR>
-                    <a:lnT w="12700" cmpd="sng">
-                      <a:noFill/>
-                    </a:lnT>
-                    <a:lnB w="12700" cmpd="sng">
-                      <a:noFill/>
-                    </a:lnB>
-                    <a:lnTlToBr w="12700" cmpd="sng">
-                      <a:noFill/>
-                      <a:prstDash val="solid"/>
-                    </a:lnTlToBr>
-                    <a:lnBlToTr w="12700" cmpd="sng">
-                      <a:noFill/>
-                      <a:prstDash val="solid"/>
-                    </a:lnBlToTr>
-                    <a:noFill/>
-                  </a:tcPr>
-                </a:tc>
-                <a:tc>
-                  <a:txBody>
-                    <a:bodyPr/>
-                    <a:lstStyle/>
-                    <a:p>
-                      <a:r>
-                        <a:rPr lang="de-DE" u="none">
-                          <a:solidFill>
-                            <a:schemeClr val="tx1"/>
-                          </a:solidFill>
-                        </a:rPr>
-                        <a:t>Alt </a:t>
-                      </a:r>
-                      <a:r>
-                        <a:rPr lang="de-DE" u="none" err="1">
-                          <a:solidFill>
-                            <a:schemeClr val="tx1"/>
-                          </a:solidFill>
-                        </a:rPr>
-                        <a:t>Gr</a:t>
-                      </a:r>
-                      <a:r>
-                        <a:rPr lang="de-DE" u="none">
-                          <a:solidFill>
-                            <a:schemeClr val="tx1"/>
-                          </a:solidFill>
-                        </a:rPr>
-                        <a:t> + 8/9</a:t>
+                        <a:t>Samstag, 21.2.</a:t>
                       </a:r>
                     </a:p>
                   </a:txBody>
@@ -3887,58 +4445,12 @@
                         <a:defRPr/>
                       </a:pPr>
                       <a:r>
-                        <a:rPr lang="de-DE" u="none">
+                        <a:rPr lang="de-DE" dirty="0">
                           <a:solidFill>
                             <a:schemeClr val="tx1"/>
                           </a:solidFill>
                         </a:rPr>
-                        <a:t>[]</a:t>
-                      </a:r>
-                    </a:p>
-                  </a:txBody>
-                  <a:tcPr>
-                    <a:lnL w="12700" cmpd="sng">
-                      <a:noFill/>
-                    </a:lnL>
-                    <a:lnR w="12700" cmpd="sng">
-                      <a:noFill/>
-                    </a:lnR>
-                    <a:lnT w="12700" cmpd="sng">
-                      <a:noFill/>
-                    </a:lnT>
-                    <a:lnB w="12700" cmpd="sng">
-                      <a:noFill/>
-                    </a:lnB>
-                    <a:lnTlToBr w="12700" cmpd="sng">
-                      <a:noFill/>
-                      <a:prstDash val="solid"/>
-                    </a:lnTlToBr>
-                    <a:lnBlToTr w="12700" cmpd="sng">
-                      <a:noFill/>
-                      <a:prstDash val="solid"/>
-                    </a:lnBlToTr>
-                    <a:noFill/>
-                  </a:tcPr>
-                </a:tc>
-                <a:extLst>
-                  <a:ext uri="{0D108BD9-81ED-4DB2-BD59-A6C34878D82A}">
-                    <a16:rowId xmlns:a16="http://schemas.microsoft.com/office/drawing/2014/main" val="4070795586"/>
-                  </a:ext>
-                </a:extLst>
-              </a:tr>
-              <a:tr h="436563">
-                <a:tc>
-                  <a:txBody>
-                    <a:bodyPr/>
-                    <a:lstStyle/>
-                    <a:p>
-                      <a:r>
-                        <a:rPr lang="de-DE" u="none">
-                          <a:solidFill>
-                            <a:schemeClr val="tx1"/>
-                          </a:solidFill>
-                        </a:rPr>
-                        <a:t>Geschweifte Klammern</a:t>
+                        <a:t>10 – 14</a:t>
                       </a:r>
                     </a:p>
                   </a:txBody>
@@ -3972,28 +4484,115 @@
                     <a:lstStyle/>
                     <a:p>
                       <a:r>
-                        <a:rPr lang="de-DE" u="none">
+                        <a:rPr lang="de-DE" dirty="0">
                           <a:solidFill>
                             <a:schemeClr val="tx1"/>
                           </a:solidFill>
                         </a:rPr>
-                        <a:t>Alt </a:t>
+                        <a:t>Mengen und Abbildungen, Klassen und Methoden, Kontrollfluss</a:t>
                       </a:r>
+                    </a:p>
+                  </a:txBody>
+                  <a:tcPr>
+                    <a:lnL w="12700" cmpd="sng">
+                      <a:noFill/>
+                    </a:lnL>
+                    <a:lnR w="12700" cmpd="sng">
+                      <a:noFill/>
+                    </a:lnR>
+                    <a:lnT w="12700" cmpd="sng">
+                      <a:noFill/>
+                    </a:lnT>
+                    <a:lnB w="12700" cmpd="sng">
+                      <a:noFill/>
+                    </a:lnB>
+                    <a:lnTlToBr w="12700" cmpd="sng">
+                      <a:noFill/>
+                      <a:prstDash val="solid"/>
+                    </a:lnTlToBr>
+                    <a:lnBlToTr w="12700" cmpd="sng">
+                      <a:noFill/>
+                      <a:prstDash val="solid"/>
+                    </a:lnBlToTr>
+                    <a:noFill/>
+                  </a:tcPr>
+                </a:tc>
+                <a:extLst>
+                  <a:ext uri="{0D108BD9-81ED-4DB2-BD59-A6C34878D82A}">
+                    <a16:rowId xmlns:a16="http://schemas.microsoft.com/office/drawing/2014/main" val="2427232611"/>
+                  </a:ext>
+                </a:extLst>
+              </a:tr>
+              <a:tr h="370840">
+                <a:tc>
+                  <a:txBody>
+                    <a:bodyPr/>
+                    <a:lstStyle/>
+                    <a:p>
+                      <a:pPr algn="r"/>
                       <a:r>
-                        <a:rPr lang="de-DE" u="none" err="1">
+                        <a:rPr lang="de-DE" dirty="0">
                           <a:solidFill>
                             <a:schemeClr val="tx1"/>
                           </a:solidFill>
                         </a:rPr>
-                        <a:t>Gr</a:t>
+                        <a:t>3</a:t>
                       </a:r>
+                    </a:p>
+                  </a:txBody>
+                  <a:tcPr>
+                    <a:lnL w="12700" cmpd="sng">
+                      <a:noFill/>
+                    </a:lnL>
+                    <a:lnR w="12700" cmpd="sng">
+                      <a:noFill/>
+                    </a:lnR>
+                    <a:lnT w="12700" cmpd="sng">
+                      <a:noFill/>
+                    </a:lnT>
+                    <a:lnB w="12700" cmpd="sng">
+                      <a:noFill/>
+                    </a:lnB>
+                    <a:lnTlToBr w="12700" cmpd="sng">
+                      <a:noFill/>
+                      <a:prstDash val="solid"/>
+                    </a:lnTlToBr>
+                    <a:lnBlToTr w="12700" cmpd="sng">
+                      <a:noFill/>
+                      <a:prstDash val="solid"/>
+                    </a:lnBlToTr>
+                    <a:noFill/>
+                  </a:tcPr>
+                </a:tc>
+                <a:tc>
+                  <a:txBody>
+                    <a:bodyPr/>
+                    <a:lstStyle/>
+                    <a:p>
+                      <a:pPr marL="0" marR="0" lvl="0" indent="0" algn="l" defTabSz="914400" rtl="0" eaLnBrk="1" fontAlgn="auto" latinLnBrk="0" hangingPunct="1">
+                        <a:lnSpc>
+                          <a:spcPct val="100000"/>
+                        </a:lnSpc>
+                        <a:spcBef>
+                          <a:spcPts val="0"/>
+                        </a:spcBef>
+                        <a:spcAft>
+                          <a:spcPts val="0"/>
+                        </a:spcAft>
+                        <a:buClrTx/>
+                        <a:buSzTx/>
+                        <a:buFontTx/>
+                        <a:buNone/>
+                        <a:tabLst/>
+                        <a:defRPr/>
+                      </a:pPr>
                       <a:r>
-                        <a:rPr lang="de-DE" u="none">
+                        <a:rPr lang="de-DE" dirty="0">
                           <a:solidFill>
                             <a:schemeClr val="tx1"/>
                           </a:solidFill>
                         </a:rPr>
-                        <a:t> + 7/0</a:t>
+                        <a:t>Freitag, 27.2.</a:t>
                       </a:r>
                     </a:p>
                   </a:txBody>
@@ -4027,58 +4626,12 @@
                     <a:lstStyle/>
                     <a:p>
                       <a:r>
-                        <a:rPr lang="de-DE" u="none">
+                        <a:rPr lang="de-DE" dirty="0">
                           <a:solidFill>
                             <a:schemeClr val="tx1"/>
                           </a:solidFill>
                         </a:rPr>
-                        <a:t>{}</a:t>
-                      </a:r>
-                    </a:p>
-                  </a:txBody>
-                  <a:tcPr>
-                    <a:lnL w="12700" cmpd="sng">
-                      <a:noFill/>
-                    </a:lnL>
-                    <a:lnR w="12700" cmpd="sng">
-                      <a:noFill/>
-                    </a:lnR>
-                    <a:lnT w="12700" cmpd="sng">
-                      <a:noFill/>
-                    </a:lnT>
-                    <a:lnB w="12700" cmpd="sng">
-                      <a:noFill/>
-                    </a:lnB>
-                    <a:lnTlToBr w="12700" cmpd="sng">
-                      <a:noFill/>
-                      <a:prstDash val="solid"/>
-                    </a:lnTlToBr>
-                    <a:lnBlToTr w="12700" cmpd="sng">
-                      <a:noFill/>
-                      <a:prstDash val="solid"/>
-                    </a:lnBlToTr>
-                    <a:noFill/>
-                  </a:tcPr>
-                </a:tc>
-                <a:extLst>
-                  <a:ext uri="{0D108BD9-81ED-4DB2-BD59-A6C34878D82A}">
-                    <a16:rowId xmlns:a16="http://schemas.microsoft.com/office/drawing/2014/main" val="3524437853"/>
-                  </a:ext>
-                </a:extLst>
-              </a:tr>
-              <a:tr h="436563">
-                <a:tc>
-                  <a:txBody>
-                    <a:bodyPr/>
-                    <a:lstStyle/>
-                    <a:p>
-                      <a:r>
-                        <a:rPr lang="de-DE" u="none">
-                          <a:solidFill>
-                            <a:schemeClr val="tx1"/>
-                          </a:solidFill>
-                        </a:rPr>
-                        <a:t>Ausrufe/Fragezeichen</a:t>
+                        <a:t>17 – 20 ?</a:t>
                       </a:r>
                     </a:p>
                   </a:txBody>
@@ -4112,12 +4665,171 @@
                     <a:lstStyle/>
                     <a:p>
                       <a:r>
-                        <a:rPr lang="de-DE" u="none">
+                        <a:rPr lang="de-DE" dirty="0">
                           <a:solidFill>
                             <a:schemeClr val="tx1"/>
                           </a:solidFill>
                         </a:rPr>
-                        <a:t>Shift + 1/ß</a:t>
+                        <a:t>Induktion und Rekursion, Datenstrukturen und Algorithmen</a:t>
+                      </a:r>
+                    </a:p>
+                  </a:txBody>
+                  <a:tcPr>
+                    <a:lnL w="12700" cmpd="sng">
+                      <a:noFill/>
+                    </a:lnL>
+                    <a:lnR w="12700" cmpd="sng">
+                      <a:noFill/>
+                    </a:lnR>
+                    <a:lnT w="12700" cmpd="sng">
+                      <a:noFill/>
+                    </a:lnT>
+                    <a:lnB w="12700" cmpd="sng">
+                      <a:noFill/>
+                    </a:lnB>
+                    <a:lnTlToBr w="12700" cmpd="sng">
+                      <a:noFill/>
+                      <a:prstDash val="solid"/>
+                    </a:lnTlToBr>
+                    <a:lnBlToTr w="12700" cmpd="sng">
+                      <a:noFill/>
+                      <a:prstDash val="solid"/>
+                    </a:lnBlToTr>
+                    <a:noFill/>
+                  </a:tcPr>
+                </a:tc>
+                <a:extLst>
+                  <a:ext uri="{0D108BD9-81ED-4DB2-BD59-A6C34878D82A}">
+                    <a16:rowId xmlns:a16="http://schemas.microsoft.com/office/drawing/2014/main" val="1580541138"/>
+                  </a:ext>
+                </a:extLst>
+              </a:tr>
+              <a:tr h="370840">
+                <a:tc>
+                  <a:txBody>
+                    <a:bodyPr/>
+                    <a:lstStyle/>
+                    <a:p>
+                      <a:pPr algn="r"/>
+                      <a:r>
+                        <a:rPr lang="de-DE" dirty="0">
+                          <a:solidFill>
+                            <a:schemeClr val="tx1"/>
+                          </a:solidFill>
+                        </a:rPr>
+                        <a:t>4</a:t>
+                      </a:r>
+                    </a:p>
+                  </a:txBody>
+                  <a:tcPr>
+                    <a:lnL w="12700" cmpd="sng">
+                      <a:noFill/>
+                    </a:lnL>
+                    <a:lnR w="12700" cmpd="sng">
+                      <a:noFill/>
+                    </a:lnR>
+                    <a:lnT w="12700" cmpd="sng">
+                      <a:noFill/>
+                    </a:lnT>
+                    <a:lnB w="12700" cmpd="sng">
+                      <a:noFill/>
+                    </a:lnB>
+                    <a:lnTlToBr w="12700" cmpd="sng">
+                      <a:noFill/>
+                      <a:prstDash val="solid"/>
+                    </a:lnTlToBr>
+                    <a:lnBlToTr w="12700" cmpd="sng">
+                      <a:noFill/>
+                      <a:prstDash val="solid"/>
+                    </a:lnBlToTr>
+                    <a:noFill/>
+                  </a:tcPr>
+                </a:tc>
+                <a:tc>
+                  <a:txBody>
+                    <a:bodyPr/>
+                    <a:lstStyle/>
+                    <a:p>
+                      <a:pPr marL="0" marR="0" lvl="0" indent="0" algn="l" defTabSz="914400" rtl="0" eaLnBrk="1" fontAlgn="auto" latinLnBrk="0" hangingPunct="1">
+                        <a:lnSpc>
+                          <a:spcPct val="100000"/>
+                        </a:lnSpc>
+                        <a:spcBef>
+                          <a:spcPts val="0"/>
+                        </a:spcBef>
+                        <a:spcAft>
+                          <a:spcPts val="0"/>
+                        </a:spcAft>
+                        <a:buClrTx/>
+                        <a:buSzTx/>
+                        <a:buFontTx/>
+                        <a:buNone/>
+                        <a:tabLst/>
+                        <a:defRPr/>
+                      </a:pPr>
+                      <a:r>
+                        <a:rPr lang="de-DE" dirty="0">
+                          <a:solidFill>
+                            <a:schemeClr val="tx1"/>
+                          </a:solidFill>
+                        </a:rPr>
+                        <a:t>Samstag, 28.2.</a:t>
+                      </a:r>
+                    </a:p>
+                  </a:txBody>
+                  <a:tcPr>
+                    <a:lnL w="12700" cmpd="sng">
+                      <a:noFill/>
+                    </a:lnL>
+                    <a:lnR w="12700" cmpd="sng">
+                      <a:noFill/>
+                    </a:lnR>
+                    <a:lnT w="12700" cmpd="sng">
+                      <a:noFill/>
+                    </a:lnT>
+                    <a:lnB w="12700" cmpd="sng">
+                      <a:noFill/>
+                    </a:lnB>
+                    <a:lnTlToBr w="12700" cmpd="sng">
+                      <a:noFill/>
+                      <a:prstDash val="solid"/>
+                    </a:lnTlToBr>
+                    <a:lnBlToTr w="12700" cmpd="sng">
+                      <a:noFill/>
+                      <a:prstDash val="solid"/>
+                    </a:lnBlToTr>
+                    <a:noFill/>
+                  </a:tcPr>
+                </a:tc>
+                <a:tc>
+                  <a:txBody>
+                    <a:bodyPr/>
+                    <a:lstStyle/>
+                    <a:p>
+                      <a:pPr marL="0" marR="0" lvl="0" indent="0" algn="l" defTabSz="914400" rtl="0" eaLnBrk="1" fontAlgn="auto" latinLnBrk="0" hangingPunct="1">
+                        <a:lnSpc>
+                          <a:spcPct val="100000"/>
+                        </a:lnSpc>
+                        <a:spcBef>
+                          <a:spcPts val="0"/>
+                        </a:spcBef>
+                        <a:spcAft>
+                          <a:spcPts val="0"/>
+                        </a:spcAft>
+                        <a:buClrTx/>
+                        <a:buSzTx/>
+                        <a:buFontTx/>
+                        <a:buNone/>
+                        <a:tabLst/>
+                        <a:defRPr/>
+                      </a:pPr>
+                      <a:r>
+                        <a:rPr lang="de-DE" dirty="0">
+                          <a:solidFill>
+                            <a:schemeClr val="tx1"/>
+                          </a:solidFill>
+                        </a:rPr>
+                        <a:t>10 – 14</a:t>
                       </a:r>
                     </a:p>
                   </a:txBody>
@@ -4151,12 +4863,28 @@
                     <a:lstStyle/>
                     <a:p>
                       <a:r>
-                        <a:rPr lang="de-DE" u="none">
+                        <a:rPr lang="de-DE" dirty="0">
                           <a:solidFill>
                             <a:schemeClr val="tx1"/>
                           </a:solidFill>
                         </a:rPr>
-                        <a:t>! ?</a:t>
+                        <a:t>Paradigmen, </a:t>
+                      </a:r>
+                      <a:r>
+                        <a:rPr lang="de-DE" dirty="0" err="1">
+                          <a:solidFill>
+                            <a:schemeClr val="tx1"/>
+                          </a:solidFill>
+                        </a:rPr>
+                        <a:t>Generics</a:t>
+                      </a:r>
+                      <a:r>
+                        <a:rPr lang="de-DE" dirty="0">
+                          <a:solidFill>
+                            <a:schemeClr val="tx1"/>
+                          </a:solidFill>
+                        </a:rPr>
+                        <a:t>, Modellierung</a:t>
                       </a:r>
                     </a:p>
                   </a:txBody>
@@ -4186,23 +4914,80 @@
                 </a:tc>
                 <a:extLst>
                   <a:ext uri="{0D108BD9-81ED-4DB2-BD59-A6C34878D82A}">
-                    <a16:rowId xmlns:a16="http://schemas.microsoft.com/office/drawing/2014/main" val="2223904026"/>
+                    <a16:rowId xmlns:a16="http://schemas.microsoft.com/office/drawing/2014/main" val="913507237"/>
                   </a:ext>
                 </a:extLst>
               </a:tr>
-              <a:tr h="436563">
+              <a:tr h="370840">
                 <a:tc>
                   <a:txBody>
                     <a:bodyPr/>
                     <a:lstStyle/>
                     <a:p>
+                      <a:pPr algn="r"/>
                       <a:r>
-                        <a:rPr lang="de-DE" u="none">
+                        <a:rPr lang="de-DE" dirty="0">
                           <a:solidFill>
                             <a:schemeClr val="tx1"/>
                           </a:solidFill>
                         </a:rPr>
-                        <a:t>Und, Gleich</a:t>
+                        <a:t>5</a:t>
+                      </a:r>
+                    </a:p>
+                  </a:txBody>
+                  <a:tcPr>
+                    <a:lnL w="12700" cmpd="sng">
+                      <a:noFill/>
+                    </a:lnL>
+                    <a:lnR w="12700" cmpd="sng">
+                      <a:noFill/>
+                    </a:lnR>
+                    <a:lnT w="12700" cmpd="sng">
+                      <a:noFill/>
+                    </a:lnT>
+                    <a:lnB w="12700" cmpd="sng">
+                      <a:noFill/>
+                    </a:lnB>
+                    <a:lnTlToBr w="12700" cmpd="sng">
+                      <a:noFill/>
+                      <a:prstDash val="solid"/>
+                    </a:lnTlToBr>
+                    <a:lnBlToTr w="12700" cmpd="sng">
+                      <a:noFill/>
+                      <a:prstDash val="solid"/>
+                    </a:lnBlToTr>
+                    <a:noFill/>
+                  </a:tcPr>
+                </a:tc>
+                <a:tc>
+                  <a:txBody>
+                    <a:bodyPr/>
+                    <a:lstStyle/>
+                    <a:p>
+                      <a:pPr marL="0" marR="0" lvl="0" indent="0" algn="l" defTabSz="914400" rtl="0" eaLnBrk="1" fontAlgn="auto" latinLnBrk="0" hangingPunct="1">
+                        <a:lnSpc>
+                          <a:spcPct val="100000"/>
+                        </a:lnSpc>
+                        <a:spcBef>
+                          <a:spcPts val="0"/>
+                        </a:spcBef>
+                        <a:spcAft>
+                          <a:spcPts val="0"/>
+                        </a:spcAft>
+                        <a:buClrTx/>
+                        <a:buSzTx/>
+                        <a:buFontTx/>
+                        <a:buNone/>
+                        <a:tabLst/>
+                        <a:defRPr/>
+                      </a:pPr>
+                      <a:r>
+                        <a:rPr lang="de-DE" dirty="0">
+                          <a:solidFill>
+                            <a:schemeClr val="tx1"/>
+                          </a:solidFill>
+                        </a:rPr>
+                        <a:t>Freitag, 6.3.</a:t>
                       </a:r>
                     </a:p>
                   </a:txBody>
@@ -4236,12 +5021,12 @@
                     <a:lstStyle/>
                     <a:p>
                       <a:r>
-                        <a:rPr lang="de-DE" u="none">
+                        <a:rPr lang="de-DE" dirty="0">
                           <a:solidFill>
                             <a:schemeClr val="tx1"/>
                           </a:solidFill>
                         </a:rPr>
-                        <a:t>Shift + 6/0</a:t>
+                        <a:t>17 – 20 ?</a:t>
                       </a:r>
                     </a:p>
                   </a:txBody>
@@ -4275,12 +5060,12 @@
                     <a:lstStyle/>
                     <a:p>
                       <a:r>
-                        <a:rPr lang="de-DE" u="none">
+                        <a:rPr lang="de-DE" dirty="0">
                           <a:solidFill>
                             <a:schemeClr val="tx1"/>
                           </a:solidFill>
                         </a:rPr>
-                        <a:t>&amp; =</a:t>
+                        <a:t>Koordinatensysteme, Vektorrechnung, Eingabe/Ausgabe, Rendering (alles 2D)</a:t>
                       </a:r>
                     </a:p>
                   </a:txBody>
@@ -4310,23 +5095,136 @@
                 </a:tc>
                 <a:extLst>
                   <a:ext uri="{0D108BD9-81ED-4DB2-BD59-A6C34878D82A}">
-                    <a16:rowId xmlns:a16="http://schemas.microsoft.com/office/drawing/2014/main" val="2046807540"/>
+                    <a16:rowId xmlns:a16="http://schemas.microsoft.com/office/drawing/2014/main" val="3430108571"/>
                   </a:ext>
                 </a:extLst>
               </a:tr>
-              <a:tr h="436563">
+              <a:tr h="370840">
                 <a:tc>
                   <a:txBody>
                     <a:bodyPr/>
                     <a:lstStyle/>
                     <a:p>
+                      <a:pPr algn="r"/>
                       <a:r>
-                        <a:rPr lang="de-DE" u="none">
+                        <a:rPr lang="de-DE" dirty="0">
                           <a:solidFill>
                             <a:schemeClr val="tx1"/>
                           </a:solidFill>
                         </a:rPr>
-                        <a:t>Senkrechter Strich</a:t>
+                        <a:t>6</a:t>
+                      </a:r>
+                    </a:p>
+                  </a:txBody>
+                  <a:tcPr>
+                    <a:lnL w="12700" cmpd="sng">
+                      <a:noFill/>
+                    </a:lnL>
+                    <a:lnR w="12700" cmpd="sng">
+                      <a:noFill/>
+                    </a:lnR>
+                    <a:lnT w="12700" cmpd="sng">
+                      <a:noFill/>
+                    </a:lnT>
+                    <a:lnB w="12700" cmpd="sng">
+                      <a:noFill/>
+                    </a:lnB>
+                    <a:lnTlToBr w="12700" cmpd="sng">
+                      <a:noFill/>
+                      <a:prstDash val="solid"/>
+                    </a:lnTlToBr>
+                    <a:lnBlToTr w="12700" cmpd="sng">
+                      <a:noFill/>
+                      <a:prstDash val="solid"/>
+                    </a:lnBlToTr>
+                    <a:noFill/>
+                  </a:tcPr>
+                </a:tc>
+                <a:tc>
+                  <a:txBody>
+                    <a:bodyPr/>
+                    <a:lstStyle/>
+                    <a:p>
+                      <a:pPr marL="0" marR="0" lvl="0" indent="0" algn="l" defTabSz="914400" rtl="0" eaLnBrk="1" fontAlgn="auto" latinLnBrk="0" hangingPunct="1">
+                        <a:lnSpc>
+                          <a:spcPct val="100000"/>
+                        </a:lnSpc>
+                        <a:spcBef>
+                          <a:spcPts val="0"/>
+                        </a:spcBef>
+                        <a:spcAft>
+                          <a:spcPts val="0"/>
+                        </a:spcAft>
+                        <a:buClrTx/>
+                        <a:buSzTx/>
+                        <a:buFontTx/>
+                        <a:buNone/>
+                        <a:tabLst/>
+                        <a:defRPr/>
+                      </a:pPr>
+                      <a:r>
+                        <a:rPr lang="de-DE" dirty="0">
+                          <a:solidFill>
+                            <a:schemeClr val="tx1"/>
+                          </a:solidFill>
+                        </a:rPr>
+                        <a:t>Samstag, 7.3.</a:t>
+                      </a:r>
+                    </a:p>
+                  </a:txBody>
+                  <a:tcPr>
+                    <a:lnL w="12700" cmpd="sng">
+                      <a:noFill/>
+                    </a:lnL>
+                    <a:lnR w="12700" cmpd="sng">
+                      <a:noFill/>
+                    </a:lnR>
+                    <a:lnT w="12700" cmpd="sng">
+                      <a:noFill/>
+                    </a:lnT>
+                    <a:lnB w="12700" cmpd="sng">
+                      <a:noFill/>
+                    </a:lnB>
+                    <a:lnTlToBr w="12700" cmpd="sng">
+                      <a:noFill/>
+                      <a:prstDash val="solid"/>
+                    </a:lnTlToBr>
+                    <a:lnBlToTr w="12700" cmpd="sng">
+                      <a:noFill/>
+                      <a:prstDash val="solid"/>
+                    </a:lnBlToTr>
+                    <a:noFill/>
+                  </a:tcPr>
+                </a:tc>
+                <a:tc>
+                  <a:txBody>
+                    <a:bodyPr/>
+                    <a:lstStyle/>
+                    <a:p>
+                      <a:pPr marL="0" marR="0" lvl="0" indent="0" algn="l" defTabSz="914400" rtl="0" eaLnBrk="1" fontAlgn="auto" latinLnBrk="0" hangingPunct="1">
+                        <a:lnSpc>
+                          <a:spcPct val="100000"/>
+                        </a:lnSpc>
+                        <a:spcBef>
+                          <a:spcPts val="0"/>
+                        </a:spcBef>
+                        <a:spcAft>
+                          <a:spcPts val="0"/>
+                        </a:spcAft>
+                        <a:buClrTx/>
+                        <a:buSzTx/>
+                        <a:buFontTx/>
+                        <a:buNone/>
+                        <a:tabLst/>
+                        <a:defRPr/>
+                      </a:pPr>
+                      <a:r>
+                        <a:rPr lang="de-DE" dirty="0">
+                          <a:solidFill>
+                            <a:schemeClr val="tx1"/>
+                          </a:solidFill>
+                        </a:rPr>
+                        <a:t>10 – 14</a:t>
                       </a:r>
                     </a:p>
                   </a:txBody>
@@ -4360,28 +5258,115 @@
                     <a:lstStyle/>
                     <a:p>
                       <a:r>
-                        <a:rPr lang="de-DE" u="none">
+                        <a:rPr lang="de-DE" dirty="0">
                           <a:solidFill>
                             <a:schemeClr val="tx1"/>
                           </a:solidFill>
                         </a:rPr>
-                        <a:t>Alt </a:t>
+                        <a:t>Implementation eines erweiterbaren Open World Spiels</a:t>
                       </a:r>
+                    </a:p>
+                  </a:txBody>
+                  <a:tcPr>
+                    <a:lnL w="12700" cmpd="sng">
+                      <a:noFill/>
+                    </a:lnL>
+                    <a:lnR w="12700" cmpd="sng">
+                      <a:noFill/>
+                    </a:lnR>
+                    <a:lnT w="12700" cmpd="sng">
+                      <a:noFill/>
+                    </a:lnT>
+                    <a:lnB w="12700" cmpd="sng">
+                      <a:noFill/>
+                    </a:lnB>
+                    <a:lnTlToBr w="12700" cmpd="sng">
+                      <a:noFill/>
+                      <a:prstDash val="solid"/>
+                    </a:lnTlToBr>
+                    <a:lnBlToTr w="12700" cmpd="sng">
+                      <a:noFill/>
+                      <a:prstDash val="solid"/>
+                    </a:lnBlToTr>
+                    <a:noFill/>
+                  </a:tcPr>
+                </a:tc>
+                <a:extLst>
+                  <a:ext uri="{0D108BD9-81ED-4DB2-BD59-A6C34878D82A}">
+                    <a16:rowId xmlns:a16="http://schemas.microsoft.com/office/drawing/2014/main" val="624401219"/>
+                  </a:ext>
+                </a:extLst>
+              </a:tr>
+              <a:tr h="370840">
+                <a:tc>
+                  <a:txBody>
+                    <a:bodyPr/>
+                    <a:lstStyle/>
+                    <a:p>
+                      <a:pPr algn="r"/>
                       <a:r>
-                        <a:rPr lang="de-DE" u="none" err="1">
+                        <a:rPr lang="de-DE" dirty="0">
                           <a:solidFill>
                             <a:schemeClr val="tx1"/>
                           </a:solidFill>
                         </a:rPr>
-                        <a:t>Gr</a:t>
+                        <a:t>7</a:t>
                       </a:r>
+                    </a:p>
+                  </a:txBody>
+                  <a:tcPr>
+                    <a:lnL w="12700" cmpd="sng">
+                      <a:noFill/>
+                    </a:lnL>
+                    <a:lnR w="12700" cmpd="sng">
+                      <a:noFill/>
+                    </a:lnR>
+                    <a:lnT w="12700" cmpd="sng">
+                      <a:noFill/>
+                    </a:lnT>
+                    <a:lnB w="12700" cmpd="sng">
+                      <a:noFill/>
+                    </a:lnB>
+                    <a:lnTlToBr w="12700" cmpd="sng">
+                      <a:noFill/>
+                      <a:prstDash val="solid"/>
+                    </a:lnTlToBr>
+                    <a:lnBlToTr w="12700" cmpd="sng">
+                      <a:noFill/>
+                      <a:prstDash val="solid"/>
+                    </a:lnBlToTr>
+                    <a:noFill/>
+                  </a:tcPr>
+                </a:tc>
+                <a:tc>
+                  <a:txBody>
+                    <a:bodyPr/>
+                    <a:lstStyle/>
+                    <a:p>
+                      <a:pPr marL="0" marR="0" lvl="0" indent="0" algn="l" defTabSz="914400" rtl="0" eaLnBrk="1" fontAlgn="auto" latinLnBrk="0" hangingPunct="1">
+                        <a:lnSpc>
+                          <a:spcPct val="100000"/>
+                        </a:lnSpc>
+                        <a:spcBef>
+                          <a:spcPts val="0"/>
+                        </a:spcBef>
+                        <a:spcAft>
+                          <a:spcPts val="0"/>
+                        </a:spcAft>
+                        <a:buClrTx/>
+                        <a:buSzTx/>
+                        <a:buFontTx/>
+                        <a:buNone/>
+                        <a:tabLst/>
+                        <a:defRPr/>
+                      </a:pPr>
                       <a:r>
-                        <a:rPr lang="de-DE" u="none">
+                        <a:rPr lang="de-DE" dirty="0">
                           <a:solidFill>
                             <a:schemeClr val="tx1"/>
                           </a:solidFill>
                         </a:rPr>
-                        <a:t> + &lt;</a:t>
+                        <a:t>Freitag, 13.3.</a:t>
                       </a:r>
                     </a:p>
                   </a:txBody>
@@ -4415,12 +5400,61 @@
                     <a:lstStyle/>
                     <a:p>
                       <a:r>
-                        <a:rPr lang="de-DE" u="none">
+                        <a:rPr lang="de-DE" dirty="0">
                           <a:solidFill>
                             <a:schemeClr val="tx1"/>
                           </a:solidFill>
                         </a:rPr>
-                        <a:t>|</a:t>
+                        <a:t>17 – 20 ?</a:t>
+                      </a:r>
+                    </a:p>
+                  </a:txBody>
+                  <a:tcPr>
+                    <a:lnL w="12700" cmpd="sng">
+                      <a:noFill/>
+                    </a:lnL>
+                    <a:lnR w="12700" cmpd="sng">
+                      <a:noFill/>
+                    </a:lnR>
+                    <a:lnT w="12700" cmpd="sng">
+                      <a:noFill/>
+                    </a:lnT>
+                    <a:lnB w="12700" cmpd="sng">
+                      <a:noFill/>
+                    </a:lnB>
+                    <a:lnTlToBr w="12700" cmpd="sng">
+                      <a:noFill/>
+                      <a:prstDash val="solid"/>
+                    </a:lnTlToBr>
+                    <a:lnBlToTr w="12700" cmpd="sng">
+                      <a:noFill/>
+                      <a:prstDash val="solid"/>
+                    </a:lnBlToTr>
+                    <a:noFill/>
+                  </a:tcPr>
+                </a:tc>
+                <a:tc rowSpan="4">
+                  <a:txBody>
+                    <a:bodyPr/>
+                    <a:lstStyle/>
+                    <a:p>
+                      <a:r>
+                        <a:rPr lang="de-DE" dirty="0">
+                          <a:solidFill>
+                            <a:schemeClr val="tx1"/>
+                          </a:solidFill>
+                        </a:rPr>
+                        <a:t>Entwurf eines Entwicklungsplans</a:t>
+                      </a:r>
+                    </a:p>
+                    <a:p>
+                      <a:r>
+                        <a:rPr lang="de-DE" dirty="0">
+                          <a:solidFill>
+                            <a:schemeClr val="tx1"/>
+                          </a:solidFill>
+                        </a:rPr>
+                        <a:t>Wahl aus Sounds &amp; Musik, Text, UI, Android-Support, Partikel &amp; Animationen, Shader, Datenspeicherung, Metaprogression, Multiplayer, Sensoren, Physik und Kollisionen, prozedurale Generation, komplexere Spielmechaniken</a:t>
                       </a:r>
                     </a:p>
                   </a:txBody>
@@ -4450,23 +5484,24 @@
                 </a:tc>
                 <a:extLst>
                   <a:ext uri="{0D108BD9-81ED-4DB2-BD59-A6C34878D82A}">
-                    <a16:rowId xmlns:a16="http://schemas.microsoft.com/office/drawing/2014/main" val="4008067369"/>
+                    <a16:rowId xmlns:a16="http://schemas.microsoft.com/office/drawing/2014/main" val="2746507518"/>
                   </a:ext>
                 </a:extLst>
               </a:tr>
-              <a:tr h="436563">
+              <a:tr h="370840">
                 <a:tc>
                   <a:txBody>
                     <a:bodyPr/>
                     <a:lstStyle/>
                     <a:p>
+                      <a:pPr algn="r"/>
                       <a:r>
-                        <a:rPr lang="de-DE" u="none">
+                        <a:rPr lang="de-DE" dirty="0">
                           <a:solidFill>
                             <a:schemeClr val="tx1"/>
                           </a:solidFill>
                         </a:rPr>
-                        <a:t>Größer</a:t>
+                        <a:t>8</a:t>
                       </a:r>
                     </a:p>
                   </a:txBody>
@@ -4500,12 +5535,151 @@
                     <a:lstStyle/>
                     <a:p>
                       <a:r>
-                        <a:rPr lang="de-DE" u="none">
+                        <a:rPr lang="de-DE" dirty="0">
                           <a:solidFill>
                             <a:schemeClr val="tx1"/>
                           </a:solidFill>
                         </a:rPr>
-                        <a:t>Shift + &lt;</a:t>
+                        <a:t>Samstag, 14.3.</a:t>
+                      </a:r>
+                    </a:p>
+                  </a:txBody>
+                  <a:tcPr>
+                    <a:lnL w="12700" cmpd="sng">
+                      <a:noFill/>
+                    </a:lnL>
+                    <a:lnR w="12700" cmpd="sng">
+                      <a:noFill/>
+                    </a:lnR>
+                    <a:lnT w="12700" cmpd="sng">
+                      <a:noFill/>
+                    </a:lnT>
+                    <a:lnB w="12700" cmpd="sng">
+                      <a:noFill/>
+                    </a:lnB>
+                    <a:lnTlToBr w="12700" cmpd="sng">
+                      <a:noFill/>
+                      <a:prstDash val="solid"/>
+                    </a:lnTlToBr>
+                    <a:lnBlToTr w="12700" cmpd="sng">
+                      <a:noFill/>
+                      <a:prstDash val="solid"/>
+                    </a:lnBlToTr>
+                    <a:noFill/>
+                  </a:tcPr>
+                </a:tc>
+                <a:tc>
+                  <a:txBody>
+                    <a:bodyPr/>
+                    <a:lstStyle/>
+                    <a:p>
+                      <a:pPr marL="0" marR="0" lvl="0" indent="0" algn="l" defTabSz="914400" rtl="0" eaLnBrk="1" fontAlgn="auto" latinLnBrk="0" hangingPunct="1">
+                        <a:lnSpc>
+                          <a:spcPct val="100000"/>
+                        </a:lnSpc>
+                        <a:spcBef>
+                          <a:spcPts val="0"/>
+                        </a:spcBef>
+                        <a:spcAft>
+                          <a:spcPts val="0"/>
+                        </a:spcAft>
+                        <a:buClrTx/>
+                        <a:buSzTx/>
+                        <a:buFontTx/>
+                        <a:buNone/>
+                        <a:tabLst/>
+                        <a:defRPr/>
+                      </a:pPr>
+                      <a:r>
+                        <a:rPr lang="de-DE" dirty="0">
+                          <a:solidFill>
+                            <a:schemeClr val="tx1"/>
+                          </a:solidFill>
+                        </a:rPr>
+                        <a:t>10 – 14</a:t>
+                      </a:r>
+                    </a:p>
+                  </a:txBody>
+                  <a:tcPr>
+                    <a:lnL w="12700" cmpd="sng">
+                      <a:noFill/>
+                    </a:lnL>
+                    <a:lnR w="12700" cmpd="sng">
+                      <a:noFill/>
+                    </a:lnR>
+                    <a:lnT w="12700" cmpd="sng">
+                      <a:noFill/>
+                    </a:lnT>
+                    <a:lnB w="12700" cmpd="sng">
+                      <a:noFill/>
+                    </a:lnB>
+                    <a:lnTlToBr w="12700" cmpd="sng">
+                      <a:noFill/>
+                      <a:prstDash val="solid"/>
+                    </a:lnTlToBr>
+                    <a:lnBlToTr w="12700" cmpd="sng">
+                      <a:noFill/>
+                      <a:prstDash val="solid"/>
+                    </a:lnBlToTr>
+                    <a:noFill/>
+                  </a:tcPr>
+                </a:tc>
+                <a:tc vMerge="1">
+                  <a:txBody>
+                    <a:bodyPr/>
+                    <a:lstStyle/>
+                    <a:p>
+                      <a:endParaRPr lang="de-DE" dirty="0">
+                        <a:solidFill>
+                          <a:schemeClr val="tx1"/>
+                        </a:solidFill>
+                      </a:endParaRPr>
+                    </a:p>
+                  </a:txBody>
+                  <a:tcPr>
+                    <a:lnL w="12700" cmpd="sng">
+                      <a:noFill/>
+                    </a:lnL>
+                    <a:lnR w="12700" cmpd="sng">
+                      <a:noFill/>
+                    </a:lnR>
+                    <a:lnT w="12700" cmpd="sng">
+                      <a:noFill/>
+                    </a:lnT>
+                    <a:lnB w="12700" cmpd="sng">
+                      <a:noFill/>
+                    </a:lnB>
+                    <a:lnTlToBr w="12700" cmpd="sng">
+                      <a:noFill/>
+                      <a:prstDash val="solid"/>
+                    </a:lnTlToBr>
+                    <a:lnBlToTr w="12700" cmpd="sng">
+                      <a:noFill/>
+                      <a:prstDash val="solid"/>
+                    </a:lnBlToTr>
+                    <a:noFill/>
+                  </a:tcPr>
+                </a:tc>
+                <a:extLst>
+                  <a:ext uri="{0D108BD9-81ED-4DB2-BD59-A6C34878D82A}">
+                    <a16:rowId xmlns:a16="http://schemas.microsoft.com/office/drawing/2014/main" val="447745933"/>
+                  </a:ext>
+                </a:extLst>
+              </a:tr>
+              <a:tr h="370840">
+                <a:tc>
+                  <a:txBody>
+                    <a:bodyPr/>
+                    <a:lstStyle/>
+                    <a:p>
+                      <a:pPr algn="r"/>
+                      <a:r>
+                        <a:rPr lang="de-DE" dirty="0">
+                          <a:solidFill>
+                            <a:schemeClr val="tx1"/>
+                          </a:solidFill>
+                        </a:rPr>
+                        <a:t>9</a:t>
                       </a:r>
                     </a:p>
                   </a:txBody>
@@ -4539,58 +5713,12 @@
                     <a:lstStyle/>
                     <a:p>
                       <a:r>
-                        <a:rPr lang="de-DE" u="none">
+                        <a:rPr lang="de-DE" dirty="0">
                           <a:solidFill>
                             <a:schemeClr val="tx1"/>
                           </a:solidFill>
                         </a:rPr>
-                        <a:t>&gt;</a:t>
-                      </a:r>
-                    </a:p>
-                  </a:txBody>
-                  <a:tcPr>
-                    <a:lnL w="12700" cmpd="sng">
-                      <a:noFill/>
-                    </a:lnL>
-                    <a:lnR w="12700" cmpd="sng">
-                      <a:noFill/>
-                    </a:lnR>
-                    <a:lnT w="12700" cmpd="sng">
-                      <a:noFill/>
-                    </a:lnT>
-                    <a:lnB w="12700" cmpd="sng">
-                      <a:noFill/>
-                    </a:lnB>
-                    <a:lnTlToBr w="12700" cmpd="sng">
-                      <a:noFill/>
-                      <a:prstDash val="solid"/>
-                    </a:lnTlToBr>
-                    <a:lnBlToTr w="12700" cmpd="sng">
-                      <a:noFill/>
-                      <a:prstDash val="solid"/>
-                    </a:lnBlToTr>
-                    <a:noFill/>
-                  </a:tcPr>
-                </a:tc>
-                <a:extLst>
-                  <a:ext uri="{0D108BD9-81ED-4DB2-BD59-A6C34878D82A}">
-                    <a16:rowId xmlns:a16="http://schemas.microsoft.com/office/drawing/2014/main" val="359078954"/>
-                  </a:ext>
-                </a:extLst>
-              </a:tr>
-              <a:tr h="436563">
-                <a:tc>
-                  <a:txBody>
-                    <a:bodyPr/>
-                    <a:lstStyle/>
-                    <a:p>
-                      <a:r>
-                        <a:rPr lang="de-DE" u="none">
-                          <a:solidFill>
-                            <a:schemeClr val="tx1"/>
-                          </a:solidFill>
-                        </a:rPr>
-                        <a:t>Unterstrich</a:t>
+                        <a:t>Freitag, 20.3.</a:t>
                       </a:r>
                     </a:p>
                   </a:txBody>
@@ -4624,12 +5752,95 @@
                     <a:lstStyle/>
                     <a:p>
                       <a:r>
-                        <a:rPr lang="de-DE" u="none">
+                        <a:rPr lang="de-DE" dirty="0">
                           <a:solidFill>
                             <a:schemeClr val="tx1"/>
                           </a:solidFill>
                         </a:rPr>
-                        <a:t>Shift + -</a:t>
+                        <a:t>17 – 20 ?</a:t>
+                      </a:r>
+                    </a:p>
+                  </a:txBody>
+                  <a:tcPr>
+                    <a:lnL w="12700" cmpd="sng">
+                      <a:noFill/>
+                    </a:lnL>
+                    <a:lnR w="12700" cmpd="sng">
+                      <a:noFill/>
+                    </a:lnR>
+                    <a:lnT w="12700" cmpd="sng">
+                      <a:noFill/>
+                    </a:lnT>
+                    <a:lnB w="12700" cmpd="sng">
+                      <a:noFill/>
+                    </a:lnB>
+                    <a:lnTlToBr w="12700" cmpd="sng">
+                      <a:noFill/>
+                      <a:prstDash val="solid"/>
+                    </a:lnTlToBr>
+                    <a:lnBlToTr w="12700" cmpd="sng">
+                      <a:noFill/>
+                      <a:prstDash val="solid"/>
+                    </a:lnBlToTr>
+                    <a:noFill/>
+                  </a:tcPr>
+                </a:tc>
+                <a:tc vMerge="1">
+                  <a:txBody>
+                    <a:bodyPr/>
+                    <a:lstStyle/>
+                    <a:p>
+                      <a:endParaRPr lang="de-DE" dirty="0">
+                        <a:solidFill>
+                          <a:schemeClr val="tx1"/>
+                        </a:solidFill>
+                      </a:endParaRPr>
+                    </a:p>
+                  </a:txBody>
+                  <a:tcPr>
+                    <a:lnL w="12700" cmpd="sng">
+                      <a:noFill/>
+                    </a:lnL>
+                    <a:lnR w="12700" cmpd="sng">
+                      <a:noFill/>
+                    </a:lnR>
+                    <a:lnT w="12700" cmpd="sng">
+                      <a:noFill/>
+                    </a:lnT>
+                    <a:lnB w="12700" cmpd="sng">
+                      <a:noFill/>
+                    </a:lnB>
+                    <a:lnTlToBr w="12700" cmpd="sng">
+                      <a:noFill/>
+                      <a:prstDash val="solid"/>
+                    </a:lnTlToBr>
+                    <a:lnBlToTr w="12700" cmpd="sng">
+                      <a:noFill/>
+                      <a:prstDash val="solid"/>
+                    </a:lnBlToTr>
+                    <a:noFill/>
+                  </a:tcPr>
+                </a:tc>
+                <a:extLst>
+                  <a:ext uri="{0D108BD9-81ED-4DB2-BD59-A6C34878D82A}">
+                    <a16:rowId xmlns:a16="http://schemas.microsoft.com/office/drawing/2014/main" val="1783336438"/>
+                  </a:ext>
+                </a:extLst>
+              </a:tr>
+              <a:tr h="370840">
+                <a:tc>
+                  <a:txBody>
+                    <a:bodyPr/>
+                    <a:lstStyle/>
+                    <a:p>
+                      <a:pPr algn="r"/>
+                      <a:r>
+                        <a:rPr lang="de-DE" dirty="0">
+                          <a:solidFill>
+                            <a:schemeClr val="tx1"/>
+                          </a:solidFill>
+                        </a:rPr>
+                        <a:t>10</a:t>
                       </a:r>
                     </a:p>
                   </a:txBody>
@@ -4663,13 +5874,105 @@
                     <a:lstStyle/>
                     <a:p>
                       <a:r>
-                        <a:rPr lang="de-DE" u="none">
+                        <a:rPr lang="de-DE" dirty="0">
                           <a:solidFill>
                             <a:schemeClr val="tx1"/>
                           </a:solidFill>
                         </a:rPr>
-                        <a:t>_</a:t>
+                        <a:t>Samstag, 21.3.</a:t>
                       </a:r>
+                    </a:p>
+                  </a:txBody>
+                  <a:tcPr>
+                    <a:lnL w="12700" cmpd="sng">
+                      <a:noFill/>
+                    </a:lnL>
+                    <a:lnR w="12700" cmpd="sng">
+                      <a:noFill/>
+                    </a:lnR>
+                    <a:lnT w="12700" cmpd="sng">
+                      <a:noFill/>
+                    </a:lnT>
+                    <a:lnB w="12700" cmpd="sng">
+                      <a:noFill/>
+                    </a:lnB>
+                    <a:lnTlToBr w="12700" cmpd="sng">
+                      <a:noFill/>
+                      <a:prstDash val="solid"/>
+                    </a:lnTlToBr>
+                    <a:lnBlToTr w="12700" cmpd="sng">
+                      <a:noFill/>
+                      <a:prstDash val="solid"/>
+                    </a:lnBlToTr>
+                    <a:noFill/>
+                  </a:tcPr>
+                </a:tc>
+                <a:tc>
+                  <a:txBody>
+                    <a:bodyPr/>
+                    <a:lstStyle/>
+                    <a:p>
+                      <a:pPr marL="0" marR="0" lvl="0" indent="0" algn="l" defTabSz="914400" rtl="0" eaLnBrk="1" fontAlgn="auto" latinLnBrk="0" hangingPunct="1">
+                        <a:lnSpc>
+                          <a:spcPct val="100000"/>
+                        </a:lnSpc>
+                        <a:spcBef>
+                          <a:spcPts val="0"/>
+                        </a:spcBef>
+                        <a:spcAft>
+                          <a:spcPts val="0"/>
+                        </a:spcAft>
+                        <a:buClrTx/>
+                        <a:buSzTx/>
+                        <a:buFontTx/>
+                        <a:buNone/>
+                        <a:tabLst/>
+                        <a:defRPr/>
+                      </a:pPr>
+                      <a:r>
+                        <a:rPr lang="de-DE" dirty="0">
+                          <a:solidFill>
+                            <a:schemeClr val="tx1"/>
+                          </a:solidFill>
+                        </a:rPr>
+                        <a:t>10 – 14</a:t>
+                      </a:r>
+                    </a:p>
+                  </a:txBody>
+                  <a:tcPr>
+                    <a:lnL w="12700" cmpd="sng">
+                      <a:noFill/>
+                    </a:lnL>
+                    <a:lnR w="12700" cmpd="sng">
+                      <a:noFill/>
+                    </a:lnR>
+                    <a:lnT w="12700" cmpd="sng">
+                      <a:noFill/>
+                    </a:lnT>
+                    <a:lnB w="12700" cmpd="sng">
+                      <a:noFill/>
+                    </a:lnB>
+                    <a:lnTlToBr w="12700" cmpd="sng">
+                      <a:noFill/>
+                      <a:prstDash val="solid"/>
+                    </a:lnTlToBr>
+                    <a:lnBlToTr w="12700" cmpd="sng">
+                      <a:noFill/>
+                      <a:prstDash val="solid"/>
+                    </a:lnBlToTr>
+                    <a:noFill/>
+                  </a:tcPr>
+                </a:tc>
+                <a:tc vMerge="1">
+                  <a:txBody>
+                    <a:bodyPr/>
+                    <a:lstStyle/>
+                    <a:p>
+                      <a:endParaRPr lang="de-DE" dirty="0">
+                        <a:solidFill>
+                          <a:schemeClr val="tx1"/>
+                        </a:solidFill>
+                      </a:endParaRPr>
                     </a:p>
                   </a:txBody>
                   <a:tcPr>
@@ -4698,7 +6001,7 @@
                 </a:tc>
                 <a:extLst>
                   <a:ext uri="{0D108BD9-81ED-4DB2-BD59-A6C34878D82A}">
-                    <a16:rowId xmlns:a16="http://schemas.microsoft.com/office/drawing/2014/main" val="2627239541"/>
+                    <a16:rowId xmlns:a16="http://schemas.microsoft.com/office/drawing/2014/main" val="870493087"/>
                   </a:ext>
                 </a:extLst>
               </a:tr>
@@ -4709,7 +6012,7 @@
     </p:spTree>
     <p:extLst>
       <p:ext uri="{BB962C8B-B14F-4D97-AF65-F5344CB8AC3E}">
-        <p14:creationId xmlns:p14="http://schemas.microsoft.com/office/powerpoint/2010/main" val="4173632400"/>
+        <p14:creationId xmlns:p14="http://schemas.microsoft.com/office/powerpoint/2010/main" val="53837270"/>
       </p:ext>
     </p:extLst>
   </p:cSld>
@@ -4719,7 +6022,7 @@
 </p:sld>
 </file>
 
-<file path=ppt/slides/slide3.xml><?xml version="1.0" encoding="utf-8"?>
+<file path=ppt/slides/slide6.xml><?xml version="1.0" encoding="utf-8"?>
 <p:sld xmlns:a="http://schemas.openxmlformats.org/drawingml/2006/main" xmlns:r="http://schemas.openxmlformats.org/officeDocument/2006/relationships" xmlns:p="http://schemas.openxmlformats.org/presentationml/2006/main">
   <p:cSld>
     <p:spTree>
@@ -4738,10 +6041,10 @@
       </p:grpSpPr>
       <p:sp>
         <p:nvSpPr>
-          <p:cNvPr id="2" name="Titel 1">
+          <p:cNvPr id="2" name="Title 1">
             <a:extLst>
               <a:ext uri="{FF2B5EF4-FFF2-40B4-BE49-F238E27FC236}">
-                <a16:creationId xmlns:a16="http://schemas.microsoft.com/office/drawing/2014/main" id="{85E2288E-B7E7-481D-8C02-46CACAC70625}"/>
+                <a16:creationId xmlns:a16="http://schemas.microsoft.com/office/drawing/2014/main" id="{367C06D6-1C95-46F8-8055-08448BD11B9E}"/>
               </a:ext>
             </a:extLst>
           </p:cNvPr>
@@ -4758,1951 +6061,41 @@
           <a:lstStyle/>
           <a:p>
             <a:r>
-              <a:rPr lang="de-DE"/>
-              <a:t>Tastatur-Shortcuts</a:t>
-            </a:r>
-          </a:p>
-        </p:txBody>
-      </p:sp>
-      <p:graphicFrame>
-        <p:nvGraphicFramePr>
-          <p:cNvPr id="5" name="Tabelle 7">
+              <a:rPr lang="de-DE" dirty="0"/>
+              <a:t>Frühstudium</a:t>
+            </a:r>
+          </a:p>
+        </p:txBody>
+      </p:sp>
+      <p:sp>
+        <p:nvSpPr>
+          <p:cNvPr id="3" name="Content Placeholder 2">
             <a:extLst>
               <a:ext uri="{FF2B5EF4-FFF2-40B4-BE49-F238E27FC236}">
-                <a16:creationId xmlns:a16="http://schemas.microsoft.com/office/drawing/2014/main" id="{D75F95FC-911C-4637-9026-3A47ACF0B353}"/>
+                <a16:creationId xmlns:a16="http://schemas.microsoft.com/office/drawing/2014/main" id="{C36264C7-7BBF-49C6-9F95-F804081052B4}"/>
               </a:ext>
             </a:extLst>
           </p:cNvPr>
-          <p:cNvGraphicFramePr>
-            <a:graphicFrameLocks noGrp="1"/>
-          </p:cNvGraphicFramePr>
-          <p:nvPr/>
-        </p:nvGraphicFramePr>
-        <p:xfrm>
-          <a:off x="838200" y="1690688"/>
-          <a:ext cx="10515600" cy="4802193"/>
-        </p:xfrm>
-        <a:graphic>
-          <a:graphicData uri="http://schemas.openxmlformats.org/drawingml/2006/table">
-            <a:tbl>
-              <a:tblPr firstRow="1" bandRow="1">
-                <a:tableStyleId>{5C22544A-7EE6-4342-B048-85BDC9FD1C3A}</a:tableStyleId>
-              </a:tblPr>
-              <a:tblGrid>
-                <a:gridCol w="5044440">
-                  <a:extLst>
-                    <a:ext uri="{9D8B030D-6E8A-4147-A177-3AD203B41FA5}">
-                      <a16:colId xmlns:a16="http://schemas.microsoft.com/office/drawing/2014/main" val="2317810761"/>
-                    </a:ext>
-                  </a:extLst>
-                </a:gridCol>
-                <a:gridCol w="5471160">
-                  <a:extLst>
-                    <a:ext uri="{9D8B030D-6E8A-4147-A177-3AD203B41FA5}">
-                      <a16:colId xmlns:a16="http://schemas.microsoft.com/office/drawing/2014/main" val="3760803087"/>
-                    </a:ext>
-                  </a:extLst>
-                </a:gridCol>
-              </a:tblGrid>
-              <a:tr h="436563">
-                <a:tc>
-                  <a:txBody>
-                    <a:bodyPr/>
-                    <a:lstStyle/>
-                    <a:p>
-                      <a:r>
-                        <a:rPr lang="de-DE" u="none">
-                          <a:solidFill>
-                            <a:schemeClr val="tx1"/>
-                          </a:solidFill>
-                        </a:rPr>
-                        <a:t>Name</a:t>
-                      </a:r>
-                    </a:p>
-                  </a:txBody>
-                  <a:tcPr>
-                    <a:lnL w="12700" cmpd="sng">
-                      <a:noFill/>
-                    </a:lnL>
-                    <a:lnR w="12700" cmpd="sng">
-                      <a:noFill/>
-                    </a:lnR>
-                    <a:lnT w="12700" cmpd="sng">
-                      <a:noFill/>
-                    </a:lnT>
-                    <a:lnB w="38100" cmpd="sng">
-                      <a:noFill/>
-                    </a:lnB>
-                    <a:lnTlToBr w="12700" cmpd="sng">
-                      <a:noFill/>
-                      <a:prstDash val="solid"/>
-                    </a:lnTlToBr>
-                    <a:lnBlToTr w="12700" cmpd="sng">
-                      <a:noFill/>
-                      <a:prstDash val="solid"/>
-                    </a:lnBlToTr>
-                    <a:noFill/>
-                  </a:tcPr>
-                </a:tc>
-                <a:tc>
-                  <a:txBody>
-                    <a:bodyPr/>
-                    <a:lstStyle/>
-                    <a:p>
-                      <a:r>
-                        <a:rPr lang="de-DE" u="none">
-                          <a:solidFill>
-                            <a:schemeClr val="tx1"/>
-                          </a:solidFill>
-                        </a:rPr>
-                        <a:t>Kombination</a:t>
-                      </a:r>
-                    </a:p>
-                  </a:txBody>
-                  <a:tcPr>
-                    <a:lnL w="12700" cmpd="sng">
-                      <a:noFill/>
-                    </a:lnL>
-                    <a:lnR w="12700" cmpd="sng">
-                      <a:noFill/>
-                    </a:lnR>
-                    <a:lnT w="12700" cmpd="sng">
-                      <a:noFill/>
-                    </a:lnT>
-                    <a:lnB w="38100" cmpd="sng">
-                      <a:noFill/>
-                    </a:lnB>
-                    <a:lnTlToBr w="12700" cmpd="sng">
-                      <a:noFill/>
-                      <a:prstDash val="solid"/>
-                    </a:lnTlToBr>
-                    <a:lnBlToTr w="12700" cmpd="sng">
-                      <a:noFill/>
-                      <a:prstDash val="solid"/>
-                    </a:lnBlToTr>
-                    <a:noFill/>
-                  </a:tcPr>
-                </a:tc>
-                <a:extLst>
-                  <a:ext uri="{0D108BD9-81ED-4DB2-BD59-A6C34878D82A}">
-                    <a16:rowId xmlns:a16="http://schemas.microsoft.com/office/drawing/2014/main" val="2371139332"/>
-                  </a:ext>
-                </a:extLst>
-              </a:tr>
-              <a:tr h="436563">
-                <a:tc>
-                  <a:txBody>
-                    <a:bodyPr/>
-                    <a:lstStyle/>
-                    <a:p>
-                      <a:r>
-                        <a:rPr lang="de-DE" u="none">
-                          <a:solidFill>
-                            <a:schemeClr val="tx1"/>
-                          </a:solidFill>
-                        </a:rPr>
-                        <a:t>Element auswählen</a:t>
-                      </a:r>
-                    </a:p>
-                  </a:txBody>
-                  <a:tcPr>
-                    <a:lnL w="12700" cmpd="sng">
-                      <a:noFill/>
-                    </a:lnL>
-                    <a:lnR w="12700" cmpd="sng">
-                      <a:noFill/>
-                    </a:lnR>
-                    <a:lnT w="38100" cmpd="sng">
-                      <a:noFill/>
-                    </a:lnT>
-                    <a:lnB w="12700" cmpd="sng">
-                      <a:noFill/>
-                    </a:lnB>
-                    <a:lnTlToBr w="12700" cmpd="sng">
-                      <a:noFill/>
-                      <a:prstDash val="solid"/>
-                    </a:lnTlToBr>
-                    <a:lnBlToTr w="12700" cmpd="sng">
-                      <a:noFill/>
-                      <a:prstDash val="solid"/>
-                    </a:lnBlToTr>
-                    <a:noFill/>
-                  </a:tcPr>
-                </a:tc>
-                <a:tc>
-                  <a:txBody>
-                    <a:bodyPr/>
-                    <a:lstStyle/>
-                    <a:p>
-                      <a:r>
-                        <a:rPr lang="de-DE" u="none">
-                          <a:solidFill>
-                            <a:schemeClr val="tx1"/>
-                          </a:solidFill>
-                        </a:rPr>
-                        <a:t>Strg + W</a:t>
-                      </a:r>
-                    </a:p>
-                  </a:txBody>
-                  <a:tcPr>
-                    <a:lnL w="12700" cmpd="sng">
-                      <a:noFill/>
-                    </a:lnL>
-                    <a:lnR w="12700" cmpd="sng">
-                      <a:noFill/>
-                    </a:lnR>
-                    <a:lnT w="38100" cmpd="sng">
-                      <a:noFill/>
-                    </a:lnT>
-                    <a:lnB w="12700" cmpd="sng">
-                      <a:noFill/>
-                    </a:lnB>
-                    <a:lnTlToBr w="12700" cmpd="sng">
-                      <a:noFill/>
-                      <a:prstDash val="solid"/>
-                    </a:lnTlToBr>
-                    <a:lnBlToTr w="12700" cmpd="sng">
-                      <a:noFill/>
-                      <a:prstDash val="solid"/>
-                    </a:lnBlToTr>
-                    <a:noFill/>
-                  </a:tcPr>
-                </a:tc>
-                <a:extLst>
-                  <a:ext uri="{0D108BD9-81ED-4DB2-BD59-A6C34878D82A}">
-                    <a16:rowId xmlns:a16="http://schemas.microsoft.com/office/drawing/2014/main" val="3418878006"/>
-                  </a:ext>
-                </a:extLst>
-              </a:tr>
-              <a:tr h="436563">
-                <a:tc>
-                  <a:txBody>
-                    <a:bodyPr/>
-                    <a:lstStyle/>
-                    <a:p>
-                      <a:r>
-                        <a:rPr lang="de-DE" u="none">
-                          <a:solidFill>
-                            <a:schemeClr val="tx1"/>
-                          </a:solidFill>
-                        </a:rPr>
-                        <a:t>Alles auswählen</a:t>
-                      </a:r>
-                    </a:p>
-                  </a:txBody>
-                  <a:tcPr>
-                    <a:lnL w="12700" cmpd="sng">
-                      <a:noFill/>
-                    </a:lnL>
-                    <a:lnR w="12700" cmpd="sng">
-                      <a:noFill/>
-                    </a:lnR>
-                    <a:lnT w="38100" cmpd="sng">
-                      <a:noFill/>
-                    </a:lnT>
-                    <a:lnB w="12700" cmpd="sng">
-                      <a:noFill/>
-                    </a:lnB>
-                    <a:lnTlToBr w="12700" cmpd="sng">
-                      <a:noFill/>
-                      <a:prstDash val="solid"/>
-                    </a:lnTlToBr>
-                    <a:lnBlToTr w="12700" cmpd="sng">
-                      <a:noFill/>
-                      <a:prstDash val="solid"/>
-                    </a:lnBlToTr>
-                    <a:noFill/>
-                  </a:tcPr>
-                </a:tc>
-                <a:tc>
-                  <a:txBody>
-                    <a:bodyPr/>
-                    <a:lstStyle/>
-                    <a:p>
-                      <a:r>
-                        <a:rPr lang="de-DE" u="none">
-                          <a:solidFill>
-                            <a:schemeClr val="tx1"/>
-                          </a:solidFill>
-                        </a:rPr>
-                        <a:t>Strg + A</a:t>
-                      </a:r>
-                    </a:p>
-                  </a:txBody>
-                  <a:tcPr>
-                    <a:lnL w="12700" cmpd="sng">
-                      <a:noFill/>
-                    </a:lnL>
-                    <a:lnR w="12700" cmpd="sng">
-                      <a:noFill/>
-                    </a:lnR>
-                    <a:lnT w="38100" cmpd="sng">
-                      <a:noFill/>
-                    </a:lnT>
-                    <a:lnB w="12700" cmpd="sng">
-                      <a:noFill/>
-                    </a:lnB>
-                    <a:lnTlToBr w="12700" cmpd="sng">
-                      <a:noFill/>
-                      <a:prstDash val="solid"/>
-                    </a:lnTlToBr>
-                    <a:lnBlToTr w="12700" cmpd="sng">
-                      <a:noFill/>
-                      <a:prstDash val="solid"/>
-                    </a:lnBlToTr>
-                    <a:noFill/>
-                  </a:tcPr>
-                </a:tc>
-                <a:extLst>
-                  <a:ext uri="{0D108BD9-81ED-4DB2-BD59-A6C34878D82A}">
-                    <a16:rowId xmlns:a16="http://schemas.microsoft.com/office/drawing/2014/main" val="1137631992"/>
-                  </a:ext>
-                </a:extLst>
-              </a:tr>
-              <a:tr h="436563">
-                <a:tc>
-                  <a:txBody>
-                    <a:bodyPr/>
-                    <a:lstStyle/>
-                    <a:p>
-                      <a:r>
-                        <a:rPr lang="de-DE" u="none">
-                          <a:solidFill>
-                            <a:schemeClr val="tx1"/>
-                          </a:solidFill>
-                        </a:rPr>
-                        <a:t>Kopieren</a:t>
-                      </a:r>
-                    </a:p>
-                  </a:txBody>
-                  <a:tcPr>
-                    <a:lnL w="12700" cmpd="sng">
-                      <a:noFill/>
-                    </a:lnL>
-                    <a:lnR w="12700" cmpd="sng">
-                      <a:noFill/>
-                    </a:lnR>
-                    <a:lnT w="12700" cmpd="sng">
-                      <a:noFill/>
-                    </a:lnT>
-                    <a:lnB w="12700" cmpd="sng">
-                      <a:noFill/>
-                    </a:lnB>
-                    <a:lnTlToBr w="12700" cmpd="sng">
-                      <a:noFill/>
-                      <a:prstDash val="solid"/>
-                    </a:lnTlToBr>
-                    <a:lnBlToTr w="12700" cmpd="sng">
-                      <a:noFill/>
-                      <a:prstDash val="solid"/>
-                    </a:lnBlToTr>
-                    <a:noFill/>
-                  </a:tcPr>
-                </a:tc>
-                <a:tc>
-                  <a:txBody>
-                    <a:bodyPr/>
-                    <a:lstStyle/>
-                    <a:p>
-                      <a:r>
-                        <a:rPr lang="de-DE" u="none">
-                          <a:solidFill>
-                            <a:schemeClr val="tx1"/>
-                          </a:solidFill>
-                        </a:rPr>
-                        <a:t>Strg + C</a:t>
-                      </a:r>
-                    </a:p>
-                  </a:txBody>
-                  <a:tcPr>
-                    <a:lnL w="12700" cmpd="sng">
-                      <a:noFill/>
-                    </a:lnL>
-                    <a:lnR w="12700" cmpd="sng">
-                      <a:noFill/>
-                    </a:lnR>
-                    <a:lnT w="12700" cmpd="sng">
-                      <a:noFill/>
-                    </a:lnT>
-                    <a:lnB w="12700" cmpd="sng">
-                      <a:noFill/>
-                    </a:lnB>
-                    <a:lnTlToBr w="12700" cmpd="sng">
-                      <a:noFill/>
-                      <a:prstDash val="solid"/>
-                    </a:lnTlToBr>
-                    <a:lnBlToTr w="12700" cmpd="sng">
-                      <a:noFill/>
-                      <a:prstDash val="solid"/>
-                    </a:lnBlToTr>
-                    <a:noFill/>
-                  </a:tcPr>
-                </a:tc>
-                <a:extLst>
-                  <a:ext uri="{0D108BD9-81ED-4DB2-BD59-A6C34878D82A}">
-                    <a16:rowId xmlns:a16="http://schemas.microsoft.com/office/drawing/2014/main" val="735349028"/>
-                  </a:ext>
-                </a:extLst>
-              </a:tr>
-              <a:tr h="436563">
-                <a:tc>
-                  <a:txBody>
-                    <a:bodyPr/>
-                    <a:lstStyle/>
-                    <a:p>
-                      <a:r>
-                        <a:rPr lang="de-DE" u="none">
-                          <a:solidFill>
-                            <a:schemeClr val="tx1"/>
-                          </a:solidFill>
-                        </a:rPr>
-                        <a:t>Einfügen</a:t>
-                      </a:r>
-                    </a:p>
-                  </a:txBody>
-                  <a:tcPr>
-                    <a:lnL w="12700" cmpd="sng">
-                      <a:noFill/>
-                    </a:lnL>
-                    <a:lnR w="12700" cmpd="sng">
-                      <a:noFill/>
-                    </a:lnR>
-                    <a:lnT w="12700" cmpd="sng">
-                      <a:noFill/>
-                    </a:lnT>
-                    <a:lnB w="12700" cmpd="sng">
-                      <a:noFill/>
-                    </a:lnB>
-                    <a:lnTlToBr w="12700" cmpd="sng">
-                      <a:noFill/>
-                      <a:prstDash val="solid"/>
-                    </a:lnTlToBr>
-                    <a:lnBlToTr w="12700" cmpd="sng">
-                      <a:noFill/>
-                      <a:prstDash val="solid"/>
-                    </a:lnBlToTr>
-                    <a:noFill/>
-                  </a:tcPr>
-                </a:tc>
-                <a:tc>
-                  <a:txBody>
-                    <a:bodyPr/>
-                    <a:lstStyle/>
-                    <a:p>
-                      <a:r>
-                        <a:rPr lang="de-DE" u="none">
-                          <a:solidFill>
-                            <a:schemeClr val="tx1"/>
-                          </a:solidFill>
-                        </a:rPr>
-                        <a:t>Strg + V</a:t>
-                      </a:r>
-                    </a:p>
-                  </a:txBody>
-                  <a:tcPr>
-                    <a:lnL w="12700" cmpd="sng">
-                      <a:noFill/>
-                    </a:lnL>
-                    <a:lnR w="12700" cmpd="sng">
-                      <a:noFill/>
-                    </a:lnR>
-                    <a:lnT w="12700" cmpd="sng">
-                      <a:noFill/>
-                    </a:lnT>
-                    <a:lnB w="12700" cmpd="sng">
-                      <a:noFill/>
-                    </a:lnB>
-                    <a:lnTlToBr w="12700" cmpd="sng">
-                      <a:noFill/>
-                      <a:prstDash val="solid"/>
-                    </a:lnTlToBr>
-                    <a:lnBlToTr w="12700" cmpd="sng">
-                      <a:noFill/>
-                      <a:prstDash val="solid"/>
-                    </a:lnBlToTr>
-                    <a:noFill/>
-                  </a:tcPr>
-                </a:tc>
-                <a:extLst>
-                  <a:ext uri="{0D108BD9-81ED-4DB2-BD59-A6C34878D82A}">
-                    <a16:rowId xmlns:a16="http://schemas.microsoft.com/office/drawing/2014/main" val="1753339480"/>
-                  </a:ext>
-                </a:extLst>
-              </a:tr>
-              <a:tr h="436563">
-                <a:tc>
-                  <a:txBody>
-                    <a:bodyPr/>
-                    <a:lstStyle/>
-                    <a:p>
-                      <a:r>
-                        <a:rPr lang="de-DE" u="none">
-                          <a:solidFill>
-                            <a:schemeClr val="tx1"/>
-                          </a:solidFill>
-                        </a:rPr>
-                        <a:t>Löschen und Kopieren</a:t>
-                      </a:r>
-                    </a:p>
-                  </a:txBody>
-                  <a:tcPr>
-                    <a:lnL w="12700" cmpd="sng">
-                      <a:noFill/>
-                    </a:lnL>
-                    <a:lnR w="12700" cmpd="sng">
-                      <a:noFill/>
-                    </a:lnR>
-                    <a:lnT w="12700" cmpd="sng">
-                      <a:noFill/>
-                    </a:lnT>
-                    <a:lnB w="12700" cmpd="sng">
-                      <a:noFill/>
-                    </a:lnB>
-                    <a:lnTlToBr w="12700" cmpd="sng">
-                      <a:noFill/>
-                      <a:prstDash val="solid"/>
-                    </a:lnTlToBr>
-                    <a:lnBlToTr w="12700" cmpd="sng">
-                      <a:noFill/>
-                      <a:prstDash val="solid"/>
-                    </a:lnBlToTr>
-                    <a:noFill/>
-                  </a:tcPr>
-                </a:tc>
-                <a:tc>
-                  <a:txBody>
-                    <a:bodyPr/>
-                    <a:lstStyle/>
-                    <a:p>
-                      <a:r>
-                        <a:rPr lang="de-DE" u="none">
-                          <a:solidFill>
-                            <a:schemeClr val="tx1"/>
-                          </a:solidFill>
-                        </a:rPr>
-                        <a:t>Strg + X</a:t>
-                      </a:r>
-                    </a:p>
-                  </a:txBody>
-                  <a:tcPr>
-                    <a:lnL w="12700" cmpd="sng">
-                      <a:noFill/>
-                    </a:lnL>
-                    <a:lnR w="12700" cmpd="sng">
-                      <a:noFill/>
-                    </a:lnR>
-                    <a:lnT w="12700" cmpd="sng">
-                      <a:noFill/>
-                    </a:lnT>
-                    <a:lnB w="12700" cmpd="sng">
-                      <a:noFill/>
-                    </a:lnB>
-                    <a:lnTlToBr w="12700" cmpd="sng">
-                      <a:noFill/>
-                      <a:prstDash val="solid"/>
-                    </a:lnTlToBr>
-                    <a:lnBlToTr w="12700" cmpd="sng">
-                      <a:noFill/>
-                      <a:prstDash val="solid"/>
-                    </a:lnBlToTr>
-                    <a:noFill/>
-                  </a:tcPr>
-                </a:tc>
-                <a:extLst>
-                  <a:ext uri="{0D108BD9-81ED-4DB2-BD59-A6C34878D82A}">
-                    <a16:rowId xmlns:a16="http://schemas.microsoft.com/office/drawing/2014/main" val="4070795586"/>
-                  </a:ext>
-                </a:extLst>
-              </a:tr>
-              <a:tr h="436563">
-                <a:tc>
-                  <a:txBody>
-                    <a:bodyPr/>
-                    <a:lstStyle/>
-                    <a:p>
-                      <a:r>
-                        <a:rPr lang="de-DE" u="none">
-                          <a:solidFill>
-                            <a:schemeClr val="tx1"/>
-                          </a:solidFill>
-                        </a:rPr>
-                        <a:t>Duplizieren</a:t>
-                      </a:r>
-                    </a:p>
-                  </a:txBody>
-                  <a:tcPr>
-                    <a:lnL w="12700" cmpd="sng">
-                      <a:noFill/>
-                    </a:lnL>
-                    <a:lnR w="12700" cmpd="sng">
-                      <a:noFill/>
-                    </a:lnR>
-                    <a:lnT w="12700" cmpd="sng">
-                      <a:noFill/>
-                    </a:lnT>
-                    <a:lnB w="12700" cmpd="sng">
-                      <a:noFill/>
-                    </a:lnB>
-                    <a:lnTlToBr w="12700" cmpd="sng">
-                      <a:noFill/>
-                      <a:prstDash val="solid"/>
-                    </a:lnTlToBr>
-                    <a:lnBlToTr w="12700" cmpd="sng">
-                      <a:noFill/>
-                      <a:prstDash val="solid"/>
-                    </a:lnBlToTr>
-                    <a:noFill/>
-                  </a:tcPr>
-                </a:tc>
-                <a:tc>
-                  <a:txBody>
-                    <a:bodyPr/>
-                    <a:lstStyle/>
-                    <a:p>
-                      <a:r>
-                        <a:rPr lang="de-DE" u="none">
-                          <a:solidFill>
-                            <a:schemeClr val="tx1"/>
-                          </a:solidFill>
-                        </a:rPr>
-                        <a:t>Strg + D</a:t>
-                      </a:r>
-                    </a:p>
-                  </a:txBody>
-                  <a:tcPr>
-                    <a:lnL w="12700" cmpd="sng">
-                      <a:noFill/>
-                    </a:lnL>
-                    <a:lnR w="12700" cmpd="sng">
-                      <a:noFill/>
-                    </a:lnR>
-                    <a:lnT w="12700" cmpd="sng">
-                      <a:noFill/>
-                    </a:lnT>
-                    <a:lnB w="12700" cmpd="sng">
-                      <a:noFill/>
-                    </a:lnB>
-                    <a:lnTlToBr w="12700" cmpd="sng">
-                      <a:noFill/>
-                      <a:prstDash val="solid"/>
-                    </a:lnTlToBr>
-                    <a:lnBlToTr w="12700" cmpd="sng">
-                      <a:noFill/>
-                      <a:prstDash val="solid"/>
-                    </a:lnBlToTr>
-                    <a:noFill/>
-                  </a:tcPr>
-                </a:tc>
-                <a:extLst>
-                  <a:ext uri="{0D108BD9-81ED-4DB2-BD59-A6C34878D82A}">
-                    <a16:rowId xmlns:a16="http://schemas.microsoft.com/office/drawing/2014/main" val="3524437853"/>
-                  </a:ext>
-                </a:extLst>
-              </a:tr>
-              <a:tr h="436563">
-                <a:tc>
-                  <a:txBody>
-                    <a:bodyPr/>
-                    <a:lstStyle/>
-                    <a:p>
-                      <a:r>
-                        <a:rPr lang="de-DE" u="none">
-                          <a:solidFill>
-                            <a:schemeClr val="tx1"/>
-                          </a:solidFill>
-                        </a:rPr>
-                        <a:t>Rückgängig</a:t>
-                      </a:r>
-                    </a:p>
-                  </a:txBody>
-                  <a:tcPr>
-                    <a:lnL w="12700" cmpd="sng">
-                      <a:noFill/>
-                    </a:lnL>
-                    <a:lnR w="12700" cmpd="sng">
-                      <a:noFill/>
-                    </a:lnR>
-                    <a:lnT w="12700" cmpd="sng">
-                      <a:noFill/>
-                    </a:lnT>
-                    <a:lnB w="12700" cmpd="sng">
-                      <a:noFill/>
-                    </a:lnB>
-                    <a:lnTlToBr w="12700" cmpd="sng">
-                      <a:noFill/>
-                      <a:prstDash val="solid"/>
-                    </a:lnTlToBr>
-                    <a:lnBlToTr w="12700" cmpd="sng">
-                      <a:noFill/>
-                      <a:prstDash val="solid"/>
-                    </a:lnBlToTr>
-                    <a:noFill/>
-                  </a:tcPr>
-                </a:tc>
-                <a:tc>
-                  <a:txBody>
-                    <a:bodyPr/>
-                    <a:lstStyle/>
-                    <a:p>
-                      <a:r>
-                        <a:rPr lang="de-DE" u="none">
-                          <a:solidFill>
-                            <a:schemeClr val="tx1"/>
-                          </a:solidFill>
-                        </a:rPr>
-                        <a:t>Strg + Z</a:t>
-                      </a:r>
-                    </a:p>
-                  </a:txBody>
-                  <a:tcPr>
-                    <a:lnL w="12700" cmpd="sng">
-                      <a:noFill/>
-                    </a:lnL>
-                    <a:lnR w="12700" cmpd="sng">
-                      <a:noFill/>
-                    </a:lnR>
-                    <a:lnT w="12700" cmpd="sng">
-                      <a:noFill/>
-                    </a:lnT>
-                    <a:lnB w="12700" cmpd="sng">
-                      <a:noFill/>
-                    </a:lnB>
-                    <a:lnTlToBr w="12700" cmpd="sng">
-                      <a:noFill/>
-                      <a:prstDash val="solid"/>
-                    </a:lnTlToBr>
-                    <a:lnBlToTr w="12700" cmpd="sng">
-                      <a:noFill/>
-                      <a:prstDash val="solid"/>
-                    </a:lnBlToTr>
-                    <a:noFill/>
-                  </a:tcPr>
-                </a:tc>
-                <a:extLst>
-                  <a:ext uri="{0D108BD9-81ED-4DB2-BD59-A6C34878D82A}">
-                    <a16:rowId xmlns:a16="http://schemas.microsoft.com/office/drawing/2014/main" val="2223904026"/>
-                  </a:ext>
-                </a:extLst>
-              </a:tr>
-              <a:tr h="436563">
-                <a:tc>
-                  <a:txBody>
-                    <a:bodyPr/>
-                    <a:lstStyle/>
-                    <a:p>
-                      <a:r>
-                        <a:rPr lang="de-DE" u="none">
-                          <a:solidFill>
-                            <a:schemeClr val="tx1"/>
-                          </a:solidFill>
-                        </a:rPr>
-                        <a:t>Rückrückgängig</a:t>
-                      </a:r>
-                    </a:p>
-                  </a:txBody>
-                  <a:tcPr>
-                    <a:lnL w="12700" cmpd="sng">
-                      <a:noFill/>
-                    </a:lnL>
-                    <a:lnR w="12700" cmpd="sng">
-                      <a:noFill/>
-                    </a:lnR>
-                    <a:lnT w="12700" cmpd="sng">
-                      <a:noFill/>
-                    </a:lnT>
-                    <a:lnB w="12700" cmpd="sng">
-                      <a:noFill/>
-                    </a:lnB>
-                    <a:lnTlToBr w="12700" cmpd="sng">
-                      <a:noFill/>
-                      <a:prstDash val="solid"/>
-                    </a:lnTlToBr>
-                    <a:lnBlToTr w="12700" cmpd="sng">
-                      <a:noFill/>
-                      <a:prstDash val="solid"/>
-                    </a:lnBlToTr>
-                    <a:noFill/>
-                  </a:tcPr>
-                </a:tc>
-                <a:tc>
-                  <a:txBody>
-                    <a:bodyPr/>
-                    <a:lstStyle/>
-                    <a:p>
-                      <a:r>
-                        <a:rPr lang="de-DE" u="none">
-                          <a:solidFill>
-                            <a:schemeClr val="tx1"/>
-                          </a:solidFill>
-                        </a:rPr>
-                        <a:t>Strg + Y</a:t>
-                      </a:r>
-                    </a:p>
-                  </a:txBody>
-                  <a:tcPr>
-                    <a:lnL w="12700" cmpd="sng">
-                      <a:noFill/>
-                    </a:lnL>
-                    <a:lnR w="12700" cmpd="sng">
-                      <a:noFill/>
-                    </a:lnR>
-                    <a:lnT w="12700" cmpd="sng">
-                      <a:noFill/>
-                    </a:lnT>
-                    <a:lnB w="12700" cmpd="sng">
-                      <a:noFill/>
-                    </a:lnB>
-                    <a:lnTlToBr w="12700" cmpd="sng">
-                      <a:noFill/>
-                      <a:prstDash val="solid"/>
-                    </a:lnTlToBr>
-                    <a:lnBlToTr w="12700" cmpd="sng">
-                      <a:noFill/>
-                      <a:prstDash val="solid"/>
-                    </a:lnBlToTr>
-                    <a:noFill/>
-                  </a:tcPr>
-                </a:tc>
-                <a:extLst>
-                  <a:ext uri="{0D108BD9-81ED-4DB2-BD59-A6C34878D82A}">
-                    <a16:rowId xmlns:a16="http://schemas.microsoft.com/office/drawing/2014/main" val="2046807540"/>
-                  </a:ext>
-                </a:extLst>
-              </a:tr>
-              <a:tr h="436563">
-                <a:tc>
-                  <a:txBody>
-                    <a:bodyPr/>
-                    <a:lstStyle/>
-                    <a:p>
-                      <a:r>
-                        <a:rPr lang="de-DE" u="none">
-                          <a:solidFill>
-                            <a:schemeClr val="tx1"/>
-                          </a:solidFill>
-                        </a:rPr>
-                        <a:t>Suchen</a:t>
-                      </a:r>
-                    </a:p>
-                  </a:txBody>
-                  <a:tcPr>
-                    <a:lnL w="12700" cmpd="sng">
-                      <a:noFill/>
-                    </a:lnL>
-                    <a:lnR w="12700" cmpd="sng">
-                      <a:noFill/>
-                    </a:lnR>
-                    <a:lnT w="12700" cmpd="sng">
-                      <a:noFill/>
-                    </a:lnT>
-                    <a:lnB w="12700" cmpd="sng">
-                      <a:noFill/>
-                    </a:lnB>
-                    <a:lnTlToBr w="12700" cmpd="sng">
-                      <a:noFill/>
-                      <a:prstDash val="solid"/>
-                    </a:lnTlToBr>
-                    <a:lnBlToTr w="12700" cmpd="sng">
-                      <a:noFill/>
-                      <a:prstDash val="solid"/>
-                    </a:lnBlToTr>
-                    <a:noFill/>
-                  </a:tcPr>
-                </a:tc>
-                <a:tc>
-                  <a:txBody>
-                    <a:bodyPr/>
-                    <a:lstStyle/>
-                    <a:p>
-                      <a:r>
-                        <a:rPr lang="de-DE" u="none">
-                          <a:solidFill>
-                            <a:schemeClr val="tx1"/>
-                          </a:solidFill>
-                        </a:rPr>
-                        <a:t>Strg + F</a:t>
-                      </a:r>
-                    </a:p>
-                  </a:txBody>
-                  <a:tcPr>
-                    <a:lnL w="12700" cmpd="sng">
-                      <a:noFill/>
-                    </a:lnL>
-                    <a:lnR w="12700" cmpd="sng">
-                      <a:noFill/>
-                    </a:lnR>
-                    <a:lnT w="12700" cmpd="sng">
-                      <a:noFill/>
-                    </a:lnT>
-                    <a:lnB w="12700" cmpd="sng">
-                      <a:noFill/>
-                    </a:lnB>
-                    <a:lnTlToBr w="12700" cmpd="sng">
-                      <a:noFill/>
-                      <a:prstDash val="solid"/>
-                    </a:lnTlToBr>
-                    <a:lnBlToTr w="12700" cmpd="sng">
-                      <a:noFill/>
-                      <a:prstDash val="solid"/>
-                    </a:lnBlToTr>
-                    <a:noFill/>
-                  </a:tcPr>
-                </a:tc>
-                <a:extLst>
-                  <a:ext uri="{0D108BD9-81ED-4DB2-BD59-A6C34878D82A}">
-                    <a16:rowId xmlns:a16="http://schemas.microsoft.com/office/drawing/2014/main" val="4008067369"/>
-                  </a:ext>
-                </a:extLst>
-              </a:tr>
-              <a:tr h="436563">
-                <a:tc>
-                  <a:txBody>
-                    <a:bodyPr/>
-                    <a:lstStyle/>
-                    <a:p>
-                      <a:r>
-                        <a:rPr lang="de-DE" u="none">
-                          <a:solidFill>
-                            <a:schemeClr val="tx1"/>
-                          </a:solidFill>
-                        </a:rPr>
-                        <a:t>Suchen und Ersetzen</a:t>
-                      </a:r>
-                    </a:p>
-                  </a:txBody>
-                  <a:tcPr>
-                    <a:lnL w="12700" cmpd="sng">
-                      <a:noFill/>
-                    </a:lnL>
-                    <a:lnR w="12700" cmpd="sng">
-                      <a:noFill/>
-                    </a:lnR>
-                    <a:lnT w="12700" cmpd="sng">
-                      <a:noFill/>
-                    </a:lnT>
-                    <a:lnB w="12700" cmpd="sng">
-                      <a:noFill/>
-                    </a:lnB>
-                    <a:lnTlToBr w="12700" cmpd="sng">
-                      <a:noFill/>
-                      <a:prstDash val="solid"/>
-                    </a:lnTlToBr>
-                    <a:lnBlToTr w="12700" cmpd="sng">
-                      <a:noFill/>
-                      <a:prstDash val="solid"/>
-                    </a:lnBlToTr>
-                    <a:noFill/>
-                  </a:tcPr>
-                </a:tc>
-                <a:tc>
-                  <a:txBody>
-                    <a:bodyPr/>
-                    <a:lstStyle/>
-                    <a:p>
-                      <a:r>
-                        <a:rPr lang="de-DE" u="none">
-                          <a:solidFill>
-                            <a:schemeClr val="tx1"/>
-                          </a:solidFill>
-                        </a:rPr>
-                        <a:t>Strg + R</a:t>
-                      </a:r>
-                    </a:p>
-                  </a:txBody>
-                  <a:tcPr>
-                    <a:lnL w="12700" cmpd="sng">
-                      <a:noFill/>
-                    </a:lnL>
-                    <a:lnR w="12700" cmpd="sng">
-                      <a:noFill/>
-                    </a:lnR>
-                    <a:lnT w="12700" cmpd="sng">
-                      <a:noFill/>
-                    </a:lnT>
-                    <a:lnB w="12700" cmpd="sng">
-                      <a:noFill/>
-                    </a:lnB>
-                    <a:lnTlToBr w="12700" cmpd="sng">
-                      <a:noFill/>
-                      <a:prstDash val="solid"/>
-                    </a:lnTlToBr>
-                    <a:lnBlToTr w="12700" cmpd="sng">
-                      <a:noFill/>
-                      <a:prstDash val="solid"/>
-                    </a:lnBlToTr>
-                    <a:noFill/>
-                  </a:tcPr>
-                </a:tc>
-                <a:extLst>
-                  <a:ext uri="{0D108BD9-81ED-4DB2-BD59-A6C34878D82A}">
-                    <a16:rowId xmlns:a16="http://schemas.microsoft.com/office/drawing/2014/main" val="359078954"/>
-                  </a:ext>
-                </a:extLst>
-              </a:tr>
-            </a:tbl>
-          </a:graphicData>
-        </a:graphic>
-      </p:graphicFrame>
+          <p:cNvSpPr>
+            <a:spLocks noGrp="1"/>
+          </p:cNvSpPr>
+          <p:nvPr>
+            <p:ph idx="1"/>
+          </p:nvPr>
+        </p:nvSpPr>
+        <p:spPr/>
+        <p:txBody>
+          <a:bodyPr/>
+          <a:lstStyle/>
+          <a:p>
+            <a:endParaRPr lang="de-DE"/>
+          </a:p>
+        </p:txBody>
+      </p:sp>
     </p:spTree>
     <p:extLst>
       <p:ext uri="{BB962C8B-B14F-4D97-AF65-F5344CB8AC3E}">
-        <p14:creationId xmlns:p14="http://schemas.microsoft.com/office/powerpoint/2010/main" val="1211559806"/>
-      </p:ext>
-    </p:extLst>
-  </p:cSld>
-  <p:clrMapOvr>
-    <a:masterClrMapping/>
-  </p:clrMapOvr>
-</p:sld>
-</file>
-
-<file path=ppt/slides/slide4.xml><?xml version="1.0" encoding="utf-8"?>
-<p:sld xmlns:a="http://schemas.openxmlformats.org/drawingml/2006/main" xmlns:r="http://schemas.openxmlformats.org/officeDocument/2006/relationships" xmlns:p="http://schemas.openxmlformats.org/presentationml/2006/main">
-  <p:cSld>
-    <p:spTree>
-      <p:nvGrpSpPr>
-        <p:cNvPr id="1" name=""/>
-        <p:cNvGrpSpPr/>
-        <p:nvPr/>
-      </p:nvGrpSpPr>
-      <p:grpSpPr>
-        <a:xfrm>
-          <a:off x="0" y="0"/>
-          <a:ext cx="0" cy="0"/>
-          <a:chOff x="0" y="0"/>
-          <a:chExt cx="0" cy="0"/>
-        </a:xfrm>
-      </p:grpSpPr>
-      <p:sp>
-        <p:nvSpPr>
-          <p:cNvPr id="2" name="Titel 1">
-            <a:extLst>
-              <a:ext uri="{FF2B5EF4-FFF2-40B4-BE49-F238E27FC236}">
-                <a16:creationId xmlns:a16="http://schemas.microsoft.com/office/drawing/2014/main" id="{85E2288E-B7E7-481D-8C02-46CACAC70625}"/>
-              </a:ext>
-            </a:extLst>
-          </p:cNvPr>
-          <p:cNvSpPr>
-            <a:spLocks noGrp="1"/>
-          </p:cNvSpPr>
-          <p:nvPr>
-            <p:ph type="title"/>
-          </p:nvPr>
-        </p:nvSpPr>
-        <p:spPr/>
-        <p:txBody>
-          <a:bodyPr/>
-          <a:lstStyle/>
-          <a:p>
-            <a:r>
-              <a:rPr lang="de-DE" err="1"/>
-              <a:t>IntelliJ</a:t>
-            </a:r>
-            <a:r>
-              <a:rPr lang="de-DE"/>
-              <a:t>-Shortcuts</a:t>
-            </a:r>
-          </a:p>
-        </p:txBody>
-      </p:sp>
-      <p:graphicFrame>
-        <p:nvGraphicFramePr>
-          <p:cNvPr id="5" name="Tabelle 7">
-            <a:extLst>
-              <a:ext uri="{FF2B5EF4-FFF2-40B4-BE49-F238E27FC236}">
-                <a16:creationId xmlns:a16="http://schemas.microsoft.com/office/drawing/2014/main" id="{D75F95FC-911C-4637-9026-3A47ACF0B353}"/>
-              </a:ext>
-            </a:extLst>
-          </p:cNvPr>
-          <p:cNvGraphicFramePr>
-            <a:graphicFrameLocks noGrp="1"/>
-          </p:cNvGraphicFramePr>
-          <p:nvPr/>
-        </p:nvGraphicFramePr>
-        <p:xfrm>
-          <a:off x="838200" y="1690688"/>
-          <a:ext cx="10515600" cy="4365630"/>
-        </p:xfrm>
-        <a:graphic>
-          <a:graphicData uri="http://schemas.openxmlformats.org/drawingml/2006/table">
-            <a:tbl>
-              <a:tblPr firstRow="1" bandRow="1">
-                <a:tableStyleId>{5C22544A-7EE6-4342-B048-85BDC9FD1C3A}</a:tableStyleId>
-              </a:tblPr>
-              <a:tblGrid>
-                <a:gridCol w="5044440">
-                  <a:extLst>
-                    <a:ext uri="{9D8B030D-6E8A-4147-A177-3AD203B41FA5}">
-                      <a16:colId xmlns:a16="http://schemas.microsoft.com/office/drawing/2014/main" val="2317810761"/>
-                    </a:ext>
-                  </a:extLst>
-                </a:gridCol>
-                <a:gridCol w="5471160">
-                  <a:extLst>
-                    <a:ext uri="{9D8B030D-6E8A-4147-A177-3AD203B41FA5}">
-                      <a16:colId xmlns:a16="http://schemas.microsoft.com/office/drawing/2014/main" val="3760803087"/>
-                    </a:ext>
-                  </a:extLst>
-                </a:gridCol>
-              </a:tblGrid>
-              <a:tr h="436563">
-                <a:tc>
-                  <a:txBody>
-                    <a:bodyPr/>
-                    <a:lstStyle/>
-                    <a:p>
-                      <a:r>
-                        <a:rPr lang="de-DE" u="none">
-                          <a:solidFill>
-                            <a:schemeClr val="tx1"/>
-                          </a:solidFill>
-                        </a:rPr>
-                        <a:t>Name</a:t>
-                      </a:r>
-                    </a:p>
-                  </a:txBody>
-                  <a:tcPr>
-                    <a:lnL w="12700" cmpd="sng">
-                      <a:noFill/>
-                    </a:lnL>
-                    <a:lnR w="12700" cmpd="sng">
-                      <a:noFill/>
-                    </a:lnR>
-                    <a:lnT w="12700" cmpd="sng">
-                      <a:noFill/>
-                    </a:lnT>
-                    <a:lnB w="38100" cmpd="sng">
-                      <a:noFill/>
-                    </a:lnB>
-                    <a:lnTlToBr w="12700" cmpd="sng">
-                      <a:noFill/>
-                      <a:prstDash val="solid"/>
-                    </a:lnTlToBr>
-                    <a:lnBlToTr w="12700" cmpd="sng">
-                      <a:noFill/>
-                      <a:prstDash val="solid"/>
-                    </a:lnBlToTr>
-                    <a:noFill/>
-                  </a:tcPr>
-                </a:tc>
-                <a:tc>
-                  <a:txBody>
-                    <a:bodyPr/>
-                    <a:lstStyle/>
-                    <a:p>
-                      <a:r>
-                        <a:rPr lang="de-DE" u="none">
-                          <a:solidFill>
-                            <a:schemeClr val="tx1"/>
-                          </a:solidFill>
-                        </a:rPr>
-                        <a:t>Kombination</a:t>
-                      </a:r>
-                    </a:p>
-                  </a:txBody>
-                  <a:tcPr>
-                    <a:lnL w="12700" cmpd="sng">
-                      <a:noFill/>
-                    </a:lnL>
-                    <a:lnR w="12700" cmpd="sng">
-                      <a:noFill/>
-                    </a:lnR>
-                    <a:lnT w="12700" cmpd="sng">
-                      <a:noFill/>
-                    </a:lnT>
-                    <a:lnB w="38100" cmpd="sng">
-                      <a:noFill/>
-                    </a:lnB>
-                    <a:lnTlToBr w="12700" cmpd="sng">
-                      <a:noFill/>
-                      <a:prstDash val="solid"/>
-                    </a:lnTlToBr>
-                    <a:lnBlToTr w="12700" cmpd="sng">
-                      <a:noFill/>
-                      <a:prstDash val="solid"/>
-                    </a:lnBlToTr>
-                    <a:noFill/>
-                  </a:tcPr>
-                </a:tc>
-                <a:extLst>
-                  <a:ext uri="{0D108BD9-81ED-4DB2-BD59-A6C34878D82A}">
-                    <a16:rowId xmlns:a16="http://schemas.microsoft.com/office/drawing/2014/main" val="2371139332"/>
-                  </a:ext>
-                </a:extLst>
-              </a:tr>
-              <a:tr h="436563">
-                <a:tc>
-                  <a:txBody>
-                    <a:bodyPr/>
-                    <a:lstStyle/>
-                    <a:p>
-                      <a:r>
-                        <a:rPr lang="de-DE" u="none">
-                          <a:solidFill>
-                            <a:schemeClr val="tx1"/>
-                          </a:solidFill>
-                        </a:rPr>
-                        <a:t>Nach oben / unten scrollen</a:t>
-                      </a:r>
-                    </a:p>
-                  </a:txBody>
-                  <a:tcPr>
-                    <a:lnL w="12700" cmpd="sng">
-                      <a:noFill/>
-                    </a:lnL>
-                    <a:lnR w="12700" cmpd="sng">
-                      <a:noFill/>
-                    </a:lnR>
-                    <a:lnT w="38100" cmpd="sng">
-                      <a:noFill/>
-                    </a:lnT>
-                    <a:lnB w="12700" cmpd="sng">
-                      <a:noFill/>
-                    </a:lnB>
-                    <a:lnTlToBr w="12700" cmpd="sng">
-                      <a:noFill/>
-                      <a:prstDash val="solid"/>
-                    </a:lnTlToBr>
-                    <a:lnBlToTr w="12700" cmpd="sng">
-                      <a:noFill/>
-                      <a:prstDash val="solid"/>
-                    </a:lnBlToTr>
-                    <a:noFill/>
-                  </a:tcPr>
-                </a:tc>
-                <a:tc>
-                  <a:txBody>
-                    <a:bodyPr/>
-                    <a:lstStyle/>
-                    <a:p>
-                      <a:r>
-                        <a:rPr lang="de-DE" u="none">
-                          <a:solidFill>
-                            <a:schemeClr val="tx1"/>
-                          </a:solidFill>
-                        </a:rPr>
-                        <a:t>Strg + ↑↓</a:t>
-                      </a:r>
-                    </a:p>
-                  </a:txBody>
-                  <a:tcPr>
-                    <a:lnL w="12700" cmpd="sng">
-                      <a:noFill/>
-                    </a:lnL>
-                    <a:lnR w="12700" cmpd="sng">
-                      <a:noFill/>
-                    </a:lnR>
-                    <a:lnT w="38100" cmpd="sng">
-                      <a:noFill/>
-                    </a:lnT>
-                    <a:lnB w="12700" cmpd="sng">
-                      <a:noFill/>
-                    </a:lnB>
-                    <a:lnTlToBr w="12700" cmpd="sng">
-                      <a:noFill/>
-                      <a:prstDash val="solid"/>
-                    </a:lnTlToBr>
-                    <a:lnBlToTr w="12700" cmpd="sng">
-                      <a:noFill/>
-                      <a:prstDash val="solid"/>
-                    </a:lnBlToTr>
-                    <a:noFill/>
-                  </a:tcPr>
-                </a:tc>
-                <a:extLst>
-                  <a:ext uri="{0D108BD9-81ED-4DB2-BD59-A6C34878D82A}">
-                    <a16:rowId xmlns:a16="http://schemas.microsoft.com/office/drawing/2014/main" val="3418878006"/>
-                  </a:ext>
-                </a:extLst>
-              </a:tr>
-              <a:tr h="436563">
-                <a:tc>
-                  <a:txBody>
-                    <a:bodyPr/>
-                    <a:lstStyle/>
-                    <a:p>
-                      <a:r>
-                        <a:rPr lang="de-DE" u="none">
-                          <a:solidFill>
-                            <a:schemeClr val="tx1"/>
-                          </a:solidFill>
-                        </a:rPr>
-                        <a:t>Mauszeiger nach links / rechts bewegen</a:t>
-                      </a:r>
-                    </a:p>
-                  </a:txBody>
-                  <a:tcPr>
-                    <a:lnL w="12700" cmpd="sng">
-                      <a:noFill/>
-                    </a:lnL>
-                    <a:lnR w="12700" cmpd="sng">
-                      <a:noFill/>
-                    </a:lnR>
-                    <a:lnT w="38100" cmpd="sng">
-                      <a:noFill/>
-                    </a:lnT>
-                    <a:lnB w="12700" cmpd="sng">
-                      <a:noFill/>
-                    </a:lnB>
-                    <a:lnTlToBr w="12700" cmpd="sng">
-                      <a:noFill/>
-                      <a:prstDash val="solid"/>
-                    </a:lnTlToBr>
-                    <a:lnBlToTr w="12700" cmpd="sng">
-                      <a:noFill/>
-                      <a:prstDash val="solid"/>
-                    </a:lnBlToTr>
-                    <a:noFill/>
-                  </a:tcPr>
-                </a:tc>
-                <a:tc>
-                  <a:txBody>
-                    <a:bodyPr/>
-                    <a:lstStyle/>
-                    <a:p>
-                      <a:r>
-                        <a:rPr lang="de-DE" u="none">
-                          <a:solidFill>
-                            <a:schemeClr val="tx1"/>
-                          </a:solidFill>
-                        </a:rPr>
-                        <a:t>Strg + ←→</a:t>
-                      </a:r>
-                    </a:p>
-                  </a:txBody>
-                  <a:tcPr>
-                    <a:lnL w="12700" cmpd="sng">
-                      <a:noFill/>
-                    </a:lnL>
-                    <a:lnR w="12700" cmpd="sng">
-                      <a:noFill/>
-                    </a:lnR>
-                    <a:lnT w="38100" cmpd="sng">
-                      <a:noFill/>
-                    </a:lnT>
-                    <a:lnB w="12700" cmpd="sng">
-                      <a:noFill/>
-                    </a:lnB>
-                    <a:lnTlToBr w="12700" cmpd="sng">
-                      <a:noFill/>
-                      <a:prstDash val="solid"/>
-                    </a:lnTlToBr>
-                    <a:lnBlToTr w="12700" cmpd="sng">
-                      <a:noFill/>
-                      <a:prstDash val="solid"/>
-                    </a:lnBlToTr>
-                    <a:noFill/>
-                  </a:tcPr>
-                </a:tc>
-                <a:extLst>
-                  <a:ext uri="{0D108BD9-81ED-4DB2-BD59-A6C34878D82A}">
-                    <a16:rowId xmlns:a16="http://schemas.microsoft.com/office/drawing/2014/main" val="1137631992"/>
-                  </a:ext>
-                </a:extLst>
-              </a:tr>
-              <a:tr h="436563">
-                <a:tc>
-                  <a:txBody>
-                    <a:bodyPr/>
-                    <a:lstStyle/>
-                    <a:p>
-                      <a:r>
-                        <a:rPr lang="de-DE" u="none">
-                          <a:solidFill>
-                            <a:schemeClr val="tx1"/>
-                          </a:solidFill>
-                        </a:rPr>
-                        <a:t>Zu Definition / Verwendung springen</a:t>
-                      </a:r>
-                    </a:p>
-                  </a:txBody>
-                  <a:tcPr>
-                    <a:lnL w="12700" cmpd="sng">
-                      <a:noFill/>
-                    </a:lnL>
-                    <a:lnR w="12700" cmpd="sng">
-                      <a:noFill/>
-                    </a:lnR>
-                    <a:lnT w="12700" cmpd="sng">
-                      <a:noFill/>
-                    </a:lnT>
-                    <a:lnB w="12700" cmpd="sng">
-                      <a:noFill/>
-                    </a:lnB>
-                    <a:lnTlToBr w="12700" cmpd="sng">
-                      <a:noFill/>
-                      <a:prstDash val="solid"/>
-                    </a:lnTlToBr>
-                    <a:lnBlToTr w="12700" cmpd="sng">
-                      <a:noFill/>
-                      <a:prstDash val="solid"/>
-                    </a:lnBlToTr>
-                    <a:noFill/>
-                  </a:tcPr>
-                </a:tc>
-                <a:tc>
-                  <a:txBody>
-                    <a:bodyPr/>
-                    <a:lstStyle/>
-                    <a:p>
-                      <a:r>
-                        <a:rPr lang="de-DE" u="none">
-                          <a:solidFill>
-                            <a:schemeClr val="tx1"/>
-                          </a:solidFill>
-                        </a:rPr>
-                        <a:t>Strg + B</a:t>
-                      </a:r>
-                    </a:p>
-                  </a:txBody>
-                  <a:tcPr>
-                    <a:lnL w="12700" cmpd="sng">
-                      <a:noFill/>
-                    </a:lnL>
-                    <a:lnR w="12700" cmpd="sng">
-                      <a:noFill/>
-                    </a:lnR>
-                    <a:lnT w="12700" cmpd="sng">
-                      <a:noFill/>
-                    </a:lnT>
-                    <a:lnB w="12700" cmpd="sng">
-                      <a:noFill/>
-                    </a:lnB>
-                    <a:lnTlToBr w="12700" cmpd="sng">
-                      <a:noFill/>
-                      <a:prstDash val="solid"/>
-                    </a:lnTlToBr>
-                    <a:lnBlToTr w="12700" cmpd="sng">
-                      <a:noFill/>
-                      <a:prstDash val="solid"/>
-                    </a:lnBlToTr>
-                    <a:noFill/>
-                  </a:tcPr>
-                </a:tc>
-                <a:extLst>
-                  <a:ext uri="{0D108BD9-81ED-4DB2-BD59-A6C34878D82A}">
-                    <a16:rowId xmlns:a16="http://schemas.microsoft.com/office/drawing/2014/main" val="735349028"/>
-                  </a:ext>
-                </a:extLst>
-              </a:tr>
-              <a:tr h="436563">
-                <a:tc>
-                  <a:txBody>
-                    <a:bodyPr/>
-                    <a:lstStyle/>
-                    <a:p>
-                      <a:r>
-                        <a:rPr lang="de-DE" u="none">
-                          <a:solidFill>
-                            <a:schemeClr val="tx1"/>
-                          </a:solidFill>
-                        </a:rPr>
-                        <a:t>Methoden überschreiben</a:t>
-                      </a:r>
-                    </a:p>
-                  </a:txBody>
-                  <a:tcPr>
-                    <a:lnL w="12700" cmpd="sng">
-                      <a:noFill/>
-                    </a:lnL>
-                    <a:lnR w="12700" cmpd="sng">
-                      <a:noFill/>
-                    </a:lnR>
-                    <a:lnT w="12700" cmpd="sng">
-                      <a:noFill/>
-                    </a:lnT>
-                    <a:lnB w="12700" cmpd="sng">
-                      <a:noFill/>
-                    </a:lnB>
-                    <a:lnTlToBr w="12700" cmpd="sng">
-                      <a:noFill/>
-                      <a:prstDash val="solid"/>
-                    </a:lnTlToBr>
-                    <a:lnBlToTr w="12700" cmpd="sng">
-                      <a:noFill/>
-                      <a:prstDash val="solid"/>
-                    </a:lnBlToTr>
-                    <a:noFill/>
-                  </a:tcPr>
-                </a:tc>
-                <a:tc>
-                  <a:txBody>
-                    <a:bodyPr/>
-                    <a:lstStyle/>
-                    <a:p>
-                      <a:r>
-                        <a:rPr lang="de-DE" u="none">
-                          <a:solidFill>
-                            <a:schemeClr val="tx1"/>
-                          </a:solidFill>
-                        </a:rPr>
-                        <a:t>Strg + O</a:t>
-                      </a:r>
-                    </a:p>
-                  </a:txBody>
-                  <a:tcPr>
-                    <a:lnL w="12700" cmpd="sng">
-                      <a:noFill/>
-                    </a:lnL>
-                    <a:lnR w="12700" cmpd="sng">
-                      <a:noFill/>
-                    </a:lnR>
-                    <a:lnT w="12700" cmpd="sng">
-                      <a:noFill/>
-                    </a:lnT>
-                    <a:lnB w="12700" cmpd="sng">
-                      <a:noFill/>
-                    </a:lnB>
-                    <a:lnTlToBr w="12700" cmpd="sng">
-                      <a:noFill/>
-                      <a:prstDash val="solid"/>
-                    </a:lnTlToBr>
-                    <a:lnBlToTr w="12700" cmpd="sng">
-                      <a:noFill/>
-                      <a:prstDash val="solid"/>
-                    </a:lnBlToTr>
-                    <a:noFill/>
-                  </a:tcPr>
-                </a:tc>
-                <a:extLst>
-                  <a:ext uri="{0D108BD9-81ED-4DB2-BD59-A6C34878D82A}">
-                    <a16:rowId xmlns:a16="http://schemas.microsoft.com/office/drawing/2014/main" val="1753339480"/>
-                  </a:ext>
-                </a:extLst>
-              </a:tr>
-              <a:tr h="436563">
-                <a:tc>
-                  <a:txBody>
-                    <a:bodyPr/>
-                    <a:lstStyle/>
-                    <a:p>
-                      <a:r>
-                        <a:rPr lang="de-DE" u="none">
-                          <a:solidFill>
-                            <a:schemeClr val="tx1"/>
-                          </a:solidFill>
-                        </a:rPr>
-                        <a:t>Schnell durch das Projekt navigieren</a:t>
-                      </a:r>
-                    </a:p>
-                  </a:txBody>
-                  <a:tcPr>
-                    <a:lnL w="12700" cmpd="sng">
-                      <a:noFill/>
-                    </a:lnL>
-                    <a:lnR w="12700" cmpd="sng">
-                      <a:noFill/>
-                    </a:lnR>
-                    <a:lnT w="12700" cmpd="sng">
-                      <a:noFill/>
-                    </a:lnT>
-                    <a:lnB w="12700" cmpd="sng">
-                      <a:noFill/>
-                    </a:lnB>
-                    <a:lnTlToBr w="12700" cmpd="sng">
-                      <a:noFill/>
-                      <a:prstDash val="solid"/>
-                    </a:lnTlToBr>
-                    <a:lnBlToTr w="12700" cmpd="sng">
-                      <a:noFill/>
-                      <a:prstDash val="solid"/>
-                    </a:lnBlToTr>
-                    <a:noFill/>
-                  </a:tcPr>
-                </a:tc>
-                <a:tc>
-                  <a:txBody>
-                    <a:bodyPr/>
-                    <a:lstStyle/>
-                    <a:p>
-                      <a:r>
-                        <a:rPr lang="de-DE" u="none">
-                          <a:solidFill>
-                            <a:schemeClr val="tx1"/>
-                          </a:solidFill>
-                        </a:rPr>
-                        <a:t>2x Shift</a:t>
-                      </a:r>
-                    </a:p>
-                  </a:txBody>
-                  <a:tcPr>
-                    <a:lnL w="12700" cmpd="sng">
-                      <a:noFill/>
-                    </a:lnL>
-                    <a:lnR w="12700" cmpd="sng">
-                      <a:noFill/>
-                    </a:lnR>
-                    <a:lnT w="12700" cmpd="sng">
-                      <a:noFill/>
-                    </a:lnT>
-                    <a:lnB w="12700" cmpd="sng">
-                      <a:noFill/>
-                    </a:lnB>
-                    <a:lnTlToBr w="12700" cmpd="sng">
-                      <a:noFill/>
-                      <a:prstDash val="solid"/>
-                    </a:lnTlToBr>
-                    <a:lnBlToTr w="12700" cmpd="sng">
-                      <a:noFill/>
-                      <a:prstDash val="solid"/>
-                    </a:lnBlToTr>
-                    <a:noFill/>
-                  </a:tcPr>
-                </a:tc>
-                <a:extLst>
-                  <a:ext uri="{0D108BD9-81ED-4DB2-BD59-A6C34878D82A}">
-                    <a16:rowId xmlns:a16="http://schemas.microsoft.com/office/drawing/2014/main" val="4070795586"/>
-                  </a:ext>
-                </a:extLst>
-              </a:tr>
-              <a:tr h="436563">
-                <a:tc>
-                  <a:txBody>
-                    <a:bodyPr/>
-                    <a:lstStyle/>
-                    <a:p>
-                      <a:r>
-                        <a:rPr lang="de-DE" u="none">
-                          <a:solidFill>
-                            <a:schemeClr val="tx1"/>
-                          </a:solidFill>
-                        </a:rPr>
-                        <a:t>Programm starten</a:t>
-                      </a:r>
-                    </a:p>
-                  </a:txBody>
-                  <a:tcPr>
-                    <a:lnL w="12700" cmpd="sng">
-                      <a:noFill/>
-                    </a:lnL>
-                    <a:lnR w="12700" cmpd="sng">
-                      <a:noFill/>
-                    </a:lnR>
-                    <a:lnT w="12700" cmpd="sng">
-                      <a:noFill/>
-                    </a:lnT>
-                    <a:lnB w="12700" cmpd="sng">
-                      <a:noFill/>
-                    </a:lnB>
-                    <a:lnTlToBr w="12700" cmpd="sng">
-                      <a:noFill/>
-                      <a:prstDash val="solid"/>
-                    </a:lnTlToBr>
-                    <a:lnBlToTr w="12700" cmpd="sng">
-                      <a:noFill/>
-                      <a:prstDash val="solid"/>
-                    </a:lnBlToTr>
-                    <a:noFill/>
-                  </a:tcPr>
-                </a:tc>
-                <a:tc>
-                  <a:txBody>
-                    <a:bodyPr/>
-                    <a:lstStyle/>
-                    <a:p>
-                      <a:r>
-                        <a:rPr lang="de-DE" u="none">
-                          <a:solidFill>
-                            <a:schemeClr val="tx1"/>
-                          </a:solidFill>
-                        </a:rPr>
-                        <a:t>Shift + F10</a:t>
-                      </a:r>
-                    </a:p>
-                  </a:txBody>
-                  <a:tcPr>
-                    <a:lnL w="12700" cmpd="sng">
-                      <a:noFill/>
-                    </a:lnL>
-                    <a:lnR w="12700" cmpd="sng">
-                      <a:noFill/>
-                    </a:lnR>
-                    <a:lnT w="12700" cmpd="sng">
-                      <a:noFill/>
-                    </a:lnT>
-                    <a:lnB w="12700" cmpd="sng">
-                      <a:noFill/>
-                    </a:lnB>
-                    <a:lnTlToBr w="12700" cmpd="sng">
-                      <a:noFill/>
-                      <a:prstDash val="solid"/>
-                    </a:lnTlToBr>
-                    <a:lnBlToTr w="12700" cmpd="sng">
-                      <a:noFill/>
-                      <a:prstDash val="solid"/>
-                    </a:lnBlToTr>
-                    <a:noFill/>
-                  </a:tcPr>
-                </a:tc>
-                <a:extLst>
-                  <a:ext uri="{0D108BD9-81ED-4DB2-BD59-A6C34878D82A}">
-                    <a16:rowId xmlns:a16="http://schemas.microsoft.com/office/drawing/2014/main" val="3524437853"/>
-                  </a:ext>
-                </a:extLst>
-              </a:tr>
-              <a:tr h="436563">
-                <a:tc>
-                  <a:txBody>
-                    <a:bodyPr/>
-                    <a:lstStyle/>
-                    <a:p>
-                      <a:r>
-                        <a:rPr lang="de-DE" u="none">
-                          <a:solidFill>
-                            <a:schemeClr val="tx1"/>
-                          </a:solidFill>
-                        </a:rPr>
-                        <a:t>Code formatieren (schön einrücken)</a:t>
-                      </a:r>
-                    </a:p>
-                  </a:txBody>
-                  <a:tcPr>
-                    <a:lnL w="12700" cmpd="sng">
-                      <a:noFill/>
-                    </a:lnL>
-                    <a:lnR w="12700" cmpd="sng">
-                      <a:noFill/>
-                    </a:lnR>
-                    <a:lnT w="12700" cmpd="sng">
-                      <a:noFill/>
-                    </a:lnT>
-                    <a:lnB w="12700" cmpd="sng">
-                      <a:noFill/>
-                    </a:lnB>
-                    <a:lnTlToBr w="12700" cmpd="sng">
-                      <a:noFill/>
-                      <a:prstDash val="solid"/>
-                    </a:lnTlToBr>
-                    <a:lnBlToTr w="12700" cmpd="sng">
-                      <a:noFill/>
-                      <a:prstDash val="solid"/>
-                    </a:lnBlToTr>
-                    <a:noFill/>
-                  </a:tcPr>
-                </a:tc>
-                <a:tc>
-                  <a:txBody>
-                    <a:bodyPr/>
-                    <a:lstStyle/>
-                    <a:p>
-                      <a:r>
-                        <a:rPr lang="de-DE" u="none">
-                          <a:solidFill>
-                            <a:schemeClr val="tx1"/>
-                          </a:solidFill>
-                        </a:rPr>
-                        <a:t>Strg + Alt + L</a:t>
-                      </a:r>
-                    </a:p>
-                  </a:txBody>
-                  <a:tcPr>
-                    <a:lnL w="12700" cmpd="sng">
-                      <a:noFill/>
-                    </a:lnL>
-                    <a:lnR w="12700" cmpd="sng">
-                      <a:noFill/>
-                    </a:lnR>
-                    <a:lnT w="12700" cmpd="sng">
-                      <a:noFill/>
-                    </a:lnT>
-                    <a:lnB w="12700" cmpd="sng">
-                      <a:noFill/>
-                    </a:lnB>
-                    <a:lnTlToBr w="12700" cmpd="sng">
-                      <a:noFill/>
-                      <a:prstDash val="solid"/>
-                    </a:lnTlToBr>
-                    <a:lnBlToTr w="12700" cmpd="sng">
-                      <a:noFill/>
-                      <a:prstDash val="solid"/>
-                    </a:lnBlToTr>
-                    <a:noFill/>
-                  </a:tcPr>
-                </a:tc>
-                <a:extLst>
-                  <a:ext uri="{0D108BD9-81ED-4DB2-BD59-A6C34878D82A}">
-                    <a16:rowId xmlns:a16="http://schemas.microsoft.com/office/drawing/2014/main" val="2223904026"/>
-                  </a:ext>
-                </a:extLst>
-              </a:tr>
-              <a:tr h="436563">
-                <a:tc>
-                  <a:txBody>
-                    <a:bodyPr/>
-                    <a:lstStyle/>
-                    <a:p>
-                      <a:r>
-                        <a:rPr lang="de-DE" u="none">
-                          <a:solidFill>
-                            <a:schemeClr val="tx1"/>
-                          </a:solidFill>
-                        </a:rPr>
-                        <a:t>Zurück zum vorherigen Mauszeiger</a:t>
-                      </a:r>
-                    </a:p>
-                  </a:txBody>
-                  <a:tcPr>
-                    <a:lnL w="12700" cmpd="sng">
-                      <a:noFill/>
-                    </a:lnL>
-                    <a:lnR w="12700" cmpd="sng">
-                      <a:noFill/>
-                    </a:lnR>
-                    <a:lnT w="12700" cmpd="sng">
-                      <a:noFill/>
-                    </a:lnT>
-                    <a:lnB w="12700" cmpd="sng">
-                      <a:noFill/>
-                    </a:lnB>
-                    <a:lnTlToBr w="12700" cmpd="sng">
-                      <a:noFill/>
-                      <a:prstDash val="solid"/>
-                    </a:lnTlToBr>
-                    <a:lnBlToTr w="12700" cmpd="sng">
-                      <a:noFill/>
-                      <a:prstDash val="solid"/>
-                    </a:lnBlToTr>
-                    <a:noFill/>
-                  </a:tcPr>
-                </a:tc>
-                <a:tc>
-                  <a:txBody>
-                    <a:bodyPr/>
-                    <a:lstStyle/>
-                    <a:p>
-                      <a:r>
-                        <a:rPr lang="de-DE" u="none">
-                          <a:solidFill>
-                            <a:schemeClr val="tx1"/>
-                          </a:solidFill>
-                        </a:rPr>
-                        <a:t>Strg + Alt + ←→</a:t>
-                      </a:r>
-                    </a:p>
-                  </a:txBody>
-                  <a:tcPr>
-                    <a:lnL w="12700" cmpd="sng">
-                      <a:noFill/>
-                    </a:lnL>
-                    <a:lnR w="12700" cmpd="sng">
-                      <a:noFill/>
-                    </a:lnR>
-                    <a:lnT w="12700" cmpd="sng">
-                      <a:noFill/>
-                    </a:lnT>
-                    <a:lnB w="12700" cmpd="sng">
-                      <a:noFill/>
-                    </a:lnB>
-                    <a:lnTlToBr w="12700" cmpd="sng">
-                      <a:noFill/>
-                      <a:prstDash val="solid"/>
-                    </a:lnTlToBr>
-                    <a:lnBlToTr w="12700" cmpd="sng">
-                      <a:noFill/>
-                      <a:prstDash val="solid"/>
-                    </a:lnBlToTr>
-                    <a:noFill/>
-                  </a:tcPr>
-                </a:tc>
-                <a:extLst>
-                  <a:ext uri="{0D108BD9-81ED-4DB2-BD59-A6C34878D82A}">
-                    <a16:rowId xmlns:a16="http://schemas.microsoft.com/office/drawing/2014/main" val="2046807540"/>
-                  </a:ext>
-                </a:extLst>
-              </a:tr>
-              <a:tr h="436563">
-                <a:tc>
-                  <a:txBody>
-                    <a:bodyPr/>
-                    <a:lstStyle/>
-                    <a:p>
-                      <a:r>
-                        <a:rPr lang="de-DE" u="none">
-                          <a:solidFill>
-                            <a:schemeClr val="tx1"/>
-                          </a:solidFill>
-                        </a:rPr>
-                        <a:t>Zu Mauszeiger springen</a:t>
-                      </a:r>
-                    </a:p>
-                  </a:txBody>
-                  <a:tcPr>
-                    <a:lnL w="12700" cmpd="sng">
-                      <a:noFill/>
-                    </a:lnL>
-                    <a:lnR w="12700" cmpd="sng">
-                      <a:noFill/>
-                    </a:lnR>
-                    <a:lnT w="12700" cmpd="sng">
-                      <a:noFill/>
-                    </a:lnT>
-                    <a:lnB w="12700" cmpd="sng">
-                      <a:noFill/>
-                    </a:lnB>
-                    <a:lnTlToBr w="12700" cmpd="sng">
-                      <a:noFill/>
-                      <a:prstDash val="solid"/>
-                    </a:lnTlToBr>
-                    <a:lnBlToTr w="12700" cmpd="sng">
-                      <a:noFill/>
-                      <a:prstDash val="solid"/>
-                    </a:lnBlToTr>
-                    <a:noFill/>
-                  </a:tcPr>
-                </a:tc>
-                <a:tc>
-                  <a:txBody>
-                    <a:bodyPr/>
-                    <a:lstStyle/>
-                    <a:p>
-                      <a:r>
-                        <a:rPr lang="de-DE" u="none">
-                          <a:solidFill>
-                            <a:schemeClr val="tx1"/>
-                          </a:solidFill>
-                        </a:rPr>
-                        <a:t>Strg + M</a:t>
-                      </a:r>
-                    </a:p>
-                  </a:txBody>
-                  <a:tcPr>
-                    <a:lnL w="12700" cmpd="sng">
-                      <a:noFill/>
-                    </a:lnL>
-                    <a:lnR w="12700" cmpd="sng">
-                      <a:noFill/>
-                    </a:lnR>
-                    <a:lnT w="12700" cmpd="sng">
-                      <a:noFill/>
-                    </a:lnT>
-                    <a:lnB w="12700" cmpd="sng">
-                      <a:noFill/>
-                    </a:lnB>
-                    <a:lnTlToBr w="12700" cmpd="sng">
-                      <a:noFill/>
-                      <a:prstDash val="solid"/>
-                    </a:lnTlToBr>
-                    <a:lnBlToTr w="12700" cmpd="sng">
-                      <a:noFill/>
-                      <a:prstDash val="solid"/>
-                    </a:lnBlToTr>
-                    <a:noFill/>
-                  </a:tcPr>
-                </a:tc>
-                <a:extLst>
-                  <a:ext uri="{0D108BD9-81ED-4DB2-BD59-A6C34878D82A}">
-                    <a16:rowId xmlns:a16="http://schemas.microsoft.com/office/drawing/2014/main" val="673940612"/>
-                  </a:ext>
-                </a:extLst>
-              </a:tr>
-            </a:tbl>
-          </a:graphicData>
-        </a:graphic>
-      </p:graphicFrame>
-    </p:spTree>
-    <p:extLst>
-      <p:ext uri="{BB962C8B-B14F-4D97-AF65-F5344CB8AC3E}">
-        <p14:creationId xmlns:p14="http://schemas.microsoft.com/office/powerpoint/2010/main" val="3199209318"/>
+        <p14:creationId xmlns:p14="http://schemas.microsoft.com/office/powerpoint/2010/main" val="2910027476"/>
       </p:ext>
     </p:extLst>
   </p:cSld>
@@ -6715,12 +6108,12 @@
 <file path=ppt/theme/theme1.xml><?xml version="1.0" encoding="utf-8"?>
 <a:theme xmlns:a="http://schemas.openxmlformats.org/drawingml/2006/main" name="Office">
   <a:themeElements>
-    <a:clrScheme name="Office">
+    <a:clrScheme name="Custom 4">
       <a:dk1>
         <a:sysClr val="windowText" lastClr="000000"/>
       </a:dk1>
       <a:lt1>
-        <a:sysClr val="window" lastClr="FFFFFF"/>
+        <a:srgbClr val="F2F5FA"/>
       </a:lt1>
       <a:dk2>
         <a:srgbClr val="44546A"/>

--- a/src/Infos.pptx
+++ b/src/Infos.pptx
@@ -10,7 +10,7 @@
     <p:sldId id="321" r:id="rId4"/>
     <p:sldId id="324" r:id="rId5"/>
     <p:sldId id="322" r:id="rId6"/>
-    <p:sldId id="323" r:id="rId7"/>
+    <p:sldId id="325" r:id="rId7"/>
   </p:sldIdLst>
   <p:sldSz cx="12192000" cy="6858000"/>
   <p:notesSz cx="7104063" cy="10234613"/>
@@ -254,7 +254,7 @@
           <a:p>
             <a:fld id="{7F74B683-5B55-47E9-B45C-EB67E1285507}" type="datetimeFigureOut">
               <a:rPr lang="de-DE" smtClean="0"/>
-              <a:t>26.09.2025</a:t>
+              <a:t>14.11.2025</a:t>
             </a:fld>
             <a:endParaRPr lang="de-DE"/>
           </a:p>
@@ -424,7 +424,7 @@
           <a:p>
             <a:fld id="{7F74B683-5B55-47E9-B45C-EB67E1285507}" type="datetimeFigureOut">
               <a:rPr lang="de-DE" smtClean="0"/>
-              <a:t>26.09.2025</a:t>
+              <a:t>14.11.2025</a:t>
             </a:fld>
             <a:endParaRPr lang="de-DE"/>
           </a:p>
@@ -604,7 +604,7 @@
           <a:p>
             <a:fld id="{7F74B683-5B55-47E9-B45C-EB67E1285507}" type="datetimeFigureOut">
               <a:rPr lang="de-DE" smtClean="0"/>
-              <a:t>26.09.2025</a:t>
+              <a:t>14.11.2025</a:t>
             </a:fld>
             <a:endParaRPr lang="de-DE"/>
           </a:p>
@@ -774,7 +774,7 @@
           <a:p>
             <a:fld id="{7F74B683-5B55-47E9-B45C-EB67E1285507}" type="datetimeFigureOut">
               <a:rPr lang="de-DE" smtClean="0"/>
-              <a:t>26.09.2025</a:t>
+              <a:t>14.11.2025</a:t>
             </a:fld>
             <a:endParaRPr lang="de-DE"/>
           </a:p>
@@ -1020,7 +1020,7 @@
           <a:p>
             <a:fld id="{7F74B683-5B55-47E9-B45C-EB67E1285507}" type="datetimeFigureOut">
               <a:rPr lang="de-DE" smtClean="0"/>
-              <a:t>26.09.2025</a:t>
+              <a:t>14.11.2025</a:t>
             </a:fld>
             <a:endParaRPr lang="de-DE"/>
           </a:p>
@@ -1252,7 +1252,7 @@
           <a:p>
             <a:fld id="{7F74B683-5B55-47E9-B45C-EB67E1285507}" type="datetimeFigureOut">
               <a:rPr lang="de-DE" smtClean="0"/>
-              <a:t>26.09.2025</a:t>
+              <a:t>14.11.2025</a:t>
             </a:fld>
             <a:endParaRPr lang="de-DE"/>
           </a:p>
@@ -1619,7 +1619,7 @@
           <a:p>
             <a:fld id="{7F74B683-5B55-47E9-B45C-EB67E1285507}" type="datetimeFigureOut">
               <a:rPr lang="de-DE" smtClean="0"/>
-              <a:t>26.09.2025</a:t>
+              <a:t>14.11.2025</a:t>
             </a:fld>
             <a:endParaRPr lang="de-DE"/>
           </a:p>
@@ -1737,7 +1737,7 @@
           <a:p>
             <a:fld id="{7F74B683-5B55-47E9-B45C-EB67E1285507}" type="datetimeFigureOut">
               <a:rPr lang="de-DE" smtClean="0"/>
-              <a:t>26.09.2025</a:t>
+              <a:t>14.11.2025</a:t>
             </a:fld>
             <a:endParaRPr lang="de-DE"/>
           </a:p>
@@ -1832,7 +1832,7 @@
           <a:p>
             <a:fld id="{7F74B683-5B55-47E9-B45C-EB67E1285507}" type="datetimeFigureOut">
               <a:rPr lang="de-DE" smtClean="0"/>
-              <a:t>26.09.2025</a:t>
+              <a:t>14.11.2025</a:t>
             </a:fld>
             <a:endParaRPr lang="de-DE"/>
           </a:p>
@@ -2109,7 +2109,7 @@
           <a:p>
             <a:fld id="{7F74B683-5B55-47E9-B45C-EB67E1285507}" type="datetimeFigureOut">
               <a:rPr lang="de-DE" smtClean="0"/>
-              <a:t>26.09.2025</a:t>
+              <a:t>14.11.2025</a:t>
             </a:fld>
             <a:endParaRPr lang="de-DE"/>
           </a:p>
@@ -2366,7 +2366,7 @@
           <a:p>
             <a:fld id="{7F74B683-5B55-47E9-B45C-EB67E1285507}" type="datetimeFigureOut">
               <a:rPr lang="de-DE" smtClean="0"/>
-              <a:t>26.09.2025</a:t>
+              <a:t>14.11.2025</a:t>
             </a:fld>
             <a:endParaRPr lang="de-DE"/>
           </a:p>
@@ -2579,7 +2579,7 @@
           <a:p>
             <a:fld id="{7F74B683-5B55-47E9-B45C-EB67E1285507}" type="datetimeFigureOut">
               <a:rPr lang="de-DE" smtClean="0"/>
-              <a:t>26.09.2025</a:t>
+              <a:t>14.11.2025</a:t>
             </a:fld>
             <a:endParaRPr lang="de-DE"/>
           </a:p>
@@ -3031,7 +3031,7 @@
           <a:p>
             <a:r>
               <a:rPr lang="de-DE" dirty="0"/>
-              <a:t>Informationen</a:t>
+              <a:t>Organisatorisches</a:t>
             </a:r>
           </a:p>
         </p:txBody>
@@ -3895,7 +3895,118 @@
           <a:bodyPr/>
           <a:lstStyle/>
           <a:p>
-            <a:endParaRPr lang="de-DE"/>
+            <a:r>
+              <a:rPr lang="de-DE" dirty="0"/>
+              <a:t>Dokumentation</a:t>
+            </a:r>
+          </a:p>
+          <a:p>
+            <a:r>
+              <a:rPr lang="de-DE" dirty="0" err="1"/>
+              <a:t>StackOverflow</a:t>
+            </a:r>
+            <a:endParaRPr lang="de-DE" dirty="0"/>
+          </a:p>
+          <a:p>
+            <a:r>
+              <a:rPr lang="de-DE" dirty="0" err="1"/>
+              <a:t>ChatGPT</a:t>
+            </a:r>
+            <a:endParaRPr lang="de-DE" dirty="0"/>
+          </a:p>
+          <a:p>
+            <a:pPr lvl="1">
+              <a:buFont typeface="Wingdings" panose="05000000000000000000" pitchFamily="2" charset="2"/>
+              <a:buChar char="ü"/>
+            </a:pPr>
+            <a:r>
+              <a:rPr lang="de-DE" dirty="0"/>
+              <a:t>Code erklären lassen („Was bedeuten die Parameter dieser Methode?“)</a:t>
+            </a:r>
+          </a:p>
+          <a:p>
+            <a:pPr lvl="1">
+              <a:buFont typeface="Wingdings" panose="05000000000000000000" pitchFamily="2" charset="2"/>
+              <a:buChar char="ü"/>
+            </a:pPr>
+            <a:r>
+              <a:rPr lang="de-DE" dirty="0"/>
+              <a:t>Syntax und </a:t>
+            </a:r>
+            <a:r>
+              <a:rPr lang="de-DE" dirty="0">
+                <a:solidFill>
+                  <a:srgbClr val="FFCCFF"/>
+                </a:solidFill>
+              </a:rPr>
+              <a:t>APIs</a:t>
+            </a:r>
+            <a:r>
+              <a:rPr lang="de-DE" dirty="0"/>
+              <a:t> verstehen („Wie spiele ich in </a:t>
+            </a:r>
+            <a:r>
+              <a:rPr lang="de-DE" dirty="0" err="1"/>
+              <a:t>libGDX</a:t>
+            </a:r>
+            <a:r>
+              <a:rPr lang="de-DE" dirty="0"/>
+              <a:t> Sounds ab?“)</a:t>
+            </a:r>
+          </a:p>
+          <a:p>
+            <a:pPr lvl="1">
+              <a:buFont typeface="Wingdings" panose="05000000000000000000" pitchFamily="2" charset="2"/>
+              <a:buChar char="ü"/>
+            </a:pPr>
+            <a:r>
+              <a:rPr lang="de-DE" dirty="0"/>
+              <a:t>Code verbessern („Wie kann ich diese Spiellogik eleganter programmieren?“)</a:t>
+            </a:r>
+          </a:p>
+          <a:p>
+            <a:pPr lvl="2"/>
+            <a:r>
+              <a:rPr lang="de-DE" dirty="0"/>
+              <a:t>Umstrukturierung ohne semantische Änderung nennt man auch </a:t>
+            </a:r>
+            <a:r>
+              <a:rPr lang="de-DE" dirty="0" err="1">
+                <a:solidFill>
+                  <a:srgbClr val="FFCCFF"/>
+                </a:solidFill>
+              </a:rPr>
+              <a:t>Refactoring</a:t>
+            </a:r>
+            <a:r>
+              <a:rPr lang="de-DE" dirty="0"/>
+              <a:t>.</a:t>
+            </a:r>
+          </a:p>
+          <a:p>
+            <a:pPr lvl="1">
+              <a:buFont typeface="Wingdings" panose="05000000000000000000" pitchFamily="2" charset="2"/>
+              <a:buChar char="ü"/>
+            </a:pPr>
+            <a:r>
+              <a:rPr lang="de-DE" dirty="0"/>
+              <a:t>Bugs finden („Wieso kann man die Spielfigur nicht sehen?“)</a:t>
+            </a:r>
+          </a:p>
+          <a:p>
+            <a:pPr lvl="1">
+              <a:buFont typeface="Symbol" panose="05050102010706020507" pitchFamily="18" charset="2"/>
+              <a:buChar char="-"/>
+            </a:pPr>
+            <a:r>
+              <a:rPr lang="de-DE" dirty="0"/>
+              <a:t>Code schreiben lassen, ohne </a:t>
+            </a:r>
+            <a:r>
+              <a:rPr lang="de-DE"/>
+              <a:t>diesen nachzuvollziehen</a:t>
+            </a:r>
+            <a:endParaRPr lang="de-DE" dirty="0"/>
           </a:p>
         </p:txBody>
       </p:sp>
@@ -3973,7 +4084,7 @@
             <p:ph idx="1"/>
             <p:extLst>
               <p:ext uri="{D42A27DB-BD31-4B8C-83A1-F6EECF244321}">
-                <p14:modId xmlns:p14="http://schemas.microsoft.com/office/powerpoint/2010/main" val="3442310689"/>
+                <p14:modId xmlns:p14="http://schemas.microsoft.com/office/powerpoint/2010/main" val="3199138706"/>
               </p:ext>
             </p:extLst>
           </p:nvPr>
@@ -4308,7 +4419,23 @@
                             <a:schemeClr val="tx1"/>
                           </a:solidFill>
                         </a:rPr>
-                        <a:t>IDE, Befehle, Variablen, Datentypen und Operationen</a:t>
+                        <a:t>IDE, Befehle</a:t>
+                      </a:r>
+                      <a:r>
+                        <a:rPr lang="de-DE">
+                          <a:solidFill>
+                            <a:schemeClr val="tx1"/>
+                          </a:solidFill>
+                        </a:rPr>
+                        <a:t>, Aussagenlogik, Variablen</a:t>
+                      </a:r>
+                      <a:r>
+                        <a:rPr lang="de-DE" dirty="0">
+                          <a:solidFill>
+                            <a:schemeClr val="tx1"/>
+                          </a:solidFill>
+                        </a:rPr>
+                        <a:t>, Datentypen und Operationen</a:t>
                       </a:r>
                     </a:p>
                   </a:txBody>
@@ -6044,7 +6171,7 @@
           <p:cNvPr id="2" name="Title 1">
             <a:extLst>
               <a:ext uri="{FF2B5EF4-FFF2-40B4-BE49-F238E27FC236}">
-                <a16:creationId xmlns:a16="http://schemas.microsoft.com/office/drawing/2014/main" id="{367C06D6-1C95-46F8-8055-08448BD11B9E}"/>
+                <a16:creationId xmlns:a16="http://schemas.microsoft.com/office/drawing/2014/main" id="{3D9C3770-C93B-4913-BE59-CF700A30DA8A}"/>
               </a:ext>
             </a:extLst>
           </p:cNvPr>
@@ -6062,7 +6189,7 @@
           <a:p>
             <a:r>
               <a:rPr lang="de-DE" dirty="0"/>
-              <a:t>Frühstudium</a:t>
+              <a:t>Weitere Vertiefungsmöglichkeiten</a:t>
             </a:r>
           </a:p>
         </p:txBody>
@@ -6072,7 +6199,7 @@
           <p:cNvPr id="3" name="Content Placeholder 2">
             <a:extLst>
               <a:ext uri="{FF2B5EF4-FFF2-40B4-BE49-F238E27FC236}">
-                <a16:creationId xmlns:a16="http://schemas.microsoft.com/office/drawing/2014/main" id="{C36264C7-7BBF-49C6-9F95-F804081052B4}"/>
+                <a16:creationId xmlns:a16="http://schemas.microsoft.com/office/drawing/2014/main" id="{D4CAA8F3-6B2A-4286-98FA-7400AFE72384}"/>
               </a:ext>
             </a:extLst>
           </p:cNvPr>
@@ -6088,14 +6215,52 @@
           <a:bodyPr/>
           <a:lstStyle/>
           <a:p>
-            <a:endParaRPr lang="de-DE"/>
+            <a:r>
+              <a:rPr lang="de-DE" dirty="0">
+                <a:hlinkClick r:id="rId2"/>
+              </a:rPr>
+              <a:t>Frühstudium</a:t>
+            </a:r>
+            <a:endParaRPr lang="de-DE" dirty="0"/>
+          </a:p>
+          <a:p>
+            <a:r>
+              <a:rPr lang="de-DE" dirty="0"/>
+              <a:t>Spieleentwicklung mit Game </a:t>
+            </a:r>
+            <a:r>
+              <a:rPr lang="de-DE" dirty="0" err="1"/>
+              <a:t>Engines</a:t>
+            </a:r>
+            <a:endParaRPr lang="de-DE" dirty="0">
+              <a:hlinkClick r:id="rId3"/>
+            </a:endParaRPr>
+          </a:p>
+          <a:p>
+            <a:r>
+              <a:rPr lang="de-DE" dirty="0">
+                <a:hlinkClick r:id="rId3"/>
+              </a:rPr>
+              <a:t>Game Jams</a:t>
+            </a:r>
+            <a:endParaRPr lang="de-DE" dirty="0"/>
+          </a:p>
+          <a:p>
+            <a:r>
+              <a:rPr lang="de-DE" dirty="0" err="1"/>
+              <a:t>Modding</a:t>
+            </a:r>
+            <a:endParaRPr lang="de-DE" dirty="0"/>
+          </a:p>
+          <a:p>
+            <a:endParaRPr lang="de-DE" dirty="0"/>
           </a:p>
         </p:txBody>
       </p:sp>
     </p:spTree>
     <p:extLst>
       <p:ext uri="{BB962C8B-B14F-4D97-AF65-F5344CB8AC3E}">
-        <p14:creationId xmlns:p14="http://schemas.microsoft.com/office/powerpoint/2010/main" val="2910027476"/>
+        <p14:creationId xmlns:p14="http://schemas.microsoft.com/office/powerpoint/2010/main" val="1857265"/>
       </p:ext>
     </p:extLst>
   </p:cSld>

--- a/src/Infos.pptx
+++ b/src/Infos.pptx
@@ -254,7 +254,7 @@
           <a:p>
             <a:fld id="{7F74B683-5B55-47E9-B45C-EB67E1285507}" type="datetimeFigureOut">
               <a:rPr lang="de-DE" smtClean="0"/>
-              <a:t>14.11.2025</a:t>
+              <a:t>20.02.2026</a:t>
             </a:fld>
             <a:endParaRPr lang="de-DE"/>
           </a:p>
@@ -424,7 +424,7 @@
           <a:p>
             <a:fld id="{7F74B683-5B55-47E9-B45C-EB67E1285507}" type="datetimeFigureOut">
               <a:rPr lang="de-DE" smtClean="0"/>
-              <a:t>14.11.2025</a:t>
+              <a:t>20.02.2026</a:t>
             </a:fld>
             <a:endParaRPr lang="de-DE"/>
           </a:p>
@@ -604,7 +604,7 @@
           <a:p>
             <a:fld id="{7F74B683-5B55-47E9-B45C-EB67E1285507}" type="datetimeFigureOut">
               <a:rPr lang="de-DE" smtClean="0"/>
-              <a:t>14.11.2025</a:t>
+              <a:t>20.02.2026</a:t>
             </a:fld>
             <a:endParaRPr lang="de-DE"/>
           </a:p>
@@ -774,7 +774,7 @@
           <a:p>
             <a:fld id="{7F74B683-5B55-47E9-B45C-EB67E1285507}" type="datetimeFigureOut">
               <a:rPr lang="de-DE" smtClean="0"/>
-              <a:t>14.11.2025</a:t>
+              <a:t>20.02.2026</a:t>
             </a:fld>
             <a:endParaRPr lang="de-DE"/>
           </a:p>
@@ -1020,7 +1020,7 @@
           <a:p>
             <a:fld id="{7F74B683-5B55-47E9-B45C-EB67E1285507}" type="datetimeFigureOut">
               <a:rPr lang="de-DE" smtClean="0"/>
-              <a:t>14.11.2025</a:t>
+              <a:t>20.02.2026</a:t>
             </a:fld>
             <a:endParaRPr lang="de-DE"/>
           </a:p>
@@ -1252,7 +1252,7 @@
           <a:p>
             <a:fld id="{7F74B683-5B55-47E9-B45C-EB67E1285507}" type="datetimeFigureOut">
               <a:rPr lang="de-DE" smtClean="0"/>
-              <a:t>14.11.2025</a:t>
+              <a:t>20.02.2026</a:t>
             </a:fld>
             <a:endParaRPr lang="de-DE"/>
           </a:p>
@@ -1619,7 +1619,7 @@
           <a:p>
             <a:fld id="{7F74B683-5B55-47E9-B45C-EB67E1285507}" type="datetimeFigureOut">
               <a:rPr lang="de-DE" smtClean="0"/>
-              <a:t>14.11.2025</a:t>
+              <a:t>20.02.2026</a:t>
             </a:fld>
             <a:endParaRPr lang="de-DE"/>
           </a:p>
@@ -1737,7 +1737,7 @@
           <a:p>
             <a:fld id="{7F74B683-5B55-47E9-B45C-EB67E1285507}" type="datetimeFigureOut">
               <a:rPr lang="de-DE" smtClean="0"/>
-              <a:t>14.11.2025</a:t>
+              <a:t>20.02.2026</a:t>
             </a:fld>
             <a:endParaRPr lang="de-DE"/>
           </a:p>
@@ -1832,7 +1832,7 @@
           <a:p>
             <a:fld id="{7F74B683-5B55-47E9-B45C-EB67E1285507}" type="datetimeFigureOut">
               <a:rPr lang="de-DE" smtClean="0"/>
-              <a:t>14.11.2025</a:t>
+              <a:t>20.02.2026</a:t>
             </a:fld>
             <a:endParaRPr lang="de-DE"/>
           </a:p>
@@ -2109,7 +2109,7 @@
           <a:p>
             <a:fld id="{7F74B683-5B55-47E9-B45C-EB67E1285507}" type="datetimeFigureOut">
               <a:rPr lang="de-DE" smtClean="0"/>
-              <a:t>14.11.2025</a:t>
+              <a:t>20.02.2026</a:t>
             </a:fld>
             <a:endParaRPr lang="de-DE"/>
           </a:p>
@@ -2366,7 +2366,7 @@
           <a:p>
             <a:fld id="{7F74B683-5B55-47E9-B45C-EB67E1285507}" type="datetimeFigureOut">
               <a:rPr lang="de-DE" smtClean="0"/>
-              <a:t>14.11.2025</a:t>
+              <a:t>20.02.2026</a:t>
             </a:fld>
             <a:endParaRPr lang="de-DE"/>
           </a:p>
@@ -2579,7 +2579,7 @@
           <a:p>
             <a:fld id="{7F74B683-5B55-47E9-B45C-EB67E1285507}" type="datetimeFigureOut">
               <a:rPr lang="de-DE" smtClean="0"/>
-              <a:t>14.11.2025</a:t>
+              <a:t>20.02.2026</a:t>
             </a:fld>
             <a:endParaRPr lang="de-DE"/>
           </a:p>
@@ -3205,7 +3205,7 @@
                   <a:noFill/>
                 </a:ln>
                 <a:effectLst/>
-                <a:latin typeface="Calibri Light" panose="020F0302020204030204" pitchFamily="34" charset="0"/>
+                <a:latin typeface="Nunito" pitchFamily="2" charset="0"/>
                 <a:ea typeface="Times New Roman" panose="02020603050405020304" pitchFamily="18" charset="0"/>
                 <a:cs typeface="Times New Roman" panose="02020603050405020304" pitchFamily="18" charset="0"/>
               </a:rPr>
@@ -3234,7 +3234,7 @@
         <p:spPr/>
         <p:txBody>
           <a:bodyPr>
-            <a:normAutofit fontScale="70000" lnSpcReduction="20000"/>
+            <a:normAutofit lnSpcReduction="10000"/>
           </a:bodyPr>
           <a:lstStyle/>
           <a:p>
@@ -3255,18 +3255,18 @@
               <a:tabLst/>
             </a:pPr>
             <a:r>
-              <a:rPr kumimoji="0" lang="de-DE" altLang="de-DE" sz="2800" b="0" i="0" u="none" strike="noStrike" cap="none" normalizeH="0" baseline="0" dirty="0">
+              <a:rPr kumimoji="0" lang="de-DE" altLang="de-DE" sz="1800" b="0" i="0" u="none" strike="noStrike" cap="none" normalizeH="0" baseline="0" dirty="0">
                 <a:ln>
                   <a:noFill/>
                 </a:ln>
                 <a:effectLst/>
-                <a:latin typeface="Calibri" panose="020F0502020204030204" pitchFamily="34" charset="0"/>
+                <a:latin typeface="IBM Plex Sans" panose="020B0503050203000203" pitchFamily="34" charset="0"/>
                 <a:ea typeface="Calibri" panose="020F0502020204030204" pitchFamily="34" charset="0"/>
                 <a:cs typeface="Times New Roman" panose="02020603050405020304" pitchFamily="18" charset="0"/>
               </a:rPr>
               <a:t>Hallo!</a:t>
             </a:r>
-            <a:endParaRPr kumimoji="0" lang="de-DE" altLang="de-DE" sz="800" b="0" i="0" u="none" strike="noStrike" cap="none" normalizeH="0" baseline="0" dirty="0">
+            <a:endParaRPr kumimoji="0" lang="de-DE" altLang="de-DE" sz="1800" b="0" i="0" u="none" strike="noStrike" cap="none" normalizeH="0" baseline="0" dirty="0">
               <a:ln>
                 <a:noFill/>
               </a:ln>
@@ -3286,18 +3286,18 @@
               </a:spcAft>
             </a:pPr>
             <a:r>
-              <a:rPr kumimoji="0" lang="de-DE" altLang="de-DE" sz="2800" b="0" i="0" u="none" strike="noStrike" cap="none" normalizeH="0" baseline="0" dirty="0">
+              <a:rPr kumimoji="0" lang="de-DE" altLang="de-DE" sz="1800" b="0" i="0" u="none" strike="noStrike" cap="none" normalizeH="0" baseline="0" dirty="0">
                 <a:ln>
                   <a:noFill/>
                 </a:ln>
                 <a:effectLst/>
-                <a:latin typeface="Calibri" panose="020F0502020204030204" pitchFamily="34" charset="0"/>
+                <a:latin typeface="IBM Plex Sans" panose="020B0503050203000203" pitchFamily="34" charset="0"/>
                 <a:ea typeface="Calibri" panose="020F0502020204030204" pitchFamily="34" charset="0"/>
                 <a:cs typeface="Times New Roman" panose="02020603050405020304" pitchFamily="18" charset="0"/>
               </a:rPr>
-              <a:t>Am 22.02. beginnt der Programmierkurs an der Junior Uni.</a:t>
-            </a:r>
-            <a:endParaRPr lang="de-DE" altLang="de-DE" sz="800" dirty="0"/>
+              <a:t>Am 22.02.2025 beginnt der Programmierkurs an der Junior Uni.</a:t>
+            </a:r>
+            <a:endParaRPr lang="de-DE" altLang="de-DE" sz="1800" dirty="0"/>
           </a:p>
           <a:p>
             <a:pPr eaLnBrk="0" fontAlgn="base" hangingPunct="0">
@@ -3312,64 +3312,64 @@
               </a:spcAft>
             </a:pPr>
             <a:r>
-              <a:rPr kumimoji="0" lang="de-DE" altLang="de-DE" sz="2800" b="0" i="0" u="none" strike="noStrike" cap="none" normalizeH="0" baseline="0" dirty="0">
+              <a:rPr kumimoji="0" lang="de-DE" altLang="de-DE" sz="1800" b="0" i="0" u="none" strike="noStrike" cap="none" normalizeH="0" baseline="0" dirty="0">
                 <a:ln>
                   <a:noFill/>
                 </a:ln>
                 <a:effectLst/>
-                <a:latin typeface="Calibri" panose="020F0502020204030204" pitchFamily="34" charset="0"/>
+                <a:latin typeface="IBM Plex Sans" panose="020B0503050203000203" pitchFamily="34" charset="0"/>
                 <a:ea typeface="Calibri" panose="020F0502020204030204" pitchFamily="34" charset="0"/>
                 <a:cs typeface="Times New Roman" panose="02020603050405020304" pitchFamily="18" charset="0"/>
               </a:rPr>
               <a:t>Standort: Gesundheitspark Altenessen (ehem. Marienhospital)</a:t>
             </a:r>
             <a:br>
-              <a:rPr kumimoji="0" lang="de-DE" altLang="de-DE" sz="2800" b="0" i="0" u="none" strike="noStrike" cap="none" normalizeH="0" baseline="0" dirty="0">
+              <a:rPr kumimoji="0" lang="de-DE" altLang="de-DE" sz="1800" b="0" i="0" u="none" strike="noStrike" cap="none" normalizeH="0" baseline="0" dirty="0">
                 <a:ln>
                   <a:noFill/>
                 </a:ln>
                 <a:effectLst/>
-                <a:latin typeface="Calibri" panose="020F0502020204030204" pitchFamily="34" charset="0"/>
+                <a:latin typeface="IBM Plex Sans" panose="020B0503050203000203" pitchFamily="34" charset="0"/>
                 <a:ea typeface="Calibri" panose="020F0502020204030204" pitchFamily="34" charset="0"/>
                 <a:cs typeface="Times New Roman" panose="02020603050405020304" pitchFamily="18" charset="0"/>
               </a:rPr>
             </a:br>
             <a:r>
-              <a:rPr kumimoji="0" lang="de-DE" altLang="de-DE" sz="2800" b="0" i="0" u="none" strike="noStrike" cap="none" normalizeH="0" baseline="0" dirty="0">
+              <a:rPr kumimoji="0" lang="de-DE" altLang="de-DE" sz="1800" b="0" i="0" u="none" strike="noStrike" cap="none" normalizeH="0" baseline="0" dirty="0">
                 <a:ln>
                   <a:noFill/>
                 </a:ln>
                 <a:effectLst/>
-                <a:latin typeface="Calibri" panose="020F0502020204030204" pitchFamily="34" charset="0"/>
+                <a:latin typeface="IBM Plex Sans" panose="020B0503050203000203" pitchFamily="34" charset="0"/>
                 <a:ea typeface="Calibri" panose="020F0502020204030204" pitchFamily="34" charset="0"/>
                 <a:cs typeface="Times New Roman" panose="02020603050405020304" pitchFamily="18" charset="0"/>
               </a:rPr>
               <a:t>Hospitalstraße 24</a:t>
             </a:r>
             <a:br>
-              <a:rPr kumimoji="0" lang="de-DE" altLang="de-DE" sz="2800" b="0" i="0" u="none" strike="noStrike" cap="none" normalizeH="0" baseline="0" dirty="0">
+              <a:rPr kumimoji="0" lang="de-DE" altLang="de-DE" sz="1800" b="0" i="0" u="none" strike="noStrike" cap="none" normalizeH="0" baseline="0" dirty="0">
                 <a:ln>
                   <a:noFill/>
                 </a:ln>
                 <a:effectLst/>
-                <a:latin typeface="Calibri" panose="020F0502020204030204" pitchFamily="34" charset="0"/>
+                <a:latin typeface="IBM Plex Sans" panose="020B0503050203000203" pitchFamily="34" charset="0"/>
                 <a:ea typeface="Calibri" panose="020F0502020204030204" pitchFamily="34" charset="0"/>
                 <a:cs typeface="Times New Roman" panose="02020603050405020304" pitchFamily="18" charset="0"/>
               </a:rPr>
             </a:br>
             <a:r>
-              <a:rPr kumimoji="0" lang="de-DE" altLang="de-DE" sz="2800" b="0" i="0" u="none" strike="noStrike" cap="none" normalizeH="0" baseline="0" dirty="0">
+              <a:rPr kumimoji="0" lang="de-DE" altLang="de-DE" sz="1800" b="0" i="0" u="none" strike="noStrike" cap="none" normalizeH="0" baseline="0" dirty="0">
                 <a:ln>
                   <a:noFill/>
                 </a:ln>
                 <a:effectLst/>
-                <a:latin typeface="Calibri" panose="020F0502020204030204" pitchFamily="34" charset="0"/>
+                <a:latin typeface="IBM Plex Sans" panose="020B0503050203000203" pitchFamily="34" charset="0"/>
                 <a:ea typeface="Calibri" panose="020F0502020204030204" pitchFamily="34" charset="0"/>
                 <a:cs typeface="Times New Roman" panose="02020603050405020304" pitchFamily="18" charset="0"/>
               </a:rPr>
               <a:t>45329 Essen</a:t>
             </a:r>
-            <a:endParaRPr lang="de-DE" altLang="de-DE" sz="800" dirty="0"/>
+            <a:endParaRPr lang="de-DE" altLang="de-DE" sz="1800" dirty="0"/>
           </a:p>
           <a:p>
             <a:pPr eaLnBrk="0" fontAlgn="base" hangingPunct="0">
@@ -3384,12 +3384,12 @@
               </a:spcAft>
             </a:pPr>
             <a:r>
-              <a:rPr kumimoji="0" lang="de-DE" altLang="de-DE" sz="2800" b="0" i="0" u="none" strike="noStrike" cap="none" normalizeH="0" baseline="0" dirty="0">
+              <a:rPr kumimoji="0" lang="de-DE" altLang="de-DE" sz="1800" b="0" i="0" u="none" strike="noStrike" cap="none" normalizeH="0" baseline="0" dirty="0">
                 <a:ln>
                   <a:noFill/>
                 </a:ln>
                 <a:effectLst/>
-                <a:latin typeface="Calibri" panose="020F0502020204030204" pitchFamily="34" charset="0"/>
+                <a:latin typeface="IBM Plex Sans" panose="020B0503050203000203" pitchFamily="34" charset="0"/>
                 <a:ea typeface="Calibri" panose="020F0502020204030204" pitchFamily="34" charset="0"/>
                 <a:cs typeface="Times New Roman" panose="02020603050405020304" pitchFamily="18" charset="0"/>
               </a:rPr>
@@ -3409,50 +3409,50 @@
               </a:spcAft>
             </a:pPr>
             <a:r>
-              <a:rPr lang="de-DE" altLang="de-DE" dirty="0">
-                <a:latin typeface="Calibri" panose="020F0502020204030204" pitchFamily="34" charset="0"/>
+              <a:rPr lang="de-DE" altLang="de-DE" sz="1800" dirty="0">
+                <a:latin typeface="IBM Plex Sans" panose="020B0503050203000203" pitchFamily="34" charset="0"/>
                 <a:ea typeface="Calibri" panose="020F0502020204030204" pitchFamily="34" charset="0"/>
                 <a:cs typeface="Times New Roman" panose="02020603050405020304" pitchFamily="18" charset="0"/>
               </a:rPr>
               <a:t>Du bekommst </a:t>
             </a:r>
             <a:r>
-              <a:rPr kumimoji="0" lang="de-DE" altLang="de-DE" sz="2800" b="0" i="0" u="none" strike="noStrike" cap="none" normalizeH="0" baseline="0" dirty="0">
+              <a:rPr kumimoji="0" lang="de-DE" altLang="de-DE" sz="1800" b="0" i="0" u="none" strike="noStrike" cap="none" normalizeH="0" baseline="0" dirty="0">
                 <a:ln>
                   <a:noFill/>
                 </a:ln>
                 <a:effectLst/>
-                <a:latin typeface="Calibri" panose="020F0502020204030204" pitchFamily="34" charset="0"/>
+                <a:latin typeface="IBM Plex Sans" panose="020B0503050203000203" pitchFamily="34" charset="0"/>
                 <a:ea typeface="Calibri" panose="020F0502020204030204" pitchFamily="34" charset="0"/>
                 <a:cs typeface="Times New Roman" panose="02020603050405020304" pitchFamily="18" charset="0"/>
               </a:rPr>
               <a:t>für die Dauer des Kurses einen leistungsstarken Laptop zusammen mit einem Netzteil und einer Tasche bereitgestellt, den du für die Entwicklung des Spiels verwendest. Bring dazu bitte den </a:t>
             </a:r>
             <a:r>
-              <a:rPr kumimoji="0" lang="de-DE" altLang="de-DE" sz="2800" b="1" i="0" u="none" strike="noStrike" cap="none" normalizeH="0" baseline="0" dirty="0">
+              <a:rPr kumimoji="0" lang="de-DE" altLang="de-DE" sz="1800" b="1" i="0" u="none" strike="noStrike" cap="none" normalizeH="0" baseline="0" dirty="0">
                 <a:ln>
                   <a:noFill/>
                 </a:ln>
                 <a:effectLst/>
-                <a:latin typeface="Calibri" panose="020F0502020204030204" pitchFamily="34" charset="0"/>
+                <a:latin typeface="IBM Plex Sans" panose="020B0503050203000203" pitchFamily="34" charset="0"/>
                 <a:ea typeface="Calibri" panose="020F0502020204030204" pitchFamily="34" charset="0"/>
                 <a:cs typeface="Times New Roman" panose="02020603050405020304" pitchFamily="18" charset="0"/>
               </a:rPr>
               <a:t>Leihvertrag</a:t>
             </a:r>
             <a:r>
-              <a:rPr kumimoji="0" lang="de-DE" altLang="de-DE" sz="2800" b="0" i="0" u="none" strike="noStrike" cap="none" normalizeH="0" baseline="0" dirty="0">
+              <a:rPr kumimoji="0" lang="de-DE" altLang="de-DE" sz="1800" b="0" i="0" u="none" strike="noStrike" cap="none" normalizeH="0" baseline="0" dirty="0">
                 <a:ln>
                   <a:noFill/>
                 </a:ln>
                 <a:effectLst/>
-                <a:latin typeface="Calibri" panose="020F0502020204030204" pitchFamily="34" charset="0"/>
+                <a:latin typeface="IBM Plex Sans" panose="020B0503050203000203" pitchFamily="34" charset="0"/>
                 <a:ea typeface="Calibri" panose="020F0502020204030204" pitchFamily="34" charset="0"/>
                 <a:cs typeface="Times New Roman" panose="02020603050405020304" pitchFamily="18" charset="0"/>
               </a:rPr>
               <a:t> zum ersten Kurstermin ausgefüllt und unterschrieben mit.</a:t>
             </a:r>
-            <a:endParaRPr lang="de-DE" altLang="de-DE" sz="800" dirty="0"/>
+            <a:endParaRPr lang="de-DE" altLang="de-DE" sz="1800" dirty="0"/>
           </a:p>
           <a:p>
             <a:pPr eaLnBrk="0" fontAlgn="base" hangingPunct="0">
@@ -3467,101 +3467,101 @@
               </a:spcAft>
             </a:pPr>
             <a:r>
-              <a:rPr kumimoji="0" lang="de-DE" altLang="de-DE" sz="2800" b="0" i="0" u="none" strike="noStrike" cap="none" normalizeH="0" baseline="0" dirty="0">
+              <a:rPr kumimoji="0" lang="de-DE" altLang="de-DE" sz="1800" b="0" i="0" u="none" strike="noStrike" cap="none" normalizeH="0" baseline="0" dirty="0">
                 <a:ln>
                   <a:noFill/>
                 </a:ln>
                 <a:effectLst/>
-                <a:latin typeface="Calibri" panose="020F0502020204030204" pitchFamily="34" charset="0"/>
+                <a:latin typeface="IBM Plex Sans" panose="020B0503050203000203" pitchFamily="34" charset="0"/>
                 <a:ea typeface="Calibri" panose="020F0502020204030204" pitchFamily="34" charset="0"/>
                 <a:cs typeface="Times New Roman" panose="02020603050405020304" pitchFamily="18" charset="0"/>
               </a:rPr>
               <a:t>Du kannst das Spiel direkt auf einem Android-Handy testen! </a:t>
             </a:r>
             <a:br>
-              <a:rPr kumimoji="0" lang="de-DE" altLang="de-DE" sz="2800" b="0" i="0" u="none" strike="noStrike" cap="none" normalizeH="0" baseline="0" dirty="0">
+              <a:rPr kumimoji="0" lang="de-DE" altLang="de-DE" sz="1800" b="0" i="0" u="none" strike="noStrike" cap="none" normalizeH="0" baseline="0" dirty="0">
                 <a:ln>
                   <a:noFill/>
                 </a:ln>
                 <a:effectLst/>
-                <a:latin typeface="Calibri" panose="020F0502020204030204" pitchFamily="34" charset="0"/>
+                <a:latin typeface="IBM Plex Sans" panose="020B0503050203000203" pitchFamily="34" charset="0"/>
                 <a:ea typeface="Calibri" panose="020F0502020204030204" pitchFamily="34" charset="0"/>
                 <a:cs typeface="Times New Roman" panose="02020603050405020304" pitchFamily="18" charset="0"/>
               </a:rPr>
             </a:br>
             <a:r>
-              <a:rPr kumimoji="0" lang="de-DE" altLang="de-DE" sz="2800" b="0" i="0" u="none" strike="noStrike" cap="none" normalizeH="0" baseline="0" dirty="0">
+              <a:rPr kumimoji="0" lang="de-DE" altLang="de-DE" sz="1800" b="0" i="0" u="none" strike="noStrike" cap="none" normalizeH="0" baseline="0" dirty="0">
                 <a:ln>
                   <a:noFill/>
                 </a:ln>
                 <a:effectLst/>
-                <a:latin typeface="Calibri" panose="020F0502020204030204" pitchFamily="34" charset="0"/>
+                <a:latin typeface="IBM Plex Sans" panose="020B0503050203000203" pitchFamily="34" charset="0"/>
                 <a:ea typeface="Calibri" panose="020F0502020204030204" pitchFamily="34" charset="0"/>
                 <a:cs typeface="Times New Roman" panose="02020603050405020304" pitchFamily="18" charset="0"/>
               </a:rPr>
               <a:t>Nimm dein </a:t>
             </a:r>
             <a:r>
-              <a:rPr kumimoji="0" lang="de-DE" altLang="de-DE" sz="2800" b="1" i="0" u="none" strike="noStrike" cap="none" normalizeH="0" baseline="0" dirty="0">
+              <a:rPr kumimoji="0" lang="de-DE" altLang="de-DE" sz="1800" b="1" i="0" u="none" strike="noStrike" cap="none" normalizeH="0" baseline="0" dirty="0">
                 <a:ln>
                   <a:noFill/>
                 </a:ln>
                 <a:effectLst/>
-                <a:latin typeface="Calibri" panose="020F0502020204030204" pitchFamily="34" charset="0"/>
+                <a:latin typeface="IBM Plex Sans" panose="020B0503050203000203" pitchFamily="34" charset="0"/>
                 <a:ea typeface="Calibri" panose="020F0502020204030204" pitchFamily="34" charset="0"/>
                 <a:cs typeface="Times New Roman" panose="02020603050405020304" pitchFamily="18" charset="0"/>
               </a:rPr>
               <a:t>Handy</a:t>
             </a:r>
             <a:r>
-              <a:rPr kumimoji="0" lang="de-DE" altLang="de-DE" sz="2800" b="0" i="0" u="none" strike="noStrike" cap="none" normalizeH="0" baseline="0" dirty="0">
+              <a:rPr kumimoji="0" lang="de-DE" altLang="de-DE" sz="1800" b="0" i="0" u="none" strike="noStrike" cap="none" normalizeH="0" baseline="0" dirty="0">
                 <a:ln>
                   <a:noFill/>
                 </a:ln>
                 <a:effectLst/>
-                <a:latin typeface="Calibri" panose="020F0502020204030204" pitchFamily="34" charset="0"/>
+                <a:latin typeface="IBM Plex Sans" panose="020B0503050203000203" pitchFamily="34" charset="0"/>
                 <a:ea typeface="Calibri" panose="020F0502020204030204" pitchFamily="34" charset="0"/>
                 <a:cs typeface="Times New Roman" panose="02020603050405020304" pitchFamily="18" charset="0"/>
               </a:rPr>
               <a:t> zusammen mit einem </a:t>
             </a:r>
             <a:r>
-              <a:rPr kumimoji="0" lang="de-DE" altLang="de-DE" sz="2800" b="1" i="0" u="none" strike="noStrike" cap="none" normalizeH="0" baseline="0" dirty="0">
+              <a:rPr kumimoji="0" lang="de-DE" altLang="de-DE" sz="1800" b="1" i="0" u="none" strike="noStrike" cap="none" normalizeH="0" baseline="0" dirty="0">
                 <a:ln>
                   <a:noFill/>
                 </a:ln>
                 <a:effectLst/>
-                <a:latin typeface="Calibri" panose="020F0502020204030204" pitchFamily="34" charset="0"/>
+                <a:latin typeface="IBM Plex Sans" panose="020B0503050203000203" pitchFamily="34" charset="0"/>
                 <a:ea typeface="Calibri" panose="020F0502020204030204" pitchFamily="34" charset="0"/>
                 <a:cs typeface="Times New Roman" panose="02020603050405020304" pitchFamily="18" charset="0"/>
               </a:rPr>
               <a:t>USB-C-Kabel</a:t>
             </a:r>
             <a:r>
-              <a:rPr kumimoji="0" lang="de-DE" altLang="de-DE" sz="2800" b="0" i="0" u="none" strike="noStrike" cap="none" normalizeH="0" baseline="0" dirty="0">
+              <a:rPr kumimoji="0" lang="de-DE" altLang="de-DE" sz="1800" b="0" i="0" u="none" strike="noStrike" cap="none" normalizeH="0" baseline="0" dirty="0">
                 <a:ln>
                   <a:noFill/>
                 </a:ln>
                 <a:effectLst/>
-                <a:latin typeface="Calibri" panose="020F0502020204030204" pitchFamily="34" charset="0"/>
+                <a:latin typeface="IBM Plex Sans" panose="020B0503050203000203" pitchFamily="34" charset="0"/>
                 <a:ea typeface="Calibri" panose="020F0502020204030204" pitchFamily="34" charset="0"/>
                 <a:cs typeface="Times New Roman" panose="02020603050405020304" pitchFamily="18" charset="0"/>
               </a:rPr>
               <a:t> mit.</a:t>
             </a:r>
             <a:br>
-              <a:rPr kumimoji="0" lang="de-DE" altLang="de-DE" sz="2800" b="0" i="0" u="none" strike="noStrike" cap="none" normalizeH="0" baseline="0" dirty="0">
+              <a:rPr kumimoji="0" lang="de-DE" altLang="de-DE" sz="1800" b="0" i="0" u="none" strike="noStrike" cap="none" normalizeH="0" baseline="0" dirty="0">
                 <a:ln>
                   <a:noFill/>
                 </a:ln>
                 <a:effectLst/>
-                <a:latin typeface="Calibri" panose="020F0502020204030204" pitchFamily="34" charset="0"/>
+                <a:latin typeface="IBM Plex Sans" panose="020B0503050203000203" pitchFamily="34" charset="0"/>
                 <a:ea typeface="Calibri" panose="020F0502020204030204" pitchFamily="34" charset="0"/>
                 <a:cs typeface="Times New Roman" panose="02020603050405020304" pitchFamily="18" charset="0"/>
               </a:rPr>
             </a:br>
             <a:r>
-              <a:rPr kumimoji="0" lang="de-DE" altLang="de-DE" sz="2800" b="1" i="0" u="none" strike="noStrike" cap="none" normalizeH="0" baseline="0" dirty="0">
+              <a:rPr kumimoji="0" lang="de-DE" altLang="de-DE" sz="1800" b="1" i="0" u="none" strike="noStrike" cap="none" normalizeH="0" baseline="0" dirty="0">
                 <a:ln>
                   <a:noFill/>
                 </a:ln>
@@ -3569,36 +3569,36 @@
                   <a:srgbClr val="F27D82"/>
                 </a:solidFill>
                 <a:effectLst/>
-                <a:latin typeface="Calibri" panose="020F0502020204030204" pitchFamily="34" charset="0"/>
+                <a:latin typeface="IBM Plex Sans" panose="020B0503050203000203" pitchFamily="34" charset="0"/>
                 <a:ea typeface="Calibri" panose="020F0502020204030204" pitchFamily="34" charset="0"/>
                 <a:cs typeface="Times New Roman" panose="02020603050405020304" pitchFamily="18" charset="0"/>
               </a:rPr>
               <a:t>Auf dem Handy darf kein Family Link installiert sein.</a:t>
             </a:r>
             <a:br>
-              <a:rPr kumimoji="0" lang="de-DE" altLang="de-DE" sz="2800" b="0" i="0" u="none" strike="noStrike" cap="none" normalizeH="0" baseline="0" dirty="0">
+              <a:rPr kumimoji="0" lang="de-DE" altLang="de-DE" sz="1800" b="0" i="0" u="none" strike="noStrike" cap="none" normalizeH="0" baseline="0" dirty="0">
                 <a:ln>
                   <a:noFill/>
                 </a:ln>
                 <a:effectLst/>
-                <a:latin typeface="Calibri" panose="020F0502020204030204" pitchFamily="34" charset="0"/>
+                <a:latin typeface="IBM Plex Sans" panose="020B0503050203000203" pitchFamily="34" charset="0"/>
                 <a:ea typeface="Calibri" panose="020F0502020204030204" pitchFamily="34" charset="0"/>
                 <a:cs typeface="Times New Roman" panose="02020603050405020304" pitchFamily="18" charset="0"/>
               </a:rPr>
             </a:br>
             <a:r>
-              <a:rPr kumimoji="0" lang="de-DE" altLang="de-DE" sz="2800" b="0" i="0" u="none" strike="noStrike" cap="none" normalizeH="0" baseline="0" dirty="0">
+              <a:rPr kumimoji="0" lang="de-DE" altLang="de-DE" sz="1800" b="0" i="0" u="none" strike="noStrike" cap="none" normalizeH="0" baseline="0" dirty="0">
                 <a:ln>
                   <a:noFill/>
                 </a:ln>
                 <a:effectLst/>
-                <a:latin typeface="Calibri" panose="020F0502020204030204" pitchFamily="34" charset="0"/>
+                <a:latin typeface="IBM Plex Sans" panose="020B0503050203000203" pitchFamily="34" charset="0"/>
                 <a:ea typeface="Calibri" panose="020F0502020204030204" pitchFamily="34" charset="0"/>
                 <a:cs typeface="Times New Roman" panose="02020603050405020304" pitchFamily="18" charset="0"/>
               </a:rPr>
               <a:t>Wir können das Spiel aufgrund der Restriktionen des Apple-Ökosystems leider nicht auf iOS installieren.</a:t>
             </a:r>
-            <a:endParaRPr kumimoji="0" lang="de-DE" altLang="de-DE" sz="800" b="0" i="0" u="none" strike="noStrike" cap="none" normalizeH="0" baseline="0" dirty="0">
+            <a:endParaRPr kumimoji="0" lang="de-DE" altLang="de-DE" sz="1800" b="0" i="0" u="none" strike="noStrike" cap="none" normalizeH="0" baseline="0" dirty="0">
               <a:ln>
                 <a:noFill/>
               </a:ln>
@@ -3623,18 +3623,18 @@
               <a:tabLst/>
             </a:pPr>
             <a:r>
-              <a:rPr kumimoji="0" lang="de-DE" altLang="de-DE" sz="2800" b="0" i="0" u="none" strike="noStrike" cap="none" normalizeH="0" baseline="0" dirty="0">
+              <a:rPr kumimoji="0" lang="de-DE" altLang="de-DE" sz="1800" b="0" i="0" u="none" strike="noStrike" cap="none" normalizeH="0" baseline="0" dirty="0">
                 <a:ln>
                   <a:noFill/>
                 </a:ln>
                 <a:effectLst/>
-                <a:latin typeface="Calibri" panose="020F0502020204030204" pitchFamily="34" charset="0"/>
+                <a:latin typeface="IBM Plex Sans" panose="020B0503050203000203" pitchFamily="34" charset="0"/>
                 <a:ea typeface="Calibri" panose="020F0502020204030204" pitchFamily="34" charset="0"/>
                 <a:cs typeface="Times New Roman" panose="02020603050405020304" pitchFamily="18" charset="0"/>
               </a:rPr>
               <a:t>Wir freuen uns auf euch!</a:t>
             </a:r>
-            <a:endParaRPr kumimoji="0" lang="de-DE" altLang="de-DE" sz="800" b="0" i="0" u="none" strike="noStrike" cap="none" normalizeH="0" baseline="0" dirty="0">
+            <a:endParaRPr kumimoji="0" lang="de-DE" altLang="de-DE" sz="1800" b="0" i="0" u="none" strike="noStrike" cap="none" normalizeH="0" baseline="0" dirty="0">
               <a:ln>
                 <a:noFill/>
               </a:ln>
@@ -3659,23 +3659,23 @@
               <a:tabLst/>
             </a:pPr>
             <a:r>
-              <a:rPr kumimoji="0" lang="de-DE" altLang="de-DE" sz="2800" b="0" i="0" u="none" strike="noStrike" cap="none" normalizeH="0" baseline="0" dirty="0">
+              <a:rPr kumimoji="0" lang="de-DE" altLang="de-DE" sz="1800" b="0" i="0" u="none" strike="noStrike" cap="none" normalizeH="0" baseline="0" dirty="0">
                 <a:ln>
                   <a:noFill/>
                 </a:ln>
                 <a:effectLst/>
-                <a:latin typeface="Calibri" panose="020F0502020204030204" pitchFamily="34" charset="0"/>
+                <a:latin typeface="IBM Plex Sans" panose="020B0503050203000203" pitchFamily="34" charset="0"/>
                 <a:ea typeface="Calibri" panose="020F0502020204030204" pitchFamily="34" charset="0"/>
                 <a:cs typeface="Times New Roman" panose="02020603050405020304" pitchFamily="18" charset="0"/>
               </a:rPr>
               <a:t>Lion und Lasse</a:t>
             </a:r>
-            <a:endParaRPr kumimoji="0" lang="de-DE" altLang="de-DE" sz="4000" b="0" i="0" u="none" strike="noStrike" cap="none" normalizeH="0" baseline="0" dirty="0">
+            <a:endParaRPr kumimoji="0" lang="de-DE" altLang="de-DE" sz="1800" b="0" i="0" u="none" strike="noStrike" cap="none" normalizeH="0" baseline="0" dirty="0">
               <a:ln>
                 <a:noFill/>
               </a:ln>
               <a:effectLst/>
-              <a:latin typeface="Arial" panose="020B0604020202020204" pitchFamily="34" charset="0"/>
+              <a:latin typeface="IBM Plex Sans" panose="020B0503050203000203" pitchFamily="34" charset="0"/>
             </a:endParaRPr>
           </a:p>
         </p:txBody>
@@ -3892,7 +3892,9 @@
         </p:nvSpPr>
         <p:spPr/>
         <p:txBody>
-          <a:bodyPr/>
+          <a:bodyPr>
+            <a:normAutofit lnSpcReduction="10000"/>
+          </a:bodyPr>
           <a:lstStyle/>
           <a:p>
             <a:r>
@@ -4000,13 +4002,8 @@
             </a:pPr>
             <a:r>
               <a:rPr lang="de-DE" dirty="0"/>
-              <a:t>Code schreiben lassen, ohne </a:t>
-            </a:r>
-            <a:r>
-              <a:rPr lang="de-DE"/>
-              <a:t>diesen nachzuvollziehen</a:t>
-            </a:r>
-            <a:endParaRPr lang="de-DE" dirty="0"/>
+              <a:t>Code schreiben lassen, ohne diesen nachzuvollziehen</a:t>
+            </a:r>
           </a:p>
         </p:txBody>
       </p:sp>
@@ -4084,14 +4081,14 @@
             <p:ph idx="1"/>
             <p:extLst>
               <p:ext uri="{D42A27DB-BD31-4B8C-83A1-F6EECF244321}">
-                <p14:modId xmlns:p14="http://schemas.microsoft.com/office/powerpoint/2010/main" val="3199138706"/>
+                <p14:modId xmlns:p14="http://schemas.microsoft.com/office/powerpoint/2010/main" val="2710785110"/>
               </p:ext>
             </p:extLst>
           </p:nvPr>
         </p:nvGraphicFramePr>
         <p:xfrm>
-          <a:off x="838200" y="1825625"/>
-          <a:ext cx="10515596" cy="4079240"/>
+          <a:off x="838204" y="1432560"/>
+          <a:ext cx="10515596" cy="4617720"/>
         </p:xfrm>
         <a:graphic>
           <a:graphicData uri="http://schemas.openxmlformats.org/drawingml/2006/table">
@@ -4100,28 +4097,28 @@
                 <a:tableStyleId>{5C22544A-7EE6-4342-B048-85BDC9FD1C3A}</a:tableStyleId>
               </a:tblPr>
               <a:tblGrid>
-                <a:gridCol w="427892">
+                <a:gridCol w="456851">
                   <a:extLst>
                     <a:ext uri="{9D8B030D-6E8A-4147-A177-3AD203B41FA5}">
                       <a16:colId xmlns:a16="http://schemas.microsoft.com/office/drawing/2014/main" val="3675322223"/>
                     </a:ext>
                   </a:extLst>
                 </a:gridCol>
-                <a:gridCol w="1572272">
+                <a:gridCol w="1725361">
                   <a:extLst>
                     <a:ext uri="{9D8B030D-6E8A-4147-A177-3AD203B41FA5}">
                       <a16:colId xmlns:a16="http://schemas.microsoft.com/office/drawing/2014/main" val="829809223"/>
                     </a:ext>
                   </a:extLst>
                 </a:gridCol>
-                <a:gridCol w="1046802">
+                <a:gridCol w="1141966">
                   <a:extLst>
                     <a:ext uri="{9D8B030D-6E8A-4147-A177-3AD203B41FA5}">
                       <a16:colId xmlns:a16="http://schemas.microsoft.com/office/drawing/2014/main" val="3562242639"/>
                     </a:ext>
                   </a:extLst>
                 </a:gridCol>
-                <a:gridCol w="7468630">
+                <a:gridCol w="7191418">
                   <a:extLst>
                     <a:ext uri="{9D8B030D-6E8A-4147-A177-3AD203B41FA5}">
                       <a16:colId xmlns:a16="http://schemas.microsoft.com/office/drawing/2014/main" val="162909940"/>
@@ -5581,7 +5578,7 @@
                             <a:schemeClr val="tx1"/>
                           </a:solidFill>
                         </a:rPr>
-                        <a:t>Wahl aus Sounds &amp; Musik, Text, UI, Android-Support, Partikel &amp; Animationen, Shader, Datenspeicherung, Metaprogression, Multiplayer, Sensoren, Physik und Kollisionen, prozedurale Generation, komplexere Spielmechaniken</a:t>
+                        <a:t>Wahl aus Kooperation, Sounds &amp; Musik, Text, UI, Android-Support, Partikel &amp; Animationen, Shader, Datenspeicherung, Metaprogression, Multiplayer, Sensoren, Physik und Kollisionen, prozedurale Generation, komplexere Spielmechaniken</a:t>
                       </a:r>
                     </a:p>
                   </a:txBody>
@@ -6311,76 +6308,16 @@
         <a:srgbClr val="954F72"/>
       </a:folHlink>
     </a:clrScheme>
-    <a:fontScheme name="Office">
+    <a:fontScheme name="Theme Font">
       <a:majorFont>
-        <a:latin typeface="Calibri Light" panose="020F0302020204030204"/>
+        <a:latin typeface="Nunito"/>
         <a:ea typeface=""/>
         <a:cs typeface=""/>
-        <a:font script="Jpan" typeface="游ゴシック Light"/>
-        <a:font script="Hang" typeface="맑은 고딕"/>
-        <a:font script="Hans" typeface="等线 Light"/>
-        <a:font script="Hant" typeface="新細明體"/>
-        <a:font script="Arab" typeface="Times New Roman"/>
-        <a:font script="Hebr" typeface="Times New Roman"/>
-        <a:font script="Thai" typeface="Angsana New"/>
-        <a:font script="Ethi" typeface="Nyala"/>
-        <a:font script="Beng" typeface="Vrinda"/>
-        <a:font script="Gujr" typeface="Shruti"/>
-        <a:font script="Khmr" typeface="MoolBoran"/>
-        <a:font script="Knda" typeface="Tunga"/>
-        <a:font script="Guru" typeface="Raavi"/>
-        <a:font script="Cans" typeface="Euphemia"/>
-        <a:font script="Cher" typeface="Plantagenet Cherokee"/>
-        <a:font script="Yiii" typeface="Microsoft Yi Baiti"/>
-        <a:font script="Tibt" typeface="Microsoft Himalaya"/>
-        <a:font script="Thaa" typeface="MV Boli"/>
-        <a:font script="Deva" typeface="Mangal"/>
-        <a:font script="Telu" typeface="Gautami"/>
-        <a:font script="Taml" typeface="Latha"/>
-        <a:font script="Syrc" typeface="Estrangelo Edessa"/>
-        <a:font script="Orya" typeface="Kalinga"/>
-        <a:font script="Mlym" typeface="Kartika"/>
-        <a:font script="Laoo" typeface="DokChampa"/>
-        <a:font script="Sinh" typeface="Iskoola Pota"/>
-        <a:font script="Mong" typeface="Mongolian Baiti"/>
-        <a:font script="Viet" typeface="Times New Roman"/>
-        <a:font script="Uigh" typeface="Microsoft Uighur"/>
-        <a:font script="Geor" typeface="Sylfaen"/>
       </a:majorFont>
       <a:minorFont>
-        <a:latin typeface="Calibri" panose="020F0502020204030204"/>
+        <a:latin typeface="IBM Plex Sans"/>
         <a:ea typeface=""/>
         <a:cs typeface=""/>
-        <a:font script="Jpan" typeface="游ゴシック"/>
-        <a:font script="Hang" typeface="맑은 고딕"/>
-        <a:font script="Hans" typeface="等线"/>
-        <a:font script="Hant" typeface="新細明體"/>
-        <a:font script="Arab" typeface="Arial"/>
-        <a:font script="Hebr" typeface="Arial"/>
-        <a:font script="Thai" typeface="Cordia New"/>
-        <a:font script="Ethi" typeface="Nyala"/>
-        <a:font script="Beng" typeface="Vrinda"/>
-        <a:font script="Gujr" typeface="Shruti"/>
-        <a:font script="Khmr" typeface="DaunPenh"/>
-        <a:font script="Knda" typeface="Tunga"/>
-        <a:font script="Guru" typeface="Raavi"/>
-        <a:font script="Cans" typeface="Euphemia"/>
-        <a:font script="Cher" typeface="Plantagenet Cherokee"/>
-        <a:font script="Yiii" typeface="Microsoft Yi Baiti"/>
-        <a:font script="Tibt" typeface="Microsoft Himalaya"/>
-        <a:font script="Thaa" typeface="MV Boli"/>
-        <a:font script="Deva" typeface="Mangal"/>
-        <a:font script="Telu" typeface="Gautami"/>
-        <a:font script="Taml" typeface="Latha"/>
-        <a:font script="Syrc" typeface="Estrangelo Edessa"/>
-        <a:font script="Orya" typeface="Kalinga"/>
-        <a:font script="Mlym" typeface="Kartika"/>
-        <a:font script="Laoo" typeface="DokChampa"/>
-        <a:font script="Sinh" typeface="Iskoola Pota"/>
-        <a:font script="Mong" typeface="Mongolian Baiti"/>
-        <a:font script="Viet" typeface="Arial"/>
-        <a:font script="Uigh" typeface="Microsoft Uighur"/>
-        <a:font script="Geor" typeface="Sylfaen"/>
       </a:minorFont>
     </a:fontScheme>
     <a:fmtScheme name="Office">

--- a/src/Infos.pptx
+++ b/src/Infos.pptx
@@ -4,12 +4,15 @@
   <p:sldMasterIdLst>
     <p:sldMasterId id="2147483660" r:id="rId1"/>
   </p:sldMasterIdLst>
+  <p:notesMasterIdLst>
+    <p:notesMasterId r:id="rId8"/>
+  </p:notesMasterIdLst>
   <p:sldIdLst>
     <p:sldId id="318" r:id="rId2"/>
     <p:sldId id="320" r:id="rId3"/>
-    <p:sldId id="321" r:id="rId4"/>
-    <p:sldId id="324" r:id="rId5"/>
-    <p:sldId id="322" r:id="rId6"/>
+    <p:sldId id="322" r:id="rId4"/>
+    <p:sldId id="321" r:id="rId5"/>
+    <p:sldId id="324" r:id="rId6"/>
     <p:sldId id="325" r:id="rId7"/>
   </p:sldIdLst>
   <p:sldSz cx="12192000" cy="6858000"/>
@@ -123,6 +126,440 @@
 </p:cmAuthorLst>
 </file>
 
+<file path=ppt/notesMasters/notesMaster1.xml><?xml version="1.0" encoding="utf-8"?>
+<p:notesMaster xmlns:a="http://schemas.openxmlformats.org/drawingml/2006/main" xmlns:r="http://schemas.openxmlformats.org/officeDocument/2006/relationships" xmlns:p="http://schemas.openxmlformats.org/presentationml/2006/main">
+  <p:cSld>
+    <p:bg>
+      <p:bgRef idx="1001">
+        <a:schemeClr val="bg1"/>
+      </p:bgRef>
+    </p:bg>
+    <p:spTree>
+      <p:nvGrpSpPr>
+        <p:cNvPr id="1" name=""/>
+        <p:cNvGrpSpPr/>
+        <p:nvPr/>
+      </p:nvGrpSpPr>
+      <p:grpSpPr>
+        <a:xfrm>
+          <a:off x="0" y="0"/>
+          <a:ext cx="0" cy="0"/>
+          <a:chOff x="0" y="0"/>
+          <a:chExt cx="0" cy="0"/>
+        </a:xfrm>
+      </p:grpSpPr>
+      <p:sp>
+        <p:nvSpPr>
+          <p:cNvPr id="2" name="Header Placeholder 1"/>
+          <p:cNvSpPr>
+            <a:spLocks noGrp="1"/>
+          </p:cNvSpPr>
+          <p:nvPr>
+            <p:ph type="hdr" sz="quarter"/>
+          </p:nvPr>
+        </p:nvSpPr>
+        <p:spPr>
+          <a:xfrm>
+            <a:off x="0" y="0"/>
+            <a:ext cx="3078163" cy="512763"/>
+          </a:xfrm>
+          <a:prstGeom prst="rect">
+            <a:avLst/>
+          </a:prstGeom>
+        </p:spPr>
+        <p:txBody>
+          <a:bodyPr vert="horz" lIns="91440" tIns="45720" rIns="91440" bIns="45720" rtlCol="0"/>
+          <a:lstStyle>
+            <a:lvl1pPr algn="l">
+              <a:defRPr sz="1200"/>
+            </a:lvl1pPr>
+          </a:lstStyle>
+          <a:p>
+            <a:endParaRPr lang="de-DE"/>
+          </a:p>
+        </p:txBody>
+      </p:sp>
+      <p:sp>
+        <p:nvSpPr>
+          <p:cNvPr id="3" name="Date Placeholder 2"/>
+          <p:cNvSpPr>
+            <a:spLocks noGrp="1"/>
+          </p:cNvSpPr>
+          <p:nvPr>
+            <p:ph type="dt" idx="1"/>
+          </p:nvPr>
+        </p:nvSpPr>
+        <p:spPr>
+          <a:xfrm>
+            <a:off x="4024313" y="0"/>
+            <a:ext cx="3078162" cy="512763"/>
+          </a:xfrm>
+          <a:prstGeom prst="rect">
+            <a:avLst/>
+          </a:prstGeom>
+        </p:spPr>
+        <p:txBody>
+          <a:bodyPr vert="horz" lIns="91440" tIns="45720" rIns="91440" bIns="45720" rtlCol="0"/>
+          <a:lstStyle>
+            <a:lvl1pPr algn="r">
+              <a:defRPr sz="1200"/>
+            </a:lvl1pPr>
+          </a:lstStyle>
+          <a:p>
+            <a:fld id="{41D138C4-A6D9-4066-A368-CF895815075A}" type="datetimeFigureOut">
+              <a:rPr lang="de-DE" smtClean="0"/>
+              <a:t>21.02.2026</a:t>
+            </a:fld>
+            <a:endParaRPr lang="de-DE"/>
+          </a:p>
+        </p:txBody>
+      </p:sp>
+      <p:sp>
+        <p:nvSpPr>
+          <p:cNvPr id="4" name="Slide Image Placeholder 3"/>
+          <p:cNvSpPr>
+            <a:spLocks noGrp="1" noRot="1" noChangeAspect="1"/>
+          </p:cNvSpPr>
+          <p:nvPr>
+            <p:ph type="sldImg" idx="2"/>
+          </p:nvPr>
+        </p:nvSpPr>
+        <p:spPr>
+          <a:xfrm>
+            <a:off x="482600" y="1279525"/>
+            <a:ext cx="6140450" cy="3454400"/>
+          </a:xfrm>
+          <a:prstGeom prst="rect">
+            <a:avLst/>
+          </a:prstGeom>
+          <a:noFill/>
+          <a:ln w="12700">
+            <a:solidFill>
+              <a:prstClr val="black"/>
+            </a:solidFill>
+          </a:ln>
+        </p:spPr>
+        <p:txBody>
+          <a:bodyPr vert="horz" lIns="91440" tIns="45720" rIns="91440" bIns="45720" rtlCol="0" anchor="ctr"/>
+          <a:lstStyle/>
+          <a:p>
+            <a:endParaRPr lang="de-DE"/>
+          </a:p>
+        </p:txBody>
+      </p:sp>
+      <p:sp>
+        <p:nvSpPr>
+          <p:cNvPr id="5" name="Notes Placeholder 4"/>
+          <p:cNvSpPr>
+            <a:spLocks noGrp="1"/>
+          </p:cNvSpPr>
+          <p:nvPr>
+            <p:ph type="body" sz="quarter" idx="3"/>
+          </p:nvPr>
+        </p:nvSpPr>
+        <p:spPr>
+          <a:xfrm>
+            <a:off x="711200" y="4926013"/>
+            <a:ext cx="5683250" cy="4029075"/>
+          </a:xfrm>
+          <a:prstGeom prst="rect">
+            <a:avLst/>
+          </a:prstGeom>
+        </p:spPr>
+        <p:txBody>
+          <a:bodyPr vert="horz" lIns="91440" tIns="45720" rIns="91440" bIns="45720" rtlCol="0"/>
+          <a:lstStyle/>
+          <a:p>
+            <a:pPr lvl="0"/>
+            <a:r>
+              <a:rPr lang="en-US"/>
+              <a:t>Click to edit Master text styles</a:t>
+            </a:r>
+          </a:p>
+          <a:p>
+            <a:pPr lvl="1"/>
+            <a:r>
+              <a:rPr lang="en-US"/>
+              <a:t>Second level</a:t>
+            </a:r>
+          </a:p>
+          <a:p>
+            <a:pPr lvl="2"/>
+            <a:r>
+              <a:rPr lang="en-US"/>
+              <a:t>Third level</a:t>
+            </a:r>
+          </a:p>
+          <a:p>
+            <a:pPr lvl="3"/>
+            <a:r>
+              <a:rPr lang="en-US"/>
+              <a:t>Fourth level</a:t>
+            </a:r>
+          </a:p>
+          <a:p>
+            <a:pPr lvl="4"/>
+            <a:r>
+              <a:rPr lang="en-US"/>
+              <a:t>Fifth level</a:t>
+            </a:r>
+            <a:endParaRPr lang="de-DE"/>
+          </a:p>
+        </p:txBody>
+      </p:sp>
+      <p:sp>
+        <p:nvSpPr>
+          <p:cNvPr id="6" name="Footer Placeholder 5"/>
+          <p:cNvSpPr>
+            <a:spLocks noGrp="1"/>
+          </p:cNvSpPr>
+          <p:nvPr>
+            <p:ph type="ftr" sz="quarter" idx="4"/>
+          </p:nvPr>
+        </p:nvSpPr>
+        <p:spPr>
+          <a:xfrm>
+            <a:off x="0" y="9721850"/>
+            <a:ext cx="3078163" cy="512763"/>
+          </a:xfrm>
+          <a:prstGeom prst="rect">
+            <a:avLst/>
+          </a:prstGeom>
+        </p:spPr>
+        <p:txBody>
+          <a:bodyPr vert="horz" lIns="91440" tIns="45720" rIns="91440" bIns="45720" rtlCol="0" anchor="b"/>
+          <a:lstStyle>
+            <a:lvl1pPr algn="l">
+              <a:defRPr sz="1200"/>
+            </a:lvl1pPr>
+          </a:lstStyle>
+          <a:p>
+            <a:endParaRPr lang="de-DE"/>
+          </a:p>
+        </p:txBody>
+      </p:sp>
+      <p:sp>
+        <p:nvSpPr>
+          <p:cNvPr id="7" name="Slide Number Placeholder 6"/>
+          <p:cNvSpPr>
+            <a:spLocks noGrp="1"/>
+          </p:cNvSpPr>
+          <p:nvPr>
+            <p:ph type="sldNum" sz="quarter" idx="5"/>
+          </p:nvPr>
+        </p:nvSpPr>
+        <p:spPr>
+          <a:xfrm>
+            <a:off x="4024313" y="9721850"/>
+            <a:ext cx="3078162" cy="512763"/>
+          </a:xfrm>
+          <a:prstGeom prst="rect">
+            <a:avLst/>
+          </a:prstGeom>
+        </p:spPr>
+        <p:txBody>
+          <a:bodyPr vert="horz" lIns="91440" tIns="45720" rIns="91440" bIns="45720" rtlCol="0" anchor="b"/>
+          <a:lstStyle>
+            <a:lvl1pPr algn="r">
+              <a:defRPr sz="1200"/>
+            </a:lvl1pPr>
+          </a:lstStyle>
+          <a:p>
+            <a:fld id="{BD605BF3-E4C3-42DC-8191-548303381329}" type="slidenum">
+              <a:rPr lang="de-DE" smtClean="0"/>
+              <a:t>‹#›</a:t>
+            </a:fld>
+            <a:endParaRPr lang="de-DE"/>
+          </a:p>
+        </p:txBody>
+      </p:sp>
+    </p:spTree>
+    <p:extLst>
+      <p:ext uri="{BB962C8B-B14F-4D97-AF65-F5344CB8AC3E}">
+        <p14:creationId xmlns:p14="http://schemas.microsoft.com/office/powerpoint/2010/main" val="4123545670"/>
+      </p:ext>
+    </p:extLst>
+  </p:cSld>
+  <p:clrMap bg1="lt1" tx1="dk1" bg2="lt2" tx2="dk2" accent1="accent1" accent2="accent2" accent3="accent3" accent4="accent4" accent5="accent5" accent6="accent6" hlink="hlink" folHlink="folHlink"/>
+  <p:notesStyle>
+    <a:lvl1pPr marL="0" algn="l" defTabSz="914400" rtl="0" eaLnBrk="1" latinLnBrk="0" hangingPunct="1">
+      <a:defRPr sz="1200" kern="1200">
+        <a:solidFill>
+          <a:schemeClr val="tx1"/>
+        </a:solidFill>
+        <a:latin typeface="+mn-lt"/>
+        <a:ea typeface="+mn-ea"/>
+        <a:cs typeface="+mn-cs"/>
+      </a:defRPr>
+    </a:lvl1pPr>
+    <a:lvl2pPr marL="457200" algn="l" defTabSz="914400" rtl="0" eaLnBrk="1" latinLnBrk="0" hangingPunct="1">
+      <a:defRPr sz="1200" kern="1200">
+        <a:solidFill>
+          <a:schemeClr val="tx1"/>
+        </a:solidFill>
+        <a:latin typeface="+mn-lt"/>
+        <a:ea typeface="+mn-ea"/>
+        <a:cs typeface="+mn-cs"/>
+      </a:defRPr>
+    </a:lvl2pPr>
+    <a:lvl3pPr marL="914400" algn="l" defTabSz="914400" rtl="0" eaLnBrk="1" latinLnBrk="0" hangingPunct="1">
+      <a:defRPr sz="1200" kern="1200">
+        <a:solidFill>
+          <a:schemeClr val="tx1"/>
+        </a:solidFill>
+        <a:latin typeface="+mn-lt"/>
+        <a:ea typeface="+mn-ea"/>
+        <a:cs typeface="+mn-cs"/>
+      </a:defRPr>
+    </a:lvl3pPr>
+    <a:lvl4pPr marL="1371600" algn="l" defTabSz="914400" rtl="0" eaLnBrk="1" latinLnBrk="0" hangingPunct="1">
+      <a:defRPr sz="1200" kern="1200">
+        <a:solidFill>
+          <a:schemeClr val="tx1"/>
+        </a:solidFill>
+        <a:latin typeface="+mn-lt"/>
+        <a:ea typeface="+mn-ea"/>
+        <a:cs typeface="+mn-cs"/>
+      </a:defRPr>
+    </a:lvl4pPr>
+    <a:lvl5pPr marL="1828800" algn="l" defTabSz="914400" rtl="0" eaLnBrk="1" latinLnBrk="0" hangingPunct="1">
+      <a:defRPr sz="1200" kern="1200">
+        <a:solidFill>
+          <a:schemeClr val="tx1"/>
+        </a:solidFill>
+        <a:latin typeface="+mn-lt"/>
+        <a:ea typeface="+mn-ea"/>
+        <a:cs typeface="+mn-cs"/>
+      </a:defRPr>
+    </a:lvl5pPr>
+    <a:lvl6pPr marL="2286000" algn="l" defTabSz="914400" rtl="0" eaLnBrk="1" latinLnBrk="0" hangingPunct="1">
+      <a:defRPr sz="1200" kern="1200">
+        <a:solidFill>
+          <a:schemeClr val="tx1"/>
+        </a:solidFill>
+        <a:latin typeface="+mn-lt"/>
+        <a:ea typeface="+mn-ea"/>
+        <a:cs typeface="+mn-cs"/>
+      </a:defRPr>
+    </a:lvl6pPr>
+    <a:lvl7pPr marL="2743200" algn="l" defTabSz="914400" rtl="0" eaLnBrk="1" latinLnBrk="0" hangingPunct="1">
+      <a:defRPr sz="1200" kern="1200">
+        <a:solidFill>
+          <a:schemeClr val="tx1"/>
+        </a:solidFill>
+        <a:latin typeface="+mn-lt"/>
+        <a:ea typeface="+mn-ea"/>
+        <a:cs typeface="+mn-cs"/>
+      </a:defRPr>
+    </a:lvl7pPr>
+    <a:lvl8pPr marL="3200400" algn="l" defTabSz="914400" rtl="0" eaLnBrk="1" latinLnBrk="0" hangingPunct="1">
+      <a:defRPr sz="1200" kern="1200">
+        <a:solidFill>
+          <a:schemeClr val="tx1"/>
+        </a:solidFill>
+        <a:latin typeface="+mn-lt"/>
+        <a:ea typeface="+mn-ea"/>
+        <a:cs typeface="+mn-cs"/>
+      </a:defRPr>
+    </a:lvl8pPr>
+    <a:lvl9pPr marL="3657600" algn="l" defTabSz="914400" rtl="0" eaLnBrk="1" latinLnBrk="0" hangingPunct="1">
+      <a:defRPr sz="1200" kern="1200">
+        <a:solidFill>
+          <a:schemeClr val="tx1"/>
+        </a:solidFill>
+        <a:latin typeface="+mn-lt"/>
+        <a:ea typeface="+mn-ea"/>
+        <a:cs typeface="+mn-cs"/>
+      </a:defRPr>
+    </a:lvl9pPr>
+  </p:notesStyle>
+</p:notesMaster>
+</file>
+
+<file path=ppt/notesSlides/notesSlide1.xml><?xml version="1.0" encoding="utf-8"?>
+<p:notes xmlns:a="http://schemas.openxmlformats.org/drawingml/2006/main" xmlns:r="http://schemas.openxmlformats.org/officeDocument/2006/relationships" xmlns:p="http://schemas.openxmlformats.org/presentationml/2006/main">
+  <p:cSld>
+    <p:spTree>
+      <p:nvGrpSpPr>
+        <p:cNvPr id="1" name=""/>
+        <p:cNvGrpSpPr/>
+        <p:nvPr/>
+      </p:nvGrpSpPr>
+      <p:grpSpPr>
+        <a:xfrm>
+          <a:off x="0" y="0"/>
+          <a:ext cx="0" cy="0"/>
+          <a:chOff x="0" y="0"/>
+          <a:chExt cx="0" cy="0"/>
+        </a:xfrm>
+      </p:grpSpPr>
+      <p:sp>
+        <p:nvSpPr>
+          <p:cNvPr id="2" name="Slide Image Placeholder 1"/>
+          <p:cNvSpPr>
+            <a:spLocks noGrp="1" noRot="1" noChangeAspect="1"/>
+          </p:cNvSpPr>
+          <p:nvPr>
+            <p:ph type="sldImg"/>
+          </p:nvPr>
+        </p:nvSpPr>
+        <p:spPr/>
+      </p:sp>
+      <p:sp>
+        <p:nvSpPr>
+          <p:cNvPr id="3" name="Notes Placeholder 2"/>
+          <p:cNvSpPr>
+            <a:spLocks noGrp="1"/>
+          </p:cNvSpPr>
+          <p:nvPr>
+            <p:ph type="body" idx="1"/>
+          </p:nvPr>
+        </p:nvSpPr>
+        <p:spPr/>
+        <p:txBody>
+          <a:bodyPr/>
+          <a:lstStyle/>
+          <a:p>
+            <a:endParaRPr lang="de-DE" dirty="0"/>
+          </a:p>
+        </p:txBody>
+      </p:sp>
+      <p:sp>
+        <p:nvSpPr>
+          <p:cNvPr id="4" name="Slide Number Placeholder 3"/>
+          <p:cNvSpPr>
+            <a:spLocks noGrp="1"/>
+          </p:cNvSpPr>
+          <p:nvPr>
+            <p:ph type="sldNum" sz="quarter" idx="5"/>
+          </p:nvPr>
+        </p:nvSpPr>
+        <p:spPr/>
+        <p:txBody>
+          <a:bodyPr/>
+          <a:lstStyle/>
+          <a:p>
+            <a:fld id="{BD605BF3-E4C3-42DC-8191-548303381329}" type="slidenum">
+              <a:rPr lang="de-DE" smtClean="0"/>
+              <a:t>3</a:t>
+            </a:fld>
+            <a:endParaRPr lang="de-DE"/>
+          </a:p>
+        </p:txBody>
+      </p:sp>
+    </p:spTree>
+    <p:extLst>
+      <p:ext uri="{BB962C8B-B14F-4D97-AF65-F5344CB8AC3E}">
+        <p14:creationId xmlns:p14="http://schemas.microsoft.com/office/powerpoint/2010/main" val="371478128"/>
+      </p:ext>
+    </p:extLst>
+  </p:cSld>
+  <p:clrMapOvr>
+    <a:masterClrMapping/>
+  </p:clrMapOvr>
+</p:notes>
+</file>
+
 <file path=ppt/slideLayouts/slideLayout1.xml><?xml version="1.0" encoding="utf-8"?>
 <p:sldLayout xmlns:a="http://schemas.openxmlformats.org/drawingml/2006/main" xmlns:r="http://schemas.openxmlformats.org/officeDocument/2006/relationships" xmlns:p="http://schemas.openxmlformats.org/presentationml/2006/main" type="title" preserve="1">
   <p:cSld name="Titelfolie">
@@ -254,7 +691,7 @@
           <a:p>
             <a:fld id="{7F74B683-5B55-47E9-B45C-EB67E1285507}" type="datetimeFigureOut">
               <a:rPr lang="de-DE" smtClean="0"/>
-              <a:t>20.02.2026</a:t>
+              <a:t>21.02.2026</a:t>
             </a:fld>
             <a:endParaRPr lang="de-DE"/>
           </a:p>
@@ -424,7 +861,7 @@
           <a:p>
             <a:fld id="{7F74B683-5B55-47E9-B45C-EB67E1285507}" type="datetimeFigureOut">
               <a:rPr lang="de-DE" smtClean="0"/>
-              <a:t>20.02.2026</a:t>
+              <a:t>21.02.2026</a:t>
             </a:fld>
             <a:endParaRPr lang="de-DE"/>
           </a:p>
@@ -604,7 +1041,7 @@
           <a:p>
             <a:fld id="{7F74B683-5B55-47E9-B45C-EB67E1285507}" type="datetimeFigureOut">
               <a:rPr lang="de-DE" smtClean="0"/>
-              <a:t>20.02.2026</a:t>
+              <a:t>21.02.2026</a:t>
             </a:fld>
             <a:endParaRPr lang="de-DE"/>
           </a:p>
@@ -774,7 +1211,7 @@
           <a:p>
             <a:fld id="{7F74B683-5B55-47E9-B45C-EB67E1285507}" type="datetimeFigureOut">
               <a:rPr lang="de-DE" smtClean="0"/>
-              <a:t>20.02.2026</a:t>
+              <a:t>21.02.2026</a:t>
             </a:fld>
             <a:endParaRPr lang="de-DE"/>
           </a:p>
@@ -1020,7 +1457,7 @@
           <a:p>
             <a:fld id="{7F74B683-5B55-47E9-B45C-EB67E1285507}" type="datetimeFigureOut">
               <a:rPr lang="de-DE" smtClean="0"/>
-              <a:t>20.02.2026</a:t>
+              <a:t>21.02.2026</a:t>
             </a:fld>
             <a:endParaRPr lang="de-DE"/>
           </a:p>
@@ -1252,7 +1689,7 @@
           <a:p>
             <a:fld id="{7F74B683-5B55-47E9-B45C-EB67E1285507}" type="datetimeFigureOut">
               <a:rPr lang="de-DE" smtClean="0"/>
-              <a:t>20.02.2026</a:t>
+              <a:t>21.02.2026</a:t>
             </a:fld>
             <a:endParaRPr lang="de-DE"/>
           </a:p>
@@ -1619,7 +2056,7 @@
           <a:p>
             <a:fld id="{7F74B683-5B55-47E9-B45C-EB67E1285507}" type="datetimeFigureOut">
               <a:rPr lang="de-DE" smtClean="0"/>
-              <a:t>20.02.2026</a:t>
+              <a:t>21.02.2026</a:t>
             </a:fld>
             <a:endParaRPr lang="de-DE"/>
           </a:p>
@@ -1737,7 +2174,7 @@
           <a:p>
             <a:fld id="{7F74B683-5B55-47E9-B45C-EB67E1285507}" type="datetimeFigureOut">
               <a:rPr lang="de-DE" smtClean="0"/>
-              <a:t>20.02.2026</a:t>
+              <a:t>21.02.2026</a:t>
             </a:fld>
             <a:endParaRPr lang="de-DE"/>
           </a:p>
@@ -1832,7 +2269,7 @@
           <a:p>
             <a:fld id="{7F74B683-5B55-47E9-B45C-EB67E1285507}" type="datetimeFigureOut">
               <a:rPr lang="de-DE" smtClean="0"/>
-              <a:t>20.02.2026</a:t>
+              <a:t>21.02.2026</a:t>
             </a:fld>
             <a:endParaRPr lang="de-DE"/>
           </a:p>
@@ -2109,7 +2546,7 @@
           <a:p>
             <a:fld id="{7F74B683-5B55-47E9-B45C-EB67E1285507}" type="datetimeFigureOut">
               <a:rPr lang="de-DE" smtClean="0"/>
-              <a:t>20.02.2026</a:t>
+              <a:t>21.02.2026</a:t>
             </a:fld>
             <a:endParaRPr lang="de-DE"/>
           </a:p>
@@ -2366,7 +2803,7 @@
           <a:p>
             <a:fld id="{7F74B683-5B55-47E9-B45C-EB67E1285507}" type="datetimeFigureOut">
               <a:rPr lang="de-DE" smtClean="0"/>
-              <a:t>20.02.2026</a:t>
+              <a:t>21.02.2026</a:t>
             </a:fld>
             <a:endParaRPr lang="de-DE"/>
           </a:p>
@@ -2579,7 +3016,7 @@
           <a:p>
             <a:fld id="{7F74B683-5B55-47E9-B45C-EB67E1285507}" type="datetimeFigureOut">
               <a:rPr lang="de-DE" smtClean="0"/>
-              <a:t>20.02.2026</a:t>
+              <a:t>21.02.2026</a:t>
             </a:fld>
             <a:endParaRPr lang="de-DE"/>
           </a:p>
@@ -3499,7 +3936,7 @@
                 <a:ea typeface="Calibri" panose="020F0502020204030204" pitchFamily="34" charset="0"/>
                 <a:cs typeface="Times New Roman" panose="02020603050405020304" pitchFamily="18" charset="0"/>
               </a:rPr>
-              <a:t>Nimm dein </a:t>
+              <a:t>Nimm bitte, sobald wir soweit sind, dein </a:t>
             </a:r>
             <a:r>
               <a:rPr kumimoji="0" lang="de-DE" altLang="de-DE" sz="1800" b="1" i="0" u="none" strike="noStrike" cap="none" normalizeH="0" baseline="0" dirty="0">
@@ -3762,286 +4199,6 @@
           <p:cNvPr id="2" name="Title 1">
             <a:extLst>
               <a:ext uri="{FF2B5EF4-FFF2-40B4-BE49-F238E27FC236}">
-                <a16:creationId xmlns:a16="http://schemas.microsoft.com/office/drawing/2014/main" id="{2263D464-E8A6-4F16-B231-80688280C1CE}"/>
-              </a:ext>
-            </a:extLst>
-          </p:cNvPr>
-          <p:cNvSpPr>
-            <a:spLocks noGrp="1"/>
-          </p:cNvSpPr>
-          <p:nvPr>
-            <p:ph type="title"/>
-          </p:nvPr>
-        </p:nvSpPr>
-        <p:spPr/>
-        <p:txBody>
-          <a:bodyPr/>
-          <a:lstStyle/>
-          <a:p>
-            <a:r>
-              <a:rPr lang="de-DE" dirty="0"/>
-              <a:t>Family Link Restriktionen umgehen</a:t>
-            </a:r>
-          </a:p>
-        </p:txBody>
-      </p:sp>
-      <p:sp>
-        <p:nvSpPr>
-          <p:cNvPr id="3" name="Content Placeholder 2">
-            <a:extLst>
-              <a:ext uri="{FF2B5EF4-FFF2-40B4-BE49-F238E27FC236}">
-                <a16:creationId xmlns:a16="http://schemas.microsoft.com/office/drawing/2014/main" id="{3686047F-D17B-45AD-9B67-5524A12FF697}"/>
-              </a:ext>
-            </a:extLst>
-          </p:cNvPr>
-          <p:cNvSpPr>
-            <a:spLocks noGrp="1"/>
-          </p:cNvSpPr>
-          <p:nvPr>
-            <p:ph idx="1"/>
-          </p:nvPr>
-        </p:nvSpPr>
-        <p:spPr/>
-        <p:txBody>
-          <a:bodyPr/>
-          <a:lstStyle/>
-          <a:p>
-            <a:pPr marL="0" indent="0">
-              <a:buNone/>
-            </a:pPr>
-            <a:r>
-              <a:rPr lang="de-DE" dirty="0"/>
-              <a:t>…</a:t>
-            </a:r>
-          </a:p>
-        </p:txBody>
-      </p:sp>
-    </p:spTree>
-    <p:extLst>
-      <p:ext uri="{BB962C8B-B14F-4D97-AF65-F5344CB8AC3E}">
-        <p14:creationId xmlns:p14="http://schemas.microsoft.com/office/powerpoint/2010/main" val="789373505"/>
-      </p:ext>
-    </p:extLst>
-  </p:cSld>
-  <p:clrMapOvr>
-    <a:masterClrMapping/>
-  </p:clrMapOvr>
-</p:sld>
-</file>
-
-<file path=ppt/slides/slide4.xml><?xml version="1.0" encoding="utf-8"?>
-<p:sld xmlns:a="http://schemas.openxmlformats.org/drawingml/2006/main" xmlns:r="http://schemas.openxmlformats.org/officeDocument/2006/relationships" xmlns:p="http://schemas.openxmlformats.org/presentationml/2006/main">
-  <p:cSld>
-    <p:spTree>
-      <p:nvGrpSpPr>
-        <p:cNvPr id="1" name=""/>
-        <p:cNvGrpSpPr/>
-        <p:nvPr/>
-      </p:nvGrpSpPr>
-      <p:grpSpPr>
-        <a:xfrm>
-          <a:off x="0" y="0"/>
-          <a:ext cx="0" cy="0"/>
-          <a:chOff x="0" y="0"/>
-          <a:chExt cx="0" cy="0"/>
-        </a:xfrm>
-      </p:grpSpPr>
-      <p:sp>
-        <p:nvSpPr>
-          <p:cNvPr id="2" name="Title 1">
-            <a:extLst>
-              <a:ext uri="{FF2B5EF4-FFF2-40B4-BE49-F238E27FC236}">
-                <a16:creationId xmlns:a16="http://schemas.microsoft.com/office/drawing/2014/main" id="{48FDF813-EE93-425A-B044-6AAE2FADF940}"/>
-              </a:ext>
-            </a:extLst>
-          </p:cNvPr>
-          <p:cNvSpPr>
-            <a:spLocks noGrp="1"/>
-          </p:cNvSpPr>
-          <p:nvPr>
-            <p:ph type="title"/>
-          </p:nvPr>
-        </p:nvSpPr>
-        <p:spPr/>
-        <p:txBody>
-          <a:bodyPr/>
-          <a:lstStyle/>
-          <a:p>
-            <a:r>
-              <a:rPr lang="de-DE" dirty="0"/>
-              <a:t>Informationen recherchieren</a:t>
-            </a:r>
-          </a:p>
-        </p:txBody>
-      </p:sp>
-      <p:sp>
-        <p:nvSpPr>
-          <p:cNvPr id="3" name="Content Placeholder 2">
-            <a:extLst>
-              <a:ext uri="{FF2B5EF4-FFF2-40B4-BE49-F238E27FC236}">
-                <a16:creationId xmlns:a16="http://schemas.microsoft.com/office/drawing/2014/main" id="{02ACB7ED-8D0E-4ED2-A0C2-4FA896016D31}"/>
-              </a:ext>
-            </a:extLst>
-          </p:cNvPr>
-          <p:cNvSpPr>
-            <a:spLocks noGrp="1"/>
-          </p:cNvSpPr>
-          <p:nvPr>
-            <p:ph idx="1"/>
-          </p:nvPr>
-        </p:nvSpPr>
-        <p:spPr/>
-        <p:txBody>
-          <a:bodyPr>
-            <a:normAutofit lnSpcReduction="10000"/>
-          </a:bodyPr>
-          <a:lstStyle/>
-          <a:p>
-            <a:r>
-              <a:rPr lang="de-DE" dirty="0"/>
-              <a:t>Dokumentation</a:t>
-            </a:r>
-          </a:p>
-          <a:p>
-            <a:r>
-              <a:rPr lang="de-DE" dirty="0" err="1"/>
-              <a:t>StackOverflow</a:t>
-            </a:r>
-            <a:endParaRPr lang="de-DE" dirty="0"/>
-          </a:p>
-          <a:p>
-            <a:r>
-              <a:rPr lang="de-DE" dirty="0" err="1"/>
-              <a:t>ChatGPT</a:t>
-            </a:r>
-            <a:endParaRPr lang="de-DE" dirty="0"/>
-          </a:p>
-          <a:p>
-            <a:pPr lvl="1">
-              <a:buFont typeface="Wingdings" panose="05000000000000000000" pitchFamily="2" charset="2"/>
-              <a:buChar char="ü"/>
-            </a:pPr>
-            <a:r>
-              <a:rPr lang="de-DE" dirty="0"/>
-              <a:t>Code erklären lassen („Was bedeuten die Parameter dieser Methode?“)</a:t>
-            </a:r>
-          </a:p>
-          <a:p>
-            <a:pPr lvl="1">
-              <a:buFont typeface="Wingdings" panose="05000000000000000000" pitchFamily="2" charset="2"/>
-              <a:buChar char="ü"/>
-            </a:pPr>
-            <a:r>
-              <a:rPr lang="de-DE" dirty="0"/>
-              <a:t>Syntax und </a:t>
-            </a:r>
-            <a:r>
-              <a:rPr lang="de-DE" dirty="0">
-                <a:solidFill>
-                  <a:srgbClr val="FFCCFF"/>
-                </a:solidFill>
-              </a:rPr>
-              <a:t>APIs</a:t>
-            </a:r>
-            <a:r>
-              <a:rPr lang="de-DE" dirty="0"/>
-              <a:t> verstehen („Wie spiele ich in </a:t>
-            </a:r>
-            <a:r>
-              <a:rPr lang="de-DE" dirty="0" err="1"/>
-              <a:t>libGDX</a:t>
-            </a:r>
-            <a:r>
-              <a:rPr lang="de-DE" dirty="0"/>
-              <a:t> Sounds ab?“)</a:t>
-            </a:r>
-          </a:p>
-          <a:p>
-            <a:pPr lvl="1">
-              <a:buFont typeface="Wingdings" panose="05000000000000000000" pitchFamily="2" charset="2"/>
-              <a:buChar char="ü"/>
-            </a:pPr>
-            <a:r>
-              <a:rPr lang="de-DE" dirty="0"/>
-              <a:t>Code verbessern („Wie kann ich diese Spiellogik eleganter programmieren?“)</a:t>
-            </a:r>
-          </a:p>
-          <a:p>
-            <a:pPr lvl="2"/>
-            <a:r>
-              <a:rPr lang="de-DE" dirty="0"/>
-              <a:t>Umstrukturierung ohne semantische Änderung nennt man auch </a:t>
-            </a:r>
-            <a:r>
-              <a:rPr lang="de-DE" dirty="0" err="1">
-                <a:solidFill>
-                  <a:srgbClr val="FFCCFF"/>
-                </a:solidFill>
-              </a:rPr>
-              <a:t>Refactoring</a:t>
-            </a:r>
-            <a:r>
-              <a:rPr lang="de-DE" dirty="0"/>
-              <a:t>.</a:t>
-            </a:r>
-          </a:p>
-          <a:p>
-            <a:pPr lvl="1">
-              <a:buFont typeface="Wingdings" panose="05000000000000000000" pitchFamily="2" charset="2"/>
-              <a:buChar char="ü"/>
-            </a:pPr>
-            <a:r>
-              <a:rPr lang="de-DE" dirty="0"/>
-              <a:t>Bugs finden („Wieso kann man die Spielfigur nicht sehen?“)</a:t>
-            </a:r>
-          </a:p>
-          <a:p>
-            <a:pPr lvl="1">
-              <a:buFont typeface="Symbol" panose="05050102010706020507" pitchFamily="18" charset="2"/>
-              <a:buChar char="-"/>
-            </a:pPr>
-            <a:r>
-              <a:rPr lang="de-DE" dirty="0"/>
-              <a:t>Code schreiben lassen, ohne diesen nachzuvollziehen</a:t>
-            </a:r>
-          </a:p>
-        </p:txBody>
-      </p:sp>
-    </p:spTree>
-    <p:extLst>
-      <p:ext uri="{BB962C8B-B14F-4D97-AF65-F5344CB8AC3E}">
-        <p14:creationId xmlns:p14="http://schemas.microsoft.com/office/powerpoint/2010/main" val="1095441688"/>
-      </p:ext>
-    </p:extLst>
-  </p:cSld>
-  <p:clrMapOvr>
-    <a:masterClrMapping/>
-  </p:clrMapOvr>
-</p:sld>
-</file>
-
-<file path=ppt/slides/slide5.xml><?xml version="1.0" encoding="utf-8"?>
-<p:sld xmlns:a="http://schemas.openxmlformats.org/drawingml/2006/main" xmlns:r="http://schemas.openxmlformats.org/officeDocument/2006/relationships" xmlns:p="http://schemas.openxmlformats.org/presentationml/2006/main">
-  <p:cSld>
-    <p:spTree>
-      <p:nvGrpSpPr>
-        <p:cNvPr id="1" name=""/>
-        <p:cNvGrpSpPr/>
-        <p:nvPr/>
-      </p:nvGrpSpPr>
-      <p:grpSpPr>
-        <a:xfrm>
-          <a:off x="0" y="0"/>
-          <a:ext cx="0" cy="0"/>
-          <a:chOff x="0" y="0"/>
-          <a:chExt cx="0" cy="0"/>
-        </a:xfrm>
-      </p:grpSpPr>
-      <p:sp>
-        <p:nvSpPr>
-          <p:cNvPr id="2" name="Title 1">
-            <a:extLst>
-              <a:ext uri="{FF2B5EF4-FFF2-40B4-BE49-F238E27FC236}">
                 <a16:creationId xmlns:a16="http://schemas.microsoft.com/office/drawing/2014/main" id="{742E89BC-A7E5-4160-B7AC-C37B5B5B627A}"/>
               </a:ext>
             </a:extLst>
@@ -4060,7 +4217,7 @@
           <a:p>
             <a:r>
               <a:rPr lang="de-DE" dirty="0"/>
-              <a:t>Ablauf Sommersemester 2025</a:t>
+              <a:t>Ablauf Sommersemester 2027</a:t>
             </a:r>
           </a:p>
         </p:txBody>
@@ -4081,14 +4238,14 @@
             <p:ph idx="1"/>
             <p:extLst>
               <p:ext uri="{D42A27DB-BD31-4B8C-83A1-F6EECF244321}">
-                <p14:modId xmlns:p14="http://schemas.microsoft.com/office/powerpoint/2010/main" val="2710785110"/>
+                <p14:modId xmlns:p14="http://schemas.microsoft.com/office/powerpoint/2010/main" val="1599445343"/>
               </p:ext>
             </p:extLst>
           </p:nvPr>
         </p:nvGraphicFramePr>
         <p:xfrm>
           <a:off x="838204" y="1432560"/>
-          <a:ext cx="10515596" cy="4617720"/>
+          <a:ext cx="10515596" cy="4079240"/>
         </p:xfrm>
         <a:graphic>
           <a:graphicData uri="http://schemas.openxmlformats.org/drawingml/2006/table">
@@ -4333,12 +4490,20 @@
                     <a:lstStyle/>
                     <a:p>
                       <a:r>
+                        <a:rPr lang="de-DE" dirty="0" err="1">
+                          <a:solidFill>
+                            <a:schemeClr val="tx1"/>
+                          </a:solidFill>
+                        </a:rPr>
+                        <a:t>tbd</a:t>
+                      </a:r>
+                      <a:r>
                         <a:rPr lang="de-DE" dirty="0">
                           <a:solidFill>
                             <a:schemeClr val="tx1"/>
                           </a:solidFill>
                         </a:rPr>
-                        <a:t>Freitag, 20.2.</a:t>
+                        <a:t>.</a:t>
                       </a:r>
                     </a:p>
                   </a:txBody>
@@ -4416,23 +4581,7 @@
                             <a:schemeClr val="tx1"/>
                           </a:solidFill>
                         </a:rPr>
-                        <a:t>IDE, Befehle</a:t>
-                      </a:r>
-                      <a:r>
-                        <a:rPr lang="de-DE">
-                          <a:solidFill>
-                            <a:schemeClr val="tx1"/>
-                          </a:solidFill>
-                        </a:rPr>
-                        <a:t>, Aussagenlogik, Variablen</a:t>
-                      </a:r>
-                      <a:r>
-                        <a:rPr lang="de-DE" dirty="0">
-                          <a:solidFill>
-                            <a:schemeClr val="tx1"/>
-                          </a:solidFill>
-                        </a:rPr>
-                        <a:t>, Datentypen und Operationen</a:t>
+                        <a:t>IDE, Mathe Teil 1, Datentypen, Variablen</a:t>
                       </a:r>
                     </a:p>
                   </a:txBody>
@@ -4512,14 +4661,11 @@
                     <a:bodyPr/>
                     <a:lstStyle/>
                     <a:p>
-                      <a:r>
-                        <a:rPr lang="de-DE" dirty="0">
-                          <a:solidFill>
-                            <a:schemeClr val="tx1"/>
-                          </a:solidFill>
-                        </a:rPr>
-                        <a:t>Samstag, 21.2.</a:t>
-                      </a:r>
+                      <a:endParaRPr lang="de-DE" dirty="0">
+                        <a:solidFill>
+                          <a:schemeClr val="tx1"/>
+                        </a:solidFill>
+                      </a:endParaRPr>
                     </a:p>
                   </a:txBody>
                   <a:tcPr>
@@ -4613,7 +4759,7 @@
                             <a:schemeClr val="tx1"/>
                           </a:solidFill>
                         </a:rPr>
-                        <a:t>Mengen und Abbildungen, Klassen und Methoden, Kontrollfluss</a:t>
+                        <a:t>Mathe Teil 2, Methoden, Klassen, Kontrollstrukturen</a:t>
                       </a:r>
                     </a:p>
                   </a:txBody>
@@ -4710,14 +4856,11 @@
                         <a:tabLst/>
                         <a:defRPr/>
                       </a:pPr>
-                      <a:r>
-                        <a:rPr lang="de-DE" dirty="0">
-                          <a:solidFill>
-                            <a:schemeClr val="tx1"/>
-                          </a:solidFill>
-                        </a:rPr>
-                        <a:t>Freitag, 27.2.</a:t>
-                      </a:r>
+                      <a:endParaRPr lang="de-DE" dirty="0">
+                        <a:solidFill>
+                          <a:schemeClr val="tx1"/>
+                        </a:solidFill>
+                      </a:endParaRPr>
                     </a:p>
                   </a:txBody>
                   <a:tcPr>
@@ -4794,7 +4937,23 @@
                             <a:schemeClr val="tx1"/>
                           </a:solidFill>
                         </a:rPr>
-                        <a:t>Induktion und Rekursion, Datenstrukturen und Algorithmen</a:t>
+                        <a:t>Mathe Teil 3, </a:t>
+                      </a:r>
+                      <a:r>
+                        <a:rPr lang="de-DE" dirty="0" err="1">
+                          <a:solidFill>
+                            <a:schemeClr val="tx1"/>
+                          </a:solidFill>
+                        </a:rPr>
+                        <a:t>Utils</a:t>
+                      </a:r>
+                      <a:r>
+                        <a:rPr lang="de-DE" dirty="0">
+                          <a:solidFill>
+                            <a:schemeClr val="tx1"/>
+                          </a:solidFill>
+                        </a:rPr>
+                        <a:t>, Arrays, Algorithmen, Polymorphismus</a:t>
                       </a:r>
                     </a:p>
                   </a:txBody>
@@ -4891,14 +5050,11 @@
                         <a:tabLst/>
                         <a:defRPr/>
                       </a:pPr>
-                      <a:r>
-                        <a:rPr lang="de-DE" dirty="0">
-                          <a:solidFill>
-                            <a:schemeClr val="tx1"/>
-                          </a:solidFill>
-                        </a:rPr>
-                        <a:t>Samstag, 28.2.</a:t>
-                      </a:r>
+                      <a:endParaRPr lang="de-DE" dirty="0">
+                        <a:solidFill>
+                          <a:schemeClr val="tx1"/>
+                        </a:solidFill>
+                      </a:endParaRPr>
                     </a:p>
                   </a:txBody>
                   <a:tcPr>
@@ -4992,23 +5148,7 @@
                             <a:schemeClr val="tx1"/>
                           </a:solidFill>
                         </a:rPr>
-                        <a:t>Paradigmen, </a:t>
-                      </a:r>
-                      <a:r>
-                        <a:rPr lang="de-DE" dirty="0" err="1">
-                          <a:solidFill>
-                            <a:schemeClr val="tx1"/>
-                          </a:solidFill>
-                        </a:rPr>
-                        <a:t>Generics</a:t>
-                      </a:r>
-                      <a:r>
-                        <a:rPr lang="de-DE" dirty="0">
-                          <a:solidFill>
-                            <a:schemeClr val="tx1"/>
-                          </a:solidFill>
-                        </a:rPr>
-                        <a:t>, Modellierung</a:t>
+                        <a:t>Mehr Übung</a:t>
                       </a:r>
                     </a:p>
                   </a:txBody>
@@ -5105,14 +5245,11 @@
                         <a:tabLst/>
                         <a:defRPr/>
                       </a:pPr>
-                      <a:r>
-                        <a:rPr lang="de-DE" dirty="0">
-                          <a:solidFill>
-                            <a:schemeClr val="tx1"/>
-                          </a:solidFill>
-                        </a:rPr>
-                        <a:t>Freitag, 6.3.</a:t>
-                      </a:r>
+                      <a:endParaRPr lang="de-DE" dirty="0">
+                        <a:solidFill>
+                          <a:schemeClr val="tx1"/>
+                        </a:solidFill>
+                      </a:endParaRPr>
                     </a:p>
                   </a:txBody>
                   <a:tcPr>
@@ -5184,12 +5321,20 @@
                     <a:lstStyle/>
                     <a:p>
                       <a:r>
+                        <a:rPr lang="de-DE" dirty="0" err="1">
+                          <a:solidFill>
+                            <a:schemeClr val="tx1"/>
+                          </a:solidFill>
+                        </a:rPr>
+                        <a:t>LibGDX</a:t>
+                      </a:r>
+                      <a:r>
                         <a:rPr lang="de-DE" dirty="0">
                           <a:solidFill>
                             <a:schemeClr val="tx1"/>
                           </a:solidFill>
                         </a:rPr>
-                        <a:t>Koordinatensysteme, Vektorrechnung, Eingabe/Ausgabe, Rendering (alles 2D)</a:t>
+                        <a:t> Teil 1, Datenstrukturen, erweiterbares Open World Spiel</a:t>
                       </a:r>
                     </a:p>
                   </a:txBody>
@@ -5286,14 +5431,11 @@
                         <a:tabLst/>
                         <a:defRPr/>
                       </a:pPr>
-                      <a:r>
-                        <a:rPr lang="de-DE" dirty="0">
-                          <a:solidFill>
-                            <a:schemeClr val="tx1"/>
-                          </a:solidFill>
-                        </a:rPr>
-                        <a:t>Samstag, 7.3.</a:t>
-                      </a:r>
+                      <a:endParaRPr lang="de-DE" dirty="0">
+                        <a:solidFill>
+                          <a:schemeClr val="tx1"/>
+                        </a:solidFill>
+                      </a:endParaRPr>
                     </a:p>
                   </a:txBody>
                   <a:tcPr>
@@ -5382,12 +5524,20 @@
                     <a:lstStyle/>
                     <a:p>
                       <a:r>
+                        <a:rPr lang="de-DE" dirty="0" err="1">
+                          <a:solidFill>
+                            <a:schemeClr val="tx1"/>
+                          </a:solidFill>
+                        </a:rPr>
+                        <a:t>LibGDX</a:t>
+                      </a:r>
+                      <a:r>
                         <a:rPr lang="de-DE" dirty="0">
                           <a:solidFill>
                             <a:schemeClr val="tx1"/>
                           </a:solidFill>
                         </a:rPr>
-                        <a:t>Implementation eines erweiterbaren Open World Spiels</a:t>
+                        <a:t> Teil 2, Java Ergänzungen</a:t>
                       </a:r>
                     </a:p>
                   </a:txBody>
@@ -5484,14 +5634,11 @@
                         <a:tabLst/>
                         <a:defRPr/>
                       </a:pPr>
-                      <a:r>
-                        <a:rPr lang="de-DE" dirty="0">
-                          <a:solidFill>
-                            <a:schemeClr val="tx1"/>
-                          </a:solidFill>
-                        </a:rPr>
-                        <a:t>Freitag, 13.3.</a:t>
-                      </a:r>
+                      <a:endParaRPr lang="de-DE" dirty="0">
+                        <a:solidFill>
+                          <a:schemeClr val="tx1"/>
+                        </a:solidFill>
+                      </a:endParaRPr>
                     </a:p>
                   </a:txBody>
                   <a:tcPr>
@@ -5568,7 +5715,7 @@
                             <a:schemeClr val="tx1"/>
                           </a:solidFill>
                         </a:rPr>
-                        <a:t>Entwurf eines Entwicklungsplans</a:t>
+                        <a:t>Entwurf eines Entwicklungsplans und eigenständige Entwicklung</a:t>
                       </a:r>
                     </a:p>
                     <a:p>
@@ -5578,7 +5725,23 @@
                             <a:schemeClr val="tx1"/>
                           </a:solidFill>
                         </a:rPr>
-                        <a:t>Wahl aus Kooperation, Sounds &amp; Musik, Text, UI, Android-Support, Partikel &amp; Animationen, Shader, Datenspeicherung, Metaprogression, Multiplayer, Sensoren, Physik und Kollisionen, prozedurale Generation, komplexere Spielmechaniken</a:t>
+                        <a:t>Wahl aus Kooperation über </a:t>
+                      </a:r>
+                      <a:r>
+                        <a:rPr lang="de-DE" dirty="0" err="1">
+                          <a:solidFill>
+                            <a:schemeClr val="tx1"/>
+                          </a:solidFill>
+                        </a:rPr>
+                        <a:t>git</a:t>
+                      </a:r>
+                      <a:r>
+                        <a:rPr lang="de-DE" dirty="0">
+                          <a:solidFill>
+                            <a:schemeClr val="tx1"/>
+                          </a:solidFill>
+                        </a:rPr>
+                        <a:t>, Sounds &amp; Musik, Text, UI, Android-Support, Partikel &amp; Animationen, Shader, Datenspeicherung, Metaprogression, Multiplayer, Sensoren, Physik und Kollisionen, prozedurale Generation, komplexere Spielmechaniken</a:t>
                       </a:r>
                     </a:p>
                   </a:txBody>
@@ -5658,14 +5821,11 @@
                     <a:bodyPr/>
                     <a:lstStyle/>
                     <a:p>
-                      <a:r>
-                        <a:rPr lang="de-DE" dirty="0">
-                          <a:solidFill>
-                            <a:schemeClr val="tx1"/>
-                          </a:solidFill>
-                        </a:rPr>
-                        <a:t>Samstag, 14.3.</a:t>
-                      </a:r>
+                      <a:endParaRPr lang="de-DE" dirty="0">
+                        <a:solidFill>
+                          <a:schemeClr val="tx1"/>
+                        </a:solidFill>
+                      </a:endParaRPr>
                     </a:p>
                   </a:txBody>
                   <a:tcPr>
@@ -5836,14 +5996,11 @@
                     <a:bodyPr/>
                     <a:lstStyle/>
                     <a:p>
-                      <a:r>
-                        <a:rPr lang="de-DE" dirty="0">
-                          <a:solidFill>
-                            <a:schemeClr val="tx1"/>
-                          </a:solidFill>
-                        </a:rPr>
-                        <a:t>Freitag, 20.3.</a:t>
-                      </a:r>
+                      <a:endParaRPr lang="de-DE" dirty="0">
+                        <a:solidFill>
+                          <a:schemeClr val="tx1"/>
+                        </a:solidFill>
+                      </a:endParaRPr>
                     </a:p>
                   </a:txBody>
                   <a:tcPr>
@@ -5997,14 +6154,11 @@
                     <a:bodyPr/>
                     <a:lstStyle/>
                     <a:p>
-                      <a:r>
-                        <a:rPr lang="de-DE" dirty="0">
-                          <a:solidFill>
-                            <a:schemeClr val="tx1"/>
-                          </a:solidFill>
-                        </a:rPr>
-                        <a:t>Samstag, 21.3.</a:t>
-                      </a:r>
+                      <a:endParaRPr lang="de-DE" dirty="0">
+                        <a:solidFill>
+                          <a:schemeClr val="tx1"/>
+                        </a:solidFill>
+                      </a:endParaRPr>
                     </a:p>
                   </a:txBody>
                   <a:tcPr>
@@ -6146,6 +6300,286 @@
 </p:sld>
 </file>
 
+<file path=ppt/slides/slide4.xml><?xml version="1.0" encoding="utf-8"?>
+<p:sld xmlns:a="http://schemas.openxmlformats.org/drawingml/2006/main" xmlns:r="http://schemas.openxmlformats.org/officeDocument/2006/relationships" xmlns:p="http://schemas.openxmlformats.org/presentationml/2006/main">
+  <p:cSld>
+    <p:spTree>
+      <p:nvGrpSpPr>
+        <p:cNvPr id="1" name=""/>
+        <p:cNvGrpSpPr/>
+        <p:nvPr/>
+      </p:nvGrpSpPr>
+      <p:grpSpPr>
+        <a:xfrm>
+          <a:off x="0" y="0"/>
+          <a:ext cx="0" cy="0"/>
+          <a:chOff x="0" y="0"/>
+          <a:chExt cx="0" cy="0"/>
+        </a:xfrm>
+      </p:grpSpPr>
+      <p:sp>
+        <p:nvSpPr>
+          <p:cNvPr id="2" name="Title 1">
+            <a:extLst>
+              <a:ext uri="{FF2B5EF4-FFF2-40B4-BE49-F238E27FC236}">
+                <a16:creationId xmlns:a16="http://schemas.microsoft.com/office/drawing/2014/main" id="{2263D464-E8A6-4F16-B231-80688280C1CE}"/>
+              </a:ext>
+            </a:extLst>
+          </p:cNvPr>
+          <p:cNvSpPr>
+            <a:spLocks noGrp="1"/>
+          </p:cNvSpPr>
+          <p:nvPr>
+            <p:ph type="title"/>
+          </p:nvPr>
+        </p:nvSpPr>
+        <p:spPr/>
+        <p:txBody>
+          <a:bodyPr/>
+          <a:lstStyle/>
+          <a:p>
+            <a:r>
+              <a:rPr lang="de-DE" dirty="0"/>
+              <a:t>Family Link Restriktionen umgehen</a:t>
+            </a:r>
+          </a:p>
+        </p:txBody>
+      </p:sp>
+      <p:sp>
+        <p:nvSpPr>
+          <p:cNvPr id="3" name="Content Placeholder 2">
+            <a:extLst>
+              <a:ext uri="{FF2B5EF4-FFF2-40B4-BE49-F238E27FC236}">
+                <a16:creationId xmlns:a16="http://schemas.microsoft.com/office/drawing/2014/main" id="{3686047F-D17B-45AD-9B67-5524A12FF697}"/>
+              </a:ext>
+            </a:extLst>
+          </p:cNvPr>
+          <p:cNvSpPr>
+            <a:spLocks noGrp="1"/>
+          </p:cNvSpPr>
+          <p:nvPr>
+            <p:ph idx="1"/>
+          </p:nvPr>
+        </p:nvSpPr>
+        <p:spPr/>
+        <p:txBody>
+          <a:bodyPr/>
+          <a:lstStyle/>
+          <a:p>
+            <a:pPr marL="0" indent="0">
+              <a:buNone/>
+            </a:pPr>
+            <a:r>
+              <a:rPr lang="de-DE" dirty="0"/>
+              <a:t>…</a:t>
+            </a:r>
+          </a:p>
+        </p:txBody>
+      </p:sp>
+    </p:spTree>
+    <p:extLst>
+      <p:ext uri="{BB962C8B-B14F-4D97-AF65-F5344CB8AC3E}">
+        <p14:creationId xmlns:p14="http://schemas.microsoft.com/office/powerpoint/2010/main" val="789373505"/>
+      </p:ext>
+    </p:extLst>
+  </p:cSld>
+  <p:clrMapOvr>
+    <a:masterClrMapping/>
+  </p:clrMapOvr>
+</p:sld>
+</file>
+
+<file path=ppt/slides/slide5.xml><?xml version="1.0" encoding="utf-8"?>
+<p:sld xmlns:a="http://schemas.openxmlformats.org/drawingml/2006/main" xmlns:r="http://schemas.openxmlformats.org/officeDocument/2006/relationships" xmlns:p="http://schemas.openxmlformats.org/presentationml/2006/main">
+  <p:cSld>
+    <p:spTree>
+      <p:nvGrpSpPr>
+        <p:cNvPr id="1" name=""/>
+        <p:cNvGrpSpPr/>
+        <p:nvPr/>
+      </p:nvGrpSpPr>
+      <p:grpSpPr>
+        <a:xfrm>
+          <a:off x="0" y="0"/>
+          <a:ext cx="0" cy="0"/>
+          <a:chOff x="0" y="0"/>
+          <a:chExt cx="0" cy="0"/>
+        </a:xfrm>
+      </p:grpSpPr>
+      <p:sp>
+        <p:nvSpPr>
+          <p:cNvPr id="2" name="Title 1">
+            <a:extLst>
+              <a:ext uri="{FF2B5EF4-FFF2-40B4-BE49-F238E27FC236}">
+                <a16:creationId xmlns:a16="http://schemas.microsoft.com/office/drawing/2014/main" id="{48FDF813-EE93-425A-B044-6AAE2FADF940}"/>
+              </a:ext>
+            </a:extLst>
+          </p:cNvPr>
+          <p:cNvSpPr>
+            <a:spLocks noGrp="1"/>
+          </p:cNvSpPr>
+          <p:nvPr>
+            <p:ph type="title"/>
+          </p:nvPr>
+        </p:nvSpPr>
+        <p:spPr/>
+        <p:txBody>
+          <a:bodyPr/>
+          <a:lstStyle/>
+          <a:p>
+            <a:r>
+              <a:rPr lang="de-DE" dirty="0"/>
+              <a:t>Informationen recherchieren</a:t>
+            </a:r>
+          </a:p>
+        </p:txBody>
+      </p:sp>
+      <p:sp>
+        <p:nvSpPr>
+          <p:cNvPr id="3" name="Content Placeholder 2">
+            <a:extLst>
+              <a:ext uri="{FF2B5EF4-FFF2-40B4-BE49-F238E27FC236}">
+                <a16:creationId xmlns:a16="http://schemas.microsoft.com/office/drawing/2014/main" id="{02ACB7ED-8D0E-4ED2-A0C2-4FA896016D31}"/>
+              </a:ext>
+            </a:extLst>
+          </p:cNvPr>
+          <p:cNvSpPr>
+            <a:spLocks noGrp="1"/>
+          </p:cNvSpPr>
+          <p:nvPr>
+            <p:ph idx="1"/>
+          </p:nvPr>
+        </p:nvSpPr>
+        <p:spPr/>
+        <p:txBody>
+          <a:bodyPr>
+            <a:normAutofit lnSpcReduction="10000"/>
+          </a:bodyPr>
+          <a:lstStyle/>
+          <a:p>
+            <a:r>
+              <a:rPr lang="de-DE" dirty="0"/>
+              <a:t>Dokumentation</a:t>
+            </a:r>
+          </a:p>
+          <a:p>
+            <a:r>
+              <a:rPr lang="de-DE" dirty="0" err="1"/>
+              <a:t>StackOverflow</a:t>
+            </a:r>
+            <a:endParaRPr lang="de-DE" dirty="0"/>
+          </a:p>
+          <a:p>
+            <a:r>
+              <a:rPr lang="de-DE" dirty="0" err="1"/>
+              <a:t>ChatGPT</a:t>
+            </a:r>
+            <a:endParaRPr lang="de-DE" dirty="0"/>
+          </a:p>
+          <a:p>
+            <a:pPr lvl="1">
+              <a:buFont typeface="Wingdings" panose="05000000000000000000" pitchFamily="2" charset="2"/>
+              <a:buChar char="ü"/>
+            </a:pPr>
+            <a:r>
+              <a:rPr lang="de-DE" dirty="0"/>
+              <a:t>Code erklären lassen („Was bedeuten die Parameter dieser Methode?“)</a:t>
+            </a:r>
+          </a:p>
+          <a:p>
+            <a:pPr lvl="1">
+              <a:buFont typeface="Wingdings" panose="05000000000000000000" pitchFamily="2" charset="2"/>
+              <a:buChar char="ü"/>
+            </a:pPr>
+            <a:r>
+              <a:rPr lang="de-DE" dirty="0"/>
+              <a:t>Syntax und </a:t>
+            </a:r>
+            <a:r>
+              <a:rPr lang="de-DE" dirty="0">
+                <a:solidFill>
+                  <a:srgbClr val="FFCCFF"/>
+                </a:solidFill>
+              </a:rPr>
+              <a:t>APIs</a:t>
+            </a:r>
+            <a:r>
+              <a:rPr lang="de-DE" dirty="0"/>
+              <a:t> verstehen („Wie spiele ich in </a:t>
+            </a:r>
+            <a:r>
+              <a:rPr lang="de-DE" dirty="0" err="1"/>
+              <a:t>libGDX</a:t>
+            </a:r>
+            <a:r>
+              <a:rPr lang="de-DE" dirty="0"/>
+              <a:t> Sounds ab?“)</a:t>
+            </a:r>
+          </a:p>
+          <a:p>
+            <a:pPr lvl="1">
+              <a:buFont typeface="Wingdings" panose="05000000000000000000" pitchFamily="2" charset="2"/>
+              <a:buChar char="ü"/>
+            </a:pPr>
+            <a:r>
+              <a:rPr lang="de-DE" dirty="0"/>
+              <a:t>Code verbessern („Wie kann ich diese Spiellogik eleganter programmieren?“)</a:t>
+            </a:r>
+          </a:p>
+          <a:p>
+            <a:pPr lvl="2"/>
+            <a:r>
+              <a:rPr lang="de-DE" dirty="0"/>
+              <a:t>Umstrukturierung ohne semantische Änderung nennt man auch </a:t>
+            </a:r>
+            <a:r>
+              <a:rPr lang="de-DE" dirty="0" err="1">
+                <a:solidFill>
+                  <a:srgbClr val="FFCCFF"/>
+                </a:solidFill>
+              </a:rPr>
+              <a:t>Refactoring</a:t>
+            </a:r>
+            <a:r>
+              <a:rPr lang="de-DE" dirty="0"/>
+              <a:t>.</a:t>
+            </a:r>
+          </a:p>
+          <a:p>
+            <a:pPr lvl="1">
+              <a:buFont typeface="Wingdings" panose="05000000000000000000" pitchFamily="2" charset="2"/>
+              <a:buChar char="ü"/>
+            </a:pPr>
+            <a:r>
+              <a:rPr lang="de-DE" dirty="0"/>
+              <a:t>Bugs finden („Wieso kann man die Spielfigur nicht sehen?“)</a:t>
+            </a:r>
+          </a:p>
+          <a:p>
+            <a:pPr lvl="1">
+              <a:buFont typeface="Symbol" panose="05050102010706020507" pitchFamily="18" charset="2"/>
+              <a:buChar char="-"/>
+            </a:pPr>
+            <a:r>
+              <a:rPr lang="de-DE" dirty="0"/>
+              <a:t>Code schreiben lassen, ohne diesen nachzuvollziehen</a:t>
+            </a:r>
+          </a:p>
+        </p:txBody>
+      </p:sp>
+    </p:spTree>
+    <p:extLst>
+      <p:ext uri="{BB962C8B-B14F-4D97-AF65-F5344CB8AC3E}">
+        <p14:creationId xmlns:p14="http://schemas.microsoft.com/office/powerpoint/2010/main" val="1095441688"/>
+      </p:ext>
+    </p:extLst>
+  </p:cSld>
+  <p:clrMapOvr>
+    <a:masterClrMapping/>
+  </p:clrMapOvr>
+</p:sld>
+</file>
+
 <file path=ppt/slides/slide6.xml><?xml version="1.0" encoding="utf-8"?>
 <p:sld xmlns:a="http://schemas.openxmlformats.org/drawingml/2006/main" xmlns:r="http://schemas.openxmlformats.org/officeDocument/2006/relationships" xmlns:p="http://schemas.openxmlformats.org/presentationml/2006/main">
   <p:cSld>
@@ -6186,7 +6620,7 @@
           <a:p>
             <a:r>
               <a:rPr lang="de-DE" dirty="0"/>
-              <a:t>Weitere Vertiefungsmöglichkeiten</a:t>
+              <a:t>Andere Vertiefungsmöglichkeiten</a:t>
             </a:r>
           </a:p>
         </p:txBody>
@@ -6466,4 +6900,299 @@
     </a:ext>
   </a:extLst>
 </a:theme>
+</file>
+
+<file path=ppt/theme/theme2.xml><?xml version="1.0" encoding="utf-8"?>
+<a:theme xmlns:a="http://schemas.openxmlformats.org/drawingml/2006/main" name="Office Theme">
+  <a:themeElements>
+    <a:clrScheme name="Office">
+      <a:dk1>
+        <a:sysClr val="windowText" lastClr="000000"/>
+      </a:dk1>
+      <a:lt1>
+        <a:sysClr val="window" lastClr="FFFFFF"/>
+      </a:lt1>
+      <a:dk2>
+        <a:srgbClr val="44546A"/>
+      </a:dk2>
+      <a:lt2>
+        <a:srgbClr val="E7E6E6"/>
+      </a:lt2>
+      <a:accent1>
+        <a:srgbClr val="4472C4"/>
+      </a:accent1>
+      <a:accent2>
+        <a:srgbClr val="ED7D31"/>
+      </a:accent2>
+      <a:accent3>
+        <a:srgbClr val="A5A5A5"/>
+      </a:accent3>
+      <a:accent4>
+        <a:srgbClr val="FFC000"/>
+      </a:accent4>
+      <a:accent5>
+        <a:srgbClr val="5B9BD5"/>
+      </a:accent5>
+      <a:accent6>
+        <a:srgbClr val="70AD47"/>
+      </a:accent6>
+      <a:hlink>
+        <a:srgbClr val="0563C1"/>
+      </a:hlink>
+      <a:folHlink>
+        <a:srgbClr val="954F72"/>
+      </a:folHlink>
+    </a:clrScheme>
+    <a:fontScheme name="Office">
+      <a:majorFont>
+        <a:latin typeface="Calibri Light" panose="020F0302020204030204"/>
+        <a:ea typeface=""/>
+        <a:cs typeface=""/>
+        <a:font script="Jpan" typeface="游ゴシック Light"/>
+        <a:font script="Hang" typeface="맑은 고딕"/>
+        <a:font script="Hans" typeface="等线 Light"/>
+        <a:font script="Hant" typeface="新細明體"/>
+        <a:font script="Arab" typeface="Times New Roman"/>
+        <a:font script="Hebr" typeface="Times New Roman"/>
+        <a:font script="Thai" typeface="Angsana New"/>
+        <a:font script="Ethi" typeface="Nyala"/>
+        <a:font script="Beng" typeface="Vrinda"/>
+        <a:font script="Gujr" typeface="Shruti"/>
+        <a:font script="Khmr" typeface="MoolBoran"/>
+        <a:font script="Knda" typeface="Tunga"/>
+        <a:font script="Guru" typeface="Raavi"/>
+        <a:font script="Cans" typeface="Euphemia"/>
+        <a:font script="Cher" typeface="Plantagenet Cherokee"/>
+        <a:font script="Yiii" typeface="Microsoft Yi Baiti"/>
+        <a:font script="Tibt" typeface="Microsoft Himalaya"/>
+        <a:font script="Thaa" typeface="MV Boli"/>
+        <a:font script="Deva" typeface="Mangal"/>
+        <a:font script="Telu" typeface="Gautami"/>
+        <a:font script="Taml" typeface="Latha"/>
+        <a:font script="Syrc" typeface="Estrangelo Edessa"/>
+        <a:font script="Orya" typeface="Kalinga"/>
+        <a:font script="Mlym" typeface="Kartika"/>
+        <a:font script="Laoo" typeface="DokChampa"/>
+        <a:font script="Sinh" typeface="Iskoola Pota"/>
+        <a:font script="Mong" typeface="Mongolian Baiti"/>
+        <a:font script="Viet" typeface="Times New Roman"/>
+        <a:font script="Uigh" typeface="Microsoft Uighur"/>
+        <a:font script="Geor" typeface="Sylfaen"/>
+        <a:font script="Armn" typeface="Arial"/>
+        <a:font script="Bugi" typeface="Leelawadee UI"/>
+        <a:font script="Bopo" typeface="Microsoft JhengHei"/>
+        <a:font script="Java" typeface="Javanese Text"/>
+        <a:font script="Lisu" typeface="Segoe UI"/>
+        <a:font script="Mymr" typeface="Myanmar Text"/>
+        <a:font script="Nkoo" typeface="Ebrima"/>
+        <a:font script="Olck" typeface="Nirmala UI"/>
+        <a:font script="Osma" typeface="Ebrima"/>
+        <a:font script="Phag" typeface="Phagspa"/>
+        <a:font script="Syrn" typeface="Estrangelo Edessa"/>
+        <a:font script="Syrj" typeface="Estrangelo Edessa"/>
+        <a:font script="Syre" typeface="Estrangelo Edessa"/>
+        <a:font script="Sora" typeface="Nirmala UI"/>
+        <a:font script="Tale" typeface="Microsoft Tai Le"/>
+        <a:font script="Talu" typeface="Microsoft New Tai Lue"/>
+        <a:font script="Tfng" typeface="Ebrima"/>
+      </a:majorFont>
+      <a:minorFont>
+        <a:latin typeface="Calibri" panose="020F0502020204030204"/>
+        <a:ea typeface=""/>
+        <a:cs typeface=""/>
+        <a:font script="Jpan" typeface="游ゴシック"/>
+        <a:font script="Hang" typeface="맑은 고딕"/>
+        <a:font script="Hans" typeface="等线"/>
+        <a:font script="Hant" typeface="新細明體"/>
+        <a:font script="Arab" typeface="Arial"/>
+        <a:font script="Hebr" typeface="Arial"/>
+        <a:font script="Thai" typeface="Cordia New"/>
+        <a:font script="Ethi" typeface="Nyala"/>
+        <a:font script="Beng" typeface="Vrinda"/>
+        <a:font script="Gujr" typeface="Shruti"/>
+        <a:font script="Khmr" typeface="DaunPenh"/>
+        <a:font script="Knda" typeface="Tunga"/>
+        <a:font script="Guru" typeface="Raavi"/>
+        <a:font script="Cans" typeface="Euphemia"/>
+        <a:font script="Cher" typeface="Plantagenet Cherokee"/>
+        <a:font script="Yiii" typeface="Microsoft Yi Baiti"/>
+        <a:font script="Tibt" typeface="Microsoft Himalaya"/>
+        <a:font script="Thaa" typeface="MV Boli"/>
+        <a:font script="Deva" typeface="Mangal"/>
+        <a:font script="Telu" typeface="Gautami"/>
+        <a:font script="Taml" typeface="Latha"/>
+        <a:font script="Syrc" typeface="Estrangelo Edessa"/>
+        <a:font script="Orya" typeface="Kalinga"/>
+        <a:font script="Mlym" typeface="Kartika"/>
+        <a:font script="Laoo" typeface="DokChampa"/>
+        <a:font script="Sinh" typeface="Iskoola Pota"/>
+        <a:font script="Mong" typeface="Mongolian Baiti"/>
+        <a:font script="Viet" typeface="Arial"/>
+        <a:font script="Uigh" typeface="Microsoft Uighur"/>
+        <a:font script="Geor" typeface="Sylfaen"/>
+        <a:font script="Armn" typeface="Arial"/>
+        <a:font script="Bugi" typeface="Leelawadee UI"/>
+        <a:font script="Bopo" typeface="Microsoft JhengHei"/>
+        <a:font script="Java" typeface="Javanese Text"/>
+        <a:font script="Lisu" typeface="Segoe UI"/>
+        <a:font script="Mymr" typeface="Myanmar Text"/>
+        <a:font script="Nkoo" typeface="Ebrima"/>
+        <a:font script="Olck" typeface="Nirmala UI"/>
+        <a:font script="Osma" typeface="Ebrima"/>
+        <a:font script="Phag" typeface="Phagspa"/>
+        <a:font script="Syrn" typeface="Estrangelo Edessa"/>
+        <a:font script="Syrj" typeface="Estrangelo Edessa"/>
+        <a:font script="Syre" typeface="Estrangelo Edessa"/>
+        <a:font script="Sora" typeface="Nirmala UI"/>
+        <a:font script="Tale" typeface="Microsoft Tai Le"/>
+        <a:font script="Talu" typeface="Microsoft New Tai Lue"/>
+        <a:font script="Tfng" typeface="Ebrima"/>
+      </a:minorFont>
+    </a:fontScheme>
+    <a:fmtScheme name="Office">
+      <a:fillStyleLst>
+        <a:solidFill>
+          <a:schemeClr val="phClr"/>
+        </a:solidFill>
+        <a:gradFill rotWithShape="1">
+          <a:gsLst>
+            <a:gs pos="0">
+              <a:schemeClr val="phClr">
+                <a:lumMod val="110000"/>
+                <a:satMod val="105000"/>
+                <a:tint val="67000"/>
+              </a:schemeClr>
+            </a:gs>
+            <a:gs pos="50000">
+              <a:schemeClr val="phClr">
+                <a:lumMod val="105000"/>
+                <a:satMod val="103000"/>
+                <a:tint val="73000"/>
+              </a:schemeClr>
+            </a:gs>
+            <a:gs pos="100000">
+              <a:schemeClr val="phClr">
+                <a:lumMod val="105000"/>
+                <a:satMod val="109000"/>
+                <a:tint val="81000"/>
+              </a:schemeClr>
+            </a:gs>
+          </a:gsLst>
+          <a:lin ang="5400000" scaled="0"/>
+        </a:gradFill>
+        <a:gradFill rotWithShape="1">
+          <a:gsLst>
+            <a:gs pos="0">
+              <a:schemeClr val="phClr">
+                <a:satMod val="103000"/>
+                <a:lumMod val="102000"/>
+                <a:tint val="94000"/>
+              </a:schemeClr>
+            </a:gs>
+            <a:gs pos="50000">
+              <a:schemeClr val="phClr">
+                <a:satMod val="110000"/>
+                <a:lumMod val="100000"/>
+                <a:shade val="100000"/>
+              </a:schemeClr>
+            </a:gs>
+            <a:gs pos="100000">
+              <a:schemeClr val="phClr">
+                <a:lumMod val="99000"/>
+                <a:satMod val="120000"/>
+                <a:shade val="78000"/>
+              </a:schemeClr>
+            </a:gs>
+          </a:gsLst>
+          <a:lin ang="5400000" scaled="0"/>
+        </a:gradFill>
+      </a:fillStyleLst>
+      <a:lnStyleLst>
+        <a:ln w="6350" cap="flat" cmpd="sng" algn="ctr">
+          <a:solidFill>
+            <a:schemeClr val="phClr"/>
+          </a:solidFill>
+          <a:prstDash val="solid"/>
+          <a:miter lim="800000"/>
+        </a:ln>
+        <a:ln w="12700" cap="flat" cmpd="sng" algn="ctr">
+          <a:solidFill>
+            <a:schemeClr val="phClr"/>
+          </a:solidFill>
+          <a:prstDash val="solid"/>
+          <a:miter lim="800000"/>
+        </a:ln>
+        <a:ln w="19050" cap="flat" cmpd="sng" algn="ctr">
+          <a:solidFill>
+            <a:schemeClr val="phClr"/>
+          </a:solidFill>
+          <a:prstDash val="solid"/>
+          <a:miter lim="800000"/>
+        </a:ln>
+      </a:lnStyleLst>
+      <a:effectStyleLst>
+        <a:effectStyle>
+          <a:effectLst/>
+        </a:effectStyle>
+        <a:effectStyle>
+          <a:effectLst/>
+        </a:effectStyle>
+        <a:effectStyle>
+          <a:effectLst>
+            <a:outerShdw blurRad="57150" dist="19050" dir="5400000" algn="ctr" rotWithShape="0">
+              <a:srgbClr val="000000">
+                <a:alpha val="63000"/>
+              </a:srgbClr>
+            </a:outerShdw>
+          </a:effectLst>
+        </a:effectStyle>
+      </a:effectStyleLst>
+      <a:bgFillStyleLst>
+        <a:solidFill>
+          <a:schemeClr val="phClr"/>
+        </a:solidFill>
+        <a:solidFill>
+          <a:schemeClr val="phClr">
+            <a:tint val="95000"/>
+            <a:satMod val="170000"/>
+          </a:schemeClr>
+        </a:solidFill>
+        <a:gradFill rotWithShape="1">
+          <a:gsLst>
+            <a:gs pos="0">
+              <a:schemeClr val="phClr">
+                <a:tint val="93000"/>
+                <a:satMod val="150000"/>
+                <a:shade val="98000"/>
+                <a:lumMod val="102000"/>
+              </a:schemeClr>
+            </a:gs>
+            <a:gs pos="50000">
+              <a:schemeClr val="phClr">
+                <a:tint val="98000"/>
+                <a:satMod val="130000"/>
+                <a:shade val="90000"/>
+                <a:lumMod val="103000"/>
+              </a:schemeClr>
+            </a:gs>
+            <a:gs pos="100000">
+              <a:schemeClr val="phClr">
+                <a:shade val="63000"/>
+                <a:satMod val="120000"/>
+              </a:schemeClr>
+            </a:gs>
+          </a:gsLst>
+          <a:lin ang="5400000" scaled="0"/>
+        </a:gradFill>
+      </a:bgFillStyleLst>
+    </a:fmtScheme>
+  </a:themeElements>
+  <a:objectDefaults/>
+  <a:extraClrSchemeLst/>
+  <a:extLst>
+    <a:ext uri="{05A4C25C-085E-4340-85A3-A5531E510DB2}">
+      <thm15:themeFamily xmlns:thm15="http://schemas.microsoft.com/office/thememl/2012/main" name="Office Theme" id="{62F939B6-93AF-4DB8-9C6B-D6C7DFDC589F}" vid="{4A3C46E8-61CC-4603-A589-7422A47A8E4A}"/>
+    </a:ext>
+  </a:extLst>
+</a:theme>
 </file>
--- a/src/Infos.pptx
+++ b/src/Infos.pptx
@@ -8,7 +8,7 @@
     <p:notesMasterId r:id="rId8"/>
   </p:notesMasterIdLst>
   <p:sldIdLst>
-    <p:sldId id="318" r:id="rId2"/>
+    <p:sldId id="422" r:id="rId2"/>
     <p:sldId id="320" r:id="rId3"/>
     <p:sldId id="322" r:id="rId4"/>
     <p:sldId id="321" r:id="rId5"/>
@@ -208,7 +208,7 @@
           <a:p>
             <a:fld id="{41D138C4-A6D9-4066-A368-CF895815075A}" type="datetimeFigureOut">
               <a:rPr lang="de-DE" smtClean="0"/>
-              <a:t>21.02.2026</a:t>
+              <a:t>23.02.2026</a:t>
             </a:fld>
             <a:endParaRPr lang="de-DE"/>
           </a:p>
@@ -691,7 +691,7 @@
           <a:p>
             <a:fld id="{7F74B683-5B55-47E9-B45C-EB67E1285507}" type="datetimeFigureOut">
               <a:rPr lang="de-DE" smtClean="0"/>
-              <a:t>21.02.2026</a:t>
+              <a:t>23.02.2026</a:t>
             </a:fld>
             <a:endParaRPr lang="de-DE"/>
           </a:p>
@@ -861,7 +861,7 @@
           <a:p>
             <a:fld id="{7F74B683-5B55-47E9-B45C-EB67E1285507}" type="datetimeFigureOut">
               <a:rPr lang="de-DE" smtClean="0"/>
-              <a:t>21.02.2026</a:t>
+              <a:t>23.02.2026</a:t>
             </a:fld>
             <a:endParaRPr lang="de-DE"/>
           </a:p>
@@ -1041,7 +1041,7 @@
           <a:p>
             <a:fld id="{7F74B683-5B55-47E9-B45C-EB67E1285507}" type="datetimeFigureOut">
               <a:rPr lang="de-DE" smtClean="0"/>
-              <a:t>21.02.2026</a:t>
+              <a:t>23.02.2026</a:t>
             </a:fld>
             <a:endParaRPr lang="de-DE"/>
           </a:p>
@@ -1211,7 +1211,7 @@
           <a:p>
             <a:fld id="{7F74B683-5B55-47E9-B45C-EB67E1285507}" type="datetimeFigureOut">
               <a:rPr lang="de-DE" smtClean="0"/>
-              <a:t>21.02.2026</a:t>
+              <a:t>23.02.2026</a:t>
             </a:fld>
             <a:endParaRPr lang="de-DE"/>
           </a:p>
@@ -1457,7 +1457,7 @@
           <a:p>
             <a:fld id="{7F74B683-5B55-47E9-B45C-EB67E1285507}" type="datetimeFigureOut">
               <a:rPr lang="de-DE" smtClean="0"/>
-              <a:t>21.02.2026</a:t>
+              <a:t>23.02.2026</a:t>
             </a:fld>
             <a:endParaRPr lang="de-DE"/>
           </a:p>
@@ -1689,7 +1689,7 @@
           <a:p>
             <a:fld id="{7F74B683-5B55-47E9-B45C-EB67E1285507}" type="datetimeFigureOut">
               <a:rPr lang="de-DE" smtClean="0"/>
-              <a:t>21.02.2026</a:t>
+              <a:t>23.02.2026</a:t>
             </a:fld>
             <a:endParaRPr lang="de-DE"/>
           </a:p>
@@ -2056,7 +2056,7 @@
           <a:p>
             <a:fld id="{7F74B683-5B55-47E9-B45C-EB67E1285507}" type="datetimeFigureOut">
               <a:rPr lang="de-DE" smtClean="0"/>
-              <a:t>21.02.2026</a:t>
+              <a:t>23.02.2026</a:t>
             </a:fld>
             <a:endParaRPr lang="de-DE"/>
           </a:p>
@@ -2174,7 +2174,7 @@
           <a:p>
             <a:fld id="{7F74B683-5B55-47E9-B45C-EB67E1285507}" type="datetimeFigureOut">
               <a:rPr lang="de-DE" smtClean="0"/>
-              <a:t>21.02.2026</a:t>
+              <a:t>23.02.2026</a:t>
             </a:fld>
             <a:endParaRPr lang="de-DE"/>
           </a:p>
@@ -2269,7 +2269,7 @@
           <a:p>
             <a:fld id="{7F74B683-5B55-47E9-B45C-EB67E1285507}" type="datetimeFigureOut">
               <a:rPr lang="de-DE" smtClean="0"/>
-              <a:t>21.02.2026</a:t>
+              <a:t>23.02.2026</a:t>
             </a:fld>
             <a:endParaRPr lang="de-DE"/>
           </a:p>
@@ -2546,7 +2546,7 @@
           <a:p>
             <a:fld id="{7F74B683-5B55-47E9-B45C-EB67E1285507}" type="datetimeFigureOut">
               <a:rPr lang="de-DE" smtClean="0"/>
-              <a:t>21.02.2026</a:t>
+              <a:t>23.02.2026</a:t>
             </a:fld>
             <a:endParaRPr lang="de-DE"/>
           </a:p>
@@ -2803,7 +2803,7 @@
           <a:p>
             <a:fld id="{7F74B683-5B55-47E9-B45C-EB67E1285507}" type="datetimeFigureOut">
               <a:rPr lang="de-DE" smtClean="0"/>
-              <a:t>21.02.2026</a:t>
+              <a:t>23.02.2026</a:t>
             </a:fld>
             <a:endParaRPr lang="de-DE"/>
           </a:p>
@@ -3016,7 +3016,7 @@
           <a:p>
             <a:fld id="{7F74B683-5B55-47E9-B45C-EB67E1285507}" type="datetimeFigureOut">
               <a:rPr lang="de-DE" smtClean="0"/>
-              <a:t>21.02.2026</a:t>
+              <a:t>23.02.2026</a:t>
             </a:fld>
             <a:endParaRPr lang="de-DE"/>
           </a:p>
@@ -3407,20 +3407,6 @@
 <file path=ppt/slides/slide1.xml><?xml version="1.0" encoding="utf-8"?>
 <p:sld xmlns:a="http://schemas.openxmlformats.org/drawingml/2006/main" xmlns:r="http://schemas.openxmlformats.org/officeDocument/2006/relationships" xmlns:p="http://schemas.openxmlformats.org/presentationml/2006/main">
   <p:cSld>
-    <p:bg>
-      <p:bgPr>
-        <a:blipFill dpi="0" rotWithShape="1">
-          <a:blip r:embed="rId2">
-            <a:lum/>
-          </a:blip>
-          <a:srcRect/>
-          <a:stretch>
-            <a:fillRect l="-6000" r="-6000"/>
-          </a:stretch>
-        </a:blipFill>
-        <a:effectLst/>
-      </p:bgPr>
-    </p:bg>
     <p:spTree>
       <p:nvGrpSpPr>
         <p:cNvPr id="1" name=""/>
@@ -3437,10 +3423,2351 @@
       </p:grpSpPr>
       <p:sp>
         <p:nvSpPr>
+          <p:cNvPr id="14" name="TextBox 13">
+            <a:extLst>
+              <a:ext uri="{FF2B5EF4-FFF2-40B4-BE49-F238E27FC236}">
+                <a16:creationId xmlns:a16="http://schemas.microsoft.com/office/drawing/2014/main" id="{6785A916-8705-4789-91FD-B6AD62310C3E}"/>
+              </a:ext>
+            </a:extLst>
+          </p:cNvPr>
+          <p:cNvSpPr txBox="1"/>
+          <p:nvPr/>
+        </p:nvSpPr>
+        <p:spPr>
+          <a:xfrm rot="1272087">
+            <a:off x="4495369" y="3406693"/>
+            <a:ext cx="7854894" cy="1569660"/>
+          </a:xfrm>
+          <a:prstGeom prst="rect">
+            <a:avLst/>
+          </a:prstGeom>
+          <a:noFill/>
+        </p:spPr>
+        <p:txBody>
+          <a:bodyPr wrap="square">
+            <a:spAutoFit/>
+          </a:bodyPr>
+          <a:lstStyle/>
+          <a:p>
+            <a:pPr marL="0" marR="0" lvl="0" indent="0" algn="l" defTabSz="914400" rtl="0" eaLnBrk="0" fontAlgn="base" latinLnBrk="0" hangingPunct="0">
+              <a:lnSpc>
+                <a:spcPct val="100000"/>
+              </a:lnSpc>
+              <a:spcBef>
+                <a:spcPct val="0"/>
+              </a:spcBef>
+              <a:spcAft>
+                <a:spcPct val="0"/>
+              </a:spcAft>
+              <a:buClrTx/>
+              <a:buSzTx/>
+              <a:buFontTx/>
+              <a:buNone/>
+              <a:tabLst/>
+            </a:pPr>
+            <a:r>
+              <a:rPr kumimoji="0" lang="de-DE" altLang="de-DE" sz="1600" b="0" i="0" u="none" strike="noStrike" cap="none" normalizeH="0" baseline="0" dirty="0" err="1">
+                <a:ln>
+                  <a:noFill/>
+                </a:ln>
+                <a:solidFill>
+                  <a:srgbClr val="CC7E47"/>
+                </a:solidFill>
+                <a:effectLst/>
+                <a:latin typeface="Roboto Mono" panose="00000009000000000000" pitchFamily="50" charset="0"/>
+              </a:rPr>
+              <a:t>for</a:t>
+            </a:r>
+            <a:r>
+              <a:rPr kumimoji="0" lang="de-DE" altLang="de-DE" sz="1600" b="0" i="0" u="none" strike="noStrike" cap="none" normalizeH="0" baseline="0" dirty="0">
+                <a:ln>
+                  <a:noFill/>
+                </a:ln>
+                <a:solidFill>
+                  <a:srgbClr val="CC7E47"/>
+                </a:solidFill>
+                <a:effectLst/>
+                <a:latin typeface="Roboto Mono" panose="00000009000000000000" pitchFamily="50" charset="0"/>
+              </a:rPr>
+              <a:t> </a:t>
+            </a:r>
+            <a:r>
+              <a:rPr kumimoji="0" lang="de-DE" altLang="de-DE" sz="1600" b="0" i="0" u="none" strike="noStrike" cap="none" normalizeH="0" baseline="0" dirty="0">
+                <a:ln>
+                  <a:noFill/>
+                </a:ln>
+                <a:solidFill>
+                  <a:srgbClr val="B0BA8C"/>
+                </a:solidFill>
+                <a:effectLst/>
+                <a:latin typeface="Roboto Mono" panose="00000009000000000000" pitchFamily="50" charset="0"/>
+              </a:rPr>
+              <a:t>(</a:t>
+            </a:r>
+            <a:r>
+              <a:rPr kumimoji="0" lang="de-DE" altLang="de-DE" sz="1600" b="0" i="0" u="none" strike="noStrike" cap="none" normalizeH="0" baseline="0" dirty="0" err="1">
+                <a:ln>
+                  <a:noFill/>
+                </a:ln>
+                <a:solidFill>
+                  <a:srgbClr val="CC7E47"/>
+                </a:solidFill>
+                <a:effectLst/>
+                <a:latin typeface="Roboto Mono" panose="00000009000000000000" pitchFamily="50" charset="0"/>
+              </a:rPr>
+              <a:t>int</a:t>
+            </a:r>
+            <a:r>
+              <a:rPr kumimoji="0" lang="de-DE" altLang="de-DE" sz="1600" b="0" i="0" u="none" strike="noStrike" cap="none" normalizeH="0" baseline="0" dirty="0">
+                <a:ln>
+                  <a:noFill/>
+                </a:ln>
+                <a:solidFill>
+                  <a:srgbClr val="CC7E47"/>
+                </a:solidFill>
+                <a:effectLst/>
+                <a:latin typeface="Roboto Mono" panose="00000009000000000000" pitchFamily="50" charset="0"/>
+              </a:rPr>
+              <a:t> </a:t>
+            </a:r>
+            <a:r>
+              <a:rPr kumimoji="0" lang="de-DE" altLang="de-DE" sz="1600" b="0" i="0" u="none" strike="noStrike" cap="none" normalizeH="0" baseline="0" dirty="0">
+                <a:ln>
+                  <a:noFill/>
+                </a:ln>
+                <a:solidFill>
+                  <a:srgbClr val="A9B7C6"/>
+                </a:solidFill>
+                <a:effectLst/>
+                <a:latin typeface="Roboto Mono" panose="00000009000000000000" pitchFamily="50" charset="0"/>
+              </a:rPr>
+              <a:t>y = -</a:t>
+            </a:r>
+            <a:r>
+              <a:rPr kumimoji="0" lang="de-DE" altLang="de-DE" sz="1600" b="0" i="0" u="none" strike="noStrike" cap="none" normalizeH="0" baseline="0" dirty="0">
+                <a:ln>
+                  <a:noFill/>
+                </a:ln>
+                <a:solidFill>
+                  <a:srgbClr val="6897BB"/>
+                </a:solidFill>
+                <a:effectLst/>
+                <a:latin typeface="Roboto Mono" panose="00000009000000000000" pitchFamily="50" charset="0"/>
+              </a:rPr>
+              <a:t>10</a:t>
+            </a:r>
+            <a:r>
+              <a:rPr kumimoji="0" lang="de-DE" altLang="de-DE" sz="1600" b="0" i="0" u="none" strike="noStrike" cap="none" normalizeH="0" baseline="0" dirty="0">
+                <a:ln>
+                  <a:noFill/>
+                </a:ln>
+                <a:solidFill>
+                  <a:srgbClr val="CC7E47"/>
+                </a:solidFill>
+                <a:effectLst/>
+                <a:latin typeface="Roboto Mono" panose="00000009000000000000" pitchFamily="50" charset="0"/>
+              </a:rPr>
+              <a:t>; </a:t>
+            </a:r>
+            <a:r>
+              <a:rPr kumimoji="0" lang="de-DE" altLang="de-DE" sz="1600" b="0" i="0" u="none" strike="noStrike" cap="none" normalizeH="0" baseline="0" dirty="0">
+                <a:ln>
+                  <a:noFill/>
+                </a:ln>
+                <a:solidFill>
+                  <a:srgbClr val="A9B7C6"/>
+                </a:solidFill>
+                <a:effectLst/>
+                <a:latin typeface="Roboto Mono" panose="00000009000000000000" pitchFamily="50" charset="0"/>
+              </a:rPr>
+              <a:t>y &lt;= </a:t>
+            </a:r>
+            <a:r>
+              <a:rPr kumimoji="0" lang="de-DE" altLang="de-DE" sz="1600" b="0" i="0" u="none" strike="noStrike" cap="none" normalizeH="0" baseline="0" dirty="0">
+                <a:ln>
+                  <a:noFill/>
+                </a:ln>
+                <a:solidFill>
+                  <a:srgbClr val="6897BB"/>
+                </a:solidFill>
+                <a:effectLst/>
+                <a:latin typeface="Roboto Mono" panose="00000009000000000000" pitchFamily="50" charset="0"/>
+              </a:rPr>
+              <a:t>10</a:t>
+            </a:r>
+            <a:r>
+              <a:rPr kumimoji="0" lang="de-DE" altLang="de-DE" sz="1600" b="0" i="0" u="none" strike="noStrike" cap="none" normalizeH="0" baseline="0" dirty="0">
+                <a:ln>
+                  <a:noFill/>
+                </a:ln>
+                <a:solidFill>
+                  <a:srgbClr val="CC7E47"/>
+                </a:solidFill>
+                <a:effectLst/>
+                <a:latin typeface="Roboto Mono" panose="00000009000000000000" pitchFamily="50" charset="0"/>
+              </a:rPr>
+              <a:t>; </a:t>
+            </a:r>
+            <a:r>
+              <a:rPr kumimoji="0" lang="de-DE" altLang="de-DE" sz="1600" b="0" i="0" u="none" strike="noStrike" cap="none" normalizeH="0" baseline="0" dirty="0">
+                <a:ln>
+                  <a:noFill/>
+                </a:ln>
+                <a:solidFill>
+                  <a:srgbClr val="A9B7C6"/>
+                </a:solidFill>
+                <a:effectLst/>
+                <a:latin typeface="Roboto Mono" panose="00000009000000000000" pitchFamily="50" charset="0"/>
+              </a:rPr>
+              <a:t>y++</a:t>
+            </a:r>
+            <a:r>
+              <a:rPr kumimoji="0" lang="de-DE" altLang="de-DE" sz="1600" b="0" i="0" u="none" strike="noStrike" cap="none" normalizeH="0" baseline="0" dirty="0">
+                <a:ln>
+                  <a:noFill/>
+                </a:ln>
+                <a:solidFill>
+                  <a:srgbClr val="B0BA8C"/>
+                </a:solidFill>
+                <a:effectLst/>
+                <a:latin typeface="Roboto Mono" panose="00000009000000000000" pitchFamily="50" charset="0"/>
+              </a:rPr>
+              <a:t>) </a:t>
+            </a:r>
+            <a:r>
+              <a:rPr kumimoji="0" lang="de-DE" altLang="de-DE" sz="1600" b="0" i="0" u="none" strike="noStrike" cap="none" normalizeH="0" baseline="0" dirty="0">
+                <a:ln>
+                  <a:noFill/>
+                </a:ln>
+                <a:solidFill>
+                  <a:srgbClr val="507874"/>
+                </a:solidFill>
+                <a:effectLst/>
+                <a:latin typeface="Roboto Mono" panose="00000009000000000000" pitchFamily="50" charset="0"/>
+              </a:rPr>
+              <a:t>{</a:t>
+            </a:r>
+            <a:br>
+              <a:rPr kumimoji="0" lang="de-DE" altLang="de-DE" sz="1600" b="0" i="0" u="none" strike="noStrike" cap="none" normalizeH="0" baseline="0" dirty="0">
+                <a:ln>
+                  <a:noFill/>
+                </a:ln>
+                <a:solidFill>
+                  <a:srgbClr val="507874"/>
+                </a:solidFill>
+                <a:effectLst/>
+                <a:latin typeface="Roboto Mono" panose="00000009000000000000" pitchFamily="50" charset="0"/>
+              </a:rPr>
+            </a:br>
+            <a:r>
+              <a:rPr kumimoji="0" lang="de-DE" altLang="de-DE" sz="1600" b="0" i="0" u="none" strike="noStrike" cap="none" normalizeH="0" baseline="0" dirty="0">
+                <a:ln>
+                  <a:noFill/>
+                </a:ln>
+                <a:solidFill>
+                  <a:srgbClr val="507874"/>
+                </a:solidFill>
+                <a:effectLst/>
+                <a:latin typeface="Roboto Mono" panose="00000009000000000000" pitchFamily="50" charset="0"/>
+              </a:rPr>
+              <a:t>    </a:t>
+            </a:r>
+            <a:r>
+              <a:rPr kumimoji="0" lang="de-DE" altLang="de-DE" sz="1600" b="0" i="0" u="none" strike="noStrike" cap="none" normalizeH="0" baseline="0" dirty="0" err="1">
+                <a:ln>
+                  <a:noFill/>
+                </a:ln>
+                <a:solidFill>
+                  <a:srgbClr val="CC7E47"/>
+                </a:solidFill>
+                <a:effectLst/>
+                <a:latin typeface="Roboto Mono" panose="00000009000000000000" pitchFamily="50" charset="0"/>
+              </a:rPr>
+              <a:t>for</a:t>
+            </a:r>
+            <a:r>
+              <a:rPr kumimoji="0" lang="de-DE" altLang="de-DE" sz="1600" b="0" i="0" u="none" strike="noStrike" cap="none" normalizeH="0" baseline="0" dirty="0">
+                <a:ln>
+                  <a:noFill/>
+                </a:ln>
+                <a:solidFill>
+                  <a:srgbClr val="CC7E47"/>
+                </a:solidFill>
+                <a:effectLst/>
+                <a:latin typeface="Roboto Mono" panose="00000009000000000000" pitchFamily="50" charset="0"/>
+              </a:rPr>
+              <a:t> </a:t>
+            </a:r>
+            <a:r>
+              <a:rPr kumimoji="0" lang="de-DE" altLang="de-DE" sz="1600" b="0" i="0" u="none" strike="noStrike" cap="none" normalizeH="0" baseline="0" dirty="0">
+                <a:ln>
+                  <a:noFill/>
+                </a:ln>
+                <a:solidFill>
+                  <a:srgbClr val="B0BA8C"/>
+                </a:solidFill>
+                <a:effectLst/>
+                <a:latin typeface="Roboto Mono" panose="00000009000000000000" pitchFamily="50" charset="0"/>
+              </a:rPr>
+              <a:t>(</a:t>
+            </a:r>
+            <a:r>
+              <a:rPr kumimoji="0" lang="de-DE" altLang="de-DE" sz="1600" b="0" i="0" u="none" strike="noStrike" cap="none" normalizeH="0" baseline="0" dirty="0" err="1">
+                <a:ln>
+                  <a:noFill/>
+                </a:ln>
+                <a:solidFill>
+                  <a:srgbClr val="CC7E47"/>
+                </a:solidFill>
+                <a:effectLst/>
+                <a:latin typeface="Roboto Mono" panose="00000009000000000000" pitchFamily="50" charset="0"/>
+              </a:rPr>
+              <a:t>int</a:t>
+            </a:r>
+            <a:r>
+              <a:rPr kumimoji="0" lang="de-DE" altLang="de-DE" sz="1600" b="0" i="0" u="none" strike="noStrike" cap="none" normalizeH="0" baseline="0" dirty="0">
+                <a:ln>
+                  <a:noFill/>
+                </a:ln>
+                <a:solidFill>
+                  <a:srgbClr val="CC7E47"/>
+                </a:solidFill>
+                <a:effectLst/>
+                <a:latin typeface="Roboto Mono" panose="00000009000000000000" pitchFamily="50" charset="0"/>
+              </a:rPr>
+              <a:t> </a:t>
+            </a:r>
+            <a:r>
+              <a:rPr kumimoji="0" lang="de-DE" altLang="de-DE" sz="1600" b="0" i="0" u="none" strike="noStrike" cap="none" normalizeH="0" baseline="0" dirty="0">
+                <a:ln>
+                  <a:noFill/>
+                </a:ln>
+                <a:solidFill>
+                  <a:srgbClr val="A9B7C6"/>
+                </a:solidFill>
+                <a:effectLst/>
+                <a:latin typeface="Roboto Mono" panose="00000009000000000000" pitchFamily="50" charset="0"/>
+              </a:rPr>
+              <a:t>x = -</a:t>
+            </a:r>
+            <a:r>
+              <a:rPr kumimoji="0" lang="de-DE" altLang="de-DE" sz="1600" b="0" i="0" u="none" strike="noStrike" cap="none" normalizeH="0" baseline="0" dirty="0">
+                <a:ln>
+                  <a:noFill/>
+                </a:ln>
+                <a:solidFill>
+                  <a:srgbClr val="6897BB"/>
+                </a:solidFill>
+                <a:effectLst/>
+                <a:latin typeface="Roboto Mono" panose="00000009000000000000" pitchFamily="50" charset="0"/>
+              </a:rPr>
+              <a:t>10</a:t>
+            </a:r>
+            <a:r>
+              <a:rPr kumimoji="0" lang="de-DE" altLang="de-DE" sz="1600" b="0" i="0" u="none" strike="noStrike" cap="none" normalizeH="0" baseline="0" dirty="0">
+                <a:ln>
+                  <a:noFill/>
+                </a:ln>
+                <a:solidFill>
+                  <a:srgbClr val="CC7E47"/>
+                </a:solidFill>
+                <a:effectLst/>
+                <a:latin typeface="Roboto Mono" panose="00000009000000000000" pitchFamily="50" charset="0"/>
+              </a:rPr>
+              <a:t>; </a:t>
+            </a:r>
+            <a:r>
+              <a:rPr kumimoji="0" lang="de-DE" altLang="de-DE" sz="1600" b="0" i="0" u="none" strike="noStrike" cap="none" normalizeH="0" baseline="0" dirty="0">
+                <a:ln>
+                  <a:noFill/>
+                </a:ln>
+                <a:solidFill>
+                  <a:srgbClr val="A9B7C6"/>
+                </a:solidFill>
+                <a:effectLst/>
+                <a:latin typeface="Roboto Mono" panose="00000009000000000000" pitchFamily="50" charset="0"/>
+              </a:rPr>
+              <a:t>x &lt;= </a:t>
+            </a:r>
+            <a:r>
+              <a:rPr kumimoji="0" lang="de-DE" altLang="de-DE" sz="1600" b="0" i="0" u="none" strike="noStrike" cap="none" normalizeH="0" baseline="0" dirty="0">
+                <a:ln>
+                  <a:noFill/>
+                </a:ln>
+                <a:solidFill>
+                  <a:srgbClr val="6897BB"/>
+                </a:solidFill>
+                <a:effectLst/>
+                <a:latin typeface="Roboto Mono" panose="00000009000000000000" pitchFamily="50" charset="0"/>
+              </a:rPr>
+              <a:t>10</a:t>
+            </a:r>
+            <a:r>
+              <a:rPr kumimoji="0" lang="de-DE" altLang="de-DE" sz="1600" b="0" i="0" u="none" strike="noStrike" cap="none" normalizeH="0" baseline="0" dirty="0">
+                <a:ln>
+                  <a:noFill/>
+                </a:ln>
+                <a:solidFill>
+                  <a:srgbClr val="CC7E47"/>
+                </a:solidFill>
+                <a:effectLst/>
+                <a:latin typeface="Roboto Mono" panose="00000009000000000000" pitchFamily="50" charset="0"/>
+              </a:rPr>
+              <a:t>; </a:t>
+            </a:r>
+            <a:r>
+              <a:rPr kumimoji="0" lang="de-DE" altLang="de-DE" sz="1600" b="0" i="0" u="none" strike="noStrike" cap="none" normalizeH="0" baseline="0" dirty="0">
+                <a:ln>
+                  <a:noFill/>
+                </a:ln>
+                <a:solidFill>
+                  <a:srgbClr val="A9B7C6"/>
+                </a:solidFill>
+                <a:effectLst/>
+                <a:latin typeface="Roboto Mono" panose="00000009000000000000" pitchFamily="50" charset="0"/>
+              </a:rPr>
+              <a:t>x++</a:t>
+            </a:r>
+            <a:r>
+              <a:rPr kumimoji="0" lang="de-DE" altLang="de-DE" sz="1600" b="0" i="0" u="none" strike="noStrike" cap="none" normalizeH="0" baseline="0" dirty="0">
+                <a:ln>
+                  <a:noFill/>
+                </a:ln>
+                <a:solidFill>
+                  <a:srgbClr val="B0BA8C"/>
+                </a:solidFill>
+                <a:effectLst/>
+                <a:latin typeface="Roboto Mono" panose="00000009000000000000" pitchFamily="50" charset="0"/>
+              </a:rPr>
+              <a:t>) </a:t>
+            </a:r>
+            <a:r>
+              <a:rPr kumimoji="0" lang="de-DE" altLang="de-DE" sz="1600" b="0" i="0" u="none" strike="noStrike" cap="none" normalizeH="0" baseline="0" dirty="0">
+                <a:ln>
+                  <a:noFill/>
+                </a:ln>
+                <a:solidFill>
+                  <a:srgbClr val="507874"/>
+                </a:solidFill>
+                <a:effectLst/>
+                <a:latin typeface="Roboto Mono" panose="00000009000000000000" pitchFamily="50" charset="0"/>
+              </a:rPr>
+              <a:t>{</a:t>
+            </a:r>
+            <a:br>
+              <a:rPr kumimoji="0" lang="de-DE" altLang="de-DE" sz="1600" b="0" i="0" u="none" strike="noStrike" cap="none" normalizeH="0" baseline="0" dirty="0">
+                <a:ln>
+                  <a:noFill/>
+                </a:ln>
+                <a:solidFill>
+                  <a:srgbClr val="507874"/>
+                </a:solidFill>
+                <a:effectLst/>
+                <a:latin typeface="Roboto Mono" panose="00000009000000000000" pitchFamily="50" charset="0"/>
+              </a:rPr>
+            </a:br>
+            <a:r>
+              <a:rPr kumimoji="0" lang="de-DE" altLang="de-DE" sz="1600" b="0" i="0" u="none" strike="noStrike" cap="none" normalizeH="0" baseline="0" dirty="0">
+                <a:ln>
+                  <a:noFill/>
+                </a:ln>
+                <a:solidFill>
+                  <a:srgbClr val="507874"/>
+                </a:solidFill>
+                <a:effectLst/>
+                <a:latin typeface="Roboto Mono" panose="00000009000000000000" pitchFamily="50" charset="0"/>
+              </a:rPr>
+              <a:t>        </a:t>
+            </a:r>
+            <a:r>
+              <a:rPr kumimoji="0" lang="de-DE" altLang="de-DE" sz="1600" b="0" i="0" u="none" strike="noStrike" cap="none" normalizeH="0" baseline="0" dirty="0" err="1">
+                <a:ln>
+                  <a:noFill/>
+                </a:ln>
+                <a:solidFill>
+                  <a:srgbClr val="5FB1DA"/>
+                </a:solidFill>
+                <a:effectLst/>
+                <a:latin typeface="Roboto Mono" panose="00000009000000000000" pitchFamily="50" charset="0"/>
+              </a:rPr>
+              <a:t>System</a:t>
+            </a:r>
+            <a:r>
+              <a:rPr kumimoji="0" lang="de-DE" altLang="de-DE" sz="1600" b="0" i="0" u="none" strike="noStrike" cap="none" normalizeH="0" baseline="0" dirty="0" err="1">
+                <a:ln>
+                  <a:noFill/>
+                </a:ln>
+                <a:solidFill>
+                  <a:srgbClr val="AC91E3"/>
+                </a:solidFill>
+                <a:effectLst/>
+                <a:latin typeface="Roboto Mono" panose="00000009000000000000" pitchFamily="50" charset="0"/>
+              </a:rPr>
+              <a:t>.</a:t>
+            </a:r>
+            <a:r>
+              <a:rPr kumimoji="0" lang="de-DE" altLang="de-DE" sz="1600" b="0" i="1" u="none" strike="noStrike" cap="none" normalizeH="0" baseline="0" dirty="0" err="1">
+                <a:ln>
+                  <a:noFill/>
+                </a:ln>
+                <a:solidFill>
+                  <a:srgbClr val="9876AA"/>
+                </a:solidFill>
+                <a:effectLst/>
+                <a:latin typeface="Roboto Mono" panose="00000009000000000000" pitchFamily="50" charset="0"/>
+              </a:rPr>
+              <a:t>out</a:t>
+            </a:r>
+            <a:r>
+              <a:rPr kumimoji="0" lang="de-DE" altLang="de-DE" sz="1600" b="0" i="0" u="none" strike="noStrike" cap="none" normalizeH="0" baseline="0" dirty="0" err="1">
+                <a:ln>
+                  <a:noFill/>
+                </a:ln>
+                <a:solidFill>
+                  <a:srgbClr val="AC91E3"/>
+                </a:solidFill>
+                <a:effectLst/>
+                <a:latin typeface="Roboto Mono" panose="00000009000000000000" pitchFamily="50" charset="0"/>
+              </a:rPr>
+              <a:t>.</a:t>
+            </a:r>
+            <a:r>
+              <a:rPr kumimoji="0" lang="de-DE" altLang="de-DE" sz="1600" b="0" i="0" u="none" strike="noStrike" cap="none" normalizeH="0" baseline="0" dirty="0" err="1">
+                <a:ln>
+                  <a:noFill/>
+                </a:ln>
+                <a:solidFill>
+                  <a:srgbClr val="B9C7A6"/>
+                </a:solidFill>
+                <a:effectLst/>
+                <a:latin typeface="Roboto Mono" panose="00000009000000000000" pitchFamily="50" charset="0"/>
+              </a:rPr>
+              <a:t>print</a:t>
+            </a:r>
+            <a:r>
+              <a:rPr kumimoji="0" lang="de-DE" altLang="de-DE" sz="1600" b="0" i="0" u="none" strike="noStrike" cap="none" normalizeH="0" baseline="0" dirty="0">
+                <a:ln>
+                  <a:noFill/>
+                </a:ln>
+                <a:solidFill>
+                  <a:srgbClr val="B0BA8C"/>
+                </a:solidFill>
+                <a:effectLst/>
+                <a:latin typeface="Roboto Mono" panose="00000009000000000000" pitchFamily="50" charset="0"/>
+              </a:rPr>
+              <a:t>(</a:t>
+            </a:r>
+            <a:r>
+              <a:rPr kumimoji="0" lang="de-DE" altLang="de-DE" sz="1600" b="0" i="0" u="none" strike="noStrike" cap="none" normalizeH="0" baseline="0" dirty="0">
+                <a:ln>
+                  <a:noFill/>
+                </a:ln>
+                <a:solidFill>
+                  <a:srgbClr val="A9B7C6"/>
+                </a:solidFill>
+                <a:effectLst/>
+                <a:latin typeface="Roboto Mono" panose="00000009000000000000" pitchFamily="50" charset="0"/>
+              </a:rPr>
+              <a:t>x * x + y * y &lt; </a:t>
+            </a:r>
+            <a:r>
+              <a:rPr kumimoji="0" lang="de-DE" altLang="de-DE" sz="1600" b="0" i="0" u="none" strike="noStrike" cap="none" normalizeH="0" baseline="0" dirty="0">
+                <a:ln>
+                  <a:noFill/>
+                </a:ln>
+                <a:solidFill>
+                  <a:srgbClr val="6897BB"/>
+                </a:solidFill>
+                <a:effectLst/>
+                <a:latin typeface="Roboto Mono" panose="00000009000000000000" pitchFamily="50" charset="0"/>
+              </a:rPr>
+              <a:t>64 </a:t>
+            </a:r>
+            <a:r>
+              <a:rPr kumimoji="0" lang="de-DE" altLang="de-DE" sz="1600" b="0" i="0" u="none" strike="noStrike" cap="none" normalizeH="0" baseline="0" dirty="0">
+                <a:ln>
+                  <a:noFill/>
+                </a:ln>
+                <a:solidFill>
+                  <a:srgbClr val="A9B7C6"/>
+                </a:solidFill>
+                <a:effectLst/>
+                <a:latin typeface="Roboto Mono" panose="00000009000000000000" pitchFamily="50" charset="0"/>
+              </a:rPr>
+              <a:t>? </a:t>
+            </a:r>
+            <a:r>
+              <a:rPr kumimoji="0" lang="de-DE" altLang="de-DE" sz="1600" b="0" i="0" u="none" strike="noStrike" cap="none" normalizeH="0" baseline="0" dirty="0">
+                <a:ln>
+                  <a:noFill/>
+                </a:ln>
+                <a:solidFill>
+                  <a:srgbClr val="6A8759"/>
+                </a:solidFill>
+                <a:effectLst/>
+                <a:latin typeface="Roboto Mono" panose="00000009000000000000" pitchFamily="50" charset="0"/>
+              </a:rPr>
+              <a:t>" x " </a:t>
+            </a:r>
+            <a:r>
+              <a:rPr kumimoji="0" lang="de-DE" altLang="de-DE" sz="1600" b="0" i="0" u="none" strike="noStrike" cap="none" normalizeH="0" baseline="0" dirty="0">
+                <a:ln>
+                  <a:noFill/>
+                </a:ln>
+                <a:solidFill>
+                  <a:srgbClr val="A9B7C6"/>
+                </a:solidFill>
+                <a:effectLst/>
+                <a:latin typeface="Roboto Mono" panose="00000009000000000000" pitchFamily="50" charset="0"/>
+              </a:rPr>
+              <a:t>: </a:t>
+            </a:r>
+            <a:r>
+              <a:rPr kumimoji="0" lang="de-DE" altLang="de-DE" sz="1600" b="0" i="0" u="none" strike="noStrike" cap="none" normalizeH="0" baseline="0" dirty="0">
+                <a:ln>
+                  <a:noFill/>
+                </a:ln>
+                <a:solidFill>
+                  <a:srgbClr val="6A8759"/>
+                </a:solidFill>
+                <a:effectLst/>
+                <a:latin typeface="Roboto Mono" panose="00000009000000000000" pitchFamily="50" charset="0"/>
+              </a:rPr>
+              <a:t>"   "</a:t>
+            </a:r>
+            <a:r>
+              <a:rPr kumimoji="0" lang="de-DE" altLang="de-DE" sz="1600" b="0" i="0" u="none" strike="noStrike" cap="none" normalizeH="0" baseline="0" dirty="0">
+                <a:ln>
+                  <a:noFill/>
+                </a:ln>
+                <a:solidFill>
+                  <a:srgbClr val="B0BA8C"/>
+                </a:solidFill>
+                <a:effectLst/>
+                <a:latin typeface="Roboto Mono" panose="00000009000000000000" pitchFamily="50" charset="0"/>
+              </a:rPr>
+              <a:t>)</a:t>
+            </a:r>
+            <a:r>
+              <a:rPr kumimoji="0" lang="de-DE" altLang="de-DE" sz="1600" b="0" i="0" u="none" strike="noStrike" cap="none" normalizeH="0" baseline="0" dirty="0">
+                <a:ln>
+                  <a:noFill/>
+                </a:ln>
+                <a:solidFill>
+                  <a:srgbClr val="CC7E47"/>
+                </a:solidFill>
+                <a:effectLst/>
+                <a:latin typeface="Roboto Mono" panose="00000009000000000000" pitchFamily="50" charset="0"/>
+              </a:rPr>
+              <a:t>;</a:t>
+            </a:r>
+            <a:br>
+              <a:rPr kumimoji="0" lang="de-DE" altLang="de-DE" sz="1600" b="0" i="0" u="none" strike="noStrike" cap="none" normalizeH="0" baseline="0" dirty="0">
+                <a:ln>
+                  <a:noFill/>
+                </a:ln>
+                <a:solidFill>
+                  <a:srgbClr val="CC7E47"/>
+                </a:solidFill>
+                <a:effectLst/>
+                <a:latin typeface="Roboto Mono" panose="00000009000000000000" pitchFamily="50" charset="0"/>
+              </a:rPr>
+            </a:br>
+            <a:r>
+              <a:rPr kumimoji="0" lang="de-DE" altLang="de-DE" sz="1600" b="0" i="0" u="none" strike="noStrike" cap="none" normalizeH="0" baseline="0" dirty="0">
+                <a:ln>
+                  <a:noFill/>
+                </a:ln>
+                <a:solidFill>
+                  <a:srgbClr val="CC7E47"/>
+                </a:solidFill>
+                <a:effectLst/>
+                <a:latin typeface="Roboto Mono" panose="00000009000000000000" pitchFamily="50" charset="0"/>
+              </a:rPr>
+              <a:t>    </a:t>
+            </a:r>
+            <a:r>
+              <a:rPr kumimoji="0" lang="de-DE" altLang="de-DE" sz="1600" b="0" i="0" u="none" strike="noStrike" cap="none" normalizeH="0" baseline="0" dirty="0">
+                <a:ln>
+                  <a:noFill/>
+                </a:ln>
+                <a:solidFill>
+                  <a:srgbClr val="507874"/>
+                </a:solidFill>
+                <a:effectLst/>
+                <a:latin typeface="Roboto Mono" panose="00000009000000000000" pitchFamily="50" charset="0"/>
+              </a:rPr>
+              <a:t>}</a:t>
+            </a:r>
+            <a:br>
+              <a:rPr kumimoji="0" lang="de-DE" altLang="de-DE" sz="1600" b="0" i="0" u="none" strike="noStrike" cap="none" normalizeH="0" baseline="0" dirty="0">
+                <a:ln>
+                  <a:noFill/>
+                </a:ln>
+                <a:solidFill>
+                  <a:srgbClr val="507874"/>
+                </a:solidFill>
+                <a:effectLst/>
+                <a:latin typeface="Roboto Mono" panose="00000009000000000000" pitchFamily="50" charset="0"/>
+              </a:rPr>
+            </a:br>
+            <a:r>
+              <a:rPr kumimoji="0" lang="de-DE" altLang="de-DE" sz="1600" b="0" i="0" u="none" strike="noStrike" cap="none" normalizeH="0" baseline="0" dirty="0">
+                <a:ln>
+                  <a:noFill/>
+                </a:ln>
+                <a:solidFill>
+                  <a:srgbClr val="507874"/>
+                </a:solidFill>
+                <a:effectLst/>
+                <a:latin typeface="Roboto Mono" panose="00000009000000000000" pitchFamily="50" charset="0"/>
+              </a:rPr>
+              <a:t>    </a:t>
+            </a:r>
+            <a:r>
+              <a:rPr kumimoji="0" lang="de-DE" altLang="de-DE" sz="1600" b="0" i="0" u="none" strike="noStrike" cap="none" normalizeH="0" baseline="0" dirty="0" err="1">
+                <a:ln>
+                  <a:noFill/>
+                </a:ln>
+                <a:solidFill>
+                  <a:srgbClr val="5FB1DA"/>
+                </a:solidFill>
+                <a:effectLst/>
+                <a:latin typeface="Roboto Mono" panose="00000009000000000000" pitchFamily="50" charset="0"/>
+              </a:rPr>
+              <a:t>System</a:t>
+            </a:r>
+            <a:r>
+              <a:rPr kumimoji="0" lang="de-DE" altLang="de-DE" sz="1600" b="0" i="0" u="none" strike="noStrike" cap="none" normalizeH="0" baseline="0" dirty="0" err="1">
+                <a:ln>
+                  <a:noFill/>
+                </a:ln>
+                <a:solidFill>
+                  <a:srgbClr val="AC91E3"/>
+                </a:solidFill>
+                <a:effectLst/>
+                <a:latin typeface="Roboto Mono" panose="00000009000000000000" pitchFamily="50" charset="0"/>
+              </a:rPr>
+              <a:t>.</a:t>
+            </a:r>
+            <a:r>
+              <a:rPr kumimoji="0" lang="de-DE" altLang="de-DE" sz="1600" b="0" i="1" u="none" strike="noStrike" cap="none" normalizeH="0" baseline="0" dirty="0" err="1">
+                <a:ln>
+                  <a:noFill/>
+                </a:ln>
+                <a:solidFill>
+                  <a:srgbClr val="9876AA"/>
+                </a:solidFill>
+                <a:effectLst/>
+                <a:latin typeface="Roboto Mono" panose="00000009000000000000" pitchFamily="50" charset="0"/>
+              </a:rPr>
+              <a:t>out</a:t>
+            </a:r>
+            <a:r>
+              <a:rPr kumimoji="0" lang="de-DE" altLang="de-DE" sz="1600" b="0" i="0" u="none" strike="noStrike" cap="none" normalizeH="0" baseline="0" dirty="0" err="1">
+                <a:ln>
+                  <a:noFill/>
+                </a:ln>
+                <a:solidFill>
+                  <a:srgbClr val="AC91E3"/>
+                </a:solidFill>
+                <a:effectLst/>
+                <a:latin typeface="Roboto Mono" panose="00000009000000000000" pitchFamily="50" charset="0"/>
+              </a:rPr>
+              <a:t>.</a:t>
+            </a:r>
+            <a:r>
+              <a:rPr kumimoji="0" lang="de-DE" altLang="de-DE" sz="1600" b="0" i="0" u="none" strike="noStrike" cap="none" normalizeH="0" baseline="0" dirty="0" err="1">
+                <a:ln>
+                  <a:noFill/>
+                </a:ln>
+                <a:solidFill>
+                  <a:srgbClr val="B9C7A6"/>
+                </a:solidFill>
+                <a:effectLst/>
+                <a:latin typeface="Roboto Mono" panose="00000009000000000000" pitchFamily="50" charset="0"/>
+              </a:rPr>
+              <a:t>println</a:t>
+            </a:r>
+            <a:r>
+              <a:rPr kumimoji="0" lang="de-DE" altLang="de-DE" sz="1600" b="0" i="0" u="none" strike="noStrike" cap="none" normalizeH="0" baseline="0" dirty="0">
+                <a:ln>
+                  <a:noFill/>
+                </a:ln>
+                <a:solidFill>
+                  <a:srgbClr val="B0BA8C"/>
+                </a:solidFill>
+                <a:effectLst/>
+                <a:latin typeface="Roboto Mono" panose="00000009000000000000" pitchFamily="50" charset="0"/>
+              </a:rPr>
+              <a:t>()</a:t>
+            </a:r>
+            <a:r>
+              <a:rPr kumimoji="0" lang="de-DE" altLang="de-DE" sz="1600" b="0" i="0" u="none" strike="noStrike" cap="none" normalizeH="0" baseline="0" dirty="0">
+                <a:ln>
+                  <a:noFill/>
+                </a:ln>
+                <a:solidFill>
+                  <a:srgbClr val="CC7E47"/>
+                </a:solidFill>
+                <a:effectLst/>
+                <a:latin typeface="Roboto Mono" panose="00000009000000000000" pitchFamily="50" charset="0"/>
+              </a:rPr>
+              <a:t>;</a:t>
+            </a:r>
+            <a:br>
+              <a:rPr kumimoji="0" lang="de-DE" altLang="de-DE" sz="1600" b="0" i="0" u="none" strike="noStrike" cap="none" normalizeH="0" baseline="0" dirty="0">
+                <a:ln>
+                  <a:noFill/>
+                </a:ln>
+                <a:solidFill>
+                  <a:srgbClr val="CC7E47"/>
+                </a:solidFill>
+                <a:effectLst/>
+                <a:latin typeface="Roboto Mono" panose="00000009000000000000" pitchFamily="50" charset="0"/>
+              </a:rPr>
+            </a:br>
+            <a:r>
+              <a:rPr kumimoji="0" lang="de-DE" altLang="de-DE" sz="1600" b="0" i="0" u="none" strike="noStrike" cap="none" normalizeH="0" baseline="0" dirty="0">
+                <a:ln>
+                  <a:noFill/>
+                </a:ln>
+                <a:solidFill>
+                  <a:srgbClr val="507874"/>
+                </a:solidFill>
+                <a:effectLst/>
+                <a:latin typeface="Roboto Mono" panose="00000009000000000000" pitchFamily="50" charset="0"/>
+              </a:rPr>
+              <a:t>}</a:t>
+            </a:r>
+            <a:endParaRPr kumimoji="0" lang="de-DE" altLang="de-DE" sz="1600" b="0" i="0" u="none" strike="noStrike" cap="none" normalizeH="0" baseline="0" dirty="0">
+              <a:ln>
+                <a:noFill/>
+              </a:ln>
+              <a:solidFill>
+                <a:schemeClr val="tx1"/>
+              </a:solidFill>
+              <a:effectLst/>
+              <a:latin typeface="Roboto Mono" panose="00000009000000000000" pitchFamily="50" charset="0"/>
+            </a:endParaRPr>
+          </a:p>
+        </p:txBody>
+      </p:sp>
+      <p:sp>
+        <p:nvSpPr>
+          <p:cNvPr id="11" name="TextBox 10">
+            <a:extLst>
+              <a:ext uri="{FF2B5EF4-FFF2-40B4-BE49-F238E27FC236}">
+                <a16:creationId xmlns:a16="http://schemas.microsoft.com/office/drawing/2014/main" id="{21EFB1FB-24D0-4C3C-837A-075D7435AE82}"/>
+              </a:ext>
+            </a:extLst>
+          </p:cNvPr>
+          <p:cNvSpPr txBox="1"/>
+          <p:nvPr/>
+        </p:nvSpPr>
+        <p:spPr>
+          <a:xfrm rot="684757">
+            <a:off x="784678" y="5190251"/>
+            <a:ext cx="8246455" cy="1323439"/>
+          </a:xfrm>
+          <a:prstGeom prst="rect">
+            <a:avLst/>
+          </a:prstGeom>
+          <a:noFill/>
+        </p:spPr>
+        <p:txBody>
+          <a:bodyPr wrap="square">
+            <a:spAutoFit/>
+          </a:bodyPr>
+          <a:lstStyle/>
+          <a:p>
+            <a:pPr marL="0" marR="0" lvl="0" indent="0" algn="l" defTabSz="914400" rtl="0" eaLnBrk="0" fontAlgn="base" latinLnBrk="0" hangingPunct="0">
+              <a:lnSpc>
+                <a:spcPct val="100000"/>
+              </a:lnSpc>
+              <a:spcBef>
+                <a:spcPct val="0"/>
+              </a:spcBef>
+              <a:spcAft>
+                <a:spcPct val="0"/>
+              </a:spcAft>
+              <a:buClrTx/>
+              <a:buSzTx/>
+              <a:buFontTx/>
+              <a:buNone/>
+              <a:tabLst/>
+            </a:pPr>
+            <a:r>
+              <a:rPr kumimoji="0" lang="de-DE" altLang="de-DE" sz="1600" b="0" i="0" u="none" strike="noStrike" cap="none" normalizeH="0" baseline="0" dirty="0">
+                <a:ln>
+                  <a:noFill/>
+                </a:ln>
+                <a:solidFill>
+                  <a:srgbClr val="CC7E47"/>
+                </a:solidFill>
+                <a:effectLst/>
+                <a:latin typeface="Roboto Mono" panose="00000009000000000000" pitchFamily="50" charset="0"/>
+              </a:rPr>
+              <a:t>private </a:t>
+            </a:r>
+            <a:r>
+              <a:rPr kumimoji="0" lang="de-DE" altLang="de-DE" sz="1600" b="0" i="0" u="none" strike="noStrike" cap="none" normalizeH="0" baseline="0" dirty="0" err="1">
+                <a:ln>
+                  <a:noFill/>
+                </a:ln>
+                <a:solidFill>
+                  <a:srgbClr val="CC7E47"/>
+                </a:solidFill>
+                <a:effectLst/>
+                <a:latin typeface="Roboto Mono" panose="00000009000000000000" pitchFamily="50" charset="0"/>
+              </a:rPr>
+              <a:t>void</a:t>
+            </a:r>
+            <a:r>
+              <a:rPr kumimoji="0" lang="de-DE" altLang="de-DE" sz="1600" b="0" i="0" u="none" strike="noStrike" cap="none" normalizeH="0" baseline="0" dirty="0">
+                <a:ln>
+                  <a:noFill/>
+                </a:ln>
+                <a:solidFill>
+                  <a:srgbClr val="CC7E47"/>
+                </a:solidFill>
+                <a:effectLst/>
+                <a:latin typeface="Roboto Mono" panose="00000009000000000000" pitchFamily="50" charset="0"/>
+              </a:rPr>
+              <a:t> </a:t>
+            </a:r>
+            <a:r>
+              <a:rPr kumimoji="0" lang="de-DE" altLang="de-DE" sz="1600" b="0" i="0" u="none" strike="noStrike" cap="none" normalizeH="0" baseline="0" dirty="0" err="1">
+                <a:ln>
+                  <a:noFill/>
+                </a:ln>
+                <a:solidFill>
+                  <a:srgbClr val="D6AF72"/>
+                </a:solidFill>
+                <a:effectLst/>
+                <a:latin typeface="Roboto Mono" panose="00000009000000000000" pitchFamily="50" charset="0"/>
+              </a:rPr>
+              <a:t>move</a:t>
+            </a:r>
+            <a:r>
+              <a:rPr kumimoji="0" lang="de-DE" altLang="de-DE" sz="1600" b="0" i="0" u="none" strike="noStrike" cap="none" normalizeH="0" baseline="0" dirty="0">
+                <a:ln>
+                  <a:noFill/>
+                </a:ln>
+                <a:solidFill>
+                  <a:srgbClr val="B0BA8C"/>
+                </a:solidFill>
+                <a:effectLst/>
+                <a:latin typeface="Roboto Mono" panose="00000009000000000000" pitchFamily="50" charset="0"/>
+              </a:rPr>
+              <a:t>(</a:t>
+            </a:r>
+            <a:r>
+              <a:rPr kumimoji="0" lang="de-DE" altLang="de-DE" sz="1600" b="0" i="0" u="none" strike="noStrike" cap="none" normalizeH="0" baseline="0" dirty="0" err="1">
+                <a:ln>
+                  <a:noFill/>
+                </a:ln>
+                <a:solidFill>
+                  <a:srgbClr val="5FB1DA"/>
+                </a:solidFill>
+                <a:effectLst/>
+                <a:latin typeface="Roboto Mono" panose="00000009000000000000" pitchFamily="50" charset="0"/>
+              </a:rPr>
+              <a:t>Direction</a:t>
+            </a:r>
+            <a:r>
+              <a:rPr kumimoji="0" lang="de-DE" altLang="de-DE" sz="1600" b="0" i="0" u="none" strike="noStrike" cap="none" normalizeH="0" baseline="0" dirty="0">
+                <a:ln>
+                  <a:noFill/>
+                </a:ln>
+                <a:solidFill>
+                  <a:srgbClr val="5FB1DA"/>
+                </a:solidFill>
+                <a:effectLst/>
+                <a:latin typeface="Roboto Mono" panose="00000009000000000000" pitchFamily="50" charset="0"/>
+              </a:rPr>
+              <a:t> </a:t>
+            </a:r>
+            <a:r>
+              <a:rPr kumimoji="0" lang="de-DE" altLang="de-DE" sz="1600" b="0" i="0" u="none" strike="noStrike" cap="none" normalizeH="0" baseline="0" dirty="0" err="1">
+                <a:ln>
+                  <a:noFill/>
+                </a:ln>
+                <a:solidFill>
+                  <a:srgbClr val="A9B7C6"/>
+                </a:solidFill>
+                <a:effectLst/>
+                <a:latin typeface="Roboto Mono" panose="00000009000000000000" pitchFamily="50" charset="0"/>
+              </a:rPr>
+              <a:t>direction</a:t>
+            </a:r>
+            <a:r>
+              <a:rPr kumimoji="0" lang="de-DE" altLang="de-DE" sz="1600" b="0" i="0" u="none" strike="noStrike" cap="none" normalizeH="0" baseline="0" dirty="0">
+                <a:ln>
+                  <a:noFill/>
+                </a:ln>
+                <a:solidFill>
+                  <a:srgbClr val="B0BA8C"/>
+                </a:solidFill>
+                <a:effectLst/>
+                <a:latin typeface="Roboto Mono" panose="00000009000000000000" pitchFamily="50" charset="0"/>
+              </a:rPr>
+              <a:t>) </a:t>
+            </a:r>
+            <a:r>
+              <a:rPr kumimoji="0" lang="de-DE" altLang="de-DE" sz="1600" b="0" i="0" u="none" strike="noStrike" cap="none" normalizeH="0" baseline="0" dirty="0">
+                <a:ln>
+                  <a:noFill/>
+                </a:ln>
+                <a:solidFill>
+                  <a:srgbClr val="507874"/>
+                </a:solidFill>
+                <a:effectLst/>
+                <a:latin typeface="Roboto Mono" panose="00000009000000000000" pitchFamily="50" charset="0"/>
+              </a:rPr>
+              <a:t>{</a:t>
+            </a:r>
+            <a:br>
+              <a:rPr kumimoji="0" lang="de-DE" altLang="de-DE" sz="1600" b="0" i="0" u="none" strike="noStrike" cap="none" normalizeH="0" baseline="0" dirty="0">
+                <a:ln>
+                  <a:noFill/>
+                </a:ln>
+                <a:solidFill>
+                  <a:srgbClr val="507874"/>
+                </a:solidFill>
+                <a:effectLst/>
+                <a:latin typeface="Roboto Mono" panose="00000009000000000000" pitchFamily="50" charset="0"/>
+              </a:rPr>
+            </a:br>
+            <a:r>
+              <a:rPr kumimoji="0" lang="de-DE" altLang="de-DE" sz="1600" b="0" i="0" u="none" strike="noStrike" cap="none" normalizeH="0" baseline="0" dirty="0">
+                <a:ln>
+                  <a:noFill/>
+                </a:ln>
+                <a:solidFill>
+                  <a:srgbClr val="507874"/>
+                </a:solidFill>
+                <a:effectLst/>
+                <a:latin typeface="Roboto Mono" panose="00000009000000000000" pitchFamily="50" charset="0"/>
+              </a:rPr>
+              <a:t>    </a:t>
+            </a:r>
+            <a:r>
+              <a:rPr kumimoji="0" lang="de-DE" altLang="de-DE" sz="1600" b="0" i="0" u="none" strike="noStrike" cap="none" normalizeH="0" baseline="0" dirty="0" err="1">
+                <a:ln>
+                  <a:noFill/>
+                </a:ln>
+                <a:solidFill>
+                  <a:srgbClr val="9876AA"/>
+                </a:solidFill>
+                <a:effectLst/>
+                <a:latin typeface="Roboto Mono" panose="00000009000000000000" pitchFamily="50" charset="0"/>
+              </a:rPr>
+              <a:t>playerPosition</a:t>
+            </a:r>
+            <a:r>
+              <a:rPr kumimoji="0" lang="de-DE" altLang="de-DE" sz="1600" b="0" i="0" u="none" strike="noStrike" cap="none" normalizeH="0" baseline="0" dirty="0">
+                <a:ln>
+                  <a:noFill/>
+                </a:ln>
+                <a:solidFill>
+                  <a:srgbClr val="9876AA"/>
+                </a:solidFill>
+                <a:effectLst/>
+                <a:latin typeface="Roboto Mono" panose="00000009000000000000" pitchFamily="50" charset="0"/>
+              </a:rPr>
+              <a:t> </a:t>
+            </a:r>
+            <a:r>
+              <a:rPr kumimoji="0" lang="de-DE" altLang="de-DE" sz="1600" b="0" i="0" u="none" strike="noStrike" cap="none" normalizeH="0" baseline="0" dirty="0">
+                <a:ln>
+                  <a:noFill/>
+                </a:ln>
+                <a:solidFill>
+                  <a:srgbClr val="A9B7C6"/>
+                </a:solidFill>
+                <a:effectLst/>
+                <a:latin typeface="Roboto Mono" panose="00000009000000000000" pitchFamily="50" charset="0"/>
+              </a:rPr>
+              <a:t>= </a:t>
+            </a:r>
+            <a:r>
+              <a:rPr kumimoji="0" lang="de-DE" altLang="de-DE" sz="1600" b="0" i="0" u="none" strike="noStrike" cap="none" normalizeH="0" baseline="0" dirty="0" err="1">
+                <a:ln>
+                  <a:noFill/>
+                </a:ln>
+                <a:solidFill>
+                  <a:srgbClr val="9876AA"/>
+                </a:solidFill>
+                <a:effectLst/>
+                <a:latin typeface="Roboto Mono" panose="00000009000000000000" pitchFamily="50" charset="0"/>
+              </a:rPr>
+              <a:t>playerPosition</a:t>
+            </a:r>
+            <a:r>
+              <a:rPr kumimoji="0" lang="de-DE" altLang="de-DE" sz="1600" b="0" i="0" u="none" strike="noStrike" cap="none" normalizeH="0" baseline="0" dirty="0" err="1">
+                <a:ln>
+                  <a:noFill/>
+                </a:ln>
+                <a:solidFill>
+                  <a:srgbClr val="AC91E3"/>
+                </a:solidFill>
+                <a:effectLst/>
+                <a:latin typeface="Roboto Mono" panose="00000009000000000000" pitchFamily="50" charset="0"/>
+              </a:rPr>
+              <a:t>.</a:t>
+            </a:r>
+            <a:r>
+              <a:rPr kumimoji="0" lang="de-DE" altLang="de-DE" sz="1600" b="0" i="0" u="none" strike="noStrike" cap="none" normalizeH="0" baseline="0" dirty="0" err="1">
+                <a:ln>
+                  <a:noFill/>
+                </a:ln>
+                <a:solidFill>
+                  <a:srgbClr val="B9C7A6"/>
+                </a:solidFill>
+                <a:effectLst/>
+                <a:latin typeface="Roboto Mono" panose="00000009000000000000" pitchFamily="50" charset="0"/>
+              </a:rPr>
+              <a:t>add</a:t>
+            </a:r>
+            <a:r>
+              <a:rPr kumimoji="0" lang="de-DE" altLang="de-DE" sz="1600" b="0" i="0" u="none" strike="noStrike" cap="none" normalizeH="0" baseline="0" dirty="0">
+                <a:ln>
+                  <a:noFill/>
+                </a:ln>
+                <a:solidFill>
+                  <a:srgbClr val="B0BA8C"/>
+                </a:solidFill>
+                <a:effectLst/>
+                <a:latin typeface="Roboto Mono" panose="00000009000000000000" pitchFamily="50" charset="0"/>
+              </a:rPr>
+              <a:t>(</a:t>
+            </a:r>
+            <a:r>
+              <a:rPr kumimoji="0" lang="de-DE" altLang="de-DE" sz="1600" b="0" i="0" u="none" strike="noStrike" cap="none" normalizeH="0" baseline="0" dirty="0" err="1">
+                <a:ln>
+                  <a:noFill/>
+                </a:ln>
+                <a:solidFill>
+                  <a:srgbClr val="A9B7C6"/>
+                </a:solidFill>
+                <a:effectLst/>
+                <a:latin typeface="Roboto Mono" panose="00000009000000000000" pitchFamily="50" charset="0"/>
+              </a:rPr>
+              <a:t>direction</a:t>
+            </a:r>
+            <a:r>
+              <a:rPr kumimoji="0" lang="de-DE" altLang="de-DE" sz="1600" b="0" i="0" u="none" strike="noStrike" cap="none" normalizeH="0" baseline="0" dirty="0" err="1">
+                <a:ln>
+                  <a:noFill/>
+                </a:ln>
+                <a:solidFill>
+                  <a:srgbClr val="AC91E3"/>
+                </a:solidFill>
+                <a:effectLst/>
+                <a:latin typeface="Roboto Mono" panose="00000009000000000000" pitchFamily="50" charset="0"/>
+              </a:rPr>
+              <a:t>.</a:t>
+            </a:r>
+            <a:r>
+              <a:rPr kumimoji="0" lang="de-DE" altLang="de-DE" sz="1600" b="0" i="0" u="none" strike="noStrike" cap="none" normalizeH="0" baseline="0" dirty="0" err="1">
+                <a:ln>
+                  <a:noFill/>
+                </a:ln>
+                <a:solidFill>
+                  <a:srgbClr val="B9C7A6"/>
+                </a:solidFill>
+                <a:effectLst/>
+                <a:latin typeface="Roboto Mono" panose="00000009000000000000" pitchFamily="50" charset="0"/>
+              </a:rPr>
+              <a:t>getPosition</a:t>
+            </a:r>
+            <a:r>
+              <a:rPr kumimoji="0" lang="de-DE" altLang="de-DE" sz="1600" b="0" i="0" u="none" strike="noStrike" cap="none" normalizeH="0" baseline="0" dirty="0">
+                <a:ln>
+                  <a:noFill/>
+                </a:ln>
+                <a:solidFill>
+                  <a:srgbClr val="B0BA8C"/>
+                </a:solidFill>
+                <a:effectLst/>
+                <a:latin typeface="Roboto Mono" panose="00000009000000000000" pitchFamily="50" charset="0"/>
+              </a:rPr>
+              <a:t>())</a:t>
+            </a:r>
+            <a:r>
+              <a:rPr kumimoji="0" lang="de-DE" altLang="de-DE" sz="1600" b="0" i="0" u="none" strike="noStrike" cap="none" normalizeH="0" baseline="0" dirty="0">
+                <a:ln>
+                  <a:noFill/>
+                </a:ln>
+                <a:solidFill>
+                  <a:srgbClr val="CC7E47"/>
+                </a:solidFill>
+                <a:effectLst/>
+                <a:latin typeface="Roboto Mono" panose="00000009000000000000" pitchFamily="50" charset="0"/>
+              </a:rPr>
+              <a:t>;</a:t>
+            </a:r>
+            <a:br>
+              <a:rPr kumimoji="0" lang="de-DE" altLang="de-DE" sz="1600" b="0" i="0" u="none" strike="noStrike" cap="none" normalizeH="0" baseline="0" dirty="0">
+                <a:ln>
+                  <a:noFill/>
+                </a:ln>
+                <a:solidFill>
+                  <a:srgbClr val="CC7E47"/>
+                </a:solidFill>
+                <a:effectLst/>
+                <a:latin typeface="Roboto Mono" panose="00000009000000000000" pitchFamily="50" charset="0"/>
+              </a:rPr>
+            </a:br>
+            <a:r>
+              <a:rPr kumimoji="0" lang="de-DE" altLang="de-DE" sz="1600" b="0" i="0" u="none" strike="noStrike" cap="none" normalizeH="0" baseline="0" dirty="0">
+                <a:ln>
+                  <a:noFill/>
+                </a:ln>
+                <a:solidFill>
+                  <a:srgbClr val="CC7E47"/>
+                </a:solidFill>
+                <a:effectLst/>
+                <a:latin typeface="Roboto Mono" panose="00000009000000000000" pitchFamily="50" charset="0"/>
+              </a:rPr>
+              <a:t>    </a:t>
+            </a:r>
+            <a:r>
+              <a:rPr kumimoji="0" lang="de-DE" altLang="de-DE" sz="1600" b="0" i="0" u="none" strike="noStrike" cap="none" normalizeH="0" baseline="0" dirty="0" err="1">
+                <a:ln>
+                  <a:noFill/>
+                </a:ln>
+                <a:solidFill>
+                  <a:srgbClr val="9876AA"/>
+                </a:solidFill>
+                <a:effectLst/>
+                <a:latin typeface="Roboto Mono" panose="00000009000000000000" pitchFamily="50" charset="0"/>
+              </a:rPr>
+              <a:t>points</a:t>
+            </a:r>
+            <a:r>
+              <a:rPr kumimoji="0" lang="de-DE" altLang="de-DE" sz="1600" b="0" i="0" u="none" strike="noStrike" cap="none" normalizeH="0" baseline="0" dirty="0">
+                <a:ln>
+                  <a:noFill/>
+                </a:ln>
+                <a:solidFill>
+                  <a:srgbClr val="9876AA"/>
+                </a:solidFill>
+                <a:effectLst/>
+                <a:latin typeface="Roboto Mono" panose="00000009000000000000" pitchFamily="50" charset="0"/>
+              </a:rPr>
+              <a:t> </a:t>
+            </a:r>
+            <a:r>
+              <a:rPr kumimoji="0" lang="de-DE" altLang="de-DE" sz="1600" b="0" i="0" u="none" strike="noStrike" cap="none" normalizeH="0" baseline="0" dirty="0">
+                <a:ln>
+                  <a:noFill/>
+                </a:ln>
+                <a:solidFill>
+                  <a:srgbClr val="A9B7C6"/>
+                </a:solidFill>
+                <a:effectLst/>
+                <a:latin typeface="Roboto Mono" panose="00000009000000000000" pitchFamily="50" charset="0"/>
+              </a:rPr>
+              <a:t>+= </a:t>
+            </a:r>
+            <a:r>
+              <a:rPr kumimoji="0" lang="de-DE" altLang="de-DE" sz="1600" b="0" i="0" u="none" strike="noStrike" cap="none" normalizeH="0" baseline="0" dirty="0" err="1">
+                <a:ln>
+                  <a:noFill/>
+                </a:ln>
+                <a:solidFill>
+                  <a:srgbClr val="9876AA"/>
+                </a:solidFill>
+                <a:effectLst/>
+                <a:latin typeface="Roboto Mono" panose="00000009000000000000" pitchFamily="50" charset="0"/>
+              </a:rPr>
+              <a:t>fields</a:t>
+            </a:r>
+            <a:r>
+              <a:rPr kumimoji="0" lang="de-DE" altLang="de-DE" sz="1600" b="0" i="0" u="none" strike="noStrike" cap="none" normalizeH="0" baseline="0" dirty="0" err="1">
+                <a:ln>
+                  <a:noFill/>
+                </a:ln>
+                <a:solidFill>
+                  <a:srgbClr val="AC91E3"/>
+                </a:solidFill>
+                <a:effectLst/>
+                <a:latin typeface="Roboto Mono" panose="00000009000000000000" pitchFamily="50" charset="0"/>
+              </a:rPr>
+              <a:t>.</a:t>
+            </a:r>
+            <a:r>
+              <a:rPr kumimoji="0" lang="de-DE" altLang="de-DE" sz="1600" b="0" i="0" u="none" strike="noStrike" cap="none" normalizeH="0" baseline="0" dirty="0" err="1">
+                <a:ln>
+                  <a:noFill/>
+                </a:ln>
+                <a:solidFill>
+                  <a:srgbClr val="B9C7A6"/>
+                </a:solidFill>
+                <a:effectLst/>
+                <a:latin typeface="Roboto Mono" panose="00000009000000000000" pitchFamily="50" charset="0"/>
+              </a:rPr>
+              <a:t>get</a:t>
+            </a:r>
+            <a:r>
+              <a:rPr kumimoji="0" lang="de-DE" altLang="de-DE" sz="1600" b="0" i="0" u="none" strike="noStrike" cap="none" normalizeH="0" baseline="0" dirty="0">
+                <a:ln>
+                  <a:noFill/>
+                </a:ln>
+                <a:solidFill>
+                  <a:srgbClr val="B0BA8C"/>
+                </a:solidFill>
+                <a:effectLst/>
+                <a:latin typeface="Roboto Mono" panose="00000009000000000000" pitchFamily="50" charset="0"/>
+              </a:rPr>
+              <a:t>(</a:t>
+            </a:r>
+            <a:r>
+              <a:rPr kumimoji="0" lang="de-DE" altLang="de-DE" sz="1600" b="0" i="0" u="none" strike="noStrike" cap="none" normalizeH="0" baseline="0" dirty="0" err="1">
+                <a:ln>
+                  <a:noFill/>
+                </a:ln>
+                <a:solidFill>
+                  <a:srgbClr val="9876AA"/>
+                </a:solidFill>
+                <a:effectLst/>
+                <a:latin typeface="Roboto Mono" panose="00000009000000000000" pitchFamily="50" charset="0"/>
+              </a:rPr>
+              <a:t>playerPosition</a:t>
+            </a:r>
+            <a:r>
+              <a:rPr kumimoji="0" lang="de-DE" altLang="de-DE" sz="1600" b="0" i="0" u="none" strike="noStrike" cap="none" normalizeH="0" baseline="0" dirty="0">
+                <a:ln>
+                  <a:noFill/>
+                </a:ln>
+                <a:solidFill>
+                  <a:srgbClr val="B0BA8C"/>
+                </a:solidFill>
+                <a:effectLst/>
+                <a:latin typeface="Roboto Mono" panose="00000009000000000000" pitchFamily="50" charset="0"/>
+              </a:rPr>
+              <a:t>)</a:t>
+            </a:r>
+            <a:r>
+              <a:rPr kumimoji="0" lang="de-DE" altLang="de-DE" sz="1600" b="0" i="0" u="none" strike="noStrike" cap="none" normalizeH="0" baseline="0" dirty="0">
+                <a:ln>
+                  <a:noFill/>
+                </a:ln>
+                <a:solidFill>
+                  <a:srgbClr val="AC91E3"/>
+                </a:solidFill>
+                <a:effectLst/>
+                <a:latin typeface="Roboto Mono" panose="00000009000000000000" pitchFamily="50" charset="0"/>
+              </a:rPr>
+              <a:t>.</a:t>
+            </a:r>
+            <a:r>
+              <a:rPr kumimoji="0" lang="de-DE" altLang="de-DE" sz="1600" b="0" i="0" u="none" strike="noStrike" cap="none" normalizeH="0" baseline="0" dirty="0" err="1">
+                <a:ln>
+                  <a:noFill/>
+                </a:ln>
+                <a:solidFill>
+                  <a:srgbClr val="B9C7A6"/>
+                </a:solidFill>
+                <a:effectLst/>
+                <a:latin typeface="Roboto Mono" panose="00000009000000000000" pitchFamily="50" charset="0"/>
+              </a:rPr>
+              <a:t>getPoints</a:t>
+            </a:r>
+            <a:r>
+              <a:rPr kumimoji="0" lang="de-DE" altLang="de-DE" sz="1600" b="0" i="0" u="none" strike="noStrike" cap="none" normalizeH="0" baseline="0" dirty="0">
+                <a:ln>
+                  <a:noFill/>
+                </a:ln>
+                <a:solidFill>
+                  <a:srgbClr val="B0BA8C"/>
+                </a:solidFill>
+                <a:effectLst/>
+                <a:latin typeface="Roboto Mono" panose="00000009000000000000" pitchFamily="50" charset="0"/>
+              </a:rPr>
+              <a:t>()</a:t>
+            </a:r>
+            <a:r>
+              <a:rPr kumimoji="0" lang="de-DE" altLang="de-DE" sz="1600" b="0" i="0" u="none" strike="noStrike" cap="none" normalizeH="0" baseline="0" dirty="0">
+                <a:ln>
+                  <a:noFill/>
+                </a:ln>
+                <a:solidFill>
+                  <a:srgbClr val="CC7E47"/>
+                </a:solidFill>
+                <a:effectLst/>
+                <a:latin typeface="Roboto Mono" panose="00000009000000000000" pitchFamily="50" charset="0"/>
+              </a:rPr>
+              <a:t>;</a:t>
+            </a:r>
+            <a:br>
+              <a:rPr kumimoji="0" lang="de-DE" altLang="de-DE" sz="1600" b="0" i="0" u="none" strike="noStrike" cap="none" normalizeH="0" baseline="0" dirty="0">
+                <a:ln>
+                  <a:noFill/>
+                </a:ln>
+                <a:solidFill>
+                  <a:srgbClr val="CC7E47"/>
+                </a:solidFill>
+                <a:effectLst/>
+                <a:latin typeface="Roboto Mono" panose="00000009000000000000" pitchFamily="50" charset="0"/>
+              </a:rPr>
+            </a:br>
+            <a:r>
+              <a:rPr kumimoji="0" lang="de-DE" altLang="de-DE" sz="1600" b="0" i="0" u="none" strike="noStrike" cap="none" normalizeH="0" baseline="0" dirty="0">
+                <a:ln>
+                  <a:noFill/>
+                </a:ln>
+                <a:solidFill>
+                  <a:srgbClr val="CC7E47"/>
+                </a:solidFill>
+                <a:effectLst/>
+                <a:latin typeface="Roboto Mono" panose="00000009000000000000" pitchFamily="50" charset="0"/>
+              </a:rPr>
+              <a:t>    </a:t>
+            </a:r>
+            <a:r>
+              <a:rPr kumimoji="0" lang="de-DE" altLang="de-DE" sz="1600" b="0" i="0" u="none" strike="noStrike" cap="none" normalizeH="0" baseline="0" dirty="0" err="1">
+                <a:ln>
+                  <a:noFill/>
+                </a:ln>
+                <a:solidFill>
+                  <a:srgbClr val="9876AA"/>
+                </a:solidFill>
+                <a:effectLst/>
+                <a:latin typeface="Roboto Mono" panose="00000009000000000000" pitchFamily="50" charset="0"/>
+              </a:rPr>
+              <a:t>fields</a:t>
+            </a:r>
+            <a:r>
+              <a:rPr kumimoji="0" lang="de-DE" altLang="de-DE" sz="1600" b="0" i="0" u="none" strike="noStrike" cap="none" normalizeH="0" baseline="0" dirty="0" err="1">
+                <a:ln>
+                  <a:noFill/>
+                </a:ln>
+                <a:solidFill>
+                  <a:srgbClr val="AC91E3"/>
+                </a:solidFill>
+                <a:effectLst/>
+                <a:latin typeface="Roboto Mono" panose="00000009000000000000" pitchFamily="50" charset="0"/>
+              </a:rPr>
+              <a:t>.</a:t>
+            </a:r>
+            <a:r>
+              <a:rPr kumimoji="0" lang="de-DE" altLang="de-DE" sz="1600" b="0" i="0" u="none" strike="noStrike" cap="none" normalizeH="0" baseline="0" dirty="0" err="1">
+                <a:ln>
+                  <a:noFill/>
+                </a:ln>
+                <a:solidFill>
+                  <a:srgbClr val="B9C7A6"/>
+                </a:solidFill>
+                <a:effectLst/>
+                <a:latin typeface="Roboto Mono" panose="00000009000000000000" pitchFamily="50" charset="0"/>
+              </a:rPr>
+              <a:t>put</a:t>
+            </a:r>
+            <a:r>
+              <a:rPr kumimoji="0" lang="de-DE" altLang="de-DE" sz="1600" b="0" i="0" u="none" strike="noStrike" cap="none" normalizeH="0" baseline="0" dirty="0">
+                <a:ln>
+                  <a:noFill/>
+                </a:ln>
+                <a:solidFill>
+                  <a:srgbClr val="B0BA8C"/>
+                </a:solidFill>
+                <a:effectLst/>
+                <a:latin typeface="Roboto Mono" panose="00000009000000000000" pitchFamily="50" charset="0"/>
+              </a:rPr>
+              <a:t>(</a:t>
+            </a:r>
+            <a:r>
+              <a:rPr kumimoji="0" lang="de-DE" altLang="de-DE" sz="1600" b="0" i="0" u="none" strike="noStrike" cap="none" normalizeH="0" baseline="0" dirty="0" err="1">
+                <a:ln>
+                  <a:noFill/>
+                </a:ln>
+                <a:solidFill>
+                  <a:srgbClr val="9876AA"/>
+                </a:solidFill>
+                <a:effectLst/>
+                <a:latin typeface="Roboto Mono" panose="00000009000000000000" pitchFamily="50" charset="0"/>
+              </a:rPr>
+              <a:t>playerPosition</a:t>
+            </a:r>
+            <a:r>
+              <a:rPr kumimoji="0" lang="de-DE" altLang="de-DE" sz="1600" b="0" i="0" u="none" strike="noStrike" cap="none" normalizeH="0" baseline="0" dirty="0">
+                <a:ln>
+                  <a:noFill/>
+                </a:ln>
+                <a:solidFill>
+                  <a:srgbClr val="CC7E47"/>
+                </a:solidFill>
+                <a:effectLst/>
+                <a:latin typeface="Roboto Mono" panose="00000009000000000000" pitchFamily="50" charset="0"/>
+              </a:rPr>
+              <a:t>, </a:t>
+            </a:r>
+            <a:r>
+              <a:rPr kumimoji="0" lang="de-DE" altLang="de-DE" sz="1600" b="0" i="0" u="none" strike="noStrike" cap="none" normalizeH="0" baseline="0" dirty="0" err="1">
+                <a:ln>
+                  <a:noFill/>
+                </a:ln>
+                <a:solidFill>
+                  <a:srgbClr val="5FB1DA"/>
+                </a:solidFill>
+                <a:effectLst/>
+                <a:latin typeface="Roboto Mono" panose="00000009000000000000" pitchFamily="50" charset="0"/>
+              </a:rPr>
+              <a:t>Field</a:t>
+            </a:r>
+            <a:r>
+              <a:rPr kumimoji="0" lang="de-DE" altLang="de-DE" sz="1600" b="0" i="0" u="none" strike="noStrike" cap="none" normalizeH="0" baseline="0" dirty="0" err="1">
+                <a:ln>
+                  <a:noFill/>
+                </a:ln>
+                <a:solidFill>
+                  <a:srgbClr val="AC91E3"/>
+                </a:solidFill>
+                <a:effectLst/>
+                <a:latin typeface="Roboto Mono" panose="00000009000000000000" pitchFamily="50" charset="0"/>
+              </a:rPr>
+              <a:t>.</a:t>
+            </a:r>
+            <a:r>
+              <a:rPr kumimoji="0" lang="de-DE" altLang="de-DE" sz="1600" b="0" i="1" u="none" strike="noStrike" cap="none" normalizeH="0" baseline="0" dirty="0" err="1">
+                <a:ln>
+                  <a:noFill/>
+                </a:ln>
+                <a:solidFill>
+                  <a:srgbClr val="9876AA"/>
+                </a:solidFill>
+                <a:effectLst/>
+                <a:latin typeface="Roboto Mono" panose="00000009000000000000" pitchFamily="50" charset="0"/>
+              </a:rPr>
+              <a:t>NEUTRAL</a:t>
+            </a:r>
+            <a:r>
+              <a:rPr kumimoji="0" lang="de-DE" altLang="de-DE" sz="1600" b="0" i="0" u="none" strike="noStrike" cap="none" normalizeH="0" baseline="0" dirty="0">
+                <a:ln>
+                  <a:noFill/>
+                </a:ln>
+                <a:solidFill>
+                  <a:srgbClr val="B0BA8C"/>
+                </a:solidFill>
+                <a:effectLst/>
+                <a:latin typeface="Roboto Mono" panose="00000009000000000000" pitchFamily="50" charset="0"/>
+              </a:rPr>
+              <a:t>)</a:t>
+            </a:r>
+            <a:r>
+              <a:rPr kumimoji="0" lang="de-DE" altLang="de-DE" sz="1600" b="0" i="0" u="none" strike="noStrike" cap="none" normalizeH="0" baseline="0" dirty="0">
+                <a:ln>
+                  <a:noFill/>
+                </a:ln>
+                <a:solidFill>
+                  <a:srgbClr val="CC7E47"/>
+                </a:solidFill>
+                <a:effectLst/>
+                <a:latin typeface="Roboto Mono" panose="00000009000000000000" pitchFamily="50" charset="0"/>
+              </a:rPr>
+              <a:t>;</a:t>
+            </a:r>
+            <a:br>
+              <a:rPr kumimoji="0" lang="de-DE" altLang="de-DE" sz="1600" b="0" i="0" u="none" strike="noStrike" cap="none" normalizeH="0" baseline="0" dirty="0">
+                <a:ln>
+                  <a:noFill/>
+                </a:ln>
+                <a:solidFill>
+                  <a:srgbClr val="CC7E47"/>
+                </a:solidFill>
+                <a:effectLst/>
+                <a:latin typeface="Roboto Mono" panose="00000009000000000000" pitchFamily="50" charset="0"/>
+              </a:rPr>
+            </a:br>
+            <a:r>
+              <a:rPr kumimoji="0" lang="de-DE" altLang="de-DE" sz="1600" b="0" i="0" u="none" strike="noStrike" cap="none" normalizeH="0" baseline="0" dirty="0">
+                <a:ln>
+                  <a:noFill/>
+                </a:ln>
+                <a:solidFill>
+                  <a:srgbClr val="507874"/>
+                </a:solidFill>
+                <a:effectLst/>
+                <a:latin typeface="Roboto Mono" panose="00000009000000000000" pitchFamily="50" charset="0"/>
+              </a:rPr>
+              <a:t>}</a:t>
+            </a:r>
+            <a:endParaRPr kumimoji="0" lang="de-DE" altLang="de-DE" sz="1600" b="0" i="0" u="none" strike="noStrike" cap="none" normalizeH="0" baseline="0" dirty="0">
+              <a:ln>
+                <a:noFill/>
+              </a:ln>
+              <a:solidFill>
+                <a:schemeClr val="tx1"/>
+              </a:solidFill>
+              <a:effectLst/>
+              <a:latin typeface="Roboto Mono" panose="00000009000000000000" pitchFamily="50" charset="0"/>
+            </a:endParaRPr>
+          </a:p>
+        </p:txBody>
+      </p:sp>
+      <p:sp>
+        <p:nvSpPr>
+          <p:cNvPr id="8" name="TextBox 7">
+            <a:extLst>
+              <a:ext uri="{FF2B5EF4-FFF2-40B4-BE49-F238E27FC236}">
+                <a16:creationId xmlns:a16="http://schemas.microsoft.com/office/drawing/2014/main" id="{132A2713-15B6-4062-AADA-FFE41E8D5591}"/>
+              </a:ext>
+            </a:extLst>
+          </p:cNvPr>
+          <p:cNvSpPr txBox="1"/>
+          <p:nvPr/>
+        </p:nvSpPr>
+        <p:spPr>
+          <a:xfrm rot="20631408">
+            <a:off x="554507" y="357691"/>
+            <a:ext cx="7622919" cy="1569660"/>
+          </a:xfrm>
+          <a:prstGeom prst="rect">
+            <a:avLst/>
+          </a:prstGeom>
+          <a:noFill/>
+        </p:spPr>
+        <p:txBody>
+          <a:bodyPr wrap="square">
+            <a:spAutoFit/>
+          </a:bodyPr>
+          <a:lstStyle/>
+          <a:p>
+            <a:pPr marL="0" marR="0" lvl="0" indent="0" algn="l" defTabSz="914400" rtl="0" eaLnBrk="0" fontAlgn="base" latinLnBrk="0" hangingPunct="0">
+              <a:lnSpc>
+                <a:spcPct val="100000"/>
+              </a:lnSpc>
+              <a:spcBef>
+                <a:spcPct val="0"/>
+              </a:spcBef>
+              <a:spcAft>
+                <a:spcPct val="0"/>
+              </a:spcAft>
+              <a:buClrTx/>
+              <a:buSzTx/>
+              <a:buFontTx/>
+              <a:buNone/>
+              <a:tabLst/>
+            </a:pPr>
+            <a:r>
+              <a:rPr kumimoji="0" lang="de-DE" altLang="de-DE" sz="1600" b="0" i="0" u="none" strike="noStrike" cap="none" normalizeH="0" baseline="0" dirty="0" err="1">
+                <a:ln>
+                  <a:noFill/>
+                </a:ln>
+                <a:solidFill>
+                  <a:srgbClr val="CC7E47"/>
+                </a:solidFill>
+                <a:effectLst/>
+                <a:latin typeface="Roboto Mono" panose="00000009000000000000" pitchFamily="50" charset="0"/>
+              </a:rPr>
+              <a:t>public</a:t>
+            </a:r>
+            <a:r>
+              <a:rPr kumimoji="0" lang="de-DE" altLang="de-DE" sz="1600" b="0" i="0" u="none" strike="noStrike" cap="none" normalizeH="0" baseline="0" dirty="0">
+                <a:ln>
+                  <a:noFill/>
+                </a:ln>
+                <a:solidFill>
+                  <a:srgbClr val="CC7E47"/>
+                </a:solidFill>
+                <a:effectLst/>
+                <a:latin typeface="Roboto Mono" panose="00000009000000000000" pitchFamily="50" charset="0"/>
+              </a:rPr>
+              <a:t> </a:t>
+            </a:r>
+            <a:r>
+              <a:rPr kumimoji="0" lang="de-DE" altLang="de-DE" sz="1600" b="0" i="0" u="none" strike="noStrike" cap="none" normalizeH="0" baseline="0" dirty="0" err="1">
+                <a:ln>
+                  <a:noFill/>
+                </a:ln>
+                <a:solidFill>
+                  <a:srgbClr val="CC7E47"/>
+                </a:solidFill>
+                <a:effectLst/>
+                <a:latin typeface="Roboto Mono" panose="00000009000000000000" pitchFamily="50" charset="0"/>
+              </a:rPr>
+              <a:t>void</a:t>
+            </a:r>
+            <a:r>
+              <a:rPr kumimoji="0" lang="de-DE" altLang="de-DE" sz="1600" b="0" i="0" u="none" strike="noStrike" cap="none" normalizeH="0" baseline="0" dirty="0">
+                <a:ln>
+                  <a:noFill/>
+                </a:ln>
+                <a:solidFill>
+                  <a:srgbClr val="CC7E47"/>
+                </a:solidFill>
+                <a:effectLst/>
+                <a:latin typeface="Roboto Mono" panose="00000009000000000000" pitchFamily="50" charset="0"/>
+              </a:rPr>
+              <a:t> </a:t>
+            </a:r>
+            <a:r>
+              <a:rPr kumimoji="0" lang="de-DE" altLang="de-DE" sz="1600" b="0" i="0" u="none" strike="noStrike" cap="none" normalizeH="0" baseline="0" dirty="0">
+                <a:ln>
+                  <a:noFill/>
+                </a:ln>
+                <a:solidFill>
+                  <a:srgbClr val="D6AF72"/>
+                </a:solidFill>
+                <a:effectLst/>
+                <a:latin typeface="Roboto Mono" panose="00000009000000000000" pitchFamily="50" charset="0"/>
+              </a:rPr>
+              <a:t>update</a:t>
+            </a:r>
+            <a:r>
+              <a:rPr kumimoji="0" lang="de-DE" altLang="de-DE" sz="1600" b="0" i="0" u="none" strike="noStrike" cap="none" normalizeH="0" baseline="0" dirty="0">
+                <a:ln>
+                  <a:noFill/>
+                </a:ln>
+                <a:solidFill>
+                  <a:srgbClr val="B0BA8C"/>
+                </a:solidFill>
+                <a:effectLst/>
+                <a:latin typeface="Roboto Mono" panose="00000009000000000000" pitchFamily="50" charset="0"/>
+              </a:rPr>
+              <a:t>() </a:t>
+            </a:r>
+            <a:r>
+              <a:rPr kumimoji="0" lang="de-DE" altLang="de-DE" sz="1600" b="0" i="0" u="none" strike="noStrike" cap="none" normalizeH="0" baseline="0" dirty="0">
+                <a:ln>
+                  <a:noFill/>
+                </a:ln>
+                <a:solidFill>
+                  <a:srgbClr val="507874"/>
+                </a:solidFill>
+                <a:effectLst/>
+                <a:latin typeface="Roboto Mono" panose="00000009000000000000" pitchFamily="50" charset="0"/>
+              </a:rPr>
+              <a:t>{</a:t>
+            </a:r>
+            <a:br>
+              <a:rPr kumimoji="0" lang="de-DE" altLang="de-DE" sz="1600" b="0" i="0" u="none" strike="noStrike" cap="none" normalizeH="0" baseline="0" dirty="0">
+                <a:ln>
+                  <a:noFill/>
+                </a:ln>
+                <a:solidFill>
+                  <a:srgbClr val="507874"/>
+                </a:solidFill>
+                <a:effectLst/>
+                <a:latin typeface="Roboto Mono" panose="00000009000000000000" pitchFamily="50" charset="0"/>
+              </a:rPr>
+            </a:br>
+            <a:r>
+              <a:rPr kumimoji="0" lang="de-DE" altLang="de-DE" sz="1600" b="0" i="0" u="none" strike="noStrike" cap="none" normalizeH="0" baseline="0" dirty="0">
+                <a:ln>
+                  <a:noFill/>
+                </a:ln>
+                <a:solidFill>
+                  <a:srgbClr val="507874"/>
+                </a:solidFill>
+                <a:effectLst/>
+                <a:latin typeface="Roboto Mono" panose="00000009000000000000" pitchFamily="50" charset="0"/>
+              </a:rPr>
+              <a:t>    </a:t>
+            </a:r>
+            <a:r>
+              <a:rPr kumimoji="0" lang="de-DE" altLang="de-DE" sz="1600" b="0" i="0" u="none" strike="noStrike" cap="none" normalizeH="0" baseline="0" dirty="0" err="1">
+                <a:ln>
+                  <a:noFill/>
+                </a:ln>
+                <a:solidFill>
+                  <a:srgbClr val="CC7E47"/>
+                </a:solidFill>
+                <a:effectLst/>
+                <a:latin typeface="Roboto Mono" panose="00000009000000000000" pitchFamily="50" charset="0"/>
+              </a:rPr>
+              <a:t>if</a:t>
+            </a:r>
+            <a:r>
+              <a:rPr kumimoji="0" lang="de-DE" altLang="de-DE" sz="1600" b="0" i="0" u="none" strike="noStrike" cap="none" normalizeH="0" baseline="0" dirty="0">
+                <a:ln>
+                  <a:noFill/>
+                </a:ln>
+                <a:solidFill>
+                  <a:srgbClr val="CC7E47"/>
+                </a:solidFill>
+                <a:effectLst/>
+                <a:latin typeface="Roboto Mono" panose="00000009000000000000" pitchFamily="50" charset="0"/>
+              </a:rPr>
+              <a:t> </a:t>
+            </a:r>
+            <a:r>
+              <a:rPr kumimoji="0" lang="de-DE" altLang="de-DE" sz="1600" b="0" i="0" u="none" strike="noStrike" cap="none" normalizeH="0" baseline="0" dirty="0">
+                <a:ln>
+                  <a:noFill/>
+                </a:ln>
+                <a:solidFill>
+                  <a:srgbClr val="B0BA8C"/>
+                </a:solidFill>
+                <a:effectLst/>
+                <a:latin typeface="Roboto Mono" panose="00000009000000000000" pitchFamily="50" charset="0"/>
+              </a:rPr>
+              <a:t>(</a:t>
+            </a:r>
+            <a:r>
+              <a:rPr kumimoji="0" lang="de-DE" altLang="de-DE" sz="1600" b="0" i="0" u="none" strike="noStrike" cap="none" normalizeH="0" baseline="0" dirty="0">
+                <a:ln>
+                  <a:noFill/>
+                </a:ln>
+                <a:solidFill>
+                  <a:srgbClr val="A9B7C6"/>
+                </a:solidFill>
+                <a:effectLst/>
+                <a:latin typeface="Roboto Mono" panose="00000009000000000000" pitchFamily="50" charset="0"/>
+              </a:rPr>
+              <a:t>!</a:t>
+            </a:r>
+            <a:r>
+              <a:rPr kumimoji="0" lang="de-DE" altLang="de-DE" sz="1600" b="0" i="0" u="none" strike="noStrike" cap="none" normalizeH="0" baseline="0" dirty="0" err="1">
+                <a:ln>
+                  <a:noFill/>
+                </a:ln>
+                <a:solidFill>
+                  <a:srgbClr val="B9C7A6"/>
+                </a:solidFill>
+                <a:effectLst/>
+                <a:latin typeface="Roboto Mono" panose="00000009000000000000" pitchFamily="50" charset="0"/>
+              </a:rPr>
+              <a:t>isPlayerAlive</a:t>
+            </a:r>
+            <a:r>
+              <a:rPr kumimoji="0" lang="de-DE" altLang="de-DE" sz="1600" b="0" i="0" u="none" strike="noStrike" cap="none" normalizeH="0" baseline="0" dirty="0">
+                <a:ln>
+                  <a:noFill/>
+                </a:ln>
+                <a:solidFill>
+                  <a:srgbClr val="B0BA8C"/>
+                </a:solidFill>
+                <a:effectLst/>
+                <a:latin typeface="Roboto Mono" panose="00000009000000000000" pitchFamily="50" charset="0"/>
+              </a:rPr>
+              <a:t>()) </a:t>
+            </a:r>
+            <a:r>
+              <a:rPr kumimoji="0" lang="de-DE" altLang="de-DE" sz="1600" b="0" i="0" u="none" strike="noStrike" cap="none" normalizeH="0" baseline="0" dirty="0" err="1">
+                <a:ln>
+                  <a:noFill/>
+                </a:ln>
+                <a:solidFill>
+                  <a:srgbClr val="CC7E47"/>
+                </a:solidFill>
+                <a:effectLst/>
+                <a:latin typeface="Roboto Mono" panose="00000009000000000000" pitchFamily="50" charset="0"/>
+              </a:rPr>
+              <a:t>return</a:t>
+            </a:r>
+            <a:r>
+              <a:rPr kumimoji="0" lang="de-DE" altLang="de-DE" sz="1600" b="0" i="0" u="none" strike="noStrike" cap="none" normalizeH="0" baseline="0" dirty="0">
+                <a:ln>
+                  <a:noFill/>
+                </a:ln>
+                <a:solidFill>
+                  <a:srgbClr val="CC7E47"/>
+                </a:solidFill>
+                <a:effectLst/>
+                <a:latin typeface="Roboto Mono" panose="00000009000000000000" pitchFamily="50" charset="0"/>
+              </a:rPr>
+              <a:t>;</a:t>
+            </a:r>
+            <a:br>
+              <a:rPr kumimoji="0" lang="de-DE" altLang="de-DE" sz="1600" b="0" i="0" u="none" strike="noStrike" cap="none" normalizeH="0" baseline="0" dirty="0">
+                <a:ln>
+                  <a:noFill/>
+                </a:ln>
+                <a:solidFill>
+                  <a:srgbClr val="CC7E47"/>
+                </a:solidFill>
+                <a:effectLst/>
+                <a:latin typeface="Roboto Mono" panose="00000009000000000000" pitchFamily="50" charset="0"/>
+              </a:rPr>
+            </a:br>
+            <a:r>
+              <a:rPr kumimoji="0" lang="de-DE" altLang="de-DE" sz="1600" b="0" i="0" u="none" strike="noStrike" cap="none" normalizeH="0" baseline="0" dirty="0">
+                <a:ln>
+                  <a:noFill/>
+                </a:ln>
+                <a:solidFill>
+                  <a:srgbClr val="CC7E47"/>
+                </a:solidFill>
+                <a:effectLst/>
+                <a:latin typeface="Roboto Mono" panose="00000009000000000000" pitchFamily="50" charset="0"/>
+              </a:rPr>
+              <a:t>    </a:t>
+            </a:r>
+            <a:r>
+              <a:rPr kumimoji="0" lang="de-DE" altLang="de-DE" sz="1600" b="0" i="0" u="none" strike="noStrike" cap="none" normalizeH="0" baseline="0" dirty="0" err="1">
+                <a:ln>
+                  <a:noFill/>
+                </a:ln>
+                <a:solidFill>
+                  <a:srgbClr val="CC7E47"/>
+                </a:solidFill>
+                <a:effectLst/>
+                <a:latin typeface="Roboto Mono" panose="00000009000000000000" pitchFamily="50" charset="0"/>
+              </a:rPr>
+              <a:t>for</a:t>
+            </a:r>
+            <a:r>
+              <a:rPr kumimoji="0" lang="de-DE" altLang="de-DE" sz="1600" b="0" i="0" u="none" strike="noStrike" cap="none" normalizeH="0" baseline="0" dirty="0">
+                <a:ln>
+                  <a:noFill/>
+                </a:ln>
+                <a:solidFill>
+                  <a:srgbClr val="CC7E47"/>
+                </a:solidFill>
+                <a:effectLst/>
+                <a:latin typeface="Roboto Mono" panose="00000009000000000000" pitchFamily="50" charset="0"/>
+              </a:rPr>
+              <a:t> </a:t>
+            </a:r>
+            <a:r>
+              <a:rPr kumimoji="0" lang="de-DE" altLang="de-DE" sz="1600" b="0" i="0" u="none" strike="noStrike" cap="none" normalizeH="0" baseline="0" dirty="0">
+                <a:ln>
+                  <a:noFill/>
+                </a:ln>
+                <a:solidFill>
+                  <a:srgbClr val="B0BA8C"/>
+                </a:solidFill>
+                <a:effectLst/>
+                <a:latin typeface="Roboto Mono" panose="00000009000000000000" pitchFamily="50" charset="0"/>
+              </a:rPr>
+              <a:t>(</a:t>
+            </a:r>
+            <a:r>
+              <a:rPr kumimoji="0" lang="de-DE" altLang="de-DE" sz="1600" b="0" i="0" u="none" strike="noStrike" cap="none" normalizeH="0" baseline="0" dirty="0" err="1">
+                <a:ln>
+                  <a:noFill/>
+                </a:ln>
+                <a:solidFill>
+                  <a:srgbClr val="5FB1DA"/>
+                </a:solidFill>
+                <a:effectLst/>
+                <a:latin typeface="Roboto Mono" panose="00000009000000000000" pitchFamily="50" charset="0"/>
+              </a:rPr>
+              <a:t>Direction</a:t>
+            </a:r>
+            <a:r>
+              <a:rPr kumimoji="0" lang="de-DE" altLang="de-DE" sz="1600" b="0" i="0" u="none" strike="noStrike" cap="none" normalizeH="0" baseline="0" dirty="0">
+                <a:ln>
+                  <a:noFill/>
+                </a:ln>
+                <a:solidFill>
+                  <a:srgbClr val="5FB1DA"/>
+                </a:solidFill>
+                <a:effectLst/>
+                <a:latin typeface="Roboto Mono" panose="00000009000000000000" pitchFamily="50" charset="0"/>
+              </a:rPr>
+              <a:t> </a:t>
+            </a:r>
+            <a:r>
+              <a:rPr kumimoji="0" lang="de-DE" altLang="de-DE" sz="1600" b="0" i="0" u="none" strike="noStrike" cap="none" normalizeH="0" baseline="0" dirty="0" err="1">
+                <a:ln>
+                  <a:noFill/>
+                </a:ln>
+                <a:solidFill>
+                  <a:srgbClr val="A9B7C6"/>
+                </a:solidFill>
+                <a:effectLst/>
+                <a:latin typeface="Roboto Mono" panose="00000009000000000000" pitchFamily="50" charset="0"/>
+              </a:rPr>
+              <a:t>direction</a:t>
+            </a:r>
+            <a:r>
+              <a:rPr kumimoji="0" lang="de-DE" altLang="de-DE" sz="1600" b="0" i="0" u="none" strike="noStrike" cap="none" normalizeH="0" baseline="0" dirty="0">
+                <a:ln>
+                  <a:noFill/>
+                </a:ln>
+                <a:solidFill>
+                  <a:srgbClr val="A9B7C6"/>
+                </a:solidFill>
+                <a:effectLst/>
+                <a:latin typeface="Roboto Mono" panose="00000009000000000000" pitchFamily="50" charset="0"/>
+              </a:rPr>
+              <a:t> : </a:t>
+            </a:r>
+            <a:r>
+              <a:rPr kumimoji="0" lang="de-DE" altLang="de-DE" sz="1600" b="0" i="0" u="none" strike="noStrike" cap="none" normalizeH="0" baseline="0" dirty="0" err="1">
+                <a:ln>
+                  <a:noFill/>
+                </a:ln>
+                <a:solidFill>
+                  <a:srgbClr val="5FB1DA"/>
+                </a:solidFill>
+                <a:effectLst/>
+                <a:latin typeface="Roboto Mono" panose="00000009000000000000" pitchFamily="50" charset="0"/>
+              </a:rPr>
+              <a:t>Direction</a:t>
+            </a:r>
+            <a:r>
+              <a:rPr kumimoji="0" lang="de-DE" altLang="de-DE" sz="1600" b="0" i="0" u="none" strike="noStrike" cap="none" normalizeH="0" baseline="0" dirty="0" err="1">
+                <a:ln>
+                  <a:noFill/>
+                </a:ln>
+                <a:solidFill>
+                  <a:srgbClr val="AC91E3"/>
+                </a:solidFill>
+                <a:effectLst/>
+                <a:latin typeface="Roboto Mono" panose="00000009000000000000" pitchFamily="50" charset="0"/>
+              </a:rPr>
+              <a:t>.</a:t>
+            </a:r>
+            <a:r>
+              <a:rPr kumimoji="0" lang="de-DE" altLang="de-DE" sz="1600" b="0" i="1" u="none" strike="noStrike" cap="none" normalizeH="0" baseline="0" dirty="0" err="1">
+                <a:ln>
+                  <a:noFill/>
+                </a:ln>
+                <a:solidFill>
+                  <a:srgbClr val="AA7876"/>
+                </a:solidFill>
+                <a:effectLst/>
+                <a:latin typeface="Roboto Mono" panose="00000009000000000000" pitchFamily="50" charset="0"/>
+              </a:rPr>
+              <a:t>values</a:t>
+            </a:r>
+            <a:r>
+              <a:rPr kumimoji="0" lang="de-DE" altLang="de-DE" sz="1600" b="0" i="0" u="none" strike="noStrike" cap="none" normalizeH="0" baseline="0" dirty="0">
+                <a:ln>
+                  <a:noFill/>
+                </a:ln>
+                <a:solidFill>
+                  <a:srgbClr val="B0BA8C"/>
+                </a:solidFill>
+                <a:effectLst/>
+                <a:latin typeface="Roboto Mono" panose="00000009000000000000" pitchFamily="50" charset="0"/>
+              </a:rPr>
+              <a:t>())</a:t>
+            </a:r>
+            <a:br>
+              <a:rPr kumimoji="0" lang="de-DE" altLang="de-DE" sz="1600" b="0" i="0" u="none" strike="noStrike" cap="none" normalizeH="0" baseline="0" dirty="0">
+                <a:ln>
+                  <a:noFill/>
+                </a:ln>
+                <a:solidFill>
+                  <a:srgbClr val="B0BA8C"/>
+                </a:solidFill>
+                <a:effectLst/>
+                <a:latin typeface="Roboto Mono" panose="00000009000000000000" pitchFamily="50" charset="0"/>
+              </a:rPr>
+            </a:br>
+            <a:r>
+              <a:rPr kumimoji="0" lang="de-DE" altLang="de-DE" sz="1600" b="0" i="0" u="none" strike="noStrike" cap="none" normalizeH="0" baseline="0" dirty="0">
+                <a:ln>
+                  <a:noFill/>
+                </a:ln>
+                <a:solidFill>
+                  <a:srgbClr val="B0BA8C"/>
+                </a:solidFill>
+                <a:effectLst/>
+                <a:latin typeface="Roboto Mono" panose="00000009000000000000" pitchFamily="50" charset="0"/>
+              </a:rPr>
+              <a:t>        </a:t>
+            </a:r>
+            <a:r>
+              <a:rPr kumimoji="0" lang="de-DE" altLang="de-DE" sz="1600" b="0" i="0" u="none" strike="noStrike" cap="none" normalizeH="0" baseline="0" dirty="0" err="1">
+                <a:ln>
+                  <a:noFill/>
+                </a:ln>
+                <a:solidFill>
+                  <a:srgbClr val="CC7E47"/>
+                </a:solidFill>
+                <a:effectLst/>
+                <a:latin typeface="Roboto Mono" panose="00000009000000000000" pitchFamily="50" charset="0"/>
+              </a:rPr>
+              <a:t>if</a:t>
+            </a:r>
+            <a:r>
+              <a:rPr kumimoji="0" lang="de-DE" altLang="de-DE" sz="1600" b="0" i="0" u="none" strike="noStrike" cap="none" normalizeH="0" baseline="0" dirty="0">
+                <a:ln>
+                  <a:noFill/>
+                </a:ln>
+                <a:solidFill>
+                  <a:srgbClr val="CC7E47"/>
+                </a:solidFill>
+                <a:effectLst/>
+                <a:latin typeface="Roboto Mono" panose="00000009000000000000" pitchFamily="50" charset="0"/>
+              </a:rPr>
+              <a:t> </a:t>
+            </a:r>
+            <a:r>
+              <a:rPr kumimoji="0" lang="de-DE" altLang="de-DE" sz="1600" b="0" i="0" u="none" strike="noStrike" cap="none" normalizeH="0" baseline="0" dirty="0">
+                <a:ln>
+                  <a:noFill/>
+                </a:ln>
+                <a:solidFill>
+                  <a:srgbClr val="B0BA8C"/>
+                </a:solidFill>
+                <a:effectLst/>
+                <a:latin typeface="Roboto Mono" panose="00000009000000000000" pitchFamily="50" charset="0"/>
+              </a:rPr>
+              <a:t>(</a:t>
+            </a:r>
+            <a:r>
+              <a:rPr kumimoji="0" lang="de-DE" altLang="de-DE" sz="1600" b="0" i="0" u="none" strike="noStrike" cap="none" normalizeH="0" baseline="0" dirty="0" err="1">
+                <a:ln>
+                  <a:noFill/>
+                </a:ln>
+                <a:solidFill>
+                  <a:srgbClr val="5FB1DA"/>
+                </a:solidFill>
+                <a:effectLst/>
+                <a:latin typeface="Roboto Mono" panose="00000009000000000000" pitchFamily="50" charset="0"/>
+              </a:rPr>
+              <a:t>Gdx</a:t>
+            </a:r>
+            <a:r>
+              <a:rPr kumimoji="0" lang="de-DE" altLang="de-DE" sz="1600" b="0" i="0" u="none" strike="noStrike" cap="none" normalizeH="0" baseline="0" dirty="0" err="1">
+                <a:ln>
+                  <a:noFill/>
+                </a:ln>
+                <a:solidFill>
+                  <a:srgbClr val="AC91E3"/>
+                </a:solidFill>
+                <a:effectLst/>
+                <a:latin typeface="Roboto Mono" panose="00000009000000000000" pitchFamily="50" charset="0"/>
+              </a:rPr>
+              <a:t>.</a:t>
+            </a:r>
+            <a:r>
+              <a:rPr kumimoji="0" lang="de-DE" altLang="de-DE" sz="1600" b="0" i="1" u="none" strike="noStrike" cap="none" normalizeH="0" baseline="0" dirty="0" err="1">
+                <a:ln>
+                  <a:noFill/>
+                </a:ln>
+                <a:solidFill>
+                  <a:srgbClr val="9876AA"/>
+                </a:solidFill>
+                <a:effectLst/>
+                <a:latin typeface="Roboto Mono" panose="00000009000000000000" pitchFamily="50" charset="0"/>
+              </a:rPr>
+              <a:t>input</a:t>
+            </a:r>
+            <a:r>
+              <a:rPr kumimoji="0" lang="de-DE" altLang="de-DE" sz="1600" b="0" i="0" u="none" strike="noStrike" cap="none" normalizeH="0" baseline="0" dirty="0" err="1">
+                <a:ln>
+                  <a:noFill/>
+                </a:ln>
+                <a:solidFill>
+                  <a:srgbClr val="AC91E3"/>
+                </a:solidFill>
+                <a:effectLst/>
+                <a:latin typeface="Roboto Mono" panose="00000009000000000000" pitchFamily="50" charset="0"/>
+              </a:rPr>
+              <a:t>.</a:t>
+            </a:r>
+            <a:r>
+              <a:rPr kumimoji="0" lang="de-DE" altLang="de-DE" sz="1600" b="0" i="0" u="none" strike="noStrike" cap="none" normalizeH="0" baseline="0" dirty="0" err="1">
+                <a:ln>
+                  <a:noFill/>
+                </a:ln>
+                <a:solidFill>
+                  <a:srgbClr val="B9C7A6"/>
+                </a:solidFill>
+                <a:effectLst/>
+                <a:latin typeface="Roboto Mono" panose="00000009000000000000" pitchFamily="50" charset="0"/>
+              </a:rPr>
+              <a:t>isKeyJustPressed</a:t>
+            </a:r>
+            <a:r>
+              <a:rPr kumimoji="0" lang="de-DE" altLang="de-DE" sz="1600" b="0" i="0" u="none" strike="noStrike" cap="none" normalizeH="0" baseline="0" dirty="0">
+                <a:ln>
+                  <a:noFill/>
+                </a:ln>
+                <a:solidFill>
+                  <a:srgbClr val="B0BA8C"/>
+                </a:solidFill>
+                <a:effectLst/>
+                <a:latin typeface="Roboto Mono" panose="00000009000000000000" pitchFamily="50" charset="0"/>
+              </a:rPr>
+              <a:t>(</a:t>
+            </a:r>
+            <a:r>
+              <a:rPr kumimoji="0" lang="de-DE" altLang="de-DE" sz="1600" b="0" i="0" u="none" strike="noStrike" cap="none" normalizeH="0" baseline="0" dirty="0" err="1">
+                <a:ln>
+                  <a:noFill/>
+                </a:ln>
+                <a:solidFill>
+                  <a:srgbClr val="A9B7C6"/>
+                </a:solidFill>
+                <a:effectLst/>
+                <a:latin typeface="Roboto Mono" panose="00000009000000000000" pitchFamily="50" charset="0"/>
+              </a:rPr>
+              <a:t>direction</a:t>
+            </a:r>
+            <a:r>
+              <a:rPr kumimoji="0" lang="de-DE" altLang="de-DE" sz="1600" b="0" i="0" u="none" strike="noStrike" cap="none" normalizeH="0" baseline="0" dirty="0" err="1">
+                <a:ln>
+                  <a:noFill/>
+                </a:ln>
+                <a:solidFill>
+                  <a:srgbClr val="AC91E3"/>
+                </a:solidFill>
+                <a:effectLst/>
+                <a:latin typeface="Roboto Mono" panose="00000009000000000000" pitchFamily="50" charset="0"/>
+              </a:rPr>
+              <a:t>.</a:t>
+            </a:r>
+            <a:r>
+              <a:rPr kumimoji="0" lang="de-DE" altLang="de-DE" sz="1600" b="0" i="0" u="none" strike="noStrike" cap="none" normalizeH="0" baseline="0" dirty="0" err="1">
+                <a:ln>
+                  <a:noFill/>
+                </a:ln>
+                <a:solidFill>
+                  <a:srgbClr val="B9C7A6"/>
+                </a:solidFill>
+                <a:effectLst/>
+                <a:latin typeface="Roboto Mono" panose="00000009000000000000" pitchFamily="50" charset="0"/>
+              </a:rPr>
+              <a:t>getKey</a:t>
+            </a:r>
+            <a:r>
+              <a:rPr kumimoji="0" lang="de-DE" altLang="de-DE" sz="1600" b="0" i="0" u="none" strike="noStrike" cap="none" normalizeH="0" baseline="0" dirty="0">
+                <a:ln>
+                  <a:noFill/>
+                </a:ln>
+                <a:solidFill>
+                  <a:srgbClr val="B0BA8C"/>
+                </a:solidFill>
+                <a:effectLst/>
+                <a:latin typeface="Roboto Mono" panose="00000009000000000000" pitchFamily="50" charset="0"/>
+              </a:rPr>
+              <a:t>()))</a:t>
+            </a:r>
+            <a:br>
+              <a:rPr kumimoji="0" lang="de-DE" altLang="de-DE" sz="1600" b="0" i="0" u="none" strike="noStrike" cap="none" normalizeH="0" baseline="0" dirty="0">
+                <a:ln>
+                  <a:noFill/>
+                </a:ln>
+                <a:solidFill>
+                  <a:srgbClr val="B0BA8C"/>
+                </a:solidFill>
+                <a:effectLst/>
+                <a:latin typeface="Roboto Mono" panose="00000009000000000000" pitchFamily="50" charset="0"/>
+              </a:rPr>
+            </a:br>
+            <a:r>
+              <a:rPr kumimoji="0" lang="de-DE" altLang="de-DE" sz="1600" b="0" i="0" u="none" strike="noStrike" cap="none" normalizeH="0" baseline="0" dirty="0">
+                <a:ln>
+                  <a:noFill/>
+                </a:ln>
+                <a:solidFill>
+                  <a:srgbClr val="B0BA8C"/>
+                </a:solidFill>
+                <a:effectLst/>
+                <a:latin typeface="Roboto Mono" panose="00000009000000000000" pitchFamily="50" charset="0"/>
+              </a:rPr>
+              <a:t>            </a:t>
+            </a:r>
+            <a:r>
+              <a:rPr kumimoji="0" lang="de-DE" altLang="de-DE" sz="1600" b="0" i="0" u="none" strike="noStrike" cap="none" normalizeH="0" baseline="0" dirty="0" err="1">
+                <a:ln>
+                  <a:noFill/>
+                </a:ln>
+                <a:solidFill>
+                  <a:srgbClr val="B9C7A6"/>
+                </a:solidFill>
+                <a:effectLst/>
+                <a:latin typeface="Roboto Mono" panose="00000009000000000000" pitchFamily="50" charset="0"/>
+              </a:rPr>
+              <a:t>move</a:t>
+            </a:r>
+            <a:r>
+              <a:rPr kumimoji="0" lang="de-DE" altLang="de-DE" sz="1600" b="0" i="0" u="none" strike="noStrike" cap="none" normalizeH="0" baseline="0" dirty="0">
+                <a:ln>
+                  <a:noFill/>
+                </a:ln>
+                <a:solidFill>
+                  <a:srgbClr val="B0BA8C"/>
+                </a:solidFill>
+                <a:effectLst/>
+                <a:latin typeface="Roboto Mono" panose="00000009000000000000" pitchFamily="50" charset="0"/>
+              </a:rPr>
+              <a:t>(</a:t>
+            </a:r>
+            <a:r>
+              <a:rPr kumimoji="0" lang="de-DE" altLang="de-DE" sz="1600" b="0" i="0" u="none" strike="noStrike" cap="none" normalizeH="0" baseline="0" dirty="0" err="1">
+                <a:ln>
+                  <a:noFill/>
+                </a:ln>
+                <a:solidFill>
+                  <a:srgbClr val="A9B7C6"/>
+                </a:solidFill>
+                <a:effectLst/>
+                <a:latin typeface="Roboto Mono" panose="00000009000000000000" pitchFamily="50" charset="0"/>
+              </a:rPr>
+              <a:t>direction</a:t>
+            </a:r>
+            <a:r>
+              <a:rPr kumimoji="0" lang="de-DE" altLang="de-DE" sz="1600" b="0" i="0" u="none" strike="noStrike" cap="none" normalizeH="0" baseline="0" dirty="0">
+                <a:ln>
+                  <a:noFill/>
+                </a:ln>
+                <a:solidFill>
+                  <a:srgbClr val="B0BA8C"/>
+                </a:solidFill>
+                <a:effectLst/>
+                <a:latin typeface="Roboto Mono" panose="00000009000000000000" pitchFamily="50" charset="0"/>
+              </a:rPr>
+              <a:t>)</a:t>
+            </a:r>
+            <a:r>
+              <a:rPr kumimoji="0" lang="de-DE" altLang="de-DE" sz="1600" b="0" i="0" u="none" strike="noStrike" cap="none" normalizeH="0" baseline="0" dirty="0">
+                <a:ln>
+                  <a:noFill/>
+                </a:ln>
+                <a:solidFill>
+                  <a:srgbClr val="CC7E47"/>
+                </a:solidFill>
+                <a:effectLst/>
+                <a:latin typeface="Roboto Mono" panose="00000009000000000000" pitchFamily="50" charset="0"/>
+              </a:rPr>
+              <a:t>;</a:t>
+            </a:r>
+            <a:br>
+              <a:rPr kumimoji="0" lang="de-DE" altLang="de-DE" sz="1600" b="0" i="0" u="none" strike="noStrike" cap="none" normalizeH="0" baseline="0" dirty="0">
+                <a:ln>
+                  <a:noFill/>
+                </a:ln>
+                <a:solidFill>
+                  <a:srgbClr val="CC7E47"/>
+                </a:solidFill>
+                <a:effectLst/>
+                <a:latin typeface="Roboto Mono" panose="00000009000000000000" pitchFamily="50" charset="0"/>
+              </a:rPr>
+            </a:br>
+            <a:r>
+              <a:rPr kumimoji="0" lang="de-DE" altLang="de-DE" sz="1600" b="0" i="0" u="none" strike="noStrike" cap="none" normalizeH="0" baseline="0" dirty="0">
+                <a:ln>
+                  <a:noFill/>
+                </a:ln>
+                <a:solidFill>
+                  <a:srgbClr val="507874"/>
+                </a:solidFill>
+                <a:effectLst/>
+                <a:latin typeface="Roboto Mono" panose="00000009000000000000" pitchFamily="50" charset="0"/>
+              </a:rPr>
+              <a:t>}</a:t>
+            </a:r>
+            <a:endParaRPr kumimoji="0" lang="de-DE" altLang="de-DE" sz="1600" b="0" i="0" u="none" strike="noStrike" cap="none" normalizeH="0" baseline="0" dirty="0">
+              <a:ln>
+                <a:noFill/>
+              </a:ln>
+              <a:solidFill>
+                <a:schemeClr val="tx1"/>
+              </a:solidFill>
+              <a:effectLst/>
+              <a:latin typeface="Roboto Mono" panose="00000009000000000000" pitchFamily="50" charset="0"/>
+            </a:endParaRPr>
+          </a:p>
+        </p:txBody>
+      </p:sp>
+      <p:sp>
+        <p:nvSpPr>
           <p:cNvPr id="2" name="Title 1">
             <a:extLst>
               <a:ext uri="{FF2B5EF4-FFF2-40B4-BE49-F238E27FC236}">
-                <a16:creationId xmlns:a16="http://schemas.microsoft.com/office/drawing/2014/main" id="{B08C29F4-26F0-4BE9-9465-D317D167A031}"/>
+                <a16:creationId xmlns:a16="http://schemas.microsoft.com/office/drawing/2014/main" id="{1C4FE5F9-987A-4C79-96C0-D4DAF6269162}"/>
               </a:ext>
             </a:extLst>
           </p:cNvPr>
@@ -3448,38 +5775,86 @@
             <a:spLocks noGrp="1"/>
           </p:cNvSpPr>
           <p:nvPr>
-            <p:ph type="title"/>
+            <p:ph type="ctrTitle"/>
           </p:nvPr>
         </p:nvSpPr>
         <p:spPr>
           <a:xfrm>
-            <a:off x="838200" y="365125"/>
-            <a:ext cx="5257800" cy="1325563"/>
+            <a:off x="899852" y="2411465"/>
+            <a:ext cx="10392295" cy="1012090"/>
           </a:xfrm>
           <a:solidFill>
-            <a:srgbClr val="000000">
-              <a:alpha val="25000"/>
-            </a:srgbClr>
+            <a:schemeClr val="bg1">
+              <a:alpha val="75000"/>
+            </a:schemeClr>
           </a:solidFill>
         </p:spPr>
         <p:txBody>
-          <a:bodyPr/>
+          <a:bodyPr>
+            <a:noAutofit/>
+          </a:bodyPr>
           <a:lstStyle/>
           <a:p>
             <a:r>
-              <a:rPr lang="de-DE" dirty="0"/>
-              <a:t>Organisatorisches</a:t>
+              <a:rPr lang="de-DE" sz="4800" dirty="0">
+                <a:cs typeface="Segoe UI" panose="020B0502040204020203" pitchFamily="34" charset="0"/>
+              </a:rPr>
+              <a:t>Eigene Projekte mit Java entwickeln</a:t>
+            </a:r>
+          </a:p>
+        </p:txBody>
+      </p:sp>
+      <p:sp>
+        <p:nvSpPr>
+          <p:cNvPr id="3" name="Subtitle 2">
+            <a:extLst>
+              <a:ext uri="{FF2B5EF4-FFF2-40B4-BE49-F238E27FC236}">
+                <a16:creationId xmlns:a16="http://schemas.microsoft.com/office/drawing/2014/main" id="{AF5A2686-A781-4544-B353-C9A1F758E48A}"/>
+              </a:ext>
+            </a:extLst>
+          </p:cNvPr>
+          <p:cNvSpPr>
+            <a:spLocks noGrp="1"/>
+          </p:cNvSpPr>
+          <p:nvPr>
+            <p:ph type="subTitle" idx="1"/>
+          </p:nvPr>
+        </p:nvSpPr>
+        <p:spPr>
+          <a:xfrm>
+            <a:off x="4307219" y="3489191"/>
+            <a:ext cx="3577559" cy="702333"/>
+          </a:xfrm>
+          <a:solidFill>
+            <a:schemeClr val="bg1">
+              <a:alpha val="75000"/>
+            </a:schemeClr>
+          </a:solidFill>
+        </p:spPr>
+        <p:txBody>
+          <a:bodyPr>
+            <a:normAutofit/>
+          </a:bodyPr>
+          <a:lstStyle/>
+          <a:p>
+            <a:r>
+              <a:rPr lang="de-DE" dirty="0">
+                <a:solidFill>
+                  <a:srgbClr val="F2F5FA"/>
+                </a:solidFill>
+              </a:rPr>
+              <a:t>Willkommen</a:t>
             </a:r>
           </a:p>
         </p:txBody>
       </p:sp>
       <p:pic>
         <p:nvPicPr>
-          <p:cNvPr id="5" name="Picture 4">
-            <a:hlinkClick r:id="rId3"/>
+          <p:cNvPr id="9" name="Picture 8">
+            <a:hlinkClick r:id="rId2"/>
             <a:extLst>
               <a:ext uri="{FF2B5EF4-FFF2-40B4-BE49-F238E27FC236}">
-                <a16:creationId xmlns:a16="http://schemas.microsoft.com/office/drawing/2014/main" id="{5542AF0F-1003-4042-BF06-D3F6158FA160}"/>
+                <a16:creationId xmlns:a16="http://schemas.microsoft.com/office/drawing/2014/main" id="{720EDD69-8336-4AFF-9A22-7F921024C168}"/>
               </a:ext>
             </a:extLst>
           </p:cNvPr>
@@ -3489,7 +5864,7 @@
           <p:nvPr/>
         </p:nvPicPr>
         <p:blipFill>
-          <a:blip r:embed="rId4">
+          <a:blip r:embed="rId3">
             <a:extLst>
               <a:ext uri="{28A0092B-C50C-407E-A947-70E740481C1C}">
                 <a14:useLocalDpi xmlns:a14="http://schemas.microsoft.com/office/drawing/2010/main" val="0"/>
@@ -3502,7 +5877,7 @@
         </p:blipFill>
         <p:spPr>
           <a:xfrm>
-            <a:off x="10668000" y="0"/>
+            <a:off x="10668000" y="701"/>
             <a:ext cx="1524000" cy="1524000"/>
           </a:xfrm>
           <a:prstGeom prst="rect">
@@ -3510,51 +5885,233 @@
           </a:prstGeom>
         </p:spPr>
       </p:pic>
-      <p:pic>
-        <p:nvPicPr>
-          <p:cNvPr id="9" name="Content Placeholder 8" descr="Laptop with solid fill">
+      <p:sp>
+        <p:nvSpPr>
+          <p:cNvPr id="10" name="Subtitle 2">
             <a:extLst>
               <a:ext uri="{FF2B5EF4-FFF2-40B4-BE49-F238E27FC236}">
-                <a16:creationId xmlns:a16="http://schemas.microsoft.com/office/drawing/2014/main" id="{0B0E6039-616C-4238-8E66-FD486931A0FA}"/>
+                <a16:creationId xmlns:a16="http://schemas.microsoft.com/office/drawing/2014/main" id="{251A9727-C8B9-4D47-9005-2FA44124B337}"/>
               </a:ext>
             </a:extLst>
           </p:cNvPr>
-          <p:cNvPicPr>
-            <a:picLocks noGrp="1" noChangeAspect="1"/>
-          </p:cNvPicPr>
-          <p:nvPr>
-            <p:ph idx="1"/>
-          </p:nvPr>
-        </p:nvPicPr>
-        <p:blipFill>
-          <a:blip r:embed="rId5">
-            <a:extLst>
-              <a:ext uri="{28A0092B-C50C-407E-A947-70E740481C1C}">
-                <a14:useLocalDpi xmlns:a14="http://schemas.microsoft.com/office/drawing/2010/main" val="0"/>
-              </a:ext>
-              <a:ext uri="{96DAC541-7B7A-43D3-8B79-37D633B846F1}">
-                <asvg:svgBlip xmlns:asvg="http://schemas.microsoft.com/office/drawing/2016/SVG/main" r:embed="rId6"/>
-              </a:ext>
-            </a:extLst>
-          </a:blip>
-          <a:stretch>
-            <a:fillRect/>
-          </a:stretch>
-        </p:blipFill>
+          <p:cNvSpPr txBox="1">
+            <a:spLocks/>
+          </p:cNvSpPr>
+          <p:nvPr/>
+        </p:nvSpPr>
         <p:spPr>
           <a:xfrm>
-            <a:off x="10896600" y="5578475"/>
-            <a:ext cx="914400" cy="914400"/>
+            <a:off x="3199719" y="4257160"/>
+            <a:ext cx="5792557" cy="702333"/>
           </a:xfrm>
+          <a:prstGeom prst="rect">
+            <a:avLst/>
+          </a:prstGeom>
+          <a:solidFill>
+            <a:schemeClr val="bg1">
+              <a:alpha val="75000"/>
+            </a:schemeClr>
+          </a:solidFill>
         </p:spPr>
-      </p:pic>
+        <p:txBody>
+          <a:bodyPr vert="horz" lIns="91440" tIns="45720" rIns="91440" bIns="45720" rtlCol="0">
+            <a:normAutofit fontScale="92500" lnSpcReduction="20000"/>
+          </a:bodyPr>
+          <a:lstStyle>
+            <a:lvl1pPr marL="0" indent="0" algn="ctr" defTabSz="914400" rtl="0" eaLnBrk="1" latinLnBrk="0" hangingPunct="1">
+              <a:lnSpc>
+                <a:spcPct val="90000"/>
+              </a:lnSpc>
+              <a:spcBef>
+                <a:spcPts val="1000"/>
+              </a:spcBef>
+              <a:buFont typeface="Arial" panose="020B0604020202020204" pitchFamily="34" charset="0"/>
+              <a:buNone/>
+              <a:defRPr sz="2400" kern="1200">
+                <a:solidFill>
+                  <a:schemeClr val="tx1"/>
+                </a:solidFill>
+                <a:latin typeface="+mn-lt"/>
+                <a:ea typeface="+mn-ea"/>
+                <a:cs typeface="+mn-cs"/>
+              </a:defRPr>
+            </a:lvl1pPr>
+            <a:lvl2pPr marL="457200" indent="0" algn="ctr" defTabSz="914400" rtl="0" eaLnBrk="1" latinLnBrk="0" hangingPunct="1">
+              <a:lnSpc>
+                <a:spcPct val="90000"/>
+              </a:lnSpc>
+              <a:spcBef>
+                <a:spcPts val="500"/>
+              </a:spcBef>
+              <a:buFont typeface="Arial" panose="020B0604020202020204" pitchFamily="34" charset="0"/>
+              <a:buNone/>
+              <a:defRPr sz="2000" kern="1200">
+                <a:solidFill>
+                  <a:schemeClr val="tx1"/>
+                </a:solidFill>
+                <a:latin typeface="+mn-lt"/>
+                <a:ea typeface="+mn-ea"/>
+                <a:cs typeface="+mn-cs"/>
+              </a:defRPr>
+            </a:lvl2pPr>
+            <a:lvl3pPr marL="914400" indent="0" algn="ctr" defTabSz="914400" rtl="0" eaLnBrk="1" latinLnBrk="0" hangingPunct="1">
+              <a:lnSpc>
+                <a:spcPct val="90000"/>
+              </a:lnSpc>
+              <a:spcBef>
+                <a:spcPts val="500"/>
+              </a:spcBef>
+              <a:buFont typeface="Arial" panose="020B0604020202020204" pitchFamily="34" charset="0"/>
+              <a:buNone/>
+              <a:defRPr sz="1800" kern="1200">
+                <a:solidFill>
+                  <a:schemeClr val="tx1"/>
+                </a:solidFill>
+                <a:latin typeface="+mn-lt"/>
+                <a:ea typeface="+mn-ea"/>
+                <a:cs typeface="+mn-cs"/>
+              </a:defRPr>
+            </a:lvl3pPr>
+            <a:lvl4pPr marL="1371600" indent="0" algn="ctr" defTabSz="914400" rtl="0" eaLnBrk="1" latinLnBrk="0" hangingPunct="1">
+              <a:lnSpc>
+                <a:spcPct val="90000"/>
+              </a:lnSpc>
+              <a:spcBef>
+                <a:spcPts val="500"/>
+              </a:spcBef>
+              <a:buFont typeface="Arial" panose="020B0604020202020204" pitchFamily="34" charset="0"/>
+              <a:buNone/>
+              <a:defRPr sz="1600" kern="1200">
+                <a:solidFill>
+                  <a:schemeClr val="tx1"/>
+                </a:solidFill>
+                <a:latin typeface="+mn-lt"/>
+                <a:ea typeface="+mn-ea"/>
+                <a:cs typeface="+mn-cs"/>
+              </a:defRPr>
+            </a:lvl4pPr>
+            <a:lvl5pPr marL="1828800" indent="0" algn="ctr" defTabSz="914400" rtl="0" eaLnBrk="1" latinLnBrk="0" hangingPunct="1">
+              <a:lnSpc>
+                <a:spcPct val="90000"/>
+              </a:lnSpc>
+              <a:spcBef>
+                <a:spcPts val="500"/>
+              </a:spcBef>
+              <a:buFont typeface="Arial" panose="020B0604020202020204" pitchFamily="34" charset="0"/>
+              <a:buNone/>
+              <a:defRPr sz="1600" kern="1200">
+                <a:solidFill>
+                  <a:schemeClr val="tx1"/>
+                </a:solidFill>
+                <a:latin typeface="+mn-lt"/>
+                <a:ea typeface="+mn-ea"/>
+                <a:cs typeface="+mn-cs"/>
+              </a:defRPr>
+            </a:lvl5pPr>
+            <a:lvl6pPr marL="2286000" indent="0" algn="ctr" defTabSz="914400" rtl="0" eaLnBrk="1" latinLnBrk="0" hangingPunct="1">
+              <a:lnSpc>
+                <a:spcPct val="90000"/>
+              </a:lnSpc>
+              <a:spcBef>
+                <a:spcPts val="500"/>
+              </a:spcBef>
+              <a:buFont typeface="Arial" panose="020B0604020202020204" pitchFamily="34" charset="0"/>
+              <a:buNone/>
+              <a:defRPr sz="1600" kern="1200">
+                <a:solidFill>
+                  <a:schemeClr val="tx1"/>
+                </a:solidFill>
+                <a:latin typeface="+mn-lt"/>
+                <a:ea typeface="+mn-ea"/>
+                <a:cs typeface="+mn-cs"/>
+              </a:defRPr>
+            </a:lvl6pPr>
+            <a:lvl7pPr marL="2743200" indent="0" algn="ctr" defTabSz="914400" rtl="0" eaLnBrk="1" latinLnBrk="0" hangingPunct="1">
+              <a:lnSpc>
+                <a:spcPct val="90000"/>
+              </a:lnSpc>
+              <a:spcBef>
+                <a:spcPts val="500"/>
+              </a:spcBef>
+              <a:buFont typeface="Arial" panose="020B0604020202020204" pitchFamily="34" charset="0"/>
+              <a:buNone/>
+              <a:defRPr sz="1600" kern="1200">
+                <a:solidFill>
+                  <a:schemeClr val="tx1"/>
+                </a:solidFill>
+                <a:latin typeface="+mn-lt"/>
+                <a:ea typeface="+mn-ea"/>
+                <a:cs typeface="+mn-cs"/>
+              </a:defRPr>
+            </a:lvl7pPr>
+            <a:lvl8pPr marL="3200400" indent="0" algn="ctr" defTabSz="914400" rtl="0" eaLnBrk="1" latinLnBrk="0" hangingPunct="1">
+              <a:lnSpc>
+                <a:spcPct val="90000"/>
+              </a:lnSpc>
+              <a:spcBef>
+                <a:spcPts val="500"/>
+              </a:spcBef>
+              <a:buFont typeface="Arial" panose="020B0604020202020204" pitchFamily="34" charset="0"/>
+              <a:buNone/>
+              <a:defRPr sz="1600" kern="1200">
+                <a:solidFill>
+                  <a:schemeClr val="tx1"/>
+                </a:solidFill>
+                <a:latin typeface="+mn-lt"/>
+                <a:ea typeface="+mn-ea"/>
+                <a:cs typeface="+mn-cs"/>
+              </a:defRPr>
+            </a:lvl8pPr>
+            <a:lvl9pPr marL="3657600" indent="0" algn="ctr" defTabSz="914400" rtl="0" eaLnBrk="1" latinLnBrk="0" hangingPunct="1">
+              <a:lnSpc>
+                <a:spcPct val="90000"/>
+              </a:lnSpc>
+              <a:spcBef>
+                <a:spcPts val="500"/>
+              </a:spcBef>
+              <a:buFont typeface="Arial" panose="020B0604020202020204" pitchFamily="34" charset="0"/>
+              <a:buNone/>
+              <a:defRPr sz="1600" kern="1200">
+                <a:solidFill>
+                  <a:schemeClr val="tx1"/>
+                </a:solidFill>
+                <a:latin typeface="+mn-lt"/>
+                <a:ea typeface="+mn-ea"/>
+                <a:cs typeface="+mn-cs"/>
+              </a:defRPr>
+            </a:lvl9pPr>
+          </a:lstStyle>
+          <a:p>
+            <a:r>
+              <a:rPr lang="de-DE" dirty="0">
+                <a:solidFill>
+                  <a:srgbClr val="F2F5FA"/>
+                </a:solidFill>
+              </a:rPr>
+              <a:t>Diese Webseite ist erreichbar unter</a:t>
+            </a:r>
+          </a:p>
+          <a:p>
+            <a:r>
+              <a:rPr lang="de-DE" dirty="0">
+                <a:solidFill>
+                  <a:srgbClr val="F2F5FA"/>
+                </a:solidFill>
+                <a:latin typeface="Roboto Mono" panose="00000009000000000000" pitchFamily="50" charset="0"/>
+                <a:ea typeface="Roboto Mono" panose="00000009000000000000" pitchFamily="50" charset="0"/>
+              </a:rPr>
+              <a:t>cactusroot.github.io/Java</a:t>
+            </a:r>
+          </a:p>
+        </p:txBody>
+      </p:sp>
       <p:pic>
         <p:nvPicPr>
-          <p:cNvPr id="4" name="Picture 3">
-            <a:hlinkClick r:id="rId7"/>
+          <p:cNvPr id="5" name="Picture 4">
+            <a:hlinkClick r:id="rId4"/>
             <a:extLst>
               <a:ext uri="{FF2B5EF4-FFF2-40B4-BE49-F238E27FC236}">
-                <a16:creationId xmlns:a16="http://schemas.microsoft.com/office/drawing/2014/main" id="{D6A60518-66E6-4120-9201-2F78A0C6B0C2}"/>
+                <a16:creationId xmlns:a16="http://schemas.microsoft.com/office/drawing/2014/main" id="{2C49912B-561D-4AE4-B32D-A20CB3A2EF83}"/>
               </a:ext>
             </a:extLst>
           </p:cNvPr>
@@ -3564,7 +6121,7 @@
           <p:nvPr/>
         </p:nvPicPr>
         <p:blipFill>
-          <a:blip r:embed="rId8">
+          <a:blip r:embed="rId5">
             <a:extLst>
               <a:ext uri="{28A0092B-C50C-407E-A947-70E740481C1C}">
                 <a14:useLocalDpi xmlns:a14="http://schemas.microsoft.com/office/drawing/2010/main" val="0"/>
@@ -3577,7 +6134,7 @@
         </p:blipFill>
         <p:spPr>
           <a:xfrm>
-            <a:off x="381000" y="5578475"/>
+            <a:off x="274320" y="5669280"/>
             <a:ext cx="914400" cy="914400"/>
           </a:xfrm>
           <a:prstGeom prst="rect">
@@ -3588,7 +6145,7 @@
     </p:spTree>
     <p:extLst>
       <p:ext uri="{BB962C8B-B14F-4D97-AF65-F5344CB8AC3E}">
-        <p14:creationId xmlns:p14="http://schemas.microsoft.com/office/powerpoint/2010/main" val="739367731"/>
+        <p14:creationId xmlns:p14="http://schemas.microsoft.com/office/powerpoint/2010/main" val="3541638153"/>
       </p:ext>
     </p:extLst>
   </p:cSld>
@@ -4238,7 +6795,7 @@
             <p:ph idx="1"/>
             <p:extLst>
               <p:ext uri="{D42A27DB-BD31-4B8C-83A1-F6EECF244321}">
-                <p14:modId xmlns:p14="http://schemas.microsoft.com/office/powerpoint/2010/main" val="1599445343"/>
+                <p14:modId xmlns:p14="http://schemas.microsoft.com/office/powerpoint/2010/main" val="3703221190"/>
               </p:ext>
             </p:extLst>
           </p:nvPr>
@@ -5725,7 +8282,23 @@
                             <a:schemeClr val="tx1"/>
                           </a:solidFill>
                         </a:rPr>
-                        <a:t>Wahl aus Kooperation über </a:t>
+                        <a:t>Wahl, </a:t>
+                      </a:r>
+                      <a:r>
+                        <a:rPr lang="de-DE">
+                          <a:solidFill>
+                            <a:schemeClr val="tx1"/>
+                          </a:solidFill>
+                        </a:rPr>
+                        <a:t>z.B. Kooperation </a:t>
+                      </a:r>
+                      <a:r>
+                        <a:rPr lang="de-DE" dirty="0">
+                          <a:solidFill>
+                            <a:schemeClr val="tx1"/>
+                          </a:solidFill>
+                        </a:rPr>
+                        <a:t>über </a:t>
                       </a:r>
                       <a:r>
                         <a:rPr lang="de-DE" dirty="0" err="1">
